--- a/project_1/precentation/Smell intensity presentation.pptx
+++ b/project_1/precentation/Smell intensity presentation.pptx
@@ -5,12 +5,28 @@
     <p:sldMasterId id="2147483648" r:id="rId1"/>
   </p:sldMasterIdLst>
   <p:notesMasterIdLst>
-    <p:notesMasterId r:id="rId5"/>
+    <p:notesMasterId r:id="rId21"/>
   </p:notesMasterIdLst>
   <p:sldIdLst>
     <p:sldId id="256" r:id="rId2"/>
     <p:sldId id="257" r:id="rId3"/>
-    <p:sldId id="258" r:id="rId4"/>
+    <p:sldId id="274" r:id="rId4"/>
+    <p:sldId id="258" r:id="rId5"/>
+    <p:sldId id="264" r:id="rId6"/>
+    <p:sldId id="259" r:id="rId7"/>
+    <p:sldId id="268" r:id="rId8"/>
+    <p:sldId id="271" r:id="rId9"/>
+    <p:sldId id="270" r:id="rId10"/>
+    <p:sldId id="265" r:id="rId11"/>
+    <p:sldId id="267" r:id="rId12"/>
+    <p:sldId id="272" r:id="rId13"/>
+    <p:sldId id="263" r:id="rId14"/>
+    <p:sldId id="275" r:id="rId15"/>
+    <p:sldId id="278" r:id="rId16"/>
+    <p:sldId id="276" r:id="rId17"/>
+    <p:sldId id="277" r:id="rId18"/>
+    <p:sldId id="260" r:id="rId19"/>
+    <p:sldId id="266" r:id="rId20"/>
   </p:sldIdLst>
   <p:sldSz cx="12192000" cy="6858000"/>
   <p:notesSz cx="6858000" cy="9144000"/>
@@ -109,6 +125,11 @@
       </a:defRPr>
     </a:lvl9pPr>
   </p:defaultTextStyle>
+  <p:extLst>
+    <p:ext uri="{EFAFB233-063F-42B5-8137-9DF3F51BA10A}">
+      <p15:sldGuideLst xmlns:p15="http://schemas.microsoft.com/office/powerpoint/2012/main"/>
+    </p:ext>
+  </p:extLst>
 </p:presentation>
 </file>
 
@@ -194,7 +215,7 @@
           <a:p>
             <a:fld id="{CF4B3431-D7CA-4884-BBC8-551033F4B8B0}" type="datetimeFigureOut">
               <a:rPr lang="LID4096" smtClean="0"/>
-              <a:t>06/13/2026</a:t>
+              <a:t>06/23/2026</a:t>
             </a:fld>
             <a:endParaRPr lang="LID4096"/>
           </a:p>
@@ -507,8 +528,96 @@
           <a:lstStyle/>
           <a:p>
             <a:r>
-              <a:rPr lang="" dirty="0"/>
-              <a:t>Each dot represents the average score of one evaluator. The box shows the middle 50% of evaluators, and σ shows the standard deviation between evaluators. For several conditions, σ is around 8–13 LMS units, supporting MAE ≈ 8 LMS as a reasonable target for model performance.</a:t>
+              <a:rPr lang="en-US" dirty="0"/>
+              <a:t>TY  - JOURT1  - Method for Predicting Odor Intensity of Perfumery Raw Materials Using Dose–Response Curve </a:t>
+            </a:r>
+            <a:r>
+              <a:rPr lang="en-US" dirty="0" err="1"/>
+              <a:t>DatabaseAU</a:t>
+            </a:r>
+            <a:r>
+              <a:rPr lang="en-US" dirty="0"/>
+              <a:t>  - Wakayama, </a:t>
+            </a:r>
+            <a:r>
+              <a:rPr lang="en-US" dirty="0" err="1"/>
+              <a:t>HidekiAU</a:t>
+            </a:r>
+            <a:r>
+              <a:rPr lang="en-US" dirty="0"/>
+              <a:t>  - </a:t>
+            </a:r>
+            <a:r>
+              <a:rPr lang="en-US" dirty="0" err="1"/>
+              <a:t>Sakasai</a:t>
+            </a:r>
+            <a:r>
+              <a:rPr lang="en-US" dirty="0"/>
+              <a:t>, </a:t>
+            </a:r>
+            <a:r>
+              <a:rPr lang="en-US" dirty="0" err="1"/>
+              <a:t>MitsuyoshiAU</a:t>
+            </a:r>
+            <a:r>
+              <a:rPr lang="en-US" dirty="0"/>
+              <a:t>  - Yoshikawa, </a:t>
+            </a:r>
+            <a:r>
+              <a:rPr lang="en-US" dirty="0" err="1"/>
+              <a:t>KeiichiAU</a:t>
+            </a:r>
+            <a:r>
+              <a:rPr lang="en-US" dirty="0"/>
+              <a:t>  - Inoue, MichiakiY1  - 2019/08/14PY  - 2019DA  - 2019/08/14N1  - </a:t>
+            </a:r>
+            <a:r>
+              <a:rPr lang="en-US" dirty="0" err="1"/>
+              <a:t>doi</a:t>
+            </a:r>
+            <a:r>
+              <a:rPr lang="en-US" dirty="0"/>
+              <a:t>: 10.1021/acs.iecr.9b01225DO  - 10.1021/acs.iecr.9b01225T2  - Industrial &amp; Engineering Chemistry </a:t>
+            </a:r>
+            <a:r>
+              <a:rPr lang="en-US" dirty="0" err="1"/>
+              <a:t>ResearchJF</a:t>
+            </a:r>
+            <a:r>
+              <a:rPr lang="en-US" dirty="0"/>
+              <a:t>  - Industrial &amp; Engineering Chemistry </a:t>
+            </a:r>
+            <a:r>
+              <a:rPr lang="en-US" dirty="0" err="1"/>
+              <a:t>ResearchJO</a:t>
+            </a:r>
+            <a:r>
+              <a:rPr lang="en-US" dirty="0"/>
+              <a:t>  - Ind. Eng. Chem. </a:t>
+            </a:r>
+            <a:r>
+              <a:rPr lang="en-US" dirty="0" err="1"/>
+              <a:t>Res.SP</a:t>
+            </a:r>
+            <a:r>
+              <a:rPr lang="en-US" dirty="0"/>
+              <a:t>  - 15036EP  - 15044VL  - 58IS  - 32PB  - American Chemical </a:t>
+            </a:r>
+            <a:r>
+              <a:rPr lang="en-US" dirty="0" err="1"/>
+              <a:t>SocietySN</a:t>
+            </a:r>
+            <a:r>
+              <a:rPr lang="en-US" dirty="0"/>
+              <a:t>  - 0888-5885M3  - </a:t>
+            </a:r>
+            <a:r>
+              <a:rPr lang="en-US" dirty="0" err="1"/>
+              <a:t>doi</a:t>
+            </a:r>
+            <a:r>
+              <a:rPr lang="en-US" dirty="0"/>
+              <a:t>: 10.1021/acs.iecr.9b01225UR  - https://doi.org/10.1021/acs.iecr.9b01225</a:t>
             </a:r>
             <a:endParaRPr lang="LID4096" dirty="0"/>
           </a:p>
@@ -531,7 +640,95 @@
           <a:p>
             <a:fld id="{4F081A42-54A3-4E6D-AAAD-815597063FD7}" type="slidenum">
               <a:rPr lang="LID4096" smtClean="0"/>
-              <a:t>3</a:t>
+              <a:t>2</a:t>
+            </a:fld>
+            <a:endParaRPr lang="LID4096"/>
+          </a:p>
+        </p:txBody>
+      </p:sp>
+    </p:spTree>
+    <p:extLst>
+      <p:ext uri="{BB962C8B-B14F-4D97-AF65-F5344CB8AC3E}">
+        <p14:creationId xmlns:p14="http://schemas.microsoft.com/office/powerpoint/2010/main" val="4121670095"/>
+      </p:ext>
+    </p:extLst>
+  </p:cSld>
+  <p:clrMapOvr>
+    <a:masterClrMapping/>
+  </p:clrMapOvr>
+</p:notes>
+</file>
+
+<file path=ppt/notesSlides/notesSlide2.xml><?xml version="1.0" encoding="utf-8"?>
+<p:notes xmlns:a="http://schemas.openxmlformats.org/drawingml/2006/main" xmlns:r="http://schemas.openxmlformats.org/officeDocument/2006/relationships" xmlns:p="http://schemas.openxmlformats.org/presentationml/2006/main">
+  <p:cSld>
+    <p:spTree>
+      <p:nvGrpSpPr>
+        <p:cNvPr id="1" name=""/>
+        <p:cNvGrpSpPr/>
+        <p:nvPr/>
+      </p:nvGrpSpPr>
+      <p:grpSpPr>
+        <a:xfrm>
+          <a:off x="0" y="0"/>
+          <a:ext cx="0" cy="0"/>
+          <a:chOff x="0" y="0"/>
+          <a:chExt cx="0" cy="0"/>
+        </a:xfrm>
+      </p:grpSpPr>
+      <p:sp>
+        <p:nvSpPr>
+          <p:cNvPr id="2" name="Slide Image Placeholder 1"/>
+          <p:cNvSpPr>
+            <a:spLocks noGrp="1" noRot="1" noChangeAspect="1"/>
+          </p:cNvSpPr>
+          <p:nvPr>
+            <p:ph type="sldImg"/>
+          </p:nvPr>
+        </p:nvSpPr>
+        <p:spPr/>
+      </p:sp>
+      <p:sp>
+        <p:nvSpPr>
+          <p:cNvPr id="3" name="Notes Placeholder 2"/>
+          <p:cNvSpPr>
+            <a:spLocks noGrp="1"/>
+          </p:cNvSpPr>
+          <p:nvPr>
+            <p:ph type="body" idx="1"/>
+          </p:nvPr>
+        </p:nvSpPr>
+        <p:spPr/>
+        <p:txBody>
+          <a:bodyPr/>
+          <a:lstStyle/>
+          <a:p>
+            <a:r>
+              <a:rPr lang="" dirty="0"/>
+              <a:t>Each dot represents the average score of one evaluator. The box shows the middle 50% of evaluators, and σ shows the standard deviation between evaluators. For several conditions, σ is around 8–13 LMS units, supporting MAE ≈ 8 LMS as a reasonable target for model performance.</a:t>
+            </a:r>
+            <a:endParaRPr lang="LID4096" dirty="0"/>
+          </a:p>
+        </p:txBody>
+      </p:sp>
+      <p:sp>
+        <p:nvSpPr>
+          <p:cNvPr id="4" name="Slide Number Placeholder 3"/>
+          <p:cNvSpPr>
+            <a:spLocks noGrp="1"/>
+          </p:cNvSpPr>
+          <p:nvPr>
+            <p:ph type="sldNum" sz="quarter" idx="5"/>
+          </p:nvPr>
+        </p:nvSpPr>
+        <p:spPr/>
+        <p:txBody>
+          <a:bodyPr/>
+          <a:lstStyle/>
+          <a:p>
+            <a:fld id="{4F081A42-54A3-4E6D-AAAD-815597063FD7}" type="slidenum">
+              <a:rPr lang="LID4096" smtClean="0"/>
+              <a:t>4</a:t>
             </a:fld>
             <a:endParaRPr lang="LID4096"/>
           </a:p>
@@ -541,6 +738,961 @@
     <p:extLst>
       <p:ext uri="{BB962C8B-B14F-4D97-AF65-F5344CB8AC3E}">
         <p14:creationId xmlns:p14="http://schemas.microsoft.com/office/powerpoint/2010/main" val="3776948734"/>
+      </p:ext>
+    </p:extLst>
+  </p:cSld>
+  <p:clrMapOvr>
+    <a:masterClrMapping/>
+  </p:clrMapOvr>
+</p:notes>
+</file>
+
+<file path=ppt/notesSlides/notesSlide3.xml><?xml version="1.0" encoding="utf-8"?>
+<p:notes xmlns:a="http://schemas.openxmlformats.org/drawingml/2006/main" xmlns:r="http://schemas.openxmlformats.org/officeDocument/2006/relationships" xmlns:p="http://schemas.openxmlformats.org/presentationml/2006/main">
+  <p:cSld>
+    <p:spTree>
+      <p:nvGrpSpPr>
+        <p:cNvPr id="1" name=""/>
+        <p:cNvGrpSpPr/>
+        <p:nvPr/>
+      </p:nvGrpSpPr>
+      <p:grpSpPr>
+        <a:xfrm>
+          <a:off x="0" y="0"/>
+          <a:ext cx="0" cy="0"/>
+          <a:chOff x="0" y="0"/>
+          <a:chExt cx="0" cy="0"/>
+        </a:xfrm>
+      </p:grpSpPr>
+      <p:sp>
+        <p:nvSpPr>
+          <p:cNvPr id="2" name="Slide Image Placeholder 1"/>
+          <p:cNvSpPr>
+            <a:spLocks noGrp="1" noRot="1" noChangeAspect="1"/>
+          </p:cNvSpPr>
+          <p:nvPr>
+            <p:ph type="sldImg"/>
+          </p:nvPr>
+        </p:nvSpPr>
+        <p:spPr/>
+      </p:sp>
+      <p:sp>
+        <p:nvSpPr>
+          <p:cNvPr id="3" name="Notes Placeholder 2"/>
+          <p:cNvSpPr>
+            <a:spLocks noGrp="1"/>
+          </p:cNvSpPr>
+          <p:nvPr>
+            <p:ph type="body" idx="1"/>
+          </p:nvPr>
+        </p:nvSpPr>
+        <p:spPr/>
+        <p:txBody>
+          <a:bodyPr/>
+          <a:lstStyle/>
+          <a:p>
+            <a:endParaRPr lang="LID4096" dirty="0"/>
+          </a:p>
+        </p:txBody>
+      </p:sp>
+      <p:sp>
+        <p:nvSpPr>
+          <p:cNvPr id="4" name="Slide Number Placeholder 3"/>
+          <p:cNvSpPr>
+            <a:spLocks noGrp="1"/>
+          </p:cNvSpPr>
+          <p:nvPr>
+            <p:ph type="sldNum" sz="quarter" idx="5"/>
+          </p:nvPr>
+        </p:nvSpPr>
+        <p:spPr/>
+        <p:txBody>
+          <a:bodyPr/>
+          <a:lstStyle/>
+          <a:p>
+            <a:fld id="{4F081A42-54A3-4E6D-AAAD-815597063FD7}" type="slidenum">
+              <a:rPr lang="LID4096" smtClean="0"/>
+              <a:t>7</a:t>
+            </a:fld>
+            <a:endParaRPr lang="LID4096"/>
+          </a:p>
+        </p:txBody>
+      </p:sp>
+    </p:spTree>
+    <p:extLst>
+      <p:ext uri="{BB962C8B-B14F-4D97-AF65-F5344CB8AC3E}">
+        <p14:creationId xmlns:p14="http://schemas.microsoft.com/office/powerpoint/2010/main" val="3004632284"/>
+      </p:ext>
+    </p:extLst>
+  </p:cSld>
+  <p:clrMapOvr>
+    <a:masterClrMapping/>
+  </p:clrMapOvr>
+</p:notes>
+</file>
+
+<file path=ppt/notesSlides/notesSlide4.xml><?xml version="1.0" encoding="utf-8"?>
+<p:notes xmlns:a="http://schemas.openxmlformats.org/drawingml/2006/main" xmlns:r="http://schemas.openxmlformats.org/officeDocument/2006/relationships" xmlns:p="http://schemas.openxmlformats.org/presentationml/2006/main">
+  <p:cSld>
+    <p:spTree>
+      <p:nvGrpSpPr>
+        <p:cNvPr id="1" name=""/>
+        <p:cNvGrpSpPr/>
+        <p:nvPr/>
+      </p:nvGrpSpPr>
+      <p:grpSpPr>
+        <a:xfrm>
+          <a:off x="0" y="0"/>
+          <a:ext cx="0" cy="0"/>
+          <a:chOff x="0" y="0"/>
+          <a:chExt cx="0" cy="0"/>
+        </a:xfrm>
+      </p:grpSpPr>
+      <p:sp>
+        <p:nvSpPr>
+          <p:cNvPr id="2" name="Slide Image Placeholder 1"/>
+          <p:cNvSpPr>
+            <a:spLocks noGrp="1" noRot="1" noChangeAspect="1"/>
+          </p:cNvSpPr>
+          <p:nvPr>
+            <p:ph type="sldImg"/>
+          </p:nvPr>
+        </p:nvSpPr>
+        <p:spPr/>
+      </p:sp>
+      <p:sp>
+        <p:nvSpPr>
+          <p:cNvPr id="3" name="Notes Placeholder 2"/>
+          <p:cNvSpPr>
+            <a:spLocks noGrp="1"/>
+          </p:cNvSpPr>
+          <p:nvPr>
+            <p:ph type="body" idx="1"/>
+          </p:nvPr>
+        </p:nvSpPr>
+        <p:spPr/>
+        <p:txBody>
+          <a:bodyPr/>
+          <a:lstStyle/>
+          <a:p>
+            <a:r>
+              <a:rPr lang="en-US" dirty="0"/>
+              <a:t>MAE less sensitive for </a:t>
+            </a:r>
+            <a:r>
+              <a:rPr lang="en-US" dirty="0" err="1"/>
+              <a:t>outlayers</a:t>
+            </a:r>
+            <a:endParaRPr lang="en-US" dirty="0"/>
+          </a:p>
+          <a:p>
+            <a:r>
+              <a:rPr lang="" dirty="0"/>
+              <a:t>subsample=0.8, Percentage of rows used to build each tree.</a:t>
+            </a:r>
+          </a:p>
+          <a:p>
+            <a:r>
+              <a:rPr lang="" dirty="0"/>
+              <a:t>colsample_bytree=1.0 Percentage of features used by each tree.</a:t>
+            </a:r>
+            <a:endParaRPr lang="LID4096" dirty="0"/>
+          </a:p>
+        </p:txBody>
+      </p:sp>
+      <p:sp>
+        <p:nvSpPr>
+          <p:cNvPr id="4" name="Slide Number Placeholder 3"/>
+          <p:cNvSpPr>
+            <a:spLocks noGrp="1"/>
+          </p:cNvSpPr>
+          <p:nvPr>
+            <p:ph type="sldNum" sz="quarter" idx="5"/>
+          </p:nvPr>
+        </p:nvSpPr>
+        <p:spPr/>
+        <p:txBody>
+          <a:bodyPr/>
+          <a:lstStyle/>
+          <a:p>
+            <a:fld id="{4F081A42-54A3-4E6D-AAAD-815597063FD7}" type="slidenum">
+              <a:rPr lang="LID4096" smtClean="0"/>
+              <a:t>8</a:t>
+            </a:fld>
+            <a:endParaRPr lang="LID4096"/>
+          </a:p>
+        </p:txBody>
+      </p:sp>
+    </p:spTree>
+    <p:extLst>
+      <p:ext uri="{BB962C8B-B14F-4D97-AF65-F5344CB8AC3E}">
+        <p14:creationId xmlns:p14="http://schemas.microsoft.com/office/powerpoint/2010/main" val="1211896185"/>
+      </p:ext>
+    </p:extLst>
+  </p:cSld>
+  <p:clrMapOvr>
+    <a:masterClrMapping/>
+  </p:clrMapOvr>
+</p:notes>
+</file>
+
+<file path=ppt/notesSlides/notesSlide5.xml><?xml version="1.0" encoding="utf-8"?>
+<p:notes xmlns:a="http://schemas.openxmlformats.org/drawingml/2006/main" xmlns:r="http://schemas.openxmlformats.org/officeDocument/2006/relationships" xmlns:p="http://schemas.openxmlformats.org/presentationml/2006/main">
+  <p:cSld>
+    <p:spTree>
+      <p:nvGrpSpPr>
+        <p:cNvPr id="1" name=""/>
+        <p:cNvGrpSpPr/>
+        <p:nvPr/>
+      </p:nvGrpSpPr>
+      <p:grpSpPr>
+        <a:xfrm>
+          <a:off x="0" y="0"/>
+          <a:ext cx="0" cy="0"/>
+          <a:chOff x="0" y="0"/>
+          <a:chExt cx="0" cy="0"/>
+        </a:xfrm>
+      </p:grpSpPr>
+      <p:sp>
+        <p:nvSpPr>
+          <p:cNvPr id="2" name="Slide Image Placeholder 1"/>
+          <p:cNvSpPr>
+            <a:spLocks noGrp="1" noRot="1" noChangeAspect="1"/>
+          </p:cNvSpPr>
+          <p:nvPr>
+            <p:ph type="sldImg"/>
+          </p:nvPr>
+        </p:nvSpPr>
+        <p:spPr/>
+      </p:sp>
+      <p:sp>
+        <p:nvSpPr>
+          <p:cNvPr id="3" name="Notes Placeholder 2"/>
+          <p:cNvSpPr>
+            <a:spLocks noGrp="1"/>
+          </p:cNvSpPr>
+          <p:nvPr>
+            <p:ph type="body" idx="1"/>
+          </p:nvPr>
+        </p:nvSpPr>
+        <p:spPr/>
+        <p:txBody>
+          <a:bodyPr/>
+          <a:lstStyle/>
+          <a:p>
+            <a:r>
+              <a:rPr lang="" dirty="0"/>
+              <a:t>For a presentation slide, I would keep it high-level and connect the descriptors to molecular properties rather than Dragon terminology.</a:t>
+            </a:r>
+          </a:p>
+          <a:p>
+            <a:r>
+              <a:rPr lang="" b="1" dirty="0"/>
+              <a:t>Key Molecular Properties Identified by XGBoost</a:t>
+            </a:r>
+          </a:p>
+          <a:p>
+            <a:r>
+              <a:rPr lang="" b="1" dirty="0"/>
+              <a:t>Strongly represented descriptor groups</a:t>
+            </a:r>
+            <a:endParaRPr lang="" dirty="0"/>
+          </a:p>
+          <a:p>
+            <a:r>
+              <a:rPr lang="" b="1" dirty="0"/>
+              <a:t>3D molecular shape and geometry</a:t>
+            </a:r>
+            <a:endParaRPr lang="" dirty="0"/>
+          </a:p>
+          <a:p>
+            <a:pPr lvl="1"/>
+            <a:r>
+              <a:rPr lang="" dirty="0"/>
+              <a:t>MoRSE descriptors (MorXX)</a:t>
+            </a:r>
+          </a:p>
+          <a:p>
+            <a:pPr lvl="1"/>
+            <a:r>
+              <a:rPr lang="" dirty="0"/>
+              <a:t>RDF descriptors (RDFXXX)</a:t>
+            </a:r>
+          </a:p>
+          <a:p>
+            <a:pPr lvl="1"/>
+            <a:r>
+              <a:rPr lang="" dirty="0"/>
+              <a:t>GETAWAY descriptors (Hx, Rx)</a:t>
+            </a:r>
+          </a:p>
+          <a:p>
+            <a:pPr lvl="1"/>
+            <a:r>
+              <a:rPr lang="" dirty="0"/>
+              <a:t>Suggests odor intensity strongly depends on how atoms are arranged in three-dimensional space.</a:t>
+            </a:r>
+          </a:p>
+          <a:p>
+            <a:r>
+              <a:rPr lang="" b="1" dirty="0"/>
+              <a:t>Molecular size and bulk</a:t>
+            </a:r>
+            <a:endParaRPr lang="" dirty="0"/>
+          </a:p>
+          <a:p>
+            <a:pPr lvl="1"/>
+            <a:r>
+              <a:rPr lang="" dirty="0"/>
+              <a:t>Vindex, Am, Gm, VAR</a:t>
+            </a:r>
+          </a:p>
+          <a:p>
+            <a:pPr lvl="1"/>
+            <a:r>
+              <a:rPr lang="" dirty="0"/>
+              <a:t>Indicates that larger and more complex molecules tend to exhibit different maximum odor intensities than smaller molecules.</a:t>
+            </a:r>
+          </a:p>
+          <a:p>
+            <a:r>
+              <a:rPr lang="" b="1" dirty="0"/>
+              <a:t>Electronic structure and charge distribution</a:t>
+            </a:r>
+            <a:endParaRPr lang="" dirty="0"/>
+          </a:p>
+          <a:p>
+            <a:pPr lvl="1"/>
+            <a:r>
+              <a:rPr lang="" dirty="0"/>
+              <a:t>GGI, JGI, ATSCe, MATSe descriptors</a:t>
+            </a:r>
+          </a:p>
+          <a:p>
+            <a:pPr lvl="1"/>
+            <a:r>
+              <a:rPr lang="" dirty="0"/>
+              <a:t>Captures electronegativity patterns, charge transfer, and electron distribution within the molecule.</a:t>
+            </a:r>
+          </a:p>
+          <a:p>
+            <a:r>
+              <a:rPr lang="" b="1" dirty="0"/>
+              <a:t>Branching and topological complexity</a:t>
+            </a:r>
+            <a:endParaRPr lang="" dirty="0"/>
+          </a:p>
+          <a:p>
+            <a:pPr lvl="1"/>
+            <a:r>
+              <a:rPr lang="" dirty="0"/>
+              <a:t>MPC08, Chi indices, VE indices, Burden eigenvalues</a:t>
+            </a:r>
+          </a:p>
+          <a:p>
+            <a:pPr lvl="1"/>
+            <a:r>
+              <a:rPr lang="" dirty="0"/>
+              <a:t>Suggests that molecular connectivity and branching influence odor intensity.</a:t>
+            </a:r>
+          </a:p>
+          <a:p>
+            <a:r>
+              <a:rPr lang="" b="1" dirty="0"/>
+              <a:t>Mass-weighted structural information</a:t>
+            </a:r>
+            <a:endParaRPr lang="" dirty="0"/>
+          </a:p>
+          <a:p>
+            <a:pPr lvl="1"/>
+            <a:r>
+              <a:rPr lang="" dirty="0"/>
+              <a:t>ATSm, MorXm, G2m, TDBm descriptors</a:t>
+            </a:r>
+          </a:p>
+          <a:p>
+            <a:pPr lvl="1"/>
+            <a:r>
+              <a:rPr lang="" dirty="0"/>
+              <a:t>Indicates that the spatial distribution of atomic masses contributes to intensity prediction.</a:t>
+            </a:r>
+          </a:p>
+          <a:p>
+            <a:r>
+              <a:rPr lang="" b="1" dirty="0"/>
+              <a:t>Hydrogen-bonding functionality</a:t>
+            </a:r>
+            <a:endParaRPr lang="" dirty="0"/>
+          </a:p>
+          <a:p>
+            <a:pPr lvl="1"/>
+            <a:r>
+              <a:rPr lang="" dirty="0"/>
+              <a:t>SsOH descriptor</a:t>
+            </a:r>
+          </a:p>
+          <a:p>
+            <a:pPr lvl="1"/>
+            <a:r>
+              <a:rPr lang="" dirty="0"/>
+              <a:t>Presence of hydroxyl groups appears to influence odor intensity.</a:t>
+            </a:r>
+          </a:p>
+          <a:p>
+            <a:br>
+              <a:rPr lang="" dirty="0"/>
+            </a:br>
+            <a:endParaRPr lang="" dirty="0"/>
+          </a:p>
+          <a:p>
+            <a:r>
+              <a:rPr lang="" b="1" dirty="0"/>
+              <a:t>Interpretation</a:t>
+            </a:r>
+          </a:p>
+          <a:p>
+            <a:r>
+              <a:rPr lang="" dirty="0"/>
+              <a:t>The selected descriptors indicate that </a:t>
+            </a:r>
+            <a:r>
+              <a:rPr lang="" b="1" dirty="0"/>
+              <a:t>odor intensity is primarily related to molecular shape, size, and electronic structure</a:t>
+            </a:r>
+            <a:r>
+              <a:rPr lang="" dirty="0"/>
+              <a:t>.</a:t>
+            </a:r>
+          </a:p>
+          <a:p>
+            <a:r>
+              <a:rPr lang="" dirty="0"/>
+              <a:t>This is consistent with the hypothesis that intensity is determined by:</a:t>
+            </a:r>
+          </a:p>
+          <a:p>
+            <a:r>
+              <a:rPr lang="" dirty="0"/>
+              <a:t>How efficiently a molecule reaches the receptor.</a:t>
+            </a:r>
+          </a:p>
+          <a:p>
+            <a:r>
+              <a:rPr lang="" dirty="0"/>
+              <a:t>How strongly it interacts with the receptor binding site.</a:t>
+            </a:r>
+          </a:p>
+          <a:p>
+            <a:br>
+              <a:rPr lang="" dirty="0"/>
+            </a:br>
+            <a:endParaRPr lang="" dirty="0"/>
+          </a:p>
+          <a:p>
+            <a:r>
+              <a:rPr lang="" b="1" dirty="0"/>
+              <a:t>Surprisingly Underrepresented</a:t>
+            </a:r>
+          </a:p>
+          <a:p>
+            <a:r>
+              <a:rPr lang="" dirty="0"/>
+              <a:t>The model selected very few descriptors directly related to:</a:t>
+            </a:r>
+          </a:p>
+          <a:p>
+            <a:r>
+              <a:rPr lang="" dirty="0"/>
+              <a:t>Lipophilicity (LogP)</a:t>
+            </a:r>
+          </a:p>
+          <a:p>
+            <a:r>
+              <a:rPr lang="" dirty="0"/>
+              <a:t>Hydrogen-bond donor count</a:t>
+            </a:r>
+          </a:p>
+          <a:p>
+            <a:r>
+              <a:rPr lang="" dirty="0"/>
+              <a:t>Hydrogen-bond acceptor count</a:t>
+            </a:r>
+          </a:p>
+          <a:p>
+            <a:r>
+              <a:rPr lang="" dirty="0"/>
+              <a:t>Molecular surface area</a:t>
+            </a:r>
+          </a:p>
+          <a:p>
+            <a:r>
+              <a:rPr lang="" dirty="0"/>
+              <a:t>Polar surface area (PSA)</a:t>
+            </a:r>
+          </a:p>
+          <a:p>
+            <a:r>
+              <a:rPr lang="" dirty="0"/>
+              <a:t>Simple constitutional descriptors</a:t>
+            </a:r>
+          </a:p>
+          <a:p>
+            <a:r>
+              <a:rPr lang="" dirty="0"/>
+              <a:t>These properties are commonly important in odor and drug-design studies, yet they were not among the most informative predictors for </a:t>
+            </a:r>
+            <a:r>
+              <a:rPr lang="" b="1" dirty="0"/>
+              <a:t>Imax</a:t>
+            </a:r>
+            <a:r>
+              <a:rPr lang="" dirty="0"/>
+              <a:t> in this dataset.</a:t>
+            </a:r>
+          </a:p>
+          <a:p>
+            <a:br>
+              <a:rPr lang="" dirty="0"/>
+            </a:br>
+            <a:endParaRPr lang="" dirty="0"/>
+          </a:p>
+          <a:p>
+            <a:r>
+              <a:rPr lang="" b="1" dirty="0"/>
+              <a:t>One-line conclusion for the slide</a:t>
+            </a:r>
+          </a:p>
+          <a:p>
+            <a:r>
+              <a:rPr lang="" b="1" dirty="0"/>
+              <a:t>Maximum odor intensity appears to be driven mainly by molecular 3D shape, size, topology, and electronic structure, whereas classical descriptors such as LogP, PSA, and simple hydrogen-bond counts were not identified as major predictors.</a:t>
+            </a:r>
+            <a:endParaRPr lang="" dirty="0"/>
+          </a:p>
+          <a:p>
+            <a:endParaRPr lang="LID4096" dirty="0"/>
+          </a:p>
+        </p:txBody>
+      </p:sp>
+      <p:sp>
+        <p:nvSpPr>
+          <p:cNvPr id="4" name="Slide Number Placeholder 3"/>
+          <p:cNvSpPr>
+            <a:spLocks noGrp="1"/>
+          </p:cNvSpPr>
+          <p:nvPr>
+            <p:ph type="sldNum" sz="quarter" idx="5"/>
+          </p:nvPr>
+        </p:nvSpPr>
+        <p:spPr/>
+        <p:txBody>
+          <a:bodyPr/>
+          <a:lstStyle/>
+          <a:p>
+            <a:fld id="{4F081A42-54A3-4E6D-AAAD-815597063FD7}" type="slidenum">
+              <a:rPr lang="LID4096" smtClean="0"/>
+              <a:t>9</a:t>
+            </a:fld>
+            <a:endParaRPr lang="LID4096"/>
+          </a:p>
+        </p:txBody>
+      </p:sp>
+    </p:spTree>
+    <p:extLst>
+      <p:ext uri="{BB962C8B-B14F-4D97-AF65-F5344CB8AC3E}">
+        <p14:creationId xmlns:p14="http://schemas.microsoft.com/office/powerpoint/2010/main" val="615583566"/>
+      </p:ext>
+    </p:extLst>
+  </p:cSld>
+  <p:clrMapOvr>
+    <a:masterClrMapping/>
+  </p:clrMapOvr>
+</p:notes>
+</file>
+
+<file path=ppt/notesSlides/notesSlide6.xml><?xml version="1.0" encoding="utf-8"?>
+<p:notes xmlns:a="http://schemas.openxmlformats.org/drawingml/2006/main" xmlns:r="http://schemas.openxmlformats.org/officeDocument/2006/relationships" xmlns:p="http://schemas.openxmlformats.org/presentationml/2006/main">
+  <p:cSld>
+    <p:spTree>
+      <p:nvGrpSpPr>
+        <p:cNvPr id="1" name=""/>
+        <p:cNvGrpSpPr/>
+        <p:nvPr/>
+      </p:nvGrpSpPr>
+      <p:grpSpPr>
+        <a:xfrm>
+          <a:off x="0" y="0"/>
+          <a:ext cx="0" cy="0"/>
+          <a:chOff x="0" y="0"/>
+          <a:chExt cx="0" cy="0"/>
+        </a:xfrm>
+      </p:grpSpPr>
+      <p:sp>
+        <p:nvSpPr>
+          <p:cNvPr id="2" name="Slide Image Placeholder 1"/>
+          <p:cNvSpPr>
+            <a:spLocks noGrp="1" noRot="1" noChangeAspect="1"/>
+          </p:cNvSpPr>
+          <p:nvPr>
+            <p:ph type="sldImg"/>
+          </p:nvPr>
+        </p:nvSpPr>
+        <p:spPr/>
+      </p:sp>
+      <p:sp>
+        <p:nvSpPr>
+          <p:cNvPr id="3" name="Notes Placeholder 2"/>
+          <p:cNvSpPr>
+            <a:spLocks noGrp="1"/>
+          </p:cNvSpPr>
+          <p:nvPr>
+            <p:ph type="body" idx="1"/>
+          </p:nvPr>
+        </p:nvSpPr>
+        <p:spPr/>
+        <p:txBody>
+          <a:bodyPr/>
+          <a:lstStyle/>
+          <a:p>
+            <a:r>
+              <a:rPr lang="" b="1" dirty="0"/>
+              <a:t>Here's what we've learned so far</a:t>
+            </a:r>
+          </a:p>
+          <a:p>
+            <a:r>
+              <a:rPr lang="" b="1" dirty="0"/>
+              <a:t>✓ XGBoost is currently your strongest base learner</a:t>
+            </a:r>
+          </a:p>
+          <a:p>
+            <a:r>
+              <a:rPr lang="" dirty="0"/>
+              <a:t>It captures most of the structure in the data.</a:t>
+            </a:r>
+          </a:p>
+          <a:p>
+            <a:r>
+              <a:rPr lang="" b="1" dirty="0"/>
+              <a:t>✓ The classifier is meaningful</a:t>
+            </a:r>
+          </a:p>
+          <a:p>
+            <a:r>
+              <a:rPr lang="" dirty="0"/>
+              <a:t>It learned something real:</a:t>
+            </a:r>
+          </a:p>
+          <a:p>
+            <a:r>
+              <a:rPr lang="" dirty="0"/>
+              <a:t>no confusion between low and high intensity </a:t>
+            </a:r>
+          </a:p>
+          <a:p>
+            <a:r>
+              <a:rPr lang="" dirty="0"/>
+              <a:t>class probabilities became moderately important features in XGBoost </a:t>
+            </a:r>
+          </a:p>
+          <a:p>
+            <a:r>
+              <a:rPr lang="" b="1" dirty="0"/>
+              <a:t>✓ But classifier probabilities do not improve regression</a:t>
+            </a:r>
+          </a:p>
+          <a:p>
+            <a:r>
+              <a:rPr lang="" dirty="0"/>
+              <a:t>We tested:</a:t>
+            </a:r>
+          </a:p>
+          <a:p>
+            <a:r>
+              <a:rPr lang="" dirty="0"/>
+              <a:t>adding them as features </a:t>
+            </a:r>
+          </a:p>
+          <a:p>
+            <a:r>
+              <a:rPr lang="" dirty="0"/>
+              <a:t>using them for residual correction </a:t>
+            </a:r>
+          </a:p>
+          <a:p>
+            <a:r>
+              <a:rPr lang="" dirty="0"/>
+              <a:t>Neither reduced CV MAE.</a:t>
+            </a:r>
+          </a:p>
+          <a:p>
+            <a:r>
+              <a:rPr lang="" dirty="0"/>
+              <a:t>So I would remove that branch from the production pipeline.</a:t>
+            </a:r>
+          </a:p>
+          <a:p>
+            <a:r>
+              <a:rPr lang="" dirty="0"/>
+              <a:t>This is actually a useful negative result—it tells us where </a:t>
+            </a:r>
+            <a:r>
+              <a:rPr lang="" b="1" dirty="0"/>
+              <a:t>not</a:t>
+            </a:r>
+            <a:r>
+              <a:rPr lang="" dirty="0"/>
+              <a:t> to spend more time.</a:t>
+            </a:r>
+          </a:p>
+          <a:p>
+            <a:endParaRPr lang="LID4096" dirty="0"/>
+          </a:p>
+        </p:txBody>
+      </p:sp>
+      <p:sp>
+        <p:nvSpPr>
+          <p:cNvPr id="4" name="Slide Number Placeholder 3"/>
+          <p:cNvSpPr>
+            <a:spLocks noGrp="1"/>
+          </p:cNvSpPr>
+          <p:nvPr>
+            <p:ph type="sldNum" sz="quarter" idx="5"/>
+          </p:nvPr>
+        </p:nvSpPr>
+        <p:spPr/>
+        <p:txBody>
+          <a:bodyPr/>
+          <a:lstStyle/>
+          <a:p>
+            <a:fld id="{4F081A42-54A3-4E6D-AAAD-815597063FD7}" type="slidenum">
+              <a:rPr lang="LID4096" smtClean="0"/>
+              <a:t>13</a:t>
+            </a:fld>
+            <a:endParaRPr lang="LID4096"/>
+          </a:p>
+        </p:txBody>
+      </p:sp>
+    </p:spTree>
+    <p:extLst>
+      <p:ext uri="{BB962C8B-B14F-4D97-AF65-F5344CB8AC3E}">
+        <p14:creationId xmlns:p14="http://schemas.microsoft.com/office/powerpoint/2010/main" val="2199111028"/>
+      </p:ext>
+    </p:extLst>
+  </p:cSld>
+  <p:clrMapOvr>
+    <a:masterClrMapping/>
+  </p:clrMapOvr>
+</p:notes>
+</file>
+
+<file path=ppt/notesSlides/notesSlide7.xml><?xml version="1.0" encoding="utf-8"?>
+<p:notes xmlns:a="http://schemas.openxmlformats.org/drawingml/2006/main" xmlns:r="http://schemas.openxmlformats.org/officeDocument/2006/relationships" xmlns:p="http://schemas.openxmlformats.org/presentationml/2006/main">
+  <p:cSld>
+    <p:spTree>
+      <p:nvGrpSpPr>
+        <p:cNvPr id="1" name=""/>
+        <p:cNvGrpSpPr/>
+        <p:nvPr/>
+      </p:nvGrpSpPr>
+      <p:grpSpPr>
+        <a:xfrm>
+          <a:off x="0" y="0"/>
+          <a:ext cx="0" cy="0"/>
+          <a:chOff x="0" y="0"/>
+          <a:chExt cx="0" cy="0"/>
+        </a:xfrm>
+      </p:grpSpPr>
+      <p:sp>
+        <p:nvSpPr>
+          <p:cNvPr id="2" name="Slide Image Placeholder 1"/>
+          <p:cNvSpPr>
+            <a:spLocks noGrp="1" noRot="1" noChangeAspect="1"/>
+          </p:cNvSpPr>
+          <p:nvPr>
+            <p:ph type="sldImg"/>
+          </p:nvPr>
+        </p:nvSpPr>
+        <p:spPr/>
+      </p:sp>
+      <p:sp>
+        <p:nvSpPr>
+          <p:cNvPr id="3" name="Notes Placeholder 2"/>
+          <p:cNvSpPr>
+            <a:spLocks noGrp="1"/>
+          </p:cNvSpPr>
+          <p:nvPr>
+            <p:ph type="body" idx="1"/>
+          </p:nvPr>
+        </p:nvSpPr>
+        <p:spPr/>
+        <p:txBody>
+          <a:bodyPr/>
+          <a:lstStyle/>
+          <a:p>
+            <a:endParaRPr lang="LID4096" dirty="0"/>
+          </a:p>
+        </p:txBody>
+      </p:sp>
+      <p:sp>
+        <p:nvSpPr>
+          <p:cNvPr id="4" name="Slide Number Placeholder 3"/>
+          <p:cNvSpPr>
+            <a:spLocks noGrp="1"/>
+          </p:cNvSpPr>
+          <p:nvPr>
+            <p:ph type="sldNum" sz="quarter" idx="5"/>
+          </p:nvPr>
+        </p:nvSpPr>
+        <p:spPr/>
+        <p:txBody>
+          <a:bodyPr/>
+          <a:lstStyle/>
+          <a:p>
+            <a:fld id="{4F081A42-54A3-4E6D-AAAD-815597063FD7}" type="slidenum">
+              <a:rPr lang="LID4096" smtClean="0"/>
+              <a:t>18</a:t>
+            </a:fld>
+            <a:endParaRPr lang="LID4096"/>
+          </a:p>
+        </p:txBody>
+      </p:sp>
+    </p:spTree>
+    <p:extLst>
+      <p:ext uri="{BB962C8B-B14F-4D97-AF65-F5344CB8AC3E}">
+        <p14:creationId xmlns:p14="http://schemas.microsoft.com/office/powerpoint/2010/main" val="2900156597"/>
+      </p:ext>
+    </p:extLst>
+  </p:cSld>
+  <p:clrMapOvr>
+    <a:masterClrMapping/>
+  </p:clrMapOvr>
+</p:notes>
+</file>
+
+<file path=ppt/notesSlides/notesSlide8.xml><?xml version="1.0" encoding="utf-8"?>
+<p:notes xmlns:a="http://schemas.openxmlformats.org/drawingml/2006/main" xmlns:r="http://schemas.openxmlformats.org/officeDocument/2006/relationships" xmlns:p="http://schemas.openxmlformats.org/presentationml/2006/main">
+  <p:cSld>
+    <p:spTree>
+      <p:nvGrpSpPr>
+        <p:cNvPr id="1" name=""/>
+        <p:cNvGrpSpPr/>
+        <p:nvPr/>
+      </p:nvGrpSpPr>
+      <p:grpSpPr>
+        <a:xfrm>
+          <a:off x="0" y="0"/>
+          <a:ext cx="0" cy="0"/>
+          <a:chOff x="0" y="0"/>
+          <a:chExt cx="0" cy="0"/>
+        </a:xfrm>
+      </p:grpSpPr>
+      <p:sp>
+        <p:nvSpPr>
+          <p:cNvPr id="2" name="Slide Image Placeholder 1"/>
+          <p:cNvSpPr>
+            <a:spLocks noGrp="1" noRot="1" noChangeAspect="1"/>
+          </p:cNvSpPr>
+          <p:nvPr>
+            <p:ph type="sldImg"/>
+          </p:nvPr>
+        </p:nvSpPr>
+        <p:spPr/>
+      </p:sp>
+      <p:sp>
+        <p:nvSpPr>
+          <p:cNvPr id="3" name="Notes Placeholder 2"/>
+          <p:cNvSpPr>
+            <a:spLocks noGrp="1"/>
+          </p:cNvSpPr>
+          <p:nvPr>
+            <p:ph type="body" idx="1"/>
+          </p:nvPr>
+        </p:nvSpPr>
+        <p:spPr/>
+        <p:txBody>
+          <a:bodyPr/>
+          <a:lstStyle/>
+          <a:p>
+            <a:r>
+              <a:rPr lang="" sz="1200" kern="1200" dirty="0">
+                <a:solidFill>
+                  <a:schemeClr val="tx1"/>
+                </a:solidFill>
+                <a:effectLst/>
+                <a:latin typeface="+mn-lt"/>
+                <a:ea typeface="+mn-ea"/>
+                <a:cs typeface="+mn-cs"/>
+                <a:hlinkClick r:id="rId3"/>
+              </a:rPr>
+              <a:t>https://scikit-learn.org/stable/modules/generated/sklearn.gaussian_process.GaussianProcessRegressor.html</a:t>
+            </a:r>
+            <a:endParaRPr lang="" sz="1200" kern="1200" dirty="0">
+              <a:solidFill>
+                <a:schemeClr val="tx1"/>
+              </a:solidFill>
+              <a:effectLst/>
+              <a:latin typeface="+mn-lt"/>
+              <a:ea typeface="+mn-ea"/>
+              <a:cs typeface="+mn-cs"/>
+            </a:endParaRPr>
+          </a:p>
+          <a:p>
+            <a:endParaRPr lang="" sz="1200" kern="1200" dirty="0">
+              <a:solidFill>
+                <a:schemeClr val="tx1"/>
+              </a:solidFill>
+              <a:effectLst/>
+              <a:latin typeface="+mn-lt"/>
+              <a:ea typeface="+mn-ea"/>
+              <a:cs typeface="+mn-cs"/>
+            </a:endParaRPr>
+          </a:p>
+          <a:p>
+            <a:r>
+              <a:rPr lang="" sz="1200" kern="1200" dirty="0">
+                <a:solidFill>
+                  <a:schemeClr val="tx1"/>
+                </a:solidFill>
+                <a:effectLst/>
+                <a:latin typeface="+mn-lt"/>
+                <a:ea typeface="+mn-ea"/>
+                <a:cs typeface="+mn-cs"/>
+                <a:hlinkClick r:id="rId4"/>
+              </a:rPr>
+              <a:t>https://scikit-learn.org/stable/modules/generated/sklearn.ensemble.VotingClassifier.html#sklearn.ensemble.VotingClassifier</a:t>
+            </a:r>
+            <a:endParaRPr lang="LID4096" dirty="0"/>
+          </a:p>
+        </p:txBody>
+      </p:sp>
+      <p:sp>
+        <p:nvSpPr>
+          <p:cNvPr id="4" name="Slide Number Placeholder 3"/>
+          <p:cNvSpPr>
+            <a:spLocks noGrp="1"/>
+          </p:cNvSpPr>
+          <p:nvPr>
+            <p:ph type="sldNum" sz="quarter" idx="5"/>
+          </p:nvPr>
+        </p:nvSpPr>
+        <p:spPr/>
+        <p:txBody>
+          <a:bodyPr/>
+          <a:lstStyle/>
+          <a:p>
+            <a:fld id="{4F081A42-54A3-4E6D-AAAD-815597063FD7}" type="slidenum">
+              <a:rPr lang="LID4096" smtClean="0"/>
+              <a:t>19</a:t>
+            </a:fld>
+            <a:endParaRPr lang="LID4096"/>
+          </a:p>
+        </p:txBody>
+      </p:sp>
+    </p:spTree>
+    <p:extLst>
+      <p:ext uri="{BB962C8B-B14F-4D97-AF65-F5344CB8AC3E}">
+        <p14:creationId xmlns:p14="http://schemas.microsoft.com/office/powerpoint/2010/main" val="2692204734"/>
       </p:ext>
     </p:extLst>
   </p:cSld>
@@ -699,7 +1851,7 @@
           <a:p>
             <a:fld id="{3DBD65A3-F498-4B74-9815-EB2DD0BB06C6}" type="datetimeFigureOut">
               <a:rPr lang="LID4096" smtClean="0"/>
-              <a:t>06/13/2026</a:t>
+              <a:t>06/23/2026</a:t>
             </a:fld>
             <a:endParaRPr lang="LID4096"/>
           </a:p>
@@ -899,7 +2051,7 @@
           <a:p>
             <a:fld id="{3DBD65A3-F498-4B74-9815-EB2DD0BB06C6}" type="datetimeFigureOut">
               <a:rPr lang="LID4096" smtClean="0"/>
-              <a:t>06/13/2026</a:t>
+              <a:t>06/23/2026</a:t>
             </a:fld>
             <a:endParaRPr lang="LID4096"/>
           </a:p>
@@ -1109,7 +2261,7 @@
           <a:p>
             <a:fld id="{3DBD65A3-F498-4B74-9815-EB2DD0BB06C6}" type="datetimeFigureOut">
               <a:rPr lang="LID4096" smtClean="0"/>
-              <a:t>06/13/2026</a:t>
+              <a:t>06/23/2026</a:t>
             </a:fld>
             <a:endParaRPr lang="LID4096"/>
           </a:p>
@@ -1309,7 +2461,7 @@
           <a:p>
             <a:fld id="{3DBD65A3-F498-4B74-9815-EB2DD0BB06C6}" type="datetimeFigureOut">
               <a:rPr lang="LID4096" smtClean="0"/>
-              <a:t>06/13/2026</a:t>
+              <a:t>06/23/2026</a:t>
             </a:fld>
             <a:endParaRPr lang="LID4096"/>
           </a:p>
@@ -1585,7 +2737,7 @@
           <a:p>
             <a:fld id="{3DBD65A3-F498-4B74-9815-EB2DD0BB06C6}" type="datetimeFigureOut">
               <a:rPr lang="LID4096" smtClean="0"/>
-              <a:t>06/13/2026</a:t>
+              <a:t>06/23/2026</a:t>
             </a:fld>
             <a:endParaRPr lang="LID4096"/>
           </a:p>
@@ -1853,7 +3005,7 @@
           <a:p>
             <a:fld id="{3DBD65A3-F498-4B74-9815-EB2DD0BB06C6}" type="datetimeFigureOut">
               <a:rPr lang="LID4096" smtClean="0"/>
-              <a:t>06/13/2026</a:t>
+              <a:t>06/23/2026</a:t>
             </a:fld>
             <a:endParaRPr lang="LID4096"/>
           </a:p>
@@ -2268,7 +3420,7 @@
           <a:p>
             <a:fld id="{3DBD65A3-F498-4B74-9815-EB2DD0BB06C6}" type="datetimeFigureOut">
               <a:rPr lang="LID4096" smtClean="0"/>
-              <a:t>06/13/2026</a:t>
+              <a:t>06/23/2026</a:t>
             </a:fld>
             <a:endParaRPr lang="LID4096"/>
           </a:p>
@@ -2410,7 +3562,7 @@
           <a:p>
             <a:fld id="{3DBD65A3-F498-4B74-9815-EB2DD0BB06C6}" type="datetimeFigureOut">
               <a:rPr lang="LID4096" smtClean="0"/>
-              <a:t>06/13/2026</a:t>
+              <a:t>06/23/2026</a:t>
             </a:fld>
             <a:endParaRPr lang="LID4096"/>
           </a:p>
@@ -2523,7 +3675,7 @@
           <a:p>
             <a:fld id="{3DBD65A3-F498-4B74-9815-EB2DD0BB06C6}" type="datetimeFigureOut">
               <a:rPr lang="LID4096" smtClean="0"/>
-              <a:t>06/13/2026</a:t>
+              <a:t>06/23/2026</a:t>
             </a:fld>
             <a:endParaRPr lang="LID4096"/>
           </a:p>
@@ -2836,7 +3988,7 @@
           <a:p>
             <a:fld id="{3DBD65A3-F498-4B74-9815-EB2DD0BB06C6}" type="datetimeFigureOut">
               <a:rPr lang="LID4096" smtClean="0"/>
-              <a:t>06/13/2026</a:t>
+              <a:t>06/23/2026</a:t>
             </a:fld>
             <a:endParaRPr lang="LID4096"/>
           </a:p>
@@ -3125,7 +4277,7 @@
           <a:p>
             <a:fld id="{3DBD65A3-F498-4B74-9815-EB2DD0BB06C6}" type="datetimeFigureOut">
               <a:rPr lang="LID4096" smtClean="0"/>
-              <a:t>06/13/2026</a:t>
+              <a:t>06/23/2026</a:t>
             </a:fld>
             <a:endParaRPr lang="LID4096"/>
           </a:p>
@@ -3368,7 +4520,7 @@
           <a:p>
             <a:fld id="{3DBD65A3-F498-4B74-9815-EB2DD0BB06C6}" type="datetimeFigureOut">
               <a:rPr lang="LID4096" smtClean="0"/>
-              <a:t>06/13/2026</a:t>
+              <a:t>06/23/2026</a:t>
             </a:fld>
             <a:endParaRPr lang="LID4096"/>
           </a:p>
@@ -3799,8 +4951,8 @@
         </p:nvSpPr>
         <p:spPr>
           <a:xfrm>
-            <a:off x="748703" y="650513"/>
-            <a:ext cx="10899157" cy="3416320"/>
+            <a:off x="621703" y="831135"/>
+            <a:ext cx="11265497" cy="4253537"/>
           </a:xfrm>
           <a:prstGeom prst="rect">
             <a:avLst/>
@@ -3814,7 +4966,7 @@
           <a:lstStyle/>
           <a:p>
             <a:r>
-              <a:rPr lang="en-US" dirty="0"/>
+              <a:rPr lang="en-US" sz="2400" b="1" dirty="0"/>
               <a:t>The goal of the project: Prediction of the odor intensity of fragrance molecules</a:t>
             </a:r>
             <a:br>
@@ -3824,7 +4976,7 @@
               <a:rPr lang="en-US" dirty="0"/>
             </a:br>
             <a:r>
-              <a:rPr lang="en-US" dirty="0"/>
+              <a:rPr lang="en-US" sz="2400" dirty="0"/>
               <a:t>The real word problem:</a:t>
             </a:r>
           </a:p>
@@ -3833,16 +4985,22 @@
           </a:p>
           <a:p>
             <a:pPr marL="285750" indent="-285750">
+              <a:lnSpc>
+                <a:spcPct val="150000"/>
+              </a:lnSpc>
               <a:buFont typeface="Arial" panose="020B0604020202020204" pitchFamily="34" charset="0"/>
               <a:buChar char="•"/>
             </a:pPr>
             <a:r>
               <a:rPr lang="en-US" dirty="0"/>
-              <a:t>Odor intensity determines how much of an ingredient is needed in a fragrance formula.</a:t>
+              <a:t>Odor intensity determines how much of an ingredient is needed in a fragrance formula (quantity ~ cost).</a:t>
             </a:r>
           </a:p>
           <a:p>
             <a:pPr marL="285750" indent="-285750">
+              <a:lnSpc>
+                <a:spcPct val="150000"/>
+              </a:lnSpc>
               <a:buFont typeface="Arial" panose="020B0604020202020204" pitchFamily="34" charset="0"/>
               <a:buChar char="•"/>
             </a:pPr>
@@ -3853,6 +5011,9 @@
           </a:p>
           <a:p>
             <a:pPr marL="285750" indent="-285750">
+              <a:lnSpc>
+                <a:spcPct val="150000"/>
+              </a:lnSpc>
               <a:buFont typeface="Arial" panose="020B0604020202020204" pitchFamily="34" charset="0"/>
               <a:buChar char="•"/>
             </a:pPr>
@@ -3863,6 +5024,9 @@
           </a:p>
           <a:p>
             <a:pPr marL="285750" indent="-285750">
+              <a:lnSpc>
+                <a:spcPct val="150000"/>
+              </a:lnSpc>
               <a:buFont typeface="Arial" panose="020B0604020202020204" pitchFamily="34" charset="0"/>
               <a:buChar char="•"/>
             </a:pPr>
@@ -3873,6 +5037,9 @@
           </a:p>
           <a:p>
             <a:pPr marL="285750" indent="-285750">
+              <a:lnSpc>
+                <a:spcPct val="150000"/>
+              </a:lnSpc>
               <a:buFont typeface="Arial" panose="020B0604020202020204" pitchFamily="34" charset="0"/>
               <a:buChar char="•"/>
             </a:pPr>
@@ -3883,6 +5050,9 @@
           </a:p>
           <a:p>
             <a:pPr marL="285750" indent="-285750">
+              <a:lnSpc>
+                <a:spcPct val="150000"/>
+              </a:lnSpc>
               <a:buFont typeface="Arial" panose="020B0604020202020204" pitchFamily="34" charset="0"/>
               <a:buChar char="•"/>
             </a:pPr>
@@ -3898,6 +5068,3047 @@
     <p:extLst>
       <p:ext uri="{BB962C8B-B14F-4D97-AF65-F5344CB8AC3E}">
         <p14:creationId xmlns:p14="http://schemas.microsoft.com/office/powerpoint/2010/main" val="1314100462"/>
+      </p:ext>
+    </p:extLst>
+  </p:cSld>
+  <p:clrMapOvr>
+    <a:masterClrMapping/>
+  </p:clrMapOvr>
+</p:sld>
+</file>
+
+<file path=ppt/slides/slide10.xml><?xml version="1.0" encoding="utf-8"?>
+<p:sld xmlns:a="http://schemas.openxmlformats.org/drawingml/2006/main" xmlns:r="http://schemas.openxmlformats.org/officeDocument/2006/relationships" xmlns:p="http://schemas.openxmlformats.org/presentationml/2006/main">
+  <p:cSld>
+    <p:spTree>
+      <p:nvGrpSpPr>
+        <p:cNvPr id="1" name=""/>
+        <p:cNvGrpSpPr/>
+        <p:nvPr/>
+      </p:nvGrpSpPr>
+      <p:grpSpPr>
+        <a:xfrm>
+          <a:off x="0" y="0"/>
+          <a:ext cx="0" cy="0"/>
+          <a:chOff x="0" y="0"/>
+          <a:chExt cx="0" cy="0"/>
+        </a:xfrm>
+      </p:grpSpPr>
+      <p:sp>
+        <p:nvSpPr>
+          <p:cNvPr id="2" name="TextBox 1">
+            <a:extLst>
+              <a:ext uri="{FF2B5EF4-FFF2-40B4-BE49-F238E27FC236}">
+                <a16:creationId xmlns:a16="http://schemas.microsoft.com/office/drawing/2014/main" id="{5D9BAA38-63BC-936A-A392-40C9C21022EC}"/>
+              </a:ext>
+            </a:extLst>
+          </p:cNvPr>
+          <p:cNvSpPr txBox="1"/>
+          <p:nvPr/>
+        </p:nvSpPr>
+        <p:spPr>
+          <a:xfrm>
+            <a:off x="541867" y="399627"/>
+            <a:ext cx="9990666" cy="369332"/>
+          </a:xfrm>
+          <a:prstGeom prst="rect">
+            <a:avLst/>
+          </a:prstGeom>
+          <a:noFill/>
+        </p:spPr>
+        <p:txBody>
+          <a:bodyPr wrap="square" rtlCol="0">
+            <a:spAutoFit/>
+          </a:bodyPr>
+          <a:lstStyle/>
+          <a:p>
+            <a:r>
+              <a:rPr lang="en-US" dirty="0"/>
+              <a:t>Imputing of Vapor Pressure – theoretically should improve Imax prediction</a:t>
+            </a:r>
+            <a:endParaRPr lang="LID4096" dirty="0"/>
+          </a:p>
+        </p:txBody>
+      </p:sp>
+      <p:sp>
+        <p:nvSpPr>
+          <p:cNvPr id="3" name="TextBox 2">
+            <a:extLst>
+              <a:ext uri="{FF2B5EF4-FFF2-40B4-BE49-F238E27FC236}">
+                <a16:creationId xmlns:a16="http://schemas.microsoft.com/office/drawing/2014/main" id="{2A4D7B89-6891-63DB-5BF1-62348BA4E724}"/>
+              </a:ext>
+            </a:extLst>
+          </p:cNvPr>
+          <p:cNvSpPr txBox="1"/>
+          <p:nvPr/>
+        </p:nvSpPr>
+        <p:spPr>
+          <a:xfrm>
+            <a:off x="541867" y="768959"/>
+            <a:ext cx="11494347" cy="1200329"/>
+          </a:xfrm>
+          <a:prstGeom prst="rect">
+            <a:avLst/>
+          </a:prstGeom>
+          <a:noFill/>
+        </p:spPr>
+        <p:txBody>
+          <a:bodyPr wrap="square" rtlCol="0">
+            <a:spAutoFit/>
+          </a:bodyPr>
+          <a:lstStyle/>
+          <a:p>
+            <a:r>
+              <a:rPr lang="en-US" dirty="0"/>
+              <a:t>We have succeeded to retrieve 416 molecules with experimental data for VP from </a:t>
+            </a:r>
+            <a:r>
+              <a:rPr lang="en-US" dirty="0" err="1"/>
+              <a:t>Pubchem</a:t>
+            </a:r>
+            <a:r>
+              <a:rPr lang="en-US" dirty="0"/>
+              <a:t>, only 66 were from Wakayama dataset.</a:t>
+            </a:r>
+          </a:p>
+          <a:p>
+            <a:endParaRPr lang="en-US" dirty="0"/>
+          </a:p>
+          <a:p>
+            <a:r>
+              <a:rPr lang="en-US" dirty="0"/>
+              <a:t> </a:t>
+            </a:r>
+            <a:endParaRPr lang="LID4096" dirty="0"/>
+          </a:p>
+        </p:txBody>
+      </p:sp>
+      <p:pic>
+        <p:nvPicPr>
+          <p:cNvPr id="5" name="Picture 4">
+            <a:extLst>
+              <a:ext uri="{FF2B5EF4-FFF2-40B4-BE49-F238E27FC236}">
+                <a16:creationId xmlns:a16="http://schemas.microsoft.com/office/drawing/2014/main" id="{46FBB98D-7539-AEDC-B889-D623E61A9F81}"/>
+              </a:ext>
+            </a:extLst>
+          </p:cNvPr>
+          <p:cNvPicPr>
+            <a:picLocks noChangeAspect="1"/>
+          </p:cNvPicPr>
+          <p:nvPr/>
+        </p:nvPicPr>
+        <p:blipFill>
+          <a:blip r:embed="rId2"/>
+          <a:stretch>
+            <a:fillRect/>
+          </a:stretch>
+        </p:blipFill>
+        <p:spPr>
+          <a:xfrm>
+            <a:off x="329666" y="2094806"/>
+            <a:ext cx="7365516" cy="3994235"/>
+          </a:xfrm>
+          <a:prstGeom prst="rect">
+            <a:avLst/>
+          </a:prstGeom>
+        </p:spPr>
+      </p:pic>
+    </p:spTree>
+    <p:extLst>
+      <p:ext uri="{BB962C8B-B14F-4D97-AF65-F5344CB8AC3E}">
+        <p14:creationId xmlns:p14="http://schemas.microsoft.com/office/powerpoint/2010/main" val="577445348"/>
+      </p:ext>
+    </p:extLst>
+  </p:cSld>
+  <p:clrMapOvr>
+    <a:masterClrMapping/>
+  </p:clrMapOvr>
+</p:sld>
+</file>
+
+<file path=ppt/slides/slide11.xml><?xml version="1.0" encoding="utf-8"?>
+<p:sld xmlns:a="http://schemas.openxmlformats.org/drawingml/2006/main" xmlns:r="http://schemas.openxmlformats.org/officeDocument/2006/relationships" xmlns:p="http://schemas.openxmlformats.org/presentationml/2006/main">
+  <p:cSld>
+    <p:spTree>
+      <p:nvGrpSpPr>
+        <p:cNvPr id="1" name=""/>
+        <p:cNvGrpSpPr/>
+        <p:nvPr/>
+      </p:nvGrpSpPr>
+      <p:grpSpPr>
+        <a:xfrm>
+          <a:off x="0" y="0"/>
+          <a:ext cx="0" cy="0"/>
+          <a:chOff x="0" y="0"/>
+          <a:chExt cx="0" cy="0"/>
+        </a:xfrm>
+      </p:grpSpPr>
+      <p:sp>
+        <p:nvSpPr>
+          <p:cNvPr id="2" name="TextBox 1">
+            <a:extLst>
+              <a:ext uri="{FF2B5EF4-FFF2-40B4-BE49-F238E27FC236}">
+                <a16:creationId xmlns:a16="http://schemas.microsoft.com/office/drawing/2014/main" id="{41C442AF-0FE3-ED24-7BE0-15559A32BD90}"/>
+              </a:ext>
+            </a:extLst>
+          </p:cNvPr>
+          <p:cNvSpPr txBox="1"/>
+          <p:nvPr/>
+        </p:nvSpPr>
+        <p:spPr>
+          <a:xfrm>
+            <a:off x="461740" y="191239"/>
+            <a:ext cx="9245600" cy="369332"/>
+          </a:xfrm>
+          <a:prstGeom prst="rect">
+            <a:avLst/>
+          </a:prstGeom>
+          <a:noFill/>
+        </p:spPr>
+        <p:txBody>
+          <a:bodyPr wrap="square" rtlCol="0">
+            <a:spAutoFit/>
+          </a:bodyPr>
+          <a:lstStyle/>
+          <a:p>
+            <a:r>
+              <a:rPr lang="en-US" dirty="0"/>
+              <a:t>Imputing of Boiling point</a:t>
+            </a:r>
+            <a:endParaRPr lang="LID4096" dirty="0"/>
+          </a:p>
+        </p:txBody>
+      </p:sp>
+      <p:pic>
+        <p:nvPicPr>
+          <p:cNvPr id="6" name="Picture 5">
+            <a:extLst>
+              <a:ext uri="{FF2B5EF4-FFF2-40B4-BE49-F238E27FC236}">
+                <a16:creationId xmlns:a16="http://schemas.microsoft.com/office/drawing/2014/main" id="{77F22C23-D392-98C5-FBB5-376334C30920}"/>
+              </a:ext>
+            </a:extLst>
+          </p:cNvPr>
+          <p:cNvPicPr>
+            <a:picLocks noChangeAspect="1"/>
+          </p:cNvPicPr>
+          <p:nvPr/>
+        </p:nvPicPr>
+        <p:blipFill>
+          <a:blip r:embed="rId2"/>
+          <a:stretch>
+            <a:fillRect/>
+          </a:stretch>
+        </p:blipFill>
+        <p:spPr>
+          <a:xfrm>
+            <a:off x="319786" y="560571"/>
+            <a:ext cx="4714672" cy="3211742"/>
+          </a:xfrm>
+          <a:prstGeom prst="rect">
+            <a:avLst/>
+          </a:prstGeom>
+        </p:spPr>
+      </p:pic>
+      <p:pic>
+        <p:nvPicPr>
+          <p:cNvPr id="8" name="Picture 7">
+            <a:extLst>
+              <a:ext uri="{FF2B5EF4-FFF2-40B4-BE49-F238E27FC236}">
+                <a16:creationId xmlns:a16="http://schemas.microsoft.com/office/drawing/2014/main" id="{188CA29D-828B-48AB-C9D8-A333AEE8E692}"/>
+              </a:ext>
+            </a:extLst>
+          </p:cNvPr>
+          <p:cNvPicPr>
+            <a:picLocks noChangeAspect="1"/>
+          </p:cNvPicPr>
+          <p:nvPr/>
+        </p:nvPicPr>
+        <p:blipFill>
+          <a:blip r:embed="rId3"/>
+          <a:stretch>
+            <a:fillRect/>
+          </a:stretch>
+        </p:blipFill>
+        <p:spPr>
+          <a:xfrm>
+            <a:off x="5878584" y="742349"/>
+            <a:ext cx="5300442" cy="5373301"/>
+          </a:xfrm>
+          <a:prstGeom prst="rect">
+            <a:avLst/>
+          </a:prstGeom>
+        </p:spPr>
+      </p:pic>
+      <p:pic>
+        <p:nvPicPr>
+          <p:cNvPr id="10" name="Picture 9">
+            <a:extLst>
+              <a:ext uri="{FF2B5EF4-FFF2-40B4-BE49-F238E27FC236}">
+                <a16:creationId xmlns:a16="http://schemas.microsoft.com/office/drawing/2014/main" id="{4A2633AE-D7B9-DDD7-4C40-E1BFECAB4638}"/>
+              </a:ext>
+            </a:extLst>
+          </p:cNvPr>
+          <p:cNvPicPr>
+            <a:picLocks noChangeAspect="1"/>
+          </p:cNvPicPr>
+          <p:nvPr/>
+        </p:nvPicPr>
+        <p:blipFill>
+          <a:blip r:embed="rId4"/>
+          <a:stretch>
+            <a:fillRect/>
+          </a:stretch>
+        </p:blipFill>
+        <p:spPr>
+          <a:xfrm>
+            <a:off x="845081" y="3603553"/>
+            <a:ext cx="4012266" cy="3183111"/>
+          </a:xfrm>
+          <a:prstGeom prst="rect">
+            <a:avLst/>
+          </a:prstGeom>
+        </p:spPr>
+      </p:pic>
+    </p:spTree>
+    <p:extLst>
+      <p:ext uri="{BB962C8B-B14F-4D97-AF65-F5344CB8AC3E}">
+        <p14:creationId xmlns:p14="http://schemas.microsoft.com/office/powerpoint/2010/main" val="554709863"/>
+      </p:ext>
+    </p:extLst>
+  </p:cSld>
+  <p:clrMapOvr>
+    <a:masterClrMapping/>
+  </p:clrMapOvr>
+</p:sld>
+</file>
+
+<file path=ppt/slides/slide12.xml><?xml version="1.0" encoding="utf-8"?>
+<p:sld xmlns:a="http://schemas.openxmlformats.org/drawingml/2006/main" xmlns:r="http://schemas.openxmlformats.org/officeDocument/2006/relationships" xmlns:p="http://schemas.openxmlformats.org/presentationml/2006/main">
+  <p:cSld>
+    <p:spTree>
+      <p:nvGrpSpPr>
+        <p:cNvPr id="1" name=""/>
+        <p:cNvGrpSpPr/>
+        <p:nvPr/>
+      </p:nvGrpSpPr>
+      <p:grpSpPr>
+        <a:xfrm>
+          <a:off x="0" y="0"/>
+          <a:ext cx="0" cy="0"/>
+          <a:chOff x="0" y="0"/>
+          <a:chExt cx="0" cy="0"/>
+        </a:xfrm>
+      </p:grpSpPr>
+      <p:pic>
+        <p:nvPicPr>
+          <p:cNvPr id="3" name="Picture 2">
+            <a:extLst>
+              <a:ext uri="{FF2B5EF4-FFF2-40B4-BE49-F238E27FC236}">
+                <a16:creationId xmlns:a16="http://schemas.microsoft.com/office/drawing/2014/main" id="{70EF1521-98DE-D5D1-4804-917C3A0AC731}"/>
+              </a:ext>
+            </a:extLst>
+          </p:cNvPr>
+          <p:cNvPicPr>
+            <a:picLocks noChangeAspect="1"/>
+          </p:cNvPicPr>
+          <p:nvPr/>
+        </p:nvPicPr>
+        <p:blipFill>
+          <a:blip r:embed="rId2"/>
+          <a:stretch>
+            <a:fillRect/>
+          </a:stretch>
+        </p:blipFill>
+        <p:spPr>
+          <a:xfrm>
+            <a:off x="563413" y="768029"/>
+            <a:ext cx="4557214" cy="551105"/>
+          </a:xfrm>
+          <a:prstGeom prst="rect">
+            <a:avLst/>
+          </a:prstGeom>
+        </p:spPr>
+      </p:pic>
+      <p:pic>
+        <p:nvPicPr>
+          <p:cNvPr id="5" name="Picture 4">
+            <a:extLst>
+              <a:ext uri="{FF2B5EF4-FFF2-40B4-BE49-F238E27FC236}">
+                <a16:creationId xmlns:a16="http://schemas.microsoft.com/office/drawing/2014/main" id="{CB10D9B6-B697-FAF9-E335-809652E796B3}"/>
+              </a:ext>
+            </a:extLst>
+          </p:cNvPr>
+          <p:cNvPicPr>
+            <a:picLocks noChangeAspect="1"/>
+          </p:cNvPicPr>
+          <p:nvPr/>
+        </p:nvPicPr>
+        <p:blipFill>
+          <a:blip r:embed="rId3"/>
+          <a:stretch>
+            <a:fillRect/>
+          </a:stretch>
+        </p:blipFill>
+        <p:spPr>
+          <a:xfrm>
+            <a:off x="563413" y="1466057"/>
+            <a:ext cx="4488910" cy="5118932"/>
+          </a:xfrm>
+          <a:prstGeom prst="rect">
+            <a:avLst/>
+          </a:prstGeom>
+        </p:spPr>
+      </p:pic>
+      <p:sp>
+        <p:nvSpPr>
+          <p:cNvPr id="8" name="TextBox 7">
+            <a:extLst>
+              <a:ext uri="{FF2B5EF4-FFF2-40B4-BE49-F238E27FC236}">
+                <a16:creationId xmlns:a16="http://schemas.microsoft.com/office/drawing/2014/main" id="{D9DCF642-64C2-1883-26A9-64FB0A05455F}"/>
+              </a:ext>
+            </a:extLst>
+          </p:cNvPr>
+          <p:cNvSpPr txBox="1"/>
+          <p:nvPr/>
+        </p:nvSpPr>
+        <p:spPr>
+          <a:xfrm>
+            <a:off x="682052" y="149902"/>
+            <a:ext cx="8581869" cy="523220"/>
+          </a:xfrm>
+          <a:prstGeom prst="rect">
+            <a:avLst/>
+          </a:prstGeom>
+          <a:noFill/>
+        </p:spPr>
+        <p:txBody>
+          <a:bodyPr wrap="square" rtlCol="0">
+            <a:spAutoFit/>
+          </a:bodyPr>
+          <a:lstStyle/>
+          <a:p>
+            <a:r>
+              <a:rPr lang="en-US" sz="2800" b="1" dirty="0"/>
+              <a:t>Additional Molecules features from </a:t>
+            </a:r>
+            <a:r>
+              <a:rPr lang="en-US" sz="2800" b="1" dirty="0" err="1"/>
+              <a:t>RDKit</a:t>
+            </a:r>
+            <a:endParaRPr lang="LID4096" sz="2800" b="1" dirty="0"/>
+          </a:p>
+        </p:txBody>
+      </p:sp>
+      <p:grpSp>
+        <p:nvGrpSpPr>
+          <p:cNvPr id="12" name="Group 11">
+            <a:extLst>
+              <a:ext uri="{FF2B5EF4-FFF2-40B4-BE49-F238E27FC236}">
+                <a16:creationId xmlns:a16="http://schemas.microsoft.com/office/drawing/2014/main" id="{BA0671D1-E983-6B46-5B7D-1537A74A89B1}"/>
+              </a:ext>
+            </a:extLst>
+          </p:cNvPr>
+          <p:cNvGrpSpPr/>
+          <p:nvPr/>
+        </p:nvGrpSpPr>
+        <p:grpSpPr>
+          <a:xfrm>
+            <a:off x="5553017" y="765421"/>
+            <a:ext cx="6433009" cy="2663579"/>
+            <a:chOff x="5553017" y="765421"/>
+            <a:chExt cx="6433009" cy="2663579"/>
+          </a:xfrm>
+        </p:grpSpPr>
+        <p:pic>
+          <p:nvPicPr>
+            <p:cNvPr id="7" name="Picture 6">
+              <a:extLst>
+                <a:ext uri="{FF2B5EF4-FFF2-40B4-BE49-F238E27FC236}">
+                  <a16:creationId xmlns:a16="http://schemas.microsoft.com/office/drawing/2014/main" id="{D8652C15-5E9F-D9BA-52D1-C288636343C6}"/>
+                </a:ext>
+              </a:extLst>
+            </p:cNvPr>
+            <p:cNvPicPr>
+              <a:picLocks noChangeAspect="1"/>
+            </p:cNvPicPr>
+            <p:nvPr/>
+          </p:nvPicPr>
+          <p:blipFill>
+            <a:blip r:embed="rId4"/>
+            <a:stretch>
+              <a:fillRect/>
+            </a:stretch>
+          </p:blipFill>
+          <p:spPr>
+            <a:xfrm>
+              <a:off x="5553017" y="765421"/>
+              <a:ext cx="6000619" cy="2663579"/>
+            </a:xfrm>
+            <a:prstGeom prst="rect">
+              <a:avLst/>
+            </a:prstGeom>
+          </p:spPr>
+        </p:pic>
+        <p:pic>
+          <p:nvPicPr>
+            <p:cNvPr id="10" name="Picture 9">
+              <a:extLst>
+                <a:ext uri="{FF2B5EF4-FFF2-40B4-BE49-F238E27FC236}">
+                  <a16:creationId xmlns:a16="http://schemas.microsoft.com/office/drawing/2014/main" id="{F8D2ECCA-3635-64C4-4CDC-19B72EDF45C8}"/>
+                </a:ext>
+              </a:extLst>
+            </p:cNvPr>
+            <p:cNvPicPr>
+              <a:picLocks noChangeAspect="1"/>
+            </p:cNvPicPr>
+            <p:nvPr/>
+          </p:nvPicPr>
+          <p:blipFill>
+            <a:blip r:embed="rId5"/>
+            <a:stretch>
+              <a:fillRect/>
+            </a:stretch>
+          </p:blipFill>
+          <p:spPr>
+            <a:xfrm>
+              <a:off x="9769980" y="1446356"/>
+              <a:ext cx="2216046" cy="1770766"/>
+            </a:xfrm>
+            <a:prstGeom prst="rect">
+              <a:avLst/>
+            </a:prstGeom>
+          </p:spPr>
+        </p:pic>
+      </p:grpSp>
+      <p:sp>
+        <p:nvSpPr>
+          <p:cNvPr id="11" name="TextBox 10">
+            <a:extLst>
+              <a:ext uri="{FF2B5EF4-FFF2-40B4-BE49-F238E27FC236}">
+                <a16:creationId xmlns:a16="http://schemas.microsoft.com/office/drawing/2014/main" id="{33586142-3F00-9790-8516-35BFF5D1CCC9}"/>
+              </a:ext>
+            </a:extLst>
+          </p:cNvPr>
+          <p:cNvSpPr txBox="1"/>
+          <p:nvPr/>
+        </p:nvSpPr>
+        <p:spPr>
+          <a:xfrm>
+            <a:off x="5420382" y="4639455"/>
+            <a:ext cx="6415790" cy="1754326"/>
+          </a:xfrm>
+          <a:prstGeom prst="rect">
+            <a:avLst/>
+          </a:prstGeom>
+          <a:noFill/>
+        </p:spPr>
+        <p:txBody>
+          <a:bodyPr wrap="square" rtlCol="0">
+            <a:spAutoFit/>
+          </a:bodyPr>
+          <a:lstStyle/>
+          <a:p>
+            <a:r>
+              <a:rPr lang="" b="1" dirty="0"/>
+              <a:t>RDKit is an open-source cheminformatics toolkit that converts molecular structures into numerical descriptors representing properties such as molecular size, shape, topology, polarity, and hydrogen-bonding ability. These descriptors can then be used as input features for machine learning models.</a:t>
+            </a:r>
+            <a:endParaRPr lang="LID4096" b="1" dirty="0"/>
+          </a:p>
+        </p:txBody>
+      </p:sp>
+    </p:spTree>
+    <p:extLst>
+      <p:ext uri="{BB962C8B-B14F-4D97-AF65-F5344CB8AC3E}">
+        <p14:creationId xmlns:p14="http://schemas.microsoft.com/office/powerpoint/2010/main" val="562612888"/>
+      </p:ext>
+    </p:extLst>
+  </p:cSld>
+  <p:clrMapOvr>
+    <a:masterClrMapping/>
+  </p:clrMapOvr>
+</p:sld>
+</file>
+
+<file path=ppt/slides/slide13.xml><?xml version="1.0" encoding="utf-8"?>
+<p:sld xmlns:a="http://schemas.openxmlformats.org/drawingml/2006/main" xmlns:r="http://schemas.openxmlformats.org/officeDocument/2006/relationships" xmlns:p="http://schemas.openxmlformats.org/presentationml/2006/main">
+  <p:cSld>
+    <p:spTree>
+      <p:nvGrpSpPr>
+        <p:cNvPr id="1" name=""/>
+        <p:cNvGrpSpPr/>
+        <p:nvPr/>
+      </p:nvGrpSpPr>
+      <p:grpSpPr>
+        <a:xfrm>
+          <a:off x="0" y="0"/>
+          <a:ext cx="0" cy="0"/>
+          <a:chOff x="0" y="0"/>
+          <a:chExt cx="0" cy="0"/>
+        </a:xfrm>
+      </p:grpSpPr>
+      <p:sp>
+        <p:nvSpPr>
+          <p:cNvPr id="2" name="TextBox 1">
+            <a:extLst>
+              <a:ext uri="{FF2B5EF4-FFF2-40B4-BE49-F238E27FC236}">
+                <a16:creationId xmlns:a16="http://schemas.microsoft.com/office/drawing/2014/main" id="{109972E1-C98D-4CED-76C8-534D209ACC69}"/>
+              </a:ext>
+            </a:extLst>
+          </p:cNvPr>
+          <p:cNvSpPr txBox="1"/>
+          <p:nvPr/>
+        </p:nvSpPr>
+        <p:spPr>
+          <a:xfrm>
+            <a:off x="433387" y="307298"/>
+            <a:ext cx="5008043" cy="369332"/>
+          </a:xfrm>
+          <a:prstGeom prst="rect">
+            <a:avLst/>
+          </a:prstGeom>
+          <a:noFill/>
+        </p:spPr>
+        <p:txBody>
+          <a:bodyPr wrap="square" rtlCol="0">
+            <a:spAutoFit/>
+          </a:bodyPr>
+          <a:lstStyle/>
+          <a:p>
+            <a:r>
+              <a:rPr lang="en-US" dirty="0"/>
+              <a:t>Best Results for Wakayama</a:t>
+            </a:r>
+            <a:endParaRPr lang="LID4096" dirty="0"/>
+          </a:p>
+        </p:txBody>
+      </p:sp>
+      <p:pic>
+        <p:nvPicPr>
+          <p:cNvPr id="7" name="Picture 6">
+            <a:extLst>
+              <a:ext uri="{FF2B5EF4-FFF2-40B4-BE49-F238E27FC236}">
+                <a16:creationId xmlns:a16="http://schemas.microsoft.com/office/drawing/2014/main" id="{66F9BD63-B55A-BB57-1DB9-ECCFF715D04E}"/>
+              </a:ext>
+            </a:extLst>
+          </p:cNvPr>
+          <p:cNvPicPr>
+            <a:picLocks noChangeAspect="1"/>
+          </p:cNvPicPr>
+          <p:nvPr/>
+        </p:nvPicPr>
+        <p:blipFill>
+          <a:blip r:embed="rId3"/>
+          <a:stretch>
+            <a:fillRect/>
+          </a:stretch>
+        </p:blipFill>
+        <p:spPr>
+          <a:xfrm>
+            <a:off x="433387" y="623887"/>
+            <a:ext cx="11325225" cy="5610225"/>
+          </a:xfrm>
+          <a:prstGeom prst="rect">
+            <a:avLst/>
+          </a:prstGeom>
+        </p:spPr>
+      </p:pic>
+    </p:spTree>
+    <p:extLst>
+      <p:ext uri="{BB962C8B-B14F-4D97-AF65-F5344CB8AC3E}">
+        <p14:creationId xmlns:p14="http://schemas.microsoft.com/office/powerpoint/2010/main" val="1172427893"/>
+      </p:ext>
+    </p:extLst>
+  </p:cSld>
+  <p:clrMapOvr>
+    <a:masterClrMapping/>
+  </p:clrMapOvr>
+</p:sld>
+</file>
+
+<file path=ppt/slides/slide14.xml><?xml version="1.0" encoding="utf-8"?>
+<p:sld xmlns:a="http://schemas.openxmlformats.org/drawingml/2006/main" xmlns:r="http://schemas.openxmlformats.org/officeDocument/2006/relationships" xmlns:p="http://schemas.openxmlformats.org/presentationml/2006/main">
+  <p:cSld>
+    <p:spTree>
+      <p:nvGrpSpPr>
+        <p:cNvPr id="1" name=""/>
+        <p:cNvGrpSpPr/>
+        <p:nvPr/>
+      </p:nvGrpSpPr>
+      <p:grpSpPr>
+        <a:xfrm>
+          <a:off x="0" y="0"/>
+          <a:ext cx="0" cy="0"/>
+          <a:chOff x="0" y="0"/>
+          <a:chExt cx="0" cy="0"/>
+        </a:xfrm>
+      </p:grpSpPr>
+      <p:pic>
+        <p:nvPicPr>
+          <p:cNvPr id="3" name="Picture 2">
+            <a:extLst>
+              <a:ext uri="{FF2B5EF4-FFF2-40B4-BE49-F238E27FC236}">
+                <a16:creationId xmlns:a16="http://schemas.microsoft.com/office/drawing/2014/main" id="{0EEE2FD6-2DFC-A969-5F04-36B551760B0C}"/>
+              </a:ext>
+            </a:extLst>
+          </p:cNvPr>
+          <p:cNvPicPr>
+            <a:picLocks noChangeAspect="1"/>
+          </p:cNvPicPr>
+          <p:nvPr/>
+        </p:nvPicPr>
+        <p:blipFill>
+          <a:blip r:embed="rId2"/>
+          <a:stretch>
+            <a:fillRect/>
+          </a:stretch>
+        </p:blipFill>
+        <p:spPr>
+          <a:xfrm>
+            <a:off x="232256" y="1285211"/>
+            <a:ext cx="5537680" cy="4173324"/>
+          </a:xfrm>
+          <a:prstGeom prst="rect">
+            <a:avLst/>
+          </a:prstGeom>
+        </p:spPr>
+      </p:pic>
+      <p:pic>
+        <p:nvPicPr>
+          <p:cNvPr id="5" name="Picture 4">
+            <a:extLst>
+              <a:ext uri="{FF2B5EF4-FFF2-40B4-BE49-F238E27FC236}">
+                <a16:creationId xmlns:a16="http://schemas.microsoft.com/office/drawing/2014/main" id="{3800DFF4-402B-AFFB-A1D9-A9B6B2E2DA13}"/>
+              </a:ext>
+            </a:extLst>
+          </p:cNvPr>
+          <p:cNvPicPr>
+            <a:picLocks noChangeAspect="1"/>
+          </p:cNvPicPr>
+          <p:nvPr/>
+        </p:nvPicPr>
+        <p:blipFill>
+          <a:blip r:embed="rId3"/>
+          <a:stretch>
+            <a:fillRect/>
+          </a:stretch>
+        </p:blipFill>
+        <p:spPr>
+          <a:xfrm>
+            <a:off x="6096000" y="1285211"/>
+            <a:ext cx="5537680" cy="4173324"/>
+          </a:xfrm>
+          <a:prstGeom prst="rect">
+            <a:avLst/>
+          </a:prstGeom>
+        </p:spPr>
+      </p:pic>
+      <p:sp>
+        <p:nvSpPr>
+          <p:cNvPr id="6" name="TextBox 5">
+            <a:extLst>
+              <a:ext uri="{FF2B5EF4-FFF2-40B4-BE49-F238E27FC236}">
+                <a16:creationId xmlns:a16="http://schemas.microsoft.com/office/drawing/2014/main" id="{D3689145-5B20-CAD8-D5CC-4858ABCAB374}"/>
+              </a:ext>
+            </a:extLst>
+          </p:cNvPr>
+          <p:cNvSpPr txBox="1"/>
+          <p:nvPr/>
+        </p:nvSpPr>
+        <p:spPr>
+          <a:xfrm>
+            <a:off x="779721" y="382772"/>
+            <a:ext cx="3969488" cy="523220"/>
+          </a:xfrm>
+          <a:prstGeom prst="rect">
+            <a:avLst/>
+          </a:prstGeom>
+          <a:noFill/>
+        </p:spPr>
+        <p:txBody>
+          <a:bodyPr wrap="square" rtlCol="0">
+            <a:spAutoFit/>
+          </a:bodyPr>
+          <a:lstStyle/>
+          <a:p>
+            <a:r>
+              <a:rPr lang="en-US" sz="2800" b="1" dirty="0"/>
+              <a:t>Residuals analysis</a:t>
+            </a:r>
+            <a:endParaRPr lang="LID4096" sz="2800" b="1" dirty="0"/>
+          </a:p>
+        </p:txBody>
+      </p:sp>
+    </p:spTree>
+    <p:extLst>
+      <p:ext uri="{BB962C8B-B14F-4D97-AF65-F5344CB8AC3E}">
+        <p14:creationId xmlns:p14="http://schemas.microsoft.com/office/powerpoint/2010/main" val="3085309385"/>
+      </p:ext>
+    </p:extLst>
+  </p:cSld>
+  <p:clrMapOvr>
+    <a:masterClrMapping/>
+  </p:clrMapOvr>
+</p:sld>
+</file>
+
+<file path=ppt/slides/slide15.xml><?xml version="1.0" encoding="utf-8"?>
+<p:sld xmlns:a="http://schemas.openxmlformats.org/drawingml/2006/main" xmlns:r="http://schemas.openxmlformats.org/officeDocument/2006/relationships" xmlns:p="http://schemas.openxmlformats.org/presentationml/2006/main">
+  <p:cSld>
+    <p:spTree>
+      <p:nvGrpSpPr>
+        <p:cNvPr id="1" name=""/>
+        <p:cNvGrpSpPr/>
+        <p:nvPr/>
+      </p:nvGrpSpPr>
+      <p:grpSpPr>
+        <a:xfrm>
+          <a:off x="0" y="0"/>
+          <a:ext cx="0" cy="0"/>
+          <a:chOff x="0" y="0"/>
+          <a:chExt cx="0" cy="0"/>
+        </a:xfrm>
+      </p:grpSpPr>
+      <p:pic>
+        <p:nvPicPr>
+          <p:cNvPr id="3" name="Picture 2">
+            <a:extLst>
+              <a:ext uri="{FF2B5EF4-FFF2-40B4-BE49-F238E27FC236}">
+                <a16:creationId xmlns:a16="http://schemas.microsoft.com/office/drawing/2014/main" id="{8915584A-2C70-D074-C19F-DA1722793EBD}"/>
+              </a:ext>
+            </a:extLst>
+          </p:cNvPr>
+          <p:cNvPicPr>
+            <a:picLocks noChangeAspect="1"/>
+          </p:cNvPicPr>
+          <p:nvPr/>
+        </p:nvPicPr>
+        <p:blipFill>
+          <a:blip r:embed="rId2"/>
+          <a:stretch>
+            <a:fillRect/>
+          </a:stretch>
+        </p:blipFill>
+        <p:spPr>
+          <a:xfrm>
+            <a:off x="3589867" y="279519"/>
+            <a:ext cx="3734323" cy="3329243"/>
+          </a:xfrm>
+          <a:prstGeom prst="rect">
+            <a:avLst/>
+          </a:prstGeom>
+        </p:spPr>
+      </p:pic>
+      <p:pic>
+        <p:nvPicPr>
+          <p:cNvPr id="5" name="Picture 4">
+            <a:extLst>
+              <a:ext uri="{FF2B5EF4-FFF2-40B4-BE49-F238E27FC236}">
+                <a16:creationId xmlns:a16="http://schemas.microsoft.com/office/drawing/2014/main" id="{8957811C-F5C8-2620-A4F6-EF048EA45786}"/>
+              </a:ext>
+            </a:extLst>
+          </p:cNvPr>
+          <p:cNvPicPr>
+            <a:picLocks noChangeAspect="1"/>
+          </p:cNvPicPr>
+          <p:nvPr/>
+        </p:nvPicPr>
+        <p:blipFill>
+          <a:blip r:embed="rId3"/>
+          <a:stretch>
+            <a:fillRect/>
+          </a:stretch>
+        </p:blipFill>
+        <p:spPr>
+          <a:xfrm>
+            <a:off x="7376475" y="356657"/>
+            <a:ext cx="3715808" cy="3252105"/>
+          </a:xfrm>
+          <a:prstGeom prst="rect">
+            <a:avLst/>
+          </a:prstGeom>
+        </p:spPr>
+      </p:pic>
+      <p:pic>
+        <p:nvPicPr>
+          <p:cNvPr id="7" name="Picture 6">
+            <a:extLst>
+              <a:ext uri="{FF2B5EF4-FFF2-40B4-BE49-F238E27FC236}">
+                <a16:creationId xmlns:a16="http://schemas.microsoft.com/office/drawing/2014/main" id="{B4A66DC3-40BE-546C-5883-46F9951555C8}"/>
+              </a:ext>
+            </a:extLst>
+          </p:cNvPr>
+          <p:cNvPicPr>
+            <a:picLocks noChangeAspect="1"/>
+          </p:cNvPicPr>
+          <p:nvPr/>
+        </p:nvPicPr>
+        <p:blipFill>
+          <a:blip r:embed="rId4"/>
+          <a:stretch>
+            <a:fillRect/>
+          </a:stretch>
+        </p:blipFill>
+        <p:spPr>
+          <a:xfrm>
+            <a:off x="3589867" y="3740424"/>
+            <a:ext cx="3525973" cy="3085960"/>
+          </a:xfrm>
+          <a:prstGeom prst="rect">
+            <a:avLst/>
+          </a:prstGeom>
+        </p:spPr>
+      </p:pic>
+      <p:pic>
+        <p:nvPicPr>
+          <p:cNvPr id="9" name="Picture 8">
+            <a:extLst>
+              <a:ext uri="{FF2B5EF4-FFF2-40B4-BE49-F238E27FC236}">
+                <a16:creationId xmlns:a16="http://schemas.microsoft.com/office/drawing/2014/main" id="{01B92B6E-0F2F-7F47-7F78-B7D67654E581}"/>
+              </a:ext>
+            </a:extLst>
+          </p:cNvPr>
+          <p:cNvPicPr>
+            <a:picLocks noChangeAspect="1"/>
+          </p:cNvPicPr>
+          <p:nvPr/>
+        </p:nvPicPr>
+        <p:blipFill>
+          <a:blip r:embed="rId5"/>
+          <a:stretch>
+            <a:fillRect/>
+          </a:stretch>
+        </p:blipFill>
+        <p:spPr>
+          <a:xfrm>
+            <a:off x="7376475" y="3740424"/>
+            <a:ext cx="3373435" cy="3085960"/>
+          </a:xfrm>
+          <a:prstGeom prst="rect">
+            <a:avLst/>
+          </a:prstGeom>
+        </p:spPr>
+      </p:pic>
+      <p:sp>
+        <p:nvSpPr>
+          <p:cNvPr id="10" name="TextBox 9">
+            <a:extLst>
+              <a:ext uri="{FF2B5EF4-FFF2-40B4-BE49-F238E27FC236}">
+                <a16:creationId xmlns:a16="http://schemas.microsoft.com/office/drawing/2014/main" id="{D5CDC19F-8508-6170-60B5-E54576F7C4F0}"/>
+              </a:ext>
+            </a:extLst>
+          </p:cNvPr>
+          <p:cNvSpPr txBox="1"/>
+          <p:nvPr/>
+        </p:nvSpPr>
+        <p:spPr>
+          <a:xfrm>
+            <a:off x="423333" y="356657"/>
+            <a:ext cx="3031067" cy="461665"/>
+          </a:xfrm>
+          <a:prstGeom prst="rect">
+            <a:avLst/>
+          </a:prstGeom>
+          <a:noFill/>
+        </p:spPr>
+        <p:txBody>
+          <a:bodyPr wrap="square" rtlCol="0">
+            <a:spAutoFit/>
+          </a:bodyPr>
+          <a:lstStyle/>
+          <a:p>
+            <a:r>
+              <a:rPr lang="en-US" sz="2400" b="1" dirty="0"/>
+              <a:t>UMAP</a:t>
+            </a:r>
+            <a:endParaRPr lang="LID4096" sz="2400" b="1" dirty="0"/>
+          </a:p>
+        </p:txBody>
+      </p:sp>
+    </p:spTree>
+    <p:extLst>
+      <p:ext uri="{BB962C8B-B14F-4D97-AF65-F5344CB8AC3E}">
+        <p14:creationId xmlns:p14="http://schemas.microsoft.com/office/powerpoint/2010/main" val="3040413587"/>
+      </p:ext>
+    </p:extLst>
+  </p:cSld>
+  <p:clrMapOvr>
+    <a:masterClrMapping/>
+  </p:clrMapOvr>
+</p:sld>
+</file>
+
+<file path=ppt/slides/slide16.xml><?xml version="1.0" encoding="utf-8"?>
+<p:sld xmlns:a="http://schemas.openxmlformats.org/drawingml/2006/main" xmlns:r="http://schemas.openxmlformats.org/officeDocument/2006/relationships" xmlns:p="http://schemas.openxmlformats.org/presentationml/2006/main">
+  <p:cSld>
+    <p:spTree>
+      <p:nvGrpSpPr>
+        <p:cNvPr id="1" name=""/>
+        <p:cNvGrpSpPr/>
+        <p:nvPr/>
+      </p:nvGrpSpPr>
+      <p:grpSpPr>
+        <a:xfrm>
+          <a:off x="0" y="0"/>
+          <a:ext cx="0" cy="0"/>
+          <a:chOff x="0" y="0"/>
+          <a:chExt cx="0" cy="0"/>
+        </a:xfrm>
+      </p:grpSpPr>
+      <p:sp>
+        <p:nvSpPr>
+          <p:cNvPr id="2" name="TextBox 1">
+            <a:extLst>
+              <a:ext uri="{FF2B5EF4-FFF2-40B4-BE49-F238E27FC236}">
+                <a16:creationId xmlns:a16="http://schemas.microsoft.com/office/drawing/2014/main" id="{8C56F656-5E9A-9F03-A91C-9FA1DE1E8958}"/>
+              </a:ext>
+            </a:extLst>
+          </p:cNvPr>
+          <p:cNvSpPr txBox="1"/>
+          <p:nvPr/>
+        </p:nvSpPr>
+        <p:spPr>
+          <a:xfrm>
+            <a:off x="487600" y="0"/>
+            <a:ext cx="10554586" cy="400110"/>
+          </a:xfrm>
+          <a:prstGeom prst="rect">
+            <a:avLst/>
+          </a:prstGeom>
+          <a:noFill/>
+        </p:spPr>
+        <p:txBody>
+          <a:bodyPr wrap="square" rtlCol="0">
+            <a:spAutoFit/>
+          </a:bodyPr>
+          <a:lstStyle/>
+          <a:p>
+            <a:r>
+              <a:rPr lang="en-US" sz="2000" b="1" dirty="0"/>
+              <a:t>Main trials to improve the results</a:t>
+            </a:r>
+            <a:endParaRPr lang="LID4096" sz="2000" b="1" dirty="0"/>
+          </a:p>
+        </p:txBody>
+      </p:sp>
+      <p:graphicFrame>
+        <p:nvGraphicFramePr>
+          <p:cNvPr id="3" name="Table 2">
+            <a:extLst>
+              <a:ext uri="{FF2B5EF4-FFF2-40B4-BE49-F238E27FC236}">
+                <a16:creationId xmlns:a16="http://schemas.microsoft.com/office/drawing/2014/main" id="{30E99A17-3295-BCC8-0EFC-E24AE1AE5141}"/>
+              </a:ext>
+            </a:extLst>
+          </p:cNvPr>
+          <p:cNvGraphicFramePr>
+            <a:graphicFrameLocks noGrp="1"/>
+          </p:cNvGraphicFramePr>
+          <p:nvPr>
+            <p:extLst>
+              <p:ext uri="{D42A27DB-BD31-4B8C-83A1-F6EECF244321}">
+                <p14:modId xmlns:p14="http://schemas.microsoft.com/office/powerpoint/2010/main" val="517946576"/>
+              </p:ext>
+            </p:extLst>
+          </p:nvPr>
+        </p:nvGraphicFramePr>
+        <p:xfrm>
+          <a:off x="568840" y="462465"/>
+          <a:ext cx="10659380" cy="6243975"/>
+        </p:xfrm>
+        <a:graphic>
+          <a:graphicData uri="http://schemas.openxmlformats.org/drawingml/2006/table">
+            <a:tbl>
+              <a:tblPr firstRow="1" bandRow="1">
+                <a:tableStyleId>{9D7B26C5-4107-4FEC-AEDC-1716B250A1EF}</a:tableStyleId>
+              </a:tblPr>
+              <a:tblGrid>
+                <a:gridCol w="6149896">
+                  <a:extLst>
+                    <a:ext uri="{9D8B030D-6E8A-4147-A177-3AD203B41FA5}">
+                      <a16:colId xmlns:a16="http://schemas.microsoft.com/office/drawing/2014/main" val="3879606949"/>
+                    </a:ext>
+                  </a:extLst>
+                </a:gridCol>
+                <a:gridCol w="2442197">
+                  <a:extLst>
+                    <a:ext uri="{9D8B030D-6E8A-4147-A177-3AD203B41FA5}">
+                      <a16:colId xmlns:a16="http://schemas.microsoft.com/office/drawing/2014/main" val="2217900553"/>
+                    </a:ext>
+                  </a:extLst>
+                </a:gridCol>
+                <a:gridCol w="2067287">
+                  <a:extLst>
+                    <a:ext uri="{9D8B030D-6E8A-4147-A177-3AD203B41FA5}">
+                      <a16:colId xmlns:a16="http://schemas.microsoft.com/office/drawing/2014/main" val="2236560047"/>
+                    </a:ext>
+                  </a:extLst>
+                </a:gridCol>
+              </a:tblGrid>
+              <a:tr h="0">
+                <a:tc>
+                  <a:txBody>
+                    <a:bodyPr/>
+                    <a:lstStyle/>
+                    <a:p>
+                      <a:r>
+                        <a:rPr lang="en-US" sz="1400" dirty="0"/>
+                        <a:t>Hypothesis</a:t>
+                      </a:r>
+                      <a:endParaRPr lang="LID4096" sz="1400" dirty="0"/>
+                    </a:p>
+                  </a:txBody>
+                  <a:tcPr/>
+                </a:tc>
+                <a:tc>
+                  <a:txBody>
+                    <a:bodyPr/>
+                    <a:lstStyle/>
+                    <a:p>
+                      <a:r>
+                        <a:rPr lang="en-US" sz="1400" dirty="0"/>
+                        <a:t>Bast MAE (LMS)</a:t>
+                      </a:r>
+                      <a:endParaRPr lang="LID4096" sz="1400" dirty="0"/>
+                    </a:p>
+                  </a:txBody>
+                  <a:tcPr/>
+                </a:tc>
+                <a:tc>
+                  <a:txBody>
+                    <a:bodyPr/>
+                    <a:lstStyle/>
+                    <a:p>
+                      <a:r>
+                        <a:rPr lang="en-US" sz="1400" dirty="0"/>
+                        <a:t>R2</a:t>
+                      </a:r>
+                      <a:endParaRPr lang="LID4096" sz="1400" dirty="0"/>
+                    </a:p>
+                  </a:txBody>
+                  <a:tcPr/>
+                </a:tc>
+                <a:extLst>
+                  <a:ext uri="{0D108BD9-81ED-4DB2-BD59-A6C34878D82A}">
+                    <a16:rowId xmlns:a16="http://schemas.microsoft.com/office/drawing/2014/main" val="4173138366"/>
+                  </a:ext>
+                </a:extLst>
+              </a:tr>
+              <a:tr h="395945">
+                <a:tc>
+                  <a:txBody>
+                    <a:bodyPr/>
+                    <a:lstStyle/>
+                    <a:p>
+                      <a:pPr marL="0" algn="l" defTabSz="914400" rtl="0" eaLnBrk="1" latinLnBrk="0" hangingPunct="1"/>
+                      <a:r>
+                        <a:rPr lang="en-US" sz="1400" kern="1200" dirty="0">
+                          <a:solidFill>
+                            <a:schemeClr val="tx1"/>
+                          </a:solidFill>
+                          <a:latin typeface="+mn-lt"/>
+                          <a:ea typeface="+mn-ea"/>
+                          <a:cs typeface="+mn-cs"/>
+                        </a:rPr>
+                        <a:t>Dummy (strategy = ‘mean’)</a:t>
+                      </a:r>
+                      <a:endParaRPr lang="LID4096" sz="1400" kern="1200" dirty="0">
+                        <a:solidFill>
+                          <a:schemeClr val="tx1"/>
+                        </a:solidFill>
+                        <a:latin typeface="+mn-lt"/>
+                        <a:ea typeface="+mn-ea"/>
+                        <a:cs typeface="+mn-cs"/>
+                      </a:endParaRPr>
+                    </a:p>
+                  </a:txBody>
+                  <a:tcPr/>
+                </a:tc>
+                <a:tc>
+                  <a:txBody>
+                    <a:bodyPr/>
+                    <a:lstStyle/>
+                    <a:p>
+                      <a:pPr marL="0" algn="l" defTabSz="914400" rtl="0" eaLnBrk="1" latinLnBrk="0" hangingPunct="1"/>
+                      <a:r>
+                        <a:rPr lang="en-US" sz="1400" kern="1200" dirty="0">
+                          <a:solidFill>
+                            <a:schemeClr val="tx1"/>
+                          </a:solidFill>
+                          <a:latin typeface="+mn-lt"/>
+                          <a:ea typeface="+mn-ea"/>
+                          <a:cs typeface="+mn-cs"/>
+                        </a:rPr>
+                        <a:t>12.137</a:t>
+                      </a:r>
+                      <a:endParaRPr lang="LID4096" sz="1400" kern="1200" dirty="0">
+                        <a:solidFill>
+                          <a:schemeClr val="tx1"/>
+                        </a:solidFill>
+                        <a:latin typeface="+mn-lt"/>
+                        <a:ea typeface="+mn-ea"/>
+                        <a:cs typeface="+mn-cs"/>
+                      </a:endParaRPr>
+                    </a:p>
+                  </a:txBody>
+                  <a:tcPr/>
+                </a:tc>
+                <a:tc>
+                  <a:txBody>
+                    <a:bodyPr/>
+                    <a:lstStyle/>
+                    <a:p>
+                      <a:pPr marL="0" algn="l" defTabSz="914400" rtl="0" eaLnBrk="1" latinLnBrk="0" hangingPunct="1"/>
+                      <a:r>
+                        <a:rPr lang="en-US" sz="1400" kern="1200" dirty="0">
+                          <a:solidFill>
+                            <a:schemeClr val="tx1"/>
+                          </a:solidFill>
+                          <a:latin typeface="+mn-lt"/>
+                          <a:ea typeface="+mn-ea"/>
+                          <a:cs typeface="+mn-cs"/>
+                        </a:rPr>
+                        <a:t>-0.008</a:t>
+                      </a:r>
+                      <a:endParaRPr lang="LID4096" sz="1400" kern="1200" dirty="0">
+                        <a:solidFill>
+                          <a:schemeClr val="tx1"/>
+                        </a:solidFill>
+                        <a:latin typeface="+mn-lt"/>
+                        <a:ea typeface="+mn-ea"/>
+                        <a:cs typeface="+mn-cs"/>
+                      </a:endParaRPr>
+                    </a:p>
+                  </a:txBody>
+                  <a:tcPr/>
+                </a:tc>
+                <a:extLst>
+                  <a:ext uri="{0D108BD9-81ED-4DB2-BD59-A6C34878D82A}">
+                    <a16:rowId xmlns:a16="http://schemas.microsoft.com/office/drawing/2014/main" val="610361843"/>
+                  </a:ext>
+                </a:extLst>
+              </a:tr>
+              <a:tr h="395945">
+                <a:tc>
+                  <a:txBody>
+                    <a:bodyPr/>
+                    <a:lstStyle/>
+                    <a:p>
+                      <a:pPr marL="0" algn="l" defTabSz="914400" rtl="0" eaLnBrk="1" latinLnBrk="0" hangingPunct="1"/>
+                      <a:r>
+                        <a:rPr lang="en-US" sz="1400" kern="1200" dirty="0">
+                          <a:solidFill>
+                            <a:schemeClr val="tx1"/>
+                          </a:solidFill>
+                          <a:latin typeface="+mn-lt"/>
+                          <a:ea typeface="+mn-ea"/>
+                          <a:cs typeface="+mn-cs"/>
+                        </a:rPr>
+                        <a:t>Dragon top 71 features - </a:t>
+                      </a:r>
+                      <a:r>
+                        <a:rPr lang="en-US" sz="1400" kern="1200" dirty="0" err="1">
+                          <a:solidFill>
+                            <a:schemeClr val="tx1"/>
+                          </a:solidFill>
+                          <a:latin typeface="+mn-lt"/>
+                          <a:ea typeface="+mn-ea"/>
+                          <a:cs typeface="+mn-cs"/>
+                        </a:rPr>
+                        <a:t>XGBoost</a:t>
+                      </a:r>
+                      <a:endParaRPr lang="LID4096" sz="1400" kern="1200" dirty="0">
+                        <a:solidFill>
+                          <a:schemeClr val="tx1"/>
+                        </a:solidFill>
+                        <a:latin typeface="+mn-lt"/>
+                        <a:ea typeface="+mn-ea"/>
+                        <a:cs typeface="+mn-cs"/>
+                      </a:endParaRPr>
+                    </a:p>
+                  </a:txBody>
+                  <a:tcPr/>
+                </a:tc>
+                <a:tc>
+                  <a:txBody>
+                    <a:bodyPr/>
+                    <a:lstStyle/>
+                    <a:p>
+                      <a:pPr marL="0" algn="l" defTabSz="914400" rtl="0" eaLnBrk="1" latinLnBrk="0" hangingPunct="1"/>
+                      <a:r>
+                        <a:rPr lang="en-US" sz="1400" kern="1200" dirty="0">
+                          <a:solidFill>
+                            <a:schemeClr val="tx1"/>
+                          </a:solidFill>
+                          <a:latin typeface="+mn-lt"/>
+                          <a:ea typeface="+mn-ea"/>
+                          <a:cs typeface="+mn-cs"/>
+                        </a:rPr>
+                        <a:t>7.51 </a:t>
+                      </a:r>
+                      <a:endParaRPr lang="LID4096" sz="1400" kern="1200" dirty="0">
+                        <a:solidFill>
+                          <a:schemeClr val="tx1"/>
+                        </a:solidFill>
+                        <a:latin typeface="+mn-lt"/>
+                        <a:ea typeface="+mn-ea"/>
+                        <a:cs typeface="+mn-cs"/>
+                      </a:endParaRPr>
+                    </a:p>
+                  </a:txBody>
+                  <a:tcPr/>
+                </a:tc>
+                <a:tc>
+                  <a:txBody>
+                    <a:bodyPr/>
+                    <a:lstStyle/>
+                    <a:p>
+                      <a:pPr marL="0" algn="l" defTabSz="914400" rtl="0" eaLnBrk="1" latinLnBrk="0" hangingPunct="1"/>
+                      <a:r>
+                        <a:rPr lang="en-US" sz="1400" kern="1200" dirty="0">
+                          <a:solidFill>
+                            <a:schemeClr val="tx1"/>
+                          </a:solidFill>
+                          <a:latin typeface="+mn-lt"/>
+                          <a:ea typeface="+mn-ea"/>
+                          <a:cs typeface="+mn-cs"/>
+                        </a:rPr>
+                        <a:t>0.62</a:t>
+                      </a:r>
+                      <a:endParaRPr lang="LID4096" sz="1400" kern="1200" dirty="0">
+                        <a:solidFill>
+                          <a:schemeClr val="tx1"/>
+                        </a:solidFill>
+                        <a:latin typeface="+mn-lt"/>
+                        <a:ea typeface="+mn-ea"/>
+                        <a:cs typeface="+mn-cs"/>
+                      </a:endParaRPr>
+                    </a:p>
+                  </a:txBody>
+                  <a:tcPr/>
+                </a:tc>
+                <a:extLst>
+                  <a:ext uri="{0D108BD9-81ED-4DB2-BD59-A6C34878D82A}">
+                    <a16:rowId xmlns:a16="http://schemas.microsoft.com/office/drawing/2014/main" val="4161021299"/>
+                  </a:ext>
+                </a:extLst>
+              </a:tr>
+              <a:tr h="395945">
+                <a:tc>
+                  <a:txBody>
+                    <a:bodyPr/>
+                    <a:lstStyle/>
+                    <a:p>
+                      <a:pPr marL="0" algn="l" defTabSz="914400" rtl="0" eaLnBrk="1" latinLnBrk="0" hangingPunct="1"/>
+                      <a:r>
+                        <a:rPr lang="en-US" sz="1400" kern="1200" dirty="0">
+                          <a:solidFill>
+                            <a:schemeClr val="tx1"/>
+                          </a:solidFill>
+                          <a:latin typeface="+mn-lt"/>
+                          <a:ea typeface="+mn-ea"/>
+                          <a:cs typeface="+mn-cs"/>
+                        </a:rPr>
+                        <a:t>Base + log(VP) - </a:t>
+                      </a:r>
+                      <a:r>
+                        <a:rPr lang="en-US" sz="1400" kern="1200" dirty="0" err="1">
+                          <a:solidFill>
+                            <a:schemeClr val="tx1"/>
+                          </a:solidFill>
+                          <a:latin typeface="+mn-lt"/>
+                          <a:ea typeface="+mn-ea"/>
+                          <a:cs typeface="+mn-cs"/>
+                        </a:rPr>
+                        <a:t>XGBoost</a:t>
+                      </a:r>
+                      <a:endParaRPr lang="LID4096" sz="1400" kern="1200" dirty="0">
+                        <a:solidFill>
+                          <a:schemeClr val="tx1"/>
+                        </a:solidFill>
+                        <a:latin typeface="+mn-lt"/>
+                        <a:ea typeface="+mn-ea"/>
+                        <a:cs typeface="+mn-cs"/>
+                      </a:endParaRPr>
+                    </a:p>
+                  </a:txBody>
+                  <a:tcPr/>
+                </a:tc>
+                <a:tc>
+                  <a:txBody>
+                    <a:bodyPr/>
+                    <a:lstStyle/>
+                    <a:p>
+                      <a:pPr marL="0" algn="l" defTabSz="914400" rtl="0" eaLnBrk="1" latinLnBrk="0" hangingPunct="1"/>
+                      <a:r>
+                        <a:rPr lang="en-US" sz="1400" kern="1200" dirty="0">
+                          <a:solidFill>
+                            <a:schemeClr val="tx1"/>
+                          </a:solidFill>
+                          <a:latin typeface="+mn-lt"/>
+                          <a:ea typeface="+mn-ea"/>
+                          <a:cs typeface="+mn-cs"/>
+                        </a:rPr>
+                        <a:t>7.69</a:t>
+                      </a:r>
+                      <a:endParaRPr lang="LID4096" sz="1400" kern="1200" dirty="0">
+                        <a:solidFill>
+                          <a:schemeClr val="tx1"/>
+                        </a:solidFill>
+                        <a:latin typeface="+mn-lt"/>
+                        <a:ea typeface="+mn-ea"/>
+                        <a:cs typeface="+mn-cs"/>
+                      </a:endParaRPr>
+                    </a:p>
+                  </a:txBody>
+                  <a:tcPr/>
+                </a:tc>
+                <a:tc>
+                  <a:txBody>
+                    <a:bodyPr/>
+                    <a:lstStyle/>
+                    <a:p>
+                      <a:pPr marL="0" algn="l" defTabSz="914400" rtl="0" eaLnBrk="1" latinLnBrk="0" hangingPunct="1"/>
+                      <a:r>
+                        <a:rPr lang="en-US" sz="1400" kern="1200" dirty="0">
+                          <a:solidFill>
+                            <a:schemeClr val="tx1"/>
+                          </a:solidFill>
+                          <a:latin typeface="+mn-lt"/>
+                          <a:ea typeface="+mn-ea"/>
+                          <a:cs typeface="+mn-cs"/>
+                        </a:rPr>
+                        <a:t>0.61</a:t>
+                      </a:r>
+                      <a:endParaRPr lang="LID4096" sz="1400" kern="1200" dirty="0">
+                        <a:solidFill>
+                          <a:schemeClr val="tx1"/>
+                        </a:solidFill>
+                        <a:latin typeface="+mn-lt"/>
+                        <a:ea typeface="+mn-ea"/>
+                        <a:cs typeface="+mn-cs"/>
+                      </a:endParaRPr>
+                    </a:p>
+                  </a:txBody>
+                  <a:tcPr/>
+                </a:tc>
+                <a:extLst>
+                  <a:ext uri="{0D108BD9-81ED-4DB2-BD59-A6C34878D82A}">
+                    <a16:rowId xmlns:a16="http://schemas.microsoft.com/office/drawing/2014/main" val="735159190"/>
+                  </a:ext>
+                </a:extLst>
+              </a:tr>
+              <a:tr h="395945">
+                <a:tc>
+                  <a:txBody>
+                    <a:bodyPr/>
+                    <a:lstStyle/>
+                    <a:p>
+                      <a:pPr marL="0" algn="l" defTabSz="914400" rtl="0" eaLnBrk="1" latinLnBrk="0" hangingPunct="1"/>
+                      <a:r>
+                        <a:rPr lang="en-US" sz="1400" kern="1200" dirty="0">
+                          <a:solidFill>
+                            <a:schemeClr val="tx1"/>
+                          </a:solidFill>
+                          <a:latin typeface="+mn-lt"/>
+                          <a:ea typeface="+mn-ea"/>
+                          <a:cs typeface="+mn-cs"/>
+                        </a:rPr>
+                        <a:t>Base + log(VP) + BP - </a:t>
+                      </a:r>
+                      <a:r>
+                        <a:rPr lang="en-US" sz="1400" kern="1200" dirty="0" err="1">
+                          <a:solidFill>
+                            <a:schemeClr val="tx1"/>
+                          </a:solidFill>
+                          <a:latin typeface="+mn-lt"/>
+                          <a:ea typeface="+mn-ea"/>
+                          <a:cs typeface="+mn-cs"/>
+                        </a:rPr>
+                        <a:t>XGBoost</a:t>
+                      </a:r>
+                      <a:endParaRPr lang="LID4096" sz="1400" kern="1200" dirty="0">
+                        <a:solidFill>
+                          <a:schemeClr val="tx1"/>
+                        </a:solidFill>
+                        <a:latin typeface="+mn-lt"/>
+                        <a:ea typeface="+mn-ea"/>
+                        <a:cs typeface="+mn-cs"/>
+                      </a:endParaRPr>
+                    </a:p>
+                  </a:txBody>
+                  <a:tcPr/>
+                </a:tc>
+                <a:tc>
+                  <a:txBody>
+                    <a:bodyPr/>
+                    <a:lstStyle/>
+                    <a:p>
+                      <a:pPr marL="0" algn="l" defTabSz="914400" rtl="0" eaLnBrk="1" latinLnBrk="0" hangingPunct="1"/>
+                      <a:r>
+                        <a:rPr lang="en-US" sz="1400" kern="1200" dirty="0">
+                          <a:solidFill>
+                            <a:schemeClr val="tx1"/>
+                          </a:solidFill>
+                          <a:latin typeface="+mn-lt"/>
+                          <a:ea typeface="+mn-ea"/>
+                          <a:cs typeface="+mn-cs"/>
+                        </a:rPr>
+                        <a:t>7.77</a:t>
+                      </a:r>
+                      <a:endParaRPr lang="LID4096" sz="1400" kern="1200" dirty="0">
+                        <a:solidFill>
+                          <a:schemeClr val="tx1"/>
+                        </a:solidFill>
+                        <a:latin typeface="+mn-lt"/>
+                        <a:ea typeface="+mn-ea"/>
+                        <a:cs typeface="+mn-cs"/>
+                      </a:endParaRPr>
+                    </a:p>
+                  </a:txBody>
+                  <a:tcPr/>
+                </a:tc>
+                <a:tc>
+                  <a:txBody>
+                    <a:bodyPr/>
+                    <a:lstStyle/>
+                    <a:p>
+                      <a:pPr marL="0" algn="l" defTabSz="914400" rtl="0" eaLnBrk="1" latinLnBrk="0" hangingPunct="1"/>
+                      <a:r>
+                        <a:rPr lang="en-US" sz="1400" kern="1200" dirty="0">
+                          <a:solidFill>
+                            <a:schemeClr val="tx1"/>
+                          </a:solidFill>
+                          <a:latin typeface="+mn-lt"/>
+                          <a:ea typeface="+mn-ea"/>
+                          <a:cs typeface="+mn-cs"/>
+                        </a:rPr>
+                        <a:t>0.6</a:t>
+                      </a:r>
+                      <a:endParaRPr lang="LID4096" sz="1400" kern="1200" dirty="0">
+                        <a:solidFill>
+                          <a:schemeClr val="tx1"/>
+                        </a:solidFill>
+                        <a:latin typeface="+mn-lt"/>
+                        <a:ea typeface="+mn-ea"/>
+                        <a:cs typeface="+mn-cs"/>
+                      </a:endParaRPr>
+                    </a:p>
+                  </a:txBody>
+                  <a:tcPr/>
+                </a:tc>
+                <a:extLst>
+                  <a:ext uri="{0D108BD9-81ED-4DB2-BD59-A6C34878D82A}">
+                    <a16:rowId xmlns:a16="http://schemas.microsoft.com/office/drawing/2014/main" val="14493301"/>
+                  </a:ext>
+                </a:extLst>
+              </a:tr>
+              <a:tr h="395945">
+                <a:tc>
+                  <a:txBody>
+                    <a:bodyPr/>
+                    <a:lstStyle/>
+                    <a:p>
+                      <a:pPr marL="0" algn="l" defTabSz="914400" rtl="0" eaLnBrk="1" latinLnBrk="0" hangingPunct="1"/>
+                      <a:r>
+                        <a:rPr lang="en-US" sz="1400" kern="1200" dirty="0">
+                          <a:solidFill>
+                            <a:schemeClr val="tx1"/>
+                          </a:solidFill>
+                          <a:latin typeface="+mn-lt"/>
+                          <a:ea typeface="+mn-ea"/>
+                          <a:cs typeface="+mn-cs"/>
+                        </a:rPr>
+                        <a:t>Only log(VP) - </a:t>
+                      </a:r>
+                      <a:r>
+                        <a:rPr lang="en-US" sz="1400" kern="1200" dirty="0" err="1">
+                          <a:solidFill>
+                            <a:schemeClr val="tx1"/>
+                          </a:solidFill>
+                          <a:latin typeface="+mn-lt"/>
+                          <a:ea typeface="+mn-ea"/>
+                          <a:cs typeface="+mn-cs"/>
+                        </a:rPr>
+                        <a:t>XGBoost</a:t>
+                      </a:r>
+                      <a:endParaRPr lang="LID4096" sz="1400" kern="1200" dirty="0">
+                        <a:solidFill>
+                          <a:schemeClr val="tx1"/>
+                        </a:solidFill>
+                        <a:latin typeface="+mn-lt"/>
+                        <a:ea typeface="+mn-ea"/>
+                        <a:cs typeface="+mn-cs"/>
+                      </a:endParaRPr>
+                    </a:p>
+                  </a:txBody>
+                  <a:tcPr/>
+                </a:tc>
+                <a:tc>
+                  <a:txBody>
+                    <a:bodyPr/>
+                    <a:lstStyle/>
+                    <a:p>
+                      <a:pPr marL="0" algn="l" defTabSz="914400" rtl="0" eaLnBrk="1" latinLnBrk="0" hangingPunct="1"/>
+                      <a:r>
+                        <a:rPr lang="en-US" sz="1400" kern="1200" dirty="0">
+                          <a:solidFill>
+                            <a:schemeClr val="tx1"/>
+                          </a:solidFill>
+                          <a:latin typeface="+mn-lt"/>
+                          <a:ea typeface="+mn-ea"/>
+                          <a:cs typeface="+mn-cs"/>
+                        </a:rPr>
+                        <a:t>9.97</a:t>
+                      </a:r>
+                      <a:endParaRPr lang="LID4096" sz="1400" kern="1200" dirty="0">
+                        <a:solidFill>
+                          <a:schemeClr val="tx1"/>
+                        </a:solidFill>
+                        <a:latin typeface="+mn-lt"/>
+                        <a:ea typeface="+mn-ea"/>
+                        <a:cs typeface="+mn-cs"/>
+                      </a:endParaRPr>
+                    </a:p>
+                  </a:txBody>
+                  <a:tcPr/>
+                </a:tc>
+                <a:tc>
+                  <a:txBody>
+                    <a:bodyPr/>
+                    <a:lstStyle/>
+                    <a:p>
+                      <a:pPr marL="0" algn="l" defTabSz="914400" rtl="0" eaLnBrk="1" latinLnBrk="0" hangingPunct="1"/>
+                      <a:r>
+                        <a:rPr lang="en-US" sz="1400" kern="1200" dirty="0">
+                          <a:solidFill>
+                            <a:schemeClr val="tx1"/>
+                          </a:solidFill>
+                          <a:latin typeface="+mn-lt"/>
+                          <a:ea typeface="+mn-ea"/>
+                          <a:cs typeface="+mn-cs"/>
+                        </a:rPr>
+                        <a:t>0.3</a:t>
+                      </a:r>
+                      <a:endParaRPr lang="LID4096" sz="1400" kern="1200" dirty="0">
+                        <a:solidFill>
+                          <a:schemeClr val="tx1"/>
+                        </a:solidFill>
+                        <a:latin typeface="+mn-lt"/>
+                        <a:ea typeface="+mn-ea"/>
+                        <a:cs typeface="+mn-cs"/>
+                      </a:endParaRPr>
+                    </a:p>
+                  </a:txBody>
+                  <a:tcPr/>
+                </a:tc>
+                <a:extLst>
+                  <a:ext uri="{0D108BD9-81ED-4DB2-BD59-A6C34878D82A}">
+                    <a16:rowId xmlns:a16="http://schemas.microsoft.com/office/drawing/2014/main" val="3966218464"/>
+                  </a:ext>
+                </a:extLst>
+              </a:tr>
+              <a:tr h="395945">
+                <a:tc>
+                  <a:txBody>
+                    <a:bodyPr/>
+                    <a:lstStyle/>
+                    <a:p>
+                      <a:pPr marL="0" algn="l" defTabSz="914400" rtl="0" eaLnBrk="1" latinLnBrk="0" hangingPunct="1"/>
+                      <a:r>
+                        <a:rPr lang="en-US" sz="1400" kern="1200" dirty="0">
+                          <a:solidFill>
+                            <a:schemeClr val="tx1"/>
+                          </a:solidFill>
+                          <a:latin typeface="+mn-lt"/>
+                          <a:ea typeface="+mn-ea"/>
+                          <a:cs typeface="+mn-cs"/>
+                        </a:rPr>
+                        <a:t>71 features - </a:t>
+                      </a:r>
+                      <a:r>
+                        <a:rPr lang="en-US" sz="1400" kern="1200" dirty="0" err="1">
+                          <a:solidFill>
+                            <a:schemeClr val="tx1"/>
+                          </a:solidFill>
+                          <a:latin typeface="+mn-lt"/>
+                          <a:ea typeface="+mn-ea"/>
+                          <a:cs typeface="+mn-cs"/>
+                        </a:rPr>
+                        <a:t>CatBoost</a:t>
+                      </a:r>
+                      <a:endParaRPr lang="LID4096" sz="1400" kern="1200" dirty="0">
+                        <a:solidFill>
+                          <a:schemeClr val="tx1"/>
+                        </a:solidFill>
+                        <a:latin typeface="+mn-lt"/>
+                        <a:ea typeface="+mn-ea"/>
+                        <a:cs typeface="+mn-cs"/>
+                      </a:endParaRPr>
+                    </a:p>
+                  </a:txBody>
+                  <a:tcPr/>
+                </a:tc>
+                <a:tc>
+                  <a:txBody>
+                    <a:bodyPr/>
+                    <a:lstStyle/>
+                    <a:p>
+                      <a:pPr marL="0" algn="l" defTabSz="914400" rtl="0" eaLnBrk="1" latinLnBrk="0" hangingPunct="1"/>
+                      <a:r>
+                        <a:rPr lang="en-US" sz="1400" kern="1200" dirty="0">
+                          <a:solidFill>
+                            <a:schemeClr val="tx1"/>
+                          </a:solidFill>
+                          <a:latin typeface="+mn-lt"/>
+                          <a:ea typeface="+mn-ea"/>
+                          <a:cs typeface="+mn-cs"/>
+                        </a:rPr>
+                        <a:t>7.59</a:t>
+                      </a:r>
+                      <a:endParaRPr lang="LID4096" sz="1400" kern="1200" dirty="0">
+                        <a:solidFill>
+                          <a:schemeClr val="tx1"/>
+                        </a:solidFill>
+                        <a:latin typeface="+mn-lt"/>
+                        <a:ea typeface="+mn-ea"/>
+                        <a:cs typeface="+mn-cs"/>
+                      </a:endParaRPr>
+                    </a:p>
+                  </a:txBody>
+                  <a:tcPr/>
+                </a:tc>
+                <a:tc>
+                  <a:txBody>
+                    <a:bodyPr/>
+                    <a:lstStyle/>
+                    <a:p>
+                      <a:pPr marL="0" algn="l" defTabSz="914400" rtl="0" eaLnBrk="1" latinLnBrk="0" hangingPunct="1"/>
+                      <a:r>
+                        <a:rPr lang="en-US" sz="1400" kern="1200" dirty="0">
+                          <a:solidFill>
+                            <a:schemeClr val="tx1"/>
+                          </a:solidFill>
+                          <a:latin typeface="+mn-lt"/>
+                          <a:ea typeface="+mn-ea"/>
+                          <a:cs typeface="+mn-cs"/>
+                        </a:rPr>
+                        <a:t>0.62</a:t>
+                      </a:r>
+                      <a:endParaRPr lang="LID4096" sz="1400" kern="1200" dirty="0">
+                        <a:solidFill>
+                          <a:schemeClr val="tx1"/>
+                        </a:solidFill>
+                        <a:latin typeface="+mn-lt"/>
+                        <a:ea typeface="+mn-ea"/>
+                        <a:cs typeface="+mn-cs"/>
+                      </a:endParaRPr>
+                    </a:p>
+                  </a:txBody>
+                  <a:tcPr/>
+                </a:tc>
+                <a:extLst>
+                  <a:ext uri="{0D108BD9-81ED-4DB2-BD59-A6C34878D82A}">
+                    <a16:rowId xmlns:a16="http://schemas.microsoft.com/office/drawing/2014/main" val="1063036125"/>
+                  </a:ext>
+                </a:extLst>
+              </a:tr>
+              <a:tr h="395945">
+                <a:tc>
+                  <a:txBody>
+                    <a:bodyPr/>
+                    <a:lstStyle/>
+                    <a:p>
+                      <a:pPr marL="0" algn="l" defTabSz="914400" rtl="0" eaLnBrk="1" latinLnBrk="0" hangingPunct="1"/>
+                      <a:r>
+                        <a:rPr lang="en-US" sz="1400" kern="1200" dirty="0">
+                          <a:solidFill>
+                            <a:schemeClr val="tx1"/>
+                          </a:solidFill>
+                          <a:latin typeface="+mn-lt"/>
+                          <a:ea typeface="+mn-ea"/>
+                          <a:cs typeface="+mn-cs"/>
+                        </a:rPr>
+                        <a:t>71 features + log(VP) + BP + </a:t>
+                      </a:r>
+                      <a:r>
+                        <a:rPr lang="en-US" sz="1400" kern="1200" dirty="0" err="1">
+                          <a:solidFill>
+                            <a:schemeClr val="tx1"/>
+                          </a:solidFill>
+                          <a:latin typeface="+mn-lt"/>
+                          <a:ea typeface="+mn-ea"/>
+                          <a:cs typeface="+mn-cs"/>
+                        </a:rPr>
+                        <a:t>RDKit</a:t>
+                      </a:r>
+                      <a:r>
+                        <a:rPr lang="en-US" sz="1400" kern="1200" dirty="0">
+                          <a:solidFill>
+                            <a:schemeClr val="tx1"/>
+                          </a:solidFill>
+                          <a:latin typeface="+mn-lt"/>
+                          <a:ea typeface="+mn-ea"/>
+                          <a:cs typeface="+mn-cs"/>
+                        </a:rPr>
+                        <a:t>(20) features</a:t>
+                      </a:r>
+                    </a:p>
+                  </a:txBody>
+                  <a:tcPr/>
+                </a:tc>
+                <a:tc>
+                  <a:txBody>
+                    <a:bodyPr/>
+                    <a:lstStyle/>
+                    <a:p>
+                      <a:pPr marL="0" algn="l" defTabSz="914400" rtl="0" eaLnBrk="1" latinLnBrk="0" hangingPunct="1"/>
+                      <a:r>
+                        <a:rPr lang="en-US" sz="1400" kern="1200" dirty="0">
+                          <a:solidFill>
+                            <a:schemeClr val="tx1"/>
+                          </a:solidFill>
+                          <a:latin typeface="+mn-lt"/>
+                          <a:ea typeface="+mn-ea"/>
+                          <a:cs typeface="+mn-cs"/>
+                        </a:rPr>
+                        <a:t>7.37</a:t>
+                      </a:r>
+                      <a:endParaRPr lang="LID4096" sz="1400" kern="1200" dirty="0">
+                        <a:solidFill>
+                          <a:schemeClr val="tx1"/>
+                        </a:solidFill>
+                        <a:latin typeface="+mn-lt"/>
+                        <a:ea typeface="+mn-ea"/>
+                        <a:cs typeface="+mn-cs"/>
+                      </a:endParaRPr>
+                    </a:p>
+                  </a:txBody>
+                  <a:tcPr/>
+                </a:tc>
+                <a:tc>
+                  <a:txBody>
+                    <a:bodyPr/>
+                    <a:lstStyle/>
+                    <a:p>
+                      <a:pPr marL="0" algn="l" defTabSz="914400" rtl="0" eaLnBrk="1" latinLnBrk="0" hangingPunct="1"/>
+                      <a:r>
+                        <a:rPr lang="en-US" sz="1400" kern="1200" dirty="0">
+                          <a:solidFill>
+                            <a:schemeClr val="tx1"/>
+                          </a:solidFill>
+                          <a:latin typeface="+mn-lt"/>
+                          <a:ea typeface="+mn-ea"/>
+                          <a:cs typeface="+mn-cs"/>
+                        </a:rPr>
+                        <a:t>0.63</a:t>
+                      </a:r>
+                      <a:endParaRPr lang="LID4096" sz="1400" kern="1200" dirty="0">
+                        <a:solidFill>
+                          <a:schemeClr val="tx1"/>
+                        </a:solidFill>
+                        <a:latin typeface="+mn-lt"/>
+                        <a:ea typeface="+mn-ea"/>
+                        <a:cs typeface="+mn-cs"/>
+                      </a:endParaRPr>
+                    </a:p>
+                  </a:txBody>
+                  <a:tcPr/>
+                </a:tc>
+                <a:extLst>
+                  <a:ext uri="{0D108BD9-81ED-4DB2-BD59-A6C34878D82A}">
+                    <a16:rowId xmlns:a16="http://schemas.microsoft.com/office/drawing/2014/main" val="4272126205"/>
+                  </a:ext>
+                </a:extLst>
+              </a:tr>
+              <a:tr h="395945">
+                <a:tc>
+                  <a:txBody>
+                    <a:bodyPr/>
+                    <a:lstStyle/>
+                    <a:p>
+                      <a:pPr marL="0" algn="l" defTabSz="914400" rtl="0" eaLnBrk="1" latinLnBrk="0" hangingPunct="1"/>
+                      <a:r>
+                        <a:rPr lang="en-US" sz="1400" kern="1200" dirty="0" err="1">
+                          <a:solidFill>
+                            <a:schemeClr val="tx1"/>
+                          </a:solidFill>
+                          <a:latin typeface="+mn-lt"/>
+                          <a:ea typeface="+mn-ea"/>
+                          <a:cs typeface="+mn-cs"/>
+                        </a:rPr>
+                        <a:t>Umap</a:t>
+                      </a:r>
+                      <a:r>
+                        <a:rPr lang="en-US" sz="1400" kern="1200" dirty="0">
+                          <a:solidFill>
+                            <a:schemeClr val="tx1"/>
+                          </a:solidFill>
+                          <a:latin typeface="+mn-lt"/>
+                          <a:ea typeface="+mn-ea"/>
+                          <a:cs typeface="+mn-cs"/>
+                        </a:rPr>
+                        <a:t> as additional features </a:t>
+                      </a:r>
+                      <a:endParaRPr lang="LID4096" sz="1400" kern="1200" dirty="0">
+                        <a:solidFill>
+                          <a:schemeClr val="tx1"/>
+                        </a:solidFill>
+                        <a:latin typeface="+mn-lt"/>
+                        <a:ea typeface="+mn-ea"/>
+                        <a:cs typeface="+mn-cs"/>
+                      </a:endParaRPr>
+                    </a:p>
+                  </a:txBody>
+                  <a:tcPr/>
+                </a:tc>
+                <a:tc>
+                  <a:txBody>
+                    <a:bodyPr/>
+                    <a:lstStyle/>
+                    <a:p>
+                      <a:pPr marL="0" algn="l" defTabSz="914400" rtl="0" eaLnBrk="1" latinLnBrk="0" hangingPunct="1"/>
+                      <a:r>
+                        <a:rPr lang="en-US" sz="1400" kern="1200" dirty="0">
+                          <a:solidFill>
+                            <a:schemeClr val="tx1"/>
+                          </a:solidFill>
+                          <a:latin typeface="+mn-lt"/>
+                          <a:ea typeface="+mn-ea"/>
+                          <a:cs typeface="+mn-cs"/>
+                        </a:rPr>
+                        <a:t>7.71</a:t>
+                      </a:r>
+                      <a:endParaRPr lang="LID4096" sz="1400" kern="1200" dirty="0">
+                        <a:solidFill>
+                          <a:schemeClr val="tx1"/>
+                        </a:solidFill>
+                        <a:latin typeface="+mn-lt"/>
+                        <a:ea typeface="+mn-ea"/>
+                        <a:cs typeface="+mn-cs"/>
+                      </a:endParaRPr>
+                    </a:p>
+                  </a:txBody>
+                  <a:tcPr/>
+                </a:tc>
+                <a:tc>
+                  <a:txBody>
+                    <a:bodyPr/>
+                    <a:lstStyle/>
+                    <a:p>
+                      <a:pPr marL="0" algn="l" defTabSz="914400" rtl="0" eaLnBrk="1" latinLnBrk="0" hangingPunct="1"/>
+                      <a:r>
+                        <a:rPr lang="en-US" sz="1400" kern="1200" dirty="0">
+                          <a:solidFill>
+                            <a:schemeClr val="tx1"/>
+                          </a:solidFill>
+                          <a:latin typeface="+mn-lt"/>
+                          <a:ea typeface="+mn-ea"/>
+                          <a:cs typeface="+mn-cs"/>
+                        </a:rPr>
+                        <a:t>0.61</a:t>
+                      </a:r>
+                      <a:endParaRPr lang="LID4096" sz="1400" kern="1200" dirty="0">
+                        <a:solidFill>
+                          <a:schemeClr val="tx1"/>
+                        </a:solidFill>
+                        <a:latin typeface="+mn-lt"/>
+                        <a:ea typeface="+mn-ea"/>
+                        <a:cs typeface="+mn-cs"/>
+                      </a:endParaRPr>
+                    </a:p>
+                  </a:txBody>
+                  <a:tcPr/>
+                </a:tc>
+                <a:extLst>
+                  <a:ext uri="{0D108BD9-81ED-4DB2-BD59-A6C34878D82A}">
+                    <a16:rowId xmlns:a16="http://schemas.microsoft.com/office/drawing/2014/main" val="415553074"/>
+                  </a:ext>
+                </a:extLst>
+              </a:tr>
+              <a:tr h="395945">
+                <a:tc>
+                  <a:txBody>
+                    <a:bodyPr/>
+                    <a:lstStyle/>
+                    <a:p>
+                      <a:pPr marL="0" algn="l" defTabSz="914400" rtl="0" eaLnBrk="1" latinLnBrk="0" hangingPunct="1"/>
+                      <a:r>
+                        <a:rPr lang="en-US" sz="1400" kern="1200" dirty="0">
+                          <a:solidFill>
+                            <a:schemeClr val="tx1"/>
+                          </a:solidFill>
+                          <a:latin typeface="+mn-lt"/>
+                          <a:ea typeface="+mn-ea"/>
+                          <a:cs typeface="+mn-cs"/>
+                        </a:rPr>
+                        <a:t>Random forest </a:t>
+                      </a:r>
+                      <a:endParaRPr lang="LID4096" sz="1400" kern="1200" dirty="0">
+                        <a:solidFill>
+                          <a:schemeClr val="tx1"/>
+                        </a:solidFill>
+                        <a:latin typeface="+mn-lt"/>
+                        <a:ea typeface="+mn-ea"/>
+                        <a:cs typeface="+mn-cs"/>
+                      </a:endParaRPr>
+                    </a:p>
+                  </a:txBody>
+                  <a:tcPr/>
+                </a:tc>
+                <a:tc>
+                  <a:txBody>
+                    <a:bodyPr/>
+                    <a:lstStyle/>
+                    <a:p>
+                      <a:pPr marL="0" algn="l" defTabSz="914400" rtl="0" eaLnBrk="1" latinLnBrk="0" hangingPunct="1"/>
+                      <a:r>
+                        <a:rPr lang="en-US" sz="1400" kern="1200" dirty="0">
+                          <a:solidFill>
+                            <a:schemeClr val="tx1"/>
+                          </a:solidFill>
+                          <a:latin typeface="+mn-lt"/>
+                          <a:ea typeface="+mn-ea"/>
+                          <a:cs typeface="+mn-cs"/>
+                        </a:rPr>
+                        <a:t>7.76</a:t>
+                      </a:r>
+                      <a:endParaRPr lang="LID4096" sz="1400" kern="1200" dirty="0">
+                        <a:solidFill>
+                          <a:schemeClr val="tx1"/>
+                        </a:solidFill>
+                        <a:latin typeface="+mn-lt"/>
+                        <a:ea typeface="+mn-ea"/>
+                        <a:cs typeface="+mn-cs"/>
+                      </a:endParaRPr>
+                    </a:p>
+                  </a:txBody>
+                  <a:tcPr/>
+                </a:tc>
+                <a:tc>
+                  <a:txBody>
+                    <a:bodyPr/>
+                    <a:lstStyle/>
+                    <a:p>
+                      <a:pPr marL="0" algn="l" defTabSz="914400" rtl="0" eaLnBrk="1" latinLnBrk="0" hangingPunct="1"/>
+                      <a:r>
+                        <a:rPr lang="en-US" sz="1400" kern="1200" dirty="0">
+                          <a:solidFill>
+                            <a:schemeClr val="tx1"/>
+                          </a:solidFill>
+                          <a:latin typeface="+mn-lt"/>
+                          <a:ea typeface="+mn-ea"/>
+                          <a:cs typeface="+mn-cs"/>
+                        </a:rPr>
+                        <a:t>0.60</a:t>
+                      </a:r>
+                      <a:endParaRPr lang="LID4096" sz="1400" kern="1200" dirty="0">
+                        <a:solidFill>
+                          <a:schemeClr val="tx1"/>
+                        </a:solidFill>
+                        <a:latin typeface="+mn-lt"/>
+                        <a:ea typeface="+mn-ea"/>
+                        <a:cs typeface="+mn-cs"/>
+                      </a:endParaRPr>
+                    </a:p>
+                  </a:txBody>
+                  <a:tcPr/>
+                </a:tc>
+                <a:extLst>
+                  <a:ext uri="{0D108BD9-81ED-4DB2-BD59-A6C34878D82A}">
+                    <a16:rowId xmlns:a16="http://schemas.microsoft.com/office/drawing/2014/main" val="1935774907"/>
+                  </a:ext>
+                </a:extLst>
+              </a:tr>
+              <a:tr h="395945">
+                <a:tc>
+                  <a:txBody>
+                    <a:bodyPr/>
+                    <a:lstStyle/>
+                    <a:p>
+                      <a:pPr marL="0" algn="l" defTabSz="914400" rtl="0" eaLnBrk="1" latinLnBrk="0" hangingPunct="1"/>
+                      <a:r>
+                        <a:rPr lang="en-US" sz="1400" kern="1200" dirty="0">
+                          <a:solidFill>
+                            <a:schemeClr val="tx1"/>
+                          </a:solidFill>
+                          <a:latin typeface="+mn-lt"/>
+                          <a:ea typeface="+mn-ea"/>
+                          <a:cs typeface="+mn-cs"/>
+                        </a:rPr>
+                        <a:t>SVR Kernel</a:t>
+                      </a:r>
+                      <a:endParaRPr lang="LID4096" sz="1400" kern="1200" dirty="0">
+                        <a:solidFill>
+                          <a:schemeClr val="tx1"/>
+                        </a:solidFill>
+                        <a:latin typeface="+mn-lt"/>
+                        <a:ea typeface="+mn-ea"/>
+                        <a:cs typeface="+mn-cs"/>
+                      </a:endParaRPr>
+                    </a:p>
+                  </a:txBody>
+                  <a:tcPr/>
+                </a:tc>
+                <a:tc>
+                  <a:txBody>
+                    <a:bodyPr/>
+                    <a:lstStyle/>
+                    <a:p>
+                      <a:pPr marL="0" algn="l" defTabSz="914400" rtl="0" eaLnBrk="1" latinLnBrk="0" hangingPunct="1"/>
+                      <a:r>
+                        <a:rPr lang="en-US" sz="1400" kern="1200" dirty="0">
+                          <a:solidFill>
+                            <a:schemeClr val="tx1"/>
+                          </a:solidFill>
+                          <a:latin typeface="+mn-lt"/>
+                          <a:ea typeface="+mn-ea"/>
+                          <a:cs typeface="+mn-cs"/>
+                        </a:rPr>
+                        <a:t>8.04</a:t>
+                      </a:r>
+                      <a:endParaRPr lang="LID4096" sz="1400" kern="1200" dirty="0">
+                        <a:solidFill>
+                          <a:schemeClr val="tx1"/>
+                        </a:solidFill>
+                        <a:latin typeface="+mn-lt"/>
+                        <a:ea typeface="+mn-ea"/>
+                        <a:cs typeface="+mn-cs"/>
+                      </a:endParaRPr>
+                    </a:p>
+                  </a:txBody>
+                  <a:tcPr/>
+                </a:tc>
+                <a:tc>
+                  <a:txBody>
+                    <a:bodyPr/>
+                    <a:lstStyle/>
+                    <a:p>
+                      <a:pPr marL="0" algn="l" defTabSz="914400" rtl="0" eaLnBrk="1" latinLnBrk="0" hangingPunct="1"/>
+                      <a:r>
+                        <a:rPr lang="en-US" sz="1400" kern="1200" dirty="0">
+                          <a:solidFill>
+                            <a:schemeClr val="tx1"/>
+                          </a:solidFill>
+                          <a:latin typeface="+mn-lt"/>
+                          <a:ea typeface="+mn-ea"/>
+                          <a:cs typeface="+mn-cs"/>
+                        </a:rPr>
+                        <a:t>0.59</a:t>
+                      </a:r>
+                      <a:endParaRPr lang="LID4096" sz="1400" kern="1200" dirty="0">
+                        <a:solidFill>
+                          <a:schemeClr val="tx1"/>
+                        </a:solidFill>
+                        <a:latin typeface="+mn-lt"/>
+                        <a:ea typeface="+mn-ea"/>
+                        <a:cs typeface="+mn-cs"/>
+                      </a:endParaRPr>
+                    </a:p>
+                  </a:txBody>
+                  <a:tcPr/>
+                </a:tc>
+                <a:extLst>
+                  <a:ext uri="{0D108BD9-81ED-4DB2-BD59-A6C34878D82A}">
+                    <a16:rowId xmlns:a16="http://schemas.microsoft.com/office/drawing/2014/main" val="664004484"/>
+                  </a:ext>
+                </a:extLst>
+              </a:tr>
+              <a:tr h="395945">
+                <a:tc>
+                  <a:txBody>
+                    <a:bodyPr/>
+                    <a:lstStyle/>
+                    <a:p>
+                      <a:pPr marL="0" algn="l" defTabSz="914400" rtl="0" eaLnBrk="1" latinLnBrk="0" hangingPunct="1"/>
+                      <a:r>
+                        <a:rPr lang="" sz="1400" kern="1200" dirty="0">
+                          <a:solidFill>
+                            <a:schemeClr val="tx1"/>
+                          </a:solidFill>
+                          <a:latin typeface="+mn-lt"/>
+                          <a:ea typeface="+mn-ea"/>
+                          <a:cs typeface="+mn-cs"/>
+                        </a:rPr>
+                        <a:t>Gaussian Process</a:t>
+                      </a:r>
+                      <a:endParaRPr lang="LID4096" sz="1400" kern="1200" dirty="0">
+                        <a:solidFill>
+                          <a:schemeClr val="tx1"/>
+                        </a:solidFill>
+                        <a:latin typeface="+mn-lt"/>
+                        <a:ea typeface="+mn-ea"/>
+                        <a:cs typeface="+mn-cs"/>
+                      </a:endParaRPr>
+                    </a:p>
+                  </a:txBody>
+                  <a:tcPr/>
+                </a:tc>
+                <a:tc>
+                  <a:txBody>
+                    <a:bodyPr/>
+                    <a:lstStyle/>
+                    <a:p>
+                      <a:pPr marL="0" algn="l" defTabSz="914400" rtl="0" eaLnBrk="1" latinLnBrk="0" hangingPunct="1"/>
+                      <a:r>
+                        <a:rPr lang="en-US" sz="1400" kern="1200" dirty="0">
+                          <a:solidFill>
+                            <a:schemeClr val="tx1"/>
+                          </a:solidFill>
+                          <a:latin typeface="+mn-lt"/>
+                          <a:ea typeface="+mn-ea"/>
+                          <a:cs typeface="+mn-cs"/>
+                        </a:rPr>
+                        <a:t>7.94</a:t>
+                      </a:r>
+                      <a:endParaRPr lang="LID4096" sz="1400" kern="1200" dirty="0">
+                        <a:solidFill>
+                          <a:schemeClr val="tx1"/>
+                        </a:solidFill>
+                        <a:latin typeface="+mn-lt"/>
+                        <a:ea typeface="+mn-ea"/>
+                        <a:cs typeface="+mn-cs"/>
+                      </a:endParaRPr>
+                    </a:p>
+                  </a:txBody>
+                  <a:tcPr/>
+                </a:tc>
+                <a:tc>
+                  <a:txBody>
+                    <a:bodyPr/>
+                    <a:lstStyle/>
+                    <a:p>
+                      <a:pPr marL="0" algn="l" defTabSz="914400" rtl="0" eaLnBrk="1" latinLnBrk="0" hangingPunct="1"/>
+                      <a:r>
+                        <a:rPr lang="en-US" sz="1400" kern="1200" dirty="0">
+                          <a:solidFill>
+                            <a:schemeClr val="tx1"/>
+                          </a:solidFill>
+                          <a:latin typeface="+mn-lt"/>
+                          <a:ea typeface="+mn-ea"/>
+                          <a:cs typeface="+mn-cs"/>
+                        </a:rPr>
+                        <a:t>0.59</a:t>
+                      </a:r>
+                      <a:endParaRPr lang="LID4096" sz="1400" kern="1200" dirty="0">
+                        <a:solidFill>
+                          <a:schemeClr val="tx1"/>
+                        </a:solidFill>
+                        <a:latin typeface="+mn-lt"/>
+                        <a:ea typeface="+mn-ea"/>
+                        <a:cs typeface="+mn-cs"/>
+                      </a:endParaRPr>
+                    </a:p>
+                  </a:txBody>
+                  <a:tcPr/>
+                </a:tc>
+                <a:extLst>
+                  <a:ext uri="{0D108BD9-81ED-4DB2-BD59-A6C34878D82A}">
+                    <a16:rowId xmlns:a16="http://schemas.microsoft.com/office/drawing/2014/main" val="3772120116"/>
+                  </a:ext>
+                </a:extLst>
+              </a:tr>
+              <a:tr h="395945">
+                <a:tc>
+                  <a:txBody>
+                    <a:bodyPr/>
+                    <a:lstStyle/>
+                    <a:p>
+                      <a:pPr marL="0" algn="l" defTabSz="914400" rtl="0" eaLnBrk="1" latinLnBrk="0" hangingPunct="1"/>
+                      <a:r>
+                        <a:rPr lang="" sz="1400" kern="1200" dirty="0">
+                          <a:solidFill>
+                            <a:schemeClr val="tx1"/>
+                          </a:solidFill>
+                          <a:latin typeface="+mn-lt"/>
+                          <a:ea typeface="+mn-ea"/>
+                          <a:cs typeface="+mn-cs"/>
+                        </a:rPr>
+                        <a:t>Stacking + GPR</a:t>
+                      </a:r>
+                      <a:endParaRPr lang="LID4096" sz="1400" kern="1200" dirty="0">
+                        <a:solidFill>
+                          <a:schemeClr val="tx1"/>
+                        </a:solidFill>
+                        <a:latin typeface="+mn-lt"/>
+                        <a:ea typeface="+mn-ea"/>
+                        <a:cs typeface="+mn-cs"/>
+                      </a:endParaRPr>
+                    </a:p>
+                  </a:txBody>
+                  <a:tcPr/>
+                </a:tc>
+                <a:tc>
+                  <a:txBody>
+                    <a:bodyPr/>
+                    <a:lstStyle/>
+                    <a:p>
+                      <a:pPr marL="0" algn="l" defTabSz="914400" rtl="0" eaLnBrk="1" latinLnBrk="0" hangingPunct="1"/>
+                      <a:r>
+                        <a:rPr lang="en-US" sz="1400" kern="1200" dirty="0">
+                          <a:solidFill>
+                            <a:schemeClr val="tx1"/>
+                          </a:solidFill>
+                          <a:latin typeface="+mn-lt"/>
+                          <a:ea typeface="+mn-ea"/>
+                          <a:cs typeface="+mn-cs"/>
+                        </a:rPr>
+                        <a:t>7.71</a:t>
+                      </a:r>
+                      <a:endParaRPr lang="LID4096" sz="1400" kern="1200" dirty="0">
+                        <a:solidFill>
+                          <a:schemeClr val="tx1"/>
+                        </a:solidFill>
+                        <a:latin typeface="+mn-lt"/>
+                        <a:ea typeface="+mn-ea"/>
+                        <a:cs typeface="+mn-cs"/>
+                      </a:endParaRPr>
+                    </a:p>
+                  </a:txBody>
+                  <a:tcPr/>
+                </a:tc>
+                <a:tc>
+                  <a:txBody>
+                    <a:bodyPr/>
+                    <a:lstStyle/>
+                    <a:p>
+                      <a:pPr marL="0" algn="l" defTabSz="914400" rtl="0" eaLnBrk="1" latinLnBrk="0" hangingPunct="1"/>
+                      <a:r>
+                        <a:rPr lang="en-US" sz="1400" kern="1200" dirty="0">
+                          <a:solidFill>
+                            <a:schemeClr val="tx1"/>
+                          </a:solidFill>
+                          <a:latin typeface="+mn-lt"/>
+                          <a:ea typeface="+mn-ea"/>
+                          <a:cs typeface="+mn-cs"/>
+                        </a:rPr>
+                        <a:t>0.61</a:t>
+                      </a:r>
+                      <a:endParaRPr lang="LID4096" sz="1400" kern="1200" dirty="0">
+                        <a:solidFill>
+                          <a:schemeClr val="tx1"/>
+                        </a:solidFill>
+                        <a:latin typeface="+mn-lt"/>
+                        <a:ea typeface="+mn-ea"/>
+                        <a:cs typeface="+mn-cs"/>
+                      </a:endParaRPr>
+                    </a:p>
+                  </a:txBody>
+                  <a:tcPr/>
+                </a:tc>
+                <a:extLst>
+                  <a:ext uri="{0D108BD9-81ED-4DB2-BD59-A6C34878D82A}">
+                    <a16:rowId xmlns:a16="http://schemas.microsoft.com/office/drawing/2014/main" val="3249508325"/>
+                  </a:ext>
+                </a:extLst>
+              </a:tr>
+              <a:tr h="395945">
+                <a:tc>
+                  <a:txBody>
+                    <a:bodyPr/>
+                    <a:lstStyle/>
+                    <a:p>
+                      <a:pPr marL="0" algn="l" defTabSz="914400" rtl="0" eaLnBrk="1" latinLnBrk="0" hangingPunct="1"/>
+                      <a:r>
+                        <a:rPr lang="" sz="1400" kern="1200" dirty="0">
+                          <a:solidFill>
+                            <a:schemeClr val="tx1"/>
+                          </a:solidFill>
+                          <a:latin typeface="+mn-lt"/>
+                          <a:ea typeface="+mn-ea"/>
+                          <a:cs typeface="+mn-cs"/>
+                        </a:rPr>
+                        <a:t>Tail specialist regressors (Separate regressors for low/high tails)</a:t>
+                      </a:r>
+                      <a:endParaRPr lang="LID4096" sz="1400" kern="1200" dirty="0">
+                        <a:solidFill>
+                          <a:schemeClr val="tx1"/>
+                        </a:solidFill>
+                        <a:latin typeface="+mn-lt"/>
+                        <a:ea typeface="+mn-ea"/>
+                        <a:cs typeface="+mn-cs"/>
+                      </a:endParaRPr>
+                    </a:p>
+                  </a:txBody>
+                  <a:tcPr/>
+                </a:tc>
+                <a:tc>
+                  <a:txBody>
+                    <a:bodyPr/>
+                    <a:lstStyle/>
+                    <a:p>
+                      <a:pPr marL="0" algn="l" defTabSz="914400" rtl="0" eaLnBrk="1" latinLnBrk="0" hangingPunct="1"/>
+                      <a:r>
+                        <a:rPr lang="en-US" sz="1400" kern="1200" dirty="0">
+                          <a:solidFill>
+                            <a:schemeClr val="tx1"/>
+                          </a:solidFill>
+                          <a:latin typeface="+mn-lt"/>
+                          <a:ea typeface="+mn-ea"/>
+                          <a:cs typeface="+mn-cs"/>
+                        </a:rPr>
+                        <a:t>7.57</a:t>
+                      </a:r>
+                      <a:endParaRPr lang="LID4096" sz="1400" kern="1200" dirty="0">
+                        <a:solidFill>
+                          <a:schemeClr val="tx1"/>
+                        </a:solidFill>
+                        <a:latin typeface="+mn-lt"/>
+                        <a:ea typeface="+mn-ea"/>
+                        <a:cs typeface="+mn-cs"/>
+                      </a:endParaRPr>
+                    </a:p>
+                  </a:txBody>
+                  <a:tcPr/>
+                </a:tc>
+                <a:tc>
+                  <a:txBody>
+                    <a:bodyPr/>
+                    <a:lstStyle/>
+                    <a:p>
+                      <a:pPr marL="0" algn="l" defTabSz="914400" rtl="0" eaLnBrk="1" latinLnBrk="0" hangingPunct="1"/>
+                      <a:r>
+                        <a:rPr lang="en-US" sz="1400" kern="1200" dirty="0">
+                          <a:solidFill>
+                            <a:schemeClr val="tx1"/>
+                          </a:solidFill>
+                          <a:latin typeface="+mn-lt"/>
+                          <a:ea typeface="+mn-ea"/>
+                          <a:cs typeface="+mn-cs"/>
+                        </a:rPr>
+                        <a:t>0.61</a:t>
+                      </a:r>
+                      <a:endParaRPr lang="LID4096" sz="1400" kern="1200" dirty="0">
+                        <a:solidFill>
+                          <a:schemeClr val="tx1"/>
+                        </a:solidFill>
+                        <a:latin typeface="+mn-lt"/>
+                        <a:ea typeface="+mn-ea"/>
+                        <a:cs typeface="+mn-cs"/>
+                      </a:endParaRPr>
+                    </a:p>
+                  </a:txBody>
+                  <a:tcPr/>
+                </a:tc>
+                <a:extLst>
+                  <a:ext uri="{0D108BD9-81ED-4DB2-BD59-A6C34878D82A}">
+                    <a16:rowId xmlns:a16="http://schemas.microsoft.com/office/drawing/2014/main" val="56158971"/>
+                  </a:ext>
+                </a:extLst>
+              </a:tr>
+              <a:tr h="395945">
+                <a:tc>
+                  <a:txBody>
+                    <a:bodyPr/>
+                    <a:lstStyle/>
+                    <a:p>
+                      <a:pPr marL="0" algn="l" defTabSz="914400" rtl="0" eaLnBrk="1" latinLnBrk="0" hangingPunct="1"/>
+                      <a:r>
+                        <a:rPr lang="" sz="1400" kern="1200" dirty="0">
+                          <a:solidFill>
+                            <a:schemeClr val="tx1"/>
+                          </a:solidFill>
+                          <a:latin typeface="+mn-lt"/>
+                          <a:ea typeface="+mn-ea"/>
+                          <a:cs typeface="+mn-cs"/>
+                        </a:rPr>
+                        <a:t>Tail residual experts (Correct only low/high intensity molecules)</a:t>
+                      </a:r>
+                      <a:endParaRPr lang="LID4096" sz="1400" kern="1200" dirty="0">
+                        <a:solidFill>
+                          <a:schemeClr val="tx1"/>
+                        </a:solidFill>
+                        <a:latin typeface="+mn-lt"/>
+                        <a:ea typeface="+mn-ea"/>
+                        <a:cs typeface="+mn-cs"/>
+                      </a:endParaRPr>
+                    </a:p>
+                  </a:txBody>
+                  <a:tcPr/>
+                </a:tc>
+                <a:tc>
+                  <a:txBody>
+                    <a:bodyPr/>
+                    <a:lstStyle/>
+                    <a:p>
+                      <a:pPr marL="0" algn="l" defTabSz="914400" rtl="0" eaLnBrk="1" latinLnBrk="0" hangingPunct="1"/>
+                      <a:r>
+                        <a:rPr lang="en-US" sz="1400" kern="1200" dirty="0">
+                          <a:solidFill>
+                            <a:schemeClr val="tx1"/>
+                          </a:solidFill>
+                          <a:latin typeface="+mn-lt"/>
+                          <a:ea typeface="+mn-ea"/>
+                          <a:cs typeface="+mn-cs"/>
+                        </a:rPr>
+                        <a:t>7.53</a:t>
+                      </a:r>
+                      <a:endParaRPr lang="LID4096" sz="1400" kern="1200" dirty="0">
+                        <a:solidFill>
+                          <a:schemeClr val="tx1"/>
+                        </a:solidFill>
+                        <a:latin typeface="+mn-lt"/>
+                        <a:ea typeface="+mn-ea"/>
+                        <a:cs typeface="+mn-cs"/>
+                      </a:endParaRPr>
+                    </a:p>
+                  </a:txBody>
+                  <a:tcPr/>
+                </a:tc>
+                <a:tc>
+                  <a:txBody>
+                    <a:bodyPr/>
+                    <a:lstStyle/>
+                    <a:p>
+                      <a:pPr marL="0" algn="l" defTabSz="914400" rtl="0" eaLnBrk="1" latinLnBrk="0" hangingPunct="1"/>
+                      <a:r>
+                        <a:rPr lang="en-US" sz="1400" kern="1200" dirty="0">
+                          <a:solidFill>
+                            <a:schemeClr val="tx1"/>
+                          </a:solidFill>
+                          <a:latin typeface="+mn-lt"/>
+                          <a:ea typeface="+mn-ea"/>
+                          <a:cs typeface="+mn-cs"/>
+                        </a:rPr>
+                        <a:t>0.62</a:t>
+                      </a:r>
+                      <a:endParaRPr lang="LID4096" sz="1400" kern="1200" dirty="0">
+                        <a:solidFill>
+                          <a:schemeClr val="tx1"/>
+                        </a:solidFill>
+                        <a:latin typeface="+mn-lt"/>
+                        <a:ea typeface="+mn-ea"/>
+                        <a:cs typeface="+mn-cs"/>
+                      </a:endParaRPr>
+                    </a:p>
+                  </a:txBody>
+                  <a:tcPr/>
+                </a:tc>
+                <a:extLst>
+                  <a:ext uri="{0D108BD9-81ED-4DB2-BD59-A6C34878D82A}">
+                    <a16:rowId xmlns:a16="http://schemas.microsoft.com/office/drawing/2014/main" val="3959661493"/>
+                  </a:ext>
+                </a:extLst>
+              </a:tr>
+              <a:tr h="395945">
+                <a:tc>
+                  <a:txBody>
+                    <a:bodyPr/>
+                    <a:lstStyle/>
+                    <a:p>
+                      <a:pPr marL="0" algn="l" defTabSz="914400" rtl="0" eaLnBrk="1" latinLnBrk="0" hangingPunct="1"/>
+                      <a:r>
+                        <a:rPr lang="" sz="1400" kern="1200" dirty="0">
+                          <a:solidFill>
+                            <a:schemeClr val="tx1"/>
+                          </a:solidFill>
+                          <a:latin typeface="+mn-lt"/>
+                          <a:ea typeface="+mn-ea"/>
+                          <a:cs typeface="+mn-cs"/>
+                        </a:rPr>
+                        <a:t>Global residual learning (Predict residual from classifier outputs)</a:t>
+                      </a:r>
+                      <a:endParaRPr lang="LID4096" sz="1400" kern="1200" dirty="0">
+                        <a:solidFill>
+                          <a:schemeClr val="tx1"/>
+                        </a:solidFill>
+                        <a:latin typeface="+mn-lt"/>
+                        <a:ea typeface="+mn-ea"/>
+                        <a:cs typeface="+mn-cs"/>
+                      </a:endParaRPr>
+                    </a:p>
+                  </a:txBody>
+                  <a:tcPr/>
+                </a:tc>
+                <a:tc>
+                  <a:txBody>
+                    <a:bodyPr/>
+                    <a:lstStyle/>
+                    <a:p>
+                      <a:pPr marL="0" algn="l" defTabSz="914400" rtl="0" eaLnBrk="1" latinLnBrk="0" hangingPunct="1"/>
+                      <a:r>
+                        <a:rPr lang="en-US" sz="1400" kern="1200" dirty="0">
+                          <a:solidFill>
+                            <a:schemeClr val="tx1"/>
+                          </a:solidFill>
+                          <a:latin typeface="+mn-lt"/>
+                          <a:ea typeface="+mn-ea"/>
+                          <a:cs typeface="+mn-cs"/>
+                        </a:rPr>
+                        <a:t>7.53</a:t>
+                      </a:r>
+                      <a:endParaRPr lang="LID4096" sz="1400" kern="1200" dirty="0">
+                        <a:solidFill>
+                          <a:schemeClr val="tx1"/>
+                        </a:solidFill>
+                        <a:latin typeface="+mn-lt"/>
+                        <a:ea typeface="+mn-ea"/>
+                        <a:cs typeface="+mn-cs"/>
+                      </a:endParaRPr>
+                    </a:p>
+                  </a:txBody>
+                  <a:tcPr/>
+                </a:tc>
+                <a:tc>
+                  <a:txBody>
+                    <a:bodyPr/>
+                    <a:lstStyle/>
+                    <a:p>
+                      <a:pPr marL="0" algn="l" defTabSz="914400" rtl="0" eaLnBrk="1" latinLnBrk="0" hangingPunct="1"/>
+                      <a:r>
+                        <a:rPr lang="en-US" sz="1400" kern="1200" dirty="0">
+                          <a:solidFill>
+                            <a:schemeClr val="tx1"/>
+                          </a:solidFill>
+                          <a:latin typeface="+mn-lt"/>
+                          <a:ea typeface="+mn-ea"/>
+                          <a:cs typeface="+mn-cs"/>
+                        </a:rPr>
+                        <a:t>0.62</a:t>
+                      </a:r>
+                      <a:endParaRPr lang="LID4096" sz="1400" kern="1200" dirty="0">
+                        <a:solidFill>
+                          <a:schemeClr val="tx1"/>
+                        </a:solidFill>
+                        <a:latin typeface="+mn-lt"/>
+                        <a:ea typeface="+mn-ea"/>
+                        <a:cs typeface="+mn-cs"/>
+                      </a:endParaRPr>
+                    </a:p>
+                  </a:txBody>
+                  <a:tcPr/>
+                </a:tc>
+                <a:extLst>
+                  <a:ext uri="{0D108BD9-81ED-4DB2-BD59-A6C34878D82A}">
+                    <a16:rowId xmlns:a16="http://schemas.microsoft.com/office/drawing/2014/main" val="1386791671"/>
+                  </a:ext>
+                </a:extLst>
+              </a:tr>
+            </a:tbl>
+          </a:graphicData>
+        </a:graphic>
+      </p:graphicFrame>
+    </p:spTree>
+    <p:extLst>
+      <p:ext uri="{BB962C8B-B14F-4D97-AF65-F5344CB8AC3E}">
+        <p14:creationId xmlns:p14="http://schemas.microsoft.com/office/powerpoint/2010/main" val="2394263787"/>
+      </p:ext>
+    </p:extLst>
+  </p:cSld>
+  <p:clrMapOvr>
+    <a:masterClrMapping/>
+  </p:clrMapOvr>
+</p:sld>
+</file>
+
+<file path=ppt/slides/slide17.xml><?xml version="1.0" encoding="utf-8"?>
+<p:sld xmlns:a="http://schemas.openxmlformats.org/drawingml/2006/main" xmlns:r="http://schemas.openxmlformats.org/officeDocument/2006/relationships" xmlns:p="http://schemas.openxmlformats.org/presentationml/2006/main">
+  <p:cSld>
+    <p:spTree>
+      <p:nvGrpSpPr>
+        <p:cNvPr id="1" name=""/>
+        <p:cNvGrpSpPr/>
+        <p:nvPr/>
+      </p:nvGrpSpPr>
+      <p:grpSpPr>
+        <a:xfrm>
+          <a:off x="0" y="0"/>
+          <a:ext cx="0" cy="0"/>
+          <a:chOff x="0" y="0"/>
+          <a:chExt cx="0" cy="0"/>
+        </a:xfrm>
+      </p:grpSpPr>
+      <p:sp>
+        <p:nvSpPr>
+          <p:cNvPr id="2" name="TextBox 1">
+            <a:extLst>
+              <a:ext uri="{FF2B5EF4-FFF2-40B4-BE49-F238E27FC236}">
+                <a16:creationId xmlns:a16="http://schemas.microsoft.com/office/drawing/2014/main" id="{4948B8EC-12C2-8C32-BDF2-4871C7C52BDD}"/>
+              </a:ext>
+            </a:extLst>
+          </p:cNvPr>
+          <p:cNvSpPr txBox="1"/>
+          <p:nvPr/>
+        </p:nvSpPr>
+        <p:spPr>
+          <a:xfrm>
+            <a:off x="609600" y="626533"/>
+            <a:ext cx="10820400" cy="6047809"/>
+          </a:xfrm>
+          <a:prstGeom prst="rect">
+            <a:avLst/>
+          </a:prstGeom>
+          <a:noFill/>
+        </p:spPr>
+        <p:txBody>
+          <a:bodyPr wrap="square" rtlCol="0">
+            <a:spAutoFit/>
+          </a:bodyPr>
+          <a:lstStyle/>
+          <a:p>
+            <a:r>
+              <a:rPr lang="" b="1" dirty="0"/>
+              <a:t>Main findings</a:t>
+            </a:r>
+          </a:p>
+          <a:p>
+            <a:endParaRPr lang="" b="1" dirty="0"/>
+          </a:p>
+          <a:p>
+            <a:r>
+              <a:rPr lang="" b="1" dirty="0"/>
+              <a:t>Best model:</a:t>
+            </a:r>
+            <a:r>
+              <a:rPr lang="" dirty="0"/>
+              <a:t> XGBoost + optimized Dragon/RDKit descriptors (</a:t>
+            </a:r>
+            <a:r>
+              <a:rPr lang="" b="1" dirty="0"/>
+              <a:t>MAE = 7.37</a:t>
+            </a:r>
+            <a:r>
+              <a:rPr lang="" dirty="0"/>
+              <a:t>, </a:t>
+            </a:r>
+            <a:r>
+              <a:rPr lang="" b="1" dirty="0"/>
+              <a:t>R² = 0.63</a:t>
+            </a:r>
+            <a:r>
+              <a:rPr lang="" dirty="0"/>
+              <a:t>).</a:t>
+            </a:r>
+          </a:p>
+          <a:p>
+            <a:pPr>
+              <a:lnSpc>
+                <a:spcPct val="150000"/>
+              </a:lnSpc>
+            </a:pPr>
+            <a:r>
+              <a:rPr lang="" dirty="0"/>
+              <a:t> </a:t>
+            </a:r>
+          </a:p>
+          <a:p>
+            <a:pPr marL="285750" indent="-285750">
+              <a:lnSpc>
+                <a:spcPct val="150000"/>
+              </a:lnSpc>
+              <a:buFont typeface="Arial" panose="020B0604020202020204" pitchFamily="34" charset="0"/>
+              <a:buChar char="•"/>
+            </a:pPr>
+            <a:r>
+              <a:rPr lang="" dirty="0"/>
+              <a:t>RDKit descriptors provided the most meaningful improvement beyond Dragon descriptors. </a:t>
+            </a:r>
+          </a:p>
+          <a:p>
+            <a:pPr marL="285750" indent="-285750">
+              <a:lnSpc>
+                <a:spcPct val="150000"/>
+              </a:lnSpc>
+              <a:buFont typeface="Arial" panose="020B0604020202020204" pitchFamily="34" charset="0"/>
+              <a:buChar char="•"/>
+            </a:pPr>
+            <a:r>
+              <a:rPr lang="" dirty="0"/>
+              <a:t>Volatility-related features (log vapor pressure, boiling point) did not improve the final optimized model. </a:t>
+            </a:r>
+          </a:p>
+          <a:p>
+            <a:pPr marL="285750" indent="-285750">
+              <a:lnSpc>
+                <a:spcPct val="150000"/>
+              </a:lnSpc>
+              <a:buFont typeface="Arial" panose="020B0604020202020204" pitchFamily="34" charset="0"/>
+              <a:buChar char="•"/>
+            </a:pPr>
+            <a:r>
+              <a:rPr lang="" dirty="0"/>
+              <a:t>Alternative regressors (CatBoost, Random Forest, Extra Trees, SVR, Gaussian Process) did not outperform XGBoost. </a:t>
+            </a:r>
+          </a:p>
+          <a:p>
+            <a:pPr marL="285750" indent="-285750">
+              <a:lnSpc>
+                <a:spcPct val="150000"/>
+              </a:lnSpc>
+              <a:buFont typeface="Arial" panose="020B0604020202020204" pitchFamily="34" charset="0"/>
+              <a:buChar char="•"/>
+            </a:pPr>
+            <a:r>
+              <a:rPr lang="" dirty="0"/>
+              <a:t>Ensemble learning (stacking, residual experts, tail experts) produced little or no additional improvement. </a:t>
+            </a:r>
+          </a:p>
+          <a:p>
+            <a:pPr marL="285750" indent="-285750">
+              <a:lnSpc>
+                <a:spcPct val="150000"/>
+              </a:lnSpc>
+              <a:buFont typeface="Arial" panose="020B0604020202020204" pitchFamily="34" charset="0"/>
+              <a:buChar char="•"/>
+            </a:pPr>
+            <a:r>
+              <a:rPr lang="" dirty="0"/>
+              <a:t>UMAP revealed a clear chemical-intensity manifold, but its coordinates did not improve prediction accuracy. </a:t>
+            </a:r>
+          </a:p>
+          <a:p>
+            <a:pPr marL="285750" indent="-285750">
+              <a:lnSpc>
+                <a:spcPct val="150000"/>
+              </a:lnSpc>
+              <a:buFont typeface="Arial" panose="020B0604020202020204" pitchFamily="34" charset="0"/>
+              <a:buChar char="•"/>
+            </a:pPr>
+            <a:r>
+              <a:rPr lang="" dirty="0"/>
+              <a:t>Remaining errors are concentrated at the </a:t>
+            </a:r>
+            <a:r>
+              <a:rPr lang="" b="1" dirty="0"/>
+              <a:t>low and high intensity tails</a:t>
+            </a:r>
+            <a:r>
+              <a:rPr lang="" dirty="0"/>
+              <a:t>, suggesting that the current limitation is likely due to dataset complexity and/or psychophysical variability rather than the regression algorithm itself.</a:t>
+            </a:r>
+          </a:p>
+          <a:p>
+            <a:endParaRPr lang="en-US" dirty="0"/>
+          </a:p>
+          <a:p>
+            <a:endParaRPr lang="en-US" dirty="0"/>
+          </a:p>
+        </p:txBody>
+      </p:sp>
+    </p:spTree>
+    <p:extLst>
+      <p:ext uri="{BB962C8B-B14F-4D97-AF65-F5344CB8AC3E}">
+        <p14:creationId xmlns:p14="http://schemas.microsoft.com/office/powerpoint/2010/main" val="1875206058"/>
+      </p:ext>
+    </p:extLst>
+  </p:cSld>
+  <p:clrMapOvr>
+    <a:masterClrMapping/>
+  </p:clrMapOvr>
+</p:sld>
+</file>
+
+<file path=ppt/slides/slide18.xml><?xml version="1.0" encoding="utf-8"?>
+<p:sld xmlns:a="http://schemas.openxmlformats.org/drawingml/2006/main" xmlns:r="http://schemas.openxmlformats.org/officeDocument/2006/relationships" xmlns:p="http://schemas.openxmlformats.org/presentationml/2006/main">
+  <p:cSld>
+    <p:spTree>
+      <p:nvGrpSpPr>
+        <p:cNvPr id="1" name=""/>
+        <p:cNvGrpSpPr/>
+        <p:nvPr/>
+      </p:nvGrpSpPr>
+      <p:grpSpPr>
+        <a:xfrm>
+          <a:off x="0" y="0"/>
+          <a:ext cx="0" cy="0"/>
+          <a:chOff x="0" y="0"/>
+          <a:chExt cx="0" cy="0"/>
+        </a:xfrm>
+      </p:grpSpPr>
+      <p:sp>
+        <p:nvSpPr>
+          <p:cNvPr id="2" name="TextBox 1">
+            <a:extLst>
+              <a:ext uri="{FF2B5EF4-FFF2-40B4-BE49-F238E27FC236}">
+                <a16:creationId xmlns:a16="http://schemas.microsoft.com/office/drawing/2014/main" id="{5DE9527C-320E-8C56-9BD4-4212ADD22E52}"/>
+              </a:ext>
+            </a:extLst>
+          </p:cNvPr>
+          <p:cNvSpPr txBox="1"/>
+          <p:nvPr/>
+        </p:nvSpPr>
+        <p:spPr>
+          <a:xfrm>
+            <a:off x="471253" y="299335"/>
+            <a:ext cx="7781925" cy="646331"/>
+          </a:xfrm>
+          <a:prstGeom prst="rect">
+            <a:avLst/>
+          </a:prstGeom>
+          <a:noFill/>
+        </p:spPr>
+        <p:txBody>
+          <a:bodyPr wrap="square" rtlCol="0">
+            <a:spAutoFit/>
+          </a:bodyPr>
+          <a:lstStyle/>
+          <a:p>
+            <a:r>
+              <a:rPr lang="en-US" dirty="0"/>
+              <a:t>We have additional experimental data set, with more evaluations. All the evaluations are made by single perfumer during time period of 2-3 years</a:t>
+            </a:r>
+            <a:endParaRPr lang="LID4096" dirty="0"/>
+          </a:p>
+        </p:txBody>
+      </p:sp>
+      <p:pic>
+        <p:nvPicPr>
+          <p:cNvPr id="4" name="Picture 3">
+            <a:extLst>
+              <a:ext uri="{FF2B5EF4-FFF2-40B4-BE49-F238E27FC236}">
+                <a16:creationId xmlns:a16="http://schemas.microsoft.com/office/drawing/2014/main" id="{5A6FF76C-8C6C-DCDD-D2F5-8D55DF7FB801}"/>
+              </a:ext>
+            </a:extLst>
+          </p:cNvPr>
+          <p:cNvPicPr>
+            <a:picLocks noChangeAspect="1"/>
+          </p:cNvPicPr>
+          <p:nvPr/>
+        </p:nvPicPr>
+        <p:blipFill>
+          <a:blip r:embed="rId3"/>
+          <a:stretch>
+            <a:fillRect/>
+          </a:stretch>
+        </p:blipFill>
+        <p:spPr>
+          <a:xfrm>
+            <a:off x="649027" y="1466459"/>
+            <a:ext cx="5362575" cy="4314825"/>
+          </a:xfrm>
+          <a:prstGeom prst="rect">
+            <a:avLst/>
+          </a:prstGeom>
+        </p:spPr>
+      </p:pic>
+    </p:spTree>
+    <p:extLst>
+      <p:ext uri="{BB962C8B-B14F-4D97-AF65-F5344CB8AC3E}">
+        <p14:creationId xmlns:p14="http://schemas.microsoft.com/office/powerpoint/2010/main" val="2564353469"/>
+      </p:ext>
+    </p:extLst>
+  </p:cSld>
+  <p:clrMapOvr>
+    <a:masterClrMapping/>
+  </p:clrMapOvr>
+</p:sld>
+</file>
+
+<file path=ppt/slides/slide19.xml><?xml version="1.0" encoding="utf-8"?>
+<p:sld xmlns:a="http://schemas.openxmlformats.org/drawingml/2006/main" xmlns:r="http://schemas.openxmlformats.org/officeDocument/2006/relationships" xmlns:p="http://schemas.openxmlformats.org/presentationml/2006/main">
+  <p:cSld>
+    <p:spTree>
+      <p:nvGrpSpPr>
+        <p:cNvPr id="1" name=""/>
+        <p:cNvGrpSpPr/>
+        <p:nvPr/>
+      </p:nvGrpSpPr>
+      <p:grpSpPr>
+        <a:xfrm>
+          <a:off x="0" y="0"/>
+          <a:ext cx="0" cy="0"/>
+          <a:chOff x="0" y="0"/>
+          <a:chExt cx="0" cy="0"/>
+        </a:xfrm>
+      </p:grpSpPr>
+      <p:pic>
+        <p:nvPicPr>
+          <p:cNvPr id="3" name="Picture 2">
+            <a:extLst>
+              <a:ext uri="{FF2B5EF4-FFF2-40B4-BE49-F238E27FC236}">
+                <a16:creationId xmlns:a16="http://schemas.microsoft.com/office/drawing/2014/main" id="{63985324-8AF6-F972-756F-B7F3FCA5EC28}"/>
+              </a:ext>
+            </a:extLst>
+          </p:cNvPr>
+          <p:cNvPicPr>
+            <a:picLocks noChangeAspect="1"/>
+          </p:cNvPicPr>
+          <p:nvPr/>
+        </p:nvPicPr>
+        <p:blipFill>
+          <a:blip r:embed="rId3"/>
+          <a:stretch>
+            <a:fillRect/>
+          </a:stretch>
+        </p:blipFill>
+        <p:spPr>
+          <a:xfrm>
+            <a:off x="363823" y="1475906"/>
+            <a:ext cx="5634975" cy="3606384"/>
+          </a:xfrm>
+          <a:prstGeom prst="rect">
+            <a:avLst/>
+          </a:prstGeom>
+        </p:spPr>
+      </p:pic>
+      <p:pic>
+        <p:nvPicPr>
+          <p:cNvPr id="5" name="Picture 4">
+            <a:extLst>
+              <a:ext uri="{FF2B5EF4-FFF2-40B4-BE49-F238E27FC236}">
+                <a16:creationId xmlns:a16="http://schemas.microsoft.com/office/drawing/2014/main" id="{DA0FBF47-5F33-F7F6-FC30-1CDF93BC8B76}"/>
+              </a:ext>
+            </a:extLst>
+          </p:cNvPr>
+          <p:cNvPicPr>
+            <a:picLocks noChangeAspect="1"/>
+          </p:cNvPicPr>
+          <p:nvPr/>
+        </p:nvPicPr>
+        <p:blipFill>
+          <a:blip r:embed="rId4"/>
+          <a:stretch>
+            <a:fillRect/>
+          </a:stretch>
+        </p:blipFill>
+        <p:spPr>
+          <a:xfrm>
+            <a:off x="6631039" y="1093370"/>
+            <a:ext cx="5001328" cy="5030113"/>
+          </a:xfrm>
+          <a:prstGeom prst="rect">
+            <a:avLst/>
+          </a:prstGeom>
+        </p:spPr>
+      </p:pic>
+      <p:sp>
+        <p:nvSpPr>
+          <p:cNvPr id="6" name="TextBox 5">
+            <a:extLst>
+              <a:ext uri="{FF2B5EF4-FFF2-40B4-BE49-F238E27FC236}">
+                <a16:creationId xmlns:a16="http://schemas.microsoft.com/office/drawing/2014/main" id="{1017A5DD-A986-8219-6613-F614C187CB48}"/>
+              </a:ext>
+            </a:extLst>
+          </p:cNvPr>
+          <p:cNvSpPr txBox="1"/>
+          <p:nvPr/>
+        </p:nvSpPr>
+        <p:spPr>
+          <a:xfrm>
+            <a:off x="682051" y="404734"/>
+            <a:ext cx="7262735" cy="400110"/>
+          </a:xfrm>
+          <a:prstGeom prst="rect">
+            <a:avLst/>
+          </a:prstGeom>
+          <a:noFill/>
+        </p:spPr>
+        <p:txBody>
+          <a:bodyPr wrap="square" rtlCol="0">
+            <a:spAutoFit/>
+          </a:bodyPr>
+          <a:lstStyle/>
+          <a:p>
+            <a:r>
+              <a:rPr lang="en-US" sz="2000" b="1" dirty="0"/>
+              <a:t>XGBOOST CV prediction of Imax based on top 165 features</a:t>
+            </a:r>
+            <a:endParaRPr lang="LID4096" sz="2000" b="1" dirty="0"/>
+          </a:p>
+        </p:txBody>
+      </p:sp>
+    </p:spTree>
+    <p:extLst>
+      <p:ext uri="{BB962C8B-B14F-4D97-AF65-F5344CB8AC3E}">
+        <p14:creationId xmlns:p14="http://schemas.microsoft.com/office/powerpoint/2010/main" val="2214624458"/>
       </p:ext>
     </p:extLst>
   </p:cSld>
@@ -3938,8 +8149,8 @@
         </p:nvSpPr>
         <p:spPr>
           <a:xfrm>
-            <a:off x="331625" y="315389"/>
-            <a:ext cx="3982856" cy="369332"/>
+            <a:off x="331624" y="315389"/>
+            <a:ext cx="6498154" cy="461665"/>
           </a:xfrm>
           <a:prstGeom prst="rect">
             <a:avLst/>
@@ -3953,10 +8164,10 @@
           <a:lstStyle/>
           <a:p>
             <a:r>
-              <a:rPr lang="en-US" dirty="0"/>
+              <a:rPr lang="en-US" sz="2400" b="1" dirty="0"/>
               <a:t>Intensity behavior (different threshold)</a:t>
             </a:r>
-            <a:endParaRPr lang="LID4096" dirty="0"/>
+            <a:endParaRPr lang="LID4096" sz="2400" b="1" dirty="0"/>
           </a:p>
         </p:txBody>
       </p:sp>
@@ -3966,72 +8177,6 @@
             <a:extLst>
               <a:ext uri="{FF2B5EF4-FFF2-40B4-BE49-F238E27FC236}">
                 <a16:creationId xmlns:a16="http://schemas.microsoft.com/office/drawing/2014/main" id="{5C05899B-29F6-AD87-D70F-5398748B488C}"/>
-              </a:ext>
-            </a:extLst>
-          </p:cNvPr>
-          <p:cNvPicPr>
-            <a:picLocks noChangeAspect="1"/>
-          </p:cNvPicPr>
-          <p:nvPr/>
-        </p:nvPicPr>
-        <p:blipFill>
-          <a:blip r:embed="rId2"/>
-          <a:stretch>
-            <a:fillRect/>
-          </a:stretch>
-        </p:blipFill>
-        <p:spPr>
-          <a:xfrm>
-            <a:off x="2235434" y="1617384"/>
-            <a:ext cx="2209914" cy="787440"/>
-          </a:xfrm>
-          <a:prstGeom prst="rect">
-            <a:avLst/>
-          </a:prstGeom>
-        </p:spPr>
-      </p:pic>
-      <p:sp>
-        <p:nvSpPr>
-          <p:cNvPr id="7" name="TextBox 6">
-            <a:extLst>
-              <a:ext uri="{FF2B5EF4-FFF2-40B4-BE49-F238E27FC236}">
-                <a16:creationId xmlns:a16="http://schemas.microsoft.com/office/drawing/2014/main" id="{DB79EB18-0A80-C009-DC4E-ADFAECF1280B}"/>
-              </a:ext>
-            </a:extLst>
-          </p:cNvPr>
-          <p:cNvSpPr txBox="1"/>
-          <p:nvPr/>
-        </p:nvSpPr>
-        <p:spPr>
-          <a:xfrm>
-            <a:off x="418271" y="875609"/>
-            <a:ext cx="11080750" cy="646331"/>
-          </a:xfrm>
-          <a:prstGeom prst="rect">
-            <a:avLst/>
-          </a:prstGeom>
-          <a:noFill/>
-        </p:spPr>
-        <p:txBody>
-          <a:bodyPr wrap="square" rtlCol="0">
-            <a:spAutoFit/>
-          </a:bodyPr>
-          <a:lstStyle/>
-          <a:p>
-            <a:r>
-              <a:rPr lang="en-US" dirty="0"/>
-              <a:t>Odor intensity is measured by  labeled magnitude scale  (LMS), which is hybrid scaling technique using verbally labeled line with quasi-logarithmic spacing between the labels.</a:t>
-            </a:r>
-            <a:endParaRPr lang="LID4096" dirty="0"/>
-          </a:p>
-        </p:txBody>
-      </p:sp>
-      <p:pic>
-        <p:nvPicPr>
-          <p:cNvPr id="9" name="Picture 8">
-            <a:extLst>
-              <a:ext uri="{FF2B5EF4-FFF2-40B4-BE49-F238E27FC236}">
-                <a16:creationId xmlns:a16="http://schemas.microsoft.com/office/drawing/2014/main" id="{67052EA4-0394-7CAA-EFE4-B4E527555E2B}"/>
               </a:ext>
             </a:extLst>
           </p:cNvPr>
@@ -4048,20 +8193,100 @@
         </p:blipFill>
         <p:spPr>
           <a:xfrm>
-            <a:off x="331625" y="2404824"/>
-            <a:ext cx="6082431" cy="4243557"/>
+            <a:off x="2235433" y="1456536"/>
+            <a:ext cx="2209914" cy="787440"/>
           </a:xfrm>
           <a:prstGeom prst="rect">
             <a:avLst/>
           </a:prstGeom>
         </p:spPr>
       </p:pic>
+      <p:sp>
+        <p:nvSpPr>
+          <p:cNvPr id="7" name="TextBox 6">
+            <a:extLst>
+              <a:ext uri="{FF2B5EF4-FFF2-40B4-BE49-F238E27FC236}">
+                <a16:creationId xmlns:a16="http://schemas.microsoft.com/office/drawing/2014/main" id="{DB79EB18-0A80-C009-DC4E-ADFAECF1280B}"/>
+              </a:ext>
+            </a:extLst>
+          </p:cNvPr>
+          <p:cNvSpPr txBox="1"/>
+          <p:nvPr/>
+        </p:nvSpPr>
+        <p:spPr>
+          <a:xfrm>
+            <a:off x="418271" y="875609"/>
+            <a:ext cx="11080750" cy="646331"/>
+          </a:xfrm>
+          <a:prstGeom prst="rect">
+            <a:avLst/>
+          </a:prstGeom>
+          <a:noFill/>
+        </p:spPr>
+        <p:txBody>
+          <a:bodyPr wrap="square" rtlCol="0">
+            <a:spAutoFit/>
+          </a:bodyPr>
+          <a:lstStyle/>
+          <a:p>
+            <a:r>
+              <a:rPr lang="en-US" dirty="0"/>
+              <a:t>Odor intensity is measured by  labeled magnitude scale  (LMS), which is hybrid scaling technique using verbally labeled line with quasi-logarithmic spacing between the labels.</a:t>
+            </a:r>
+            <a:endParaRPr lang="LID4096" dirty="0"/>
+          </a:p>
+        </p:txBody>
+      </p:sp>
+      <p:sp>
+        <p:nvSpPr>
+          <p:cNvPr id="3" name="TextBox 2">
+            <a:extLst>
+              <a:ext uri="{FF2B5EF4-FFF2-40B4-BE49-F238E27FC236}">
+                <a16:creationId xmlns:a16="http://schemas.microsoft.com/office/drawing/2014/main" id="{D950E2B9-F4ED-64FE-3875-E8D1D5E4F4A9}"/>
+              </a:ext>
+            </a:extLst>
+          </p:cNvPr>
+          <p:cNvSpPr txBox="1"/>
+          <p:nvPr/>
+        </p:nvSpPr>
+        <p:spPr>
+          <a:xfrm>
+            <a:off x="587022" y="6478852"/>
+            <a:ext cx="6852356" cy="400110"/>
+          </a:xfrm>
+          <a:prstGeom prst="rect">
+            <a:avLst/>
+          </a:prstGeom>
+          <a:noFill/>
+        </p:spPr>
+        <p:txBody>
+          <a:bodyPr wrap="square" rtlCol="0">
+            <a:spAutoFit/>
+          </a:bodyPr>
+          <a:lstStyle/>
+          <a:p>
+            <a:r>
+              <a:rPr lang="en-US" sz="1000" dirty="0"/>
+              <a:t>ref: Method for Predicting Odor Intensity of Perfumery Raw Materials Using Dose–Response Curve Database, Wakayama, Hideki, </a:t>
+            </a:r>
+            <a:r>
+              <a:rPr lang="en-US" sz="1000" dirty="0" err="1"/>
+              <a:t>doi</a:t>
+            </a:r>
+            <a:r>
+              <a:rPr lang="en-US" sz="1000" dirty="0"/>
+              <a:t>: 10.1021/acs.iecr.9b01225, https://pubs.acs.org/doi/10.1021/acs.iecr.9b01225</a:t>
+            </a:r>
+            <a:endParaRPr lang="LID4096" sz="1000" dirty="0"/>
+          </a:p>
+        </p:txBody>
+      </p:sp>
       <p:pic>
         <p:nvPicPr>
-          <p:cNvPr id="13" name="Picture 12">
-            <a:extLst>
-              <a:ext uri="{FF2B5EF4-FFF2-40B4-BE49-F238E27FC236}">
-                <a16:creationId xmlns:a16="http://schemas.microsoft.com/office/drawing/2014/main" id="{5793A317-1F85-D632-5EA2-DC411D061F77}"/>
+          <p:cNvPr id="5" name="Picture 4">
+            <a:extLst>
+              <a:ext uri="{FF2B5EF4-FFF2-40B4-BE49-F238E27FC236}">
+                <a16:creationId xmlns:a16="http://schemas.microsoft.com/office/drawing/2014/main" id="{B0EC1BE1-BF81-17A7-302C-30B1EB2D80BC}"/>
               </a:ext>
             </a:extLst>
           </p:cNvPr>
@@ -4078,8 +8303,38 @@
         </p:blipFill>
         <p:spPr>
           <a:xfrm>
-            <a:off x="7746654" y="1617384"/>
-            <a:ext cx="3752367" cy="5041445"/>
+            <a:off x="6559673" y="1758257"/>
+            <a:ext cx="5428011" cy="4224134"/>
+          </a:xfrm>
+          <a:prstGeom prst="rect">
+            <a:avLst/>
+          </a:prstGeom>
+        </p:spPr>
+      </p:pic>
+      <p:pic>
+        <p:nvPicPr>
+          <p:cNvPr id="10" name="Picture 9">
+            <a:extLst>
+              <a:ext uri="{FF2B5EF4-FFF2-40B4-BE49-F238E27FC236}">
+                <a16:creationId xmlns:a16="http://schemas.microsoft.com/office/drawing/2014/main" id="{613DD6F3-2A55-C108-5E5C-56DCD8D2283C}"/>
+              </a:ext>
+            </a:extLst>
+          </p:cNvPr>
+          <p:cNvPicPr>
+            <a:picLocks noChangeAspect="1"/>
+          </p:cNvPicPr>
+          <p:nvPr/>
+        </p:nvPicPr>
+        <p:blipFill>
+          <a:blip r:embed="rId5"/>
+          <a:stretch>
+            <a:fillRect/>
+          </a:stretch>
+        </p:blipFill>
+        <p:spPr>
+          <a:xfrm>
+            <a:off x="835308" y="2427411"/>
+            <a:ext cx="5260692" cy="2902148"/>
           </a:xfrm>
           <a:prstGeom prst="rect">
             <a:avLst/>
@@ -4116,12 +8371,72 @@
           <a:chExt cx="0" cy="0"/>
         </a:xfrm>
       </p:grpSpPr>
-      <p:sp>
-        <p:nvSpPr>
-          <p:cNvPr id="2" name="TextBox 1">
-            <a:extLst>
-              <a:ext uri="{FF2B5EF4-FFF2-40B4-BE49-F238E27FC236}">
-                <a16:creationId xmlns:a16="http://schemas.microsoft.com/office/drawing/2014/main" id="{0B634F69-47D3-6340-82F6-E6001F0A2F41}"/>
+      <p:pic>
+        <p:nvPicPr>
+          <p:cNvPr id="9" name="Picture 8">
+            <a:extLst>
+              <a:ext uri="{FF2B5EF4-FFF2-40B4-BE49-F238E27FC236}">
+                <a16:creationId xmlns:a16="http://schemas.microsoft.com/office/drawing/2014/main" id="{33C44EB0-956E-9071-7A22-34C1DD46D688}"/>
+              </a:ext>
+            </a:extLst>
+          </p:cNvPr>
+          <p:cNvPicPr>
+            <a:picLocks noChangeAspect="1"/>
+          </p:cNvPicPr>
+          <p:nvPr/>
+        </p:nvPicPr>
+        <p:blipFill>
+          <a:blip r:embed="rId2"/>
+          <a:stretch>
+            <a:fillRect/>
+          </a:stretch>
+        </p:blipFill>
+        <p:spPr>
+          <a:xfrm>
+            <a:off x="4856022" y="1009407"/>
+            <a:ext cx="7226071" cy="5041445"/>
+          </a:xfrm>
+          <a:prstGeom prst="rect">
+            <a:avLst/>
+          </a:prstGeom>
+        </p:spPr>
+      </p:pic>
+      <p:pic>
+        <p:nvPicPr>
+          <p:cNvPr id="11" name="Picture 10">
+            <a:extLst>
+              <a:ext uri="{FF2B5EF4-FFF2-40B4-BE49-F238E27FC236}">
+                <a16:creationId xmlns:a16="http://schemas.microsoft.com/office/drawing/2014/main" id="{CAC36BBC-278C-C198-E896-D3827667ADDC}"/>
+              </a:ext>
+            </a:extLst>
+          </p:cNvPr>
+          <p:cNvPicPr>
+            <a:picLocks noChangeAspect="1"/>
+          </p:cNvPicPr>
+          <p:nvPr/>
+        </p:nvPicPr>
+        <p:blipFill>
+          <a:blip r:embed="rId3"/>
+          <a:stretch>
+            <a:fillRect/>
+          </a:stretch>
+        </p:blipFill>
+        <p:spPr>
+          <a:xfrm>
+            <a:off x="109907" y="789243"/>
+            <a:ext cx="4230356" cy="5683641"/>
+          </a:xfrm>
+          <a:prstGeom prst="rect">
+            <a:avLst/>
+          </a:prstGeom>
+        </p:spPr>
+      </p:pic>
+      <p:sp>
+        <p:nvSpPr>
+          <p:cNvPr id="12" name="TextBox 11">
+            <a:extLst>
+              <a:ext uri="{FF2B5EF4-FFF2-40B4-BE49-F238E27FC236}">
+                <a16:creationId xmlns:a16="http://schemas.microsoft.com/office/drawing/2014/main" id="{40CAA5B8-2CA5-5D52-9EF5-9004B4829A12}"/>
               </a:ext>
             </a:extLst>
           </p:cNvPr>
@@ -4130,8 +8445,8 @@
         </p:nvSpPr>
         <p:spPr>
           <a:xfrm>
-            <a:off x="435999" y="373926"/>
-            <a:ext cx="11320001" cy="923330"/>
+            <a:off x="703385" y="251208"/>
+            <a:ext cx="4230356" cy="369332"/>
           </a:xfrm>
           <a:prstGeom prst="rect">
             <a:avLst/>
@@ -4145,9 +8460,78 @@
           <a:lstStyle/>
           <a:p>
             <a:r>
+              <a:rPr lang="en-US" b="1" dirty="0"/>
+              <a:t>Visualization of data with Python</a:t>
+            </a:r>
+            <a:endParaRPr lang="LID4096" b="1" dirty="0"/>
+          </a:p>
+        </p:txBody>
+      </p:sp>
+    </p:spTree>
+    <p:extLst>
+      <p:ext uri="{BB962C8B-B14F-4D97-AF65-F5344CB8AC3E}">
+        <p14:creationId xmlns:p14="http://schemas.microsoft.com/office/powerpoint/2010/main" val="1197451467"/>
+      </p:ext>
+    </p:extLst>
+  </p:cSld>
+  <p:clrMapOvr>
+    <a:masterClrMapping/>
+  </p:clrMapOvr>
+</p:sld>
+</file>
+
+<file path=ppt/slides/slide4.xml><?xml version="1.0" encoding="utf-8"?>
+<p:sld xmlns:a="http://schemas.openxmlformats.org/drawingml/2006/main" xmlns:r="http://schemas.openxmlformats.org/officeDocument/2006/relationships" xmlns:p="http://schemas.openxmlformats.org/presentationml/2006/main">
+  <p:cSld>
+    <p:spTree>
+      <p:nvGrpSpPr>
+        <p:cNvPr id="1" name=""/>
+        <p:cNvGrpSpPr/>
+        <p:nvPr/>
+      </p:nvGrpSpPr>
+      <p:grpSpPr>
+        <a:xfrm>
+          <a:off x="0" y="0"/>
+          <a:ext cx="0" cy="0"/>
+          <a:chOff x="0" y="0"/>
+          <a:chExt cx="0" cy="0"/>
+        </a:xfrm>
+      </p:grpSpPr>
+      <p:sp>
+        <p:nvSpPr>
+          <p:cNvPr id="2" name="TextBox 1">
+            <a:extLst>
+              <a:ext uri="{FF2B5EF4-FFF2-40B4-BE49-F238E27FC236}">
+                <a16:creationId xmlns:a16="http://schemas.microsoft.com/office/drawing/2014/main" id="{0B634F69-47D3-6340-82F6-E6001F0A2F41}"/>
+              </a:ext>
+            </a:extLst>
+          </p:cNvPr>
+          <p:cNvSpPr txBox="1"/>
+          <p:nvPr/>
+        </p:nvSpPr>
+        <p:spPr>
+          <a:xfrm>
+            <a:off x="444703" y="193055"/>
+            <a:ext cx="11320001" cy="1200329"/>
+          </a:xfrm>
+          <a:prstGeom prst="rect">
+            <a:avLst/>
+          </a:prstGeom>
+          <a:noFill/>
+        </p:spPr>
+        <p:txBody>
+          <a:bodyPr wrap="square" rtlCol="0">
+            <a:spAutoFit/>
+          </a:bodyPr>
+          <a:lstStyle/>
+          <a:p>
+            <a:r>
               <a:rPr lang="" b="1" dirty="0"/>
               <a:t>Performance Target Selection:</a:t>
             </a:r>
+            <a:endParaRPr lang="he-IL" b="1" dirty="0"/>
+          </a:p>
+          <a:p>
             <a:endParaRPr lang="he-IL" dirty="0"/>
           </a:p>
           <a:p>
@@ -4404,7 +8788,7 @@
           <p:nvPr>
             <p:extLst>
               <p:ext uri="{D42A27DB-BD31-4B8C-83A1-F6EECF244321}">
-                <p14:modId xmlns:p14="http://schemas.microsoft.com/office/powerpoint/2010/main" val="512177599"/>
+                <p14:modId xmlns:p14="http://schemas.microsoft.com/office/powerpoint/2010/main" val="4176444207"/>
               </p:ext>
             </p:extLst>
           </p:nvPr>
@@ -4580,10 +8964,10 @@
                         <a:buNone/>
                       </a:pPr>
                       <a:r>
-                        <a:rPr lang="en-US" sz="1200" dirty="0"/>
+                        <a:rPr lang="en-US" sz="1200" b="1" dirty="0"/>
                         <a:t>Approaching measurement noise level</a:t>
                       </a:r>
-                      <a:endParaRPr lang="" sz="1200" dirty="0"/>
+                      <a:endParaRPr lang="" sz="1200" b="1" dirty="0"/>
                     </a:p>
                   </a:txBody>
                   <a:tcPr anchor="ctr"/>
@@ -4657,6 +9041,1571 @@
     <p:extLst>
       <p:ext uri="{BB962C8B-B14F-4D97-AF65-F5344CB8AC3E}">
         <p14:creationId xmlns:p14="http://schemas.microsoft.com/office/powerpoint/2010/main" val="834371571"/>
+      </p:ext>
+    </p:extLst>
+  </p:cSld>
+  <p:clrMapOvr>
+    <a:masterClrMapping/>
+  </p:clrMapOvr>
+</p:sld>
+</file>
+
+<file path=ppt/slides/slide5.xml><?xml version="1.0" encoding="utf-8"?>
+<p:sld xmlns:a="http://schemas.openxmlformats.org/drawingml/2006/main" xmlns:r="http://schemas.openxmlformats.org/officeDocument/2006/relationships" xmlns:p="http://schemas.openxmlformats.org/presentationml/2006/main">
+  <p:cSld>
+    <p:spTree>
+      <p:nvGrpSpPr>
+        <p:cNvPr id="1" name=""/>
+        <p:cNvGrpSpPr/>
+        <p:nvPr/>
+      </p:nvGrpSpPr>
+      <p:grpSpPr>
+        <a:xfrm>
+          <a:off x="0" y="0"/>
+          <a:ext cx="0" cy="0"/>
+          <a:chOff x="0" y="0"/>
+          <a:chExt cx="0" cy="0"/>
+        </a:xfrm>
+      </p:grpSpPr>
+      <p:sp>
+        <p:nvSpPr>
+          <p:cNvPr id="2" name="TextBox 1">
+            <a:extLst>
+              <a:ext uri="{FF2B5EF4-FFF2-40B4-BE49-F238E27FC236}">
+                <a16:creationId xmlns:a16="http://schemas.microsoft.com/office/drawing/2014/main" id="{3BAA89AE-181F-004D-E569-9173FE18C08A}"/>
+              </a:ext>
+            </a:extLst>
+          </p:cNvPr>
+          <p:cNvSpPr txBox="1"/>
+          <p:nvPr/>
+        </p:nvSpPr>
+        <p:spPr>
+          <a:xfrm>
+            <a:off x="131657" y="85718"/>
+            <a:ext cx="3821559" cy="369332"/>
+          </a:xfrm>
+          <a:prstGeom prst="rect">
+            <a:avLst/>
+          </a:prstGeom>
+          <a:noFill/>
+        </p:spPr>
+        <p:txBody>
+          <a:bodyPr wrap="none" rtlCol="0">
+            <a:spAutoFit/>
+          </a:bodyPr>
+          <a:lstStyle/>
+          <a:p>
+            <a:r>
+              <a:rPr lang="en-US" b="1" dirty="0"/>
+              <a:t>What do we have as an initial data?</a:t>
+            </a:r>
+            <a:endParaRPr lang="LID4096" b="1" dirty="0"/>
+          </a:p>
+        </p:txBody>
+      </p:sp>
+      <p:pic>
+        <p:nvPicPr>
+          <p:cNvPr id="4" name="Picture 3">
+            <a:extLst>
+              <a:ext uri="{FF2B5EF4-FFF2-40B4-BE49-F238E27FC236}">
+                <a16:creationId xmlns:a16="http://schemas.microsoft.com/office/drawing/2014/main" id="{DE9B36B9-DFC0-9D74-5F4D-36D2EB1FA76E}"/>
+              </a:ext>
+            </a:extLst>
+          </p:cNvPr>
+          <p:cNvPicPr>
+            <a:picLocks noChangeAspect="1"/>
+          </p:cNvPicPr>
+          <p:nvPr/>
+        </p:nvPicPr>
+        <p:blipFill>
+          <a:blip r:embed="rId2"/>
+          <a:stretch>
+            <a:fillRect/>
+          </a:stretch>
+        </p:blipFill>
+        <p:spPr>
+          <a:xfrm>
+            <a:off x="131657" y="3248530"/>
+            <a:ext cx="7495117" cy="3392723"/>
+          </a:xfrm>
+          <a:prstGeom prst="rect">
+            <a:avLst/>
+          </a:prstGeom>
+        </p:spPr>
+      </p:pic>
+      <p:grpSp>
+        <p:nvGrpSpPr>
+          <p:cNvPr id="23" name="Group 22">
+            <a:extLst>
+              <a:ext uri="{FF2B5EF4-FFF2-40B4-BE49-F238E27FC236}">
+                <a16:creationId xmlns:a16="http://schemas.microsoft.com/office/drawing/2014/main" id="{2B46C2AB-A0B1-828E-F932-72A7EB624B52}"/>
+              </a:ext>
+            </a:extLst>
+          </p:cNvPr>
+          <p:cNvGrpSpPr/>
+          <p:nvPr/>
+        </p:nvGrpSpPr>
+        <p:grpSpPr>
+          <a:xfrm>
+            <a:off x="13547" y="816539"/>
+            <a:ext cx="5520699" cy="1956071"/>
+            <a:chOff x="13547" y="816539"/>
+            <a:chExt cx="5520699" cy="1956071"/>
+          </a:xfrm>
+        </p:grpSpPr>
+        <p:grpSp>
+          <p:nvGrpSpPr>
+            <p:cNvPr id="9" name="Group 8">
+              <a:extLst>
+                <a:ext uri="{FF2B5EF4-FFF2-40B4-BE49-F238E27FC236}">
+                  <a16:creationId xmlns:a16="http://schemas.microsoft.com/office/drawing/2014/main" id="{FC07FFA6-CEBC-967F-05BA-07288506CEEA}"/>
+                </a:ext>
+              </a:extLst>
+            </p:cNvPr>
+            <p:cNvGrpSpPr/>
+            <p:nvPr/>
+          </p:nvGrpSpPr>
+          <p:grpSpPr>
+            <a:xfrm>
+              <a:off x="592667" y="816539"/>
+              <a:ext cx="4941579" cy="1956071"/>
+              <a:chOff x="592667" y="816539"/>
+              <a:chExt cx="4941579" cy="1956071"/>
+            </a:xfrm>
+          </p:grpSpPr>
+          <p:pic>
+            <p:nvPicPr>
+              <p:cNvPr id="6" name="Picture 5">
+                <a:extLst>
+                  <a:ext uri="{FF2B5EF4-FFF2-40B4-BE49-F238E27FC236}">
+                    <a16:creationId xmlns:a16="http://schemas.microsoft.com/office/drawing/2014/main" id="{5FBEE714-BC4A-1A55-9395-350BFE3B4106}"/>
+                  </a:ext>
+                </a:extLst>
+              </p:cNvPr>
+              <p:cNvPicPr>
+                <a:picLocks noChangeAspect="1"/>
+              </p:cNvPicPr>
+              <p:nvPr/>
+            </p:nvPicPr>
+            <p:blipFill>
+              <a:blip r:embed="rId3"/>
+              <a:stretch>
+                <a:fillRect/>
+              </a:stretch>
+            </p:blipFill>
+            <p:spPr>
+              <a:xfrm>
+                <a:off x="839894" y="816539"/>
+                <a:ext cx="4694352" cy="1619023"/>
+              </a:xfrm>
+              <a:prstGeom prst="rect">
+                <a:avLst/>
+              </a:prstGeom>
+            </p:spPr>
+          </p:pic>
+          <p:sp>
+            <p:nvSpPr>
+              <p:cNvPr id="7" name="TextBox 6">
+                <a:extLst>
+                  <a:ext uri="{FF2B5EF4-FFF2-40B4-BE49-F238E27FC236}">
+                    <a16:creationId xmlns:a16="http://schemas.microsoft.com/office/drawing/2014/main" id="{93E29352-B6B4-EB03-7A6C-47604E93CDFC}"/>
+                  </a:ext>
+                </a:extLst>
+              </p:cNvPr>
+              <p:cNvSpPr txBox="1"/>
+              <p:nvPr/>
+            </p:nvSpPr>
+            <p:spPr>
+              <a:xfrm>
+                <a:off x="914400" y="2403278"/>
+                <a:ext cx="1551093" cy="369332"/>
+              </a:xfrm>
+              <a:prstGeom prst="rect">
+                <a:avLst/>
+              </a:prstGeom>
+              <a:noFill/>
+            </p:spPr>
+            <p:txBody>
+              <a:bodyPr wrap="square" rtlCol="0">
+                <a:spAutoFit/>
+              </a:bodyPr>
+              <a:lstStyle/>
+              <a:p>
+                <a:r>
+                  <a:rPr lang="he-IL" dirty="0"/>
+                  <a:t>......</a:t>
+                </a:r>
+                <a:endParaRPr lang="LID4096" dirty="0"/>
+              </a:p>
+            </p:txBody>
+          </p:sp>
+          <p:sp>
+            <p:nvSpPr>
+              <p:cNvPr id="8" name="Left Brace 7">
+                <a:extLst>
+                  <a:ext uri="{FF2B5EF4-FFF2-40B4-BE49-F238E27FC236}">
+                    <a16:creationId xmlns:a16="http://schemas.microsoft.com/office/drawing/2014/main" id="{CFE8BC09-5359-8FCC-C6F9-DC28EA6ACF25}"/>
+                  </a:ext>
+                </a:extLst>
+              </p:cNvPr>
+              <p:cNvSpPr/>
+              <p:nvPr/>
+            </p:nvSpPr>
+            <p:spPr>
+              <a:xfrm>
+                <a:off x="592667" y="1758759"/>
+                <a:ext cx="209974" cy="866987"/>
+              </a:xfrm>
+              <a:prstGeom prst="leftBrace">
+                <a:avLst/>
+              </a:prstGeom>
+            </p:spPr>
+            <p:style>
+              <a:lnRef idx="2">
+                <a:schemeClr val="accent1"/>
+              </a:lnRef>
+              <a:fillRef idx="0">
+                <a:schemeClr val="accent1"/>
+              </a:fillRef>
+              <a:effectRef idx="1">
+                <a:schemeClr val="accent1"/>
+              </a:effectRef>
+              <a:fontRef idx="minor">
+                <a:schemeClr val="tx1"/>
+              </a:fontRef>
+            </p:style>
+            <p:txBody>
+              <a:bodyPr rtlCol="0" anchor="ctr"/>
+              <a:lstStyle/>
+              <a:p>
+                <a:pPr algn="ctr"/>
+                <a:endParaRPr lang="LID4096"/>
+              </a:p>
+            </p:txBody>
+          </p:sp>
+        </p:grpSp>
+        <p:sp>
+          <p:nvSpPr>
+            <p:cNvPr id="10" name="TextBox 9">
+              <a:extLst>
+                <a:ext uri="{FF2B5EF4-FFF2-40B4-BE49-F238E27FC236}">
+                  <a16:creationId xmlns:a16="http://schemas.microsoft.com/office/drawing/2014/main" id="{2D21E78F-3C32-ED3B-86E8-62E25678DDB2}"/>
+                </a:ext>
+              </a:extLst>
+            </p:cNvPr>
+            <p:cNvSpPr txBox="1"/>
+            <p:nvPr/>
+          </p:nvSpPr>
+          <p:spPr>
+            <a:xfrm>
+              <a:off x="13547" y="2007586"/>
+              <a:ext cx="684107" cy="338554"/>
+            </a:xfrm>
+            <a:prstGeom prst="rect">
+              <a:avLst/>
+            </a:prstGeom>
+            <a:noFill/>
+          </p:spPr>
+          <p:txBody>
+            <a:bodyPr wrap="square" rtlCol="0">
+              <a:spAutoFit/>
+            </a:bodyPr>
+            <a:lstStyle/>
+            <a:p>
+              <a:r>
+                <a:rPr lang="he-IL" sz="1600" b="1" dirty="0"/>
+                <a:t>312</a:t>
+              </a:r>
+              <a:endParaRPr lang="LID4096" sz="1600" b="1" dirty="0"/>
+            </a:p>
+          </p:txBody>
+        </p:sp>
+      </p:grpSp>
+      <p:sp>
+        <p:nvSpPr>
+          <p:cNvPr id="12" name="TextBox 11">
+            <a:extLst>
+              <a:ext uri="{FF2B5EF4-FFF2-40B4-BE49-F238E27FC236}">
+                <a16:creationId xmlns:a16="http://schemas.microsoft.com/office/drawing/2014/main" id="{C02ABD11-BF1C-FC6A-8D4B-3404785B724B}"/>
+              </a:ext>
+            </a:extLst>
+          </p:cNvPr>
+          <p:cNvSpPr txBox="1"/>
+          <p:nvPr/>
+        </p:nvSpPr>
+        <p:spPr>
+          <a:xfrm>
+            <a:off x="7262708" y="303319"/>
+            <a:ext cx="5096933" cy="338554"/>
+          </a:xfrm>
+          <a:prstGeom prst="rect">
+            <a:avLst/>
+          </a:prstGeom>
+          <a:noFill/>
+        </p:spPr>
+        <p:txBody>
+          <a:bodyPr wrap="square" rtlCol="0">
+            <a:spAutoFit/>
+          </a:bodyPr>
+          <a:lstStyle/>
+          <a:p>
+            <a:r>
+              <a:rPr lang="en-US" sz="1600" b="1" i="1" dirty="0"/>
+              <a:t>Dragon, computational data set for molecules</a:t>
+            </a:r>
+            <a:endParaRPr lang="LID4096" sz="1600" b="1" i="1" dirty="0"/>
+          </a:p>
+        </p:txBody>
+      </p:sp>
+      <p:grpSp>
+        <p:nvGrpSpPr>
+          <p:cNvPr id="27" name="Group 26">
+            <a:extLst>
+              <a:ext uri="{FF2B5EF4-FFF2-40B4-BE49-F238E27FC236}">
+                <a16:creationId xmlns:a16="http://schemas.microsoft.com/office/drawing/2014/main" id="{CCC54312-73B0-7455-D4A7-D47575F063E7}"/>
+              </a:ext>
+            </a:extLst>
+          </p:cNvPr>
+          <p:cNvGrpSpPr/>
+          <p:nvPr/>
+        </p:nvGrpSpPr>
+        <p:grpSpPr>
+          <a:xfrm>
+            <a:off x="7626774" y="615072"/>
+            <a:ext cx="3535681" cy="2327152"/>
+            <a:chOff x="6096000" y="632794"/>
+            <a:chExt cx="3535681" cy="2327152"/>
+          </a:xfrm>
+        </p:grpSpPr>
+        <p:sp>
+          <p:nvSpPr>
+            <p:cNvPr id="11" name="Rectangle 10">
+              <a:extLst>
+                <a:ext uri="{FF2B5EF4-FFF2-40B4-BE49-F238E27FC236}">
+                  <a16:creationId xmlns:a16="http://schemas.microsoft.com/office/drawing/2014/main" id="{82EE073D-8154-EE02-DEB1-807272EEA68C}"/>
+                </a:ext>
+              </a:extLst>
+            </p:cNvPr>
+            <p:cNvSpPr/>
+            <p:nvPr/>
+          </p:nvSpPr>
+          <p:spPr>
+            <a:xfrm>
+              <a:off x="6929121" y="1025983"/>
+              <a:ext cx="2702560" cy="1933963"/>
+            </a:xfrm>
+            <a:prstGeom prst="rect">
+              <a:avLst/>
+            </a:prstGeom>
+            <a:solidFill>
+              <a:schemeClr val="tx2">
+                <a:lumMod val="25000"/>
+                <a:lumOff val="75000"/>
+              </a:schemeClr>
+            </a:solidFill>
+          </p:spPr>
+          <p:style>
+            <a:lnRef idx="2">
+              <a:schemeClr val="accent1">
+                <a:shade val="15000"/>
+              </a:schemeClr>
+            </a:lnRef>
+            <a:fillRef idx="1">
+              <a:schemeClr val="accent1"/>
+            </a:fillRef>
+            <a:effectRef idx="0">
+              <a:schemeClr val="accent1"/>
+            </a:effectRef>
+            <a:fontRef idx="minor">
+              <a:schemeClr val="lt1"/>
+            </a:fontRef>
+          </p:style>
+          <p:txBody>
+            <a:bodyPr rtlCol="0" anchor="ctr"/>
+            <a:lstStyle/>
+            <a:p>
+              <a:pPr algn="ctr"/>
+              <a:endParaRPr lang="LID4096"/>
+            </a:p>
+          </p:txBody>
+        </p:sp>
+        <p:sp>
+          <p:nvSpPr>
+            <p:cNvPr id="13" name="TextBox 12">
+              <a:extLst>
+                <a:ext uri="{FF2B5EF4-FFF2-40B4-BE49-F238E27FC236}">
+                  <a16:creationId xmlns:a16="http://schemas.microsoft.com/office/drawing/2014/main" id="{E2154EF2-7BC8-7A5A-FEAD-E7F778111E3B}"/>
+                </a:ext>
+              </a:extLst>
+            </p:cNvPr>
+            <p:cNvSpPr txBox="1"/>
+            <p:nvPr/>
+          </p:nvSpPr>
+          <p:spPr>
+            <a:xfrm>
+              <a:off x="6096000" y="1758759"/>
+              <a:ext cx="751840" cy="369332"/>
+            </a:xfrm>
+            <a:prstGeom prst="rect">
+              <a:avLst/>
+            </a:prstGeom>
+            <a:noFill/>
+          </p:spPr>
+          <p:txBody>
+            <a:bodyPr wrap="square" rtlCol="0">
+              <a:spAutoFit/>
+            </a:bodyPr>
+            <a:lstStyle/>
+            <a:p>
+              <a:r>
+                <a:rPr lang="en-US" dirty="0"/>
+                <a:t>4065</a:t>
+              </a:r>
+              <a:endParaRPr lang="LID4096" dirty="0"/>
+            </a:p>
+          </p:txBody>
+        </p:sp>
+        <p:cxnSp>
+          <p:nvCxnSpPr>
+            <p:cNvPr id="15" name="Straight Connector 14">
+              <a:extLst>
+                <a:ext uri="{FF2B5EF4-FFF2-40B4-BE49-F238E27FC236}">
+                  <a16:creationId xmlns:a16="http://schemas.microsoft.com/office/drawing/2014/main" id="{5BBFE7F0-54C0-6A8E-113B-5F6481DFE993}"/>
+                </a:ext>
+              </a:extLst>
+            </p:cNvPr>
+            <p:cNvCxnSpPr>
+              <a:cxnSpLocks/>
+              <a:endCxn id="13" idx="0"/>
+            </p:cNvCxnSpPr>
+            <p:nvPr/>
+          </p:nvCxnSpPr>
+          <p:spPr>
+            <a:xfrm>
+              <a:off x="6471920" y="1025983"/>
+              <a:ext cx="0" cy="732776"/>
+            </a:xfrm>
+            <a:prstGeom prst="line">
+              <a:avLst/>
+            </a:prstGeom>
+            <a:ln>
+              <a:headEnd type="diamond"/>
+            </a:ln>
+          </p:spPr>
+          <p:style>
+            <a:lnRef idx="2">
+              <a:schemeClr val="accent1"/>
+            </a:lnRef>
+            <a:fillRef idx="0">
+              <a:schemeClr val="accent1"/>
+            </a:fillRef>
+            <a:effectRef idx="1">
+              <a:schemeClr val="accent1"/>
+            </a:effectRef>
+            <a:fontRef idx="minor">
+              <a:schemeClr val="tx1"/>
+            </a:fontRef>
+          </p:style>
+        </p:cxnSp>
+        <p:cxnSp>
+          <p:nvCxnSpPr>
+            <p:cNvPr id="16" name="Straight Connector 15">
+              <a:extLst>
+                <a:ext uri="{FF2B5EF4-FFF2-40B4-BE49-F238E27FC236}">
+                  <a16:creationId xmlns:a16="http://schemas.microsoft.com/office/drawing/2014/main" id="{24D16D01-8A4F-4A9D-C1F9-53D5F1E23825}"/>
+                </a:ext>
+              </a:extLst>
+            </p:cNvPr>
+            <p:cNvCxnSpPr>
+              <a:cxnSpLocks/>
+            </p:cNvCxnSpPr>
+            <p:nvPr/>
+          </p:nvCxnSpPr>
+          <p:spPr>
+            <a:xfrm>
+              <a:off x="6475307" y="2176863"/>
+              <a:ext cx="0" cy="732776"/>
+            </a:xfrm>
+            <a:prstGeom prst="line">
+              <a:avLst/>
+            </a:prstGeom>
+            <a:ln>
+              <a:tailEnd type="diamond"/>
+            </a:ln>
+          </p:spPr>
+          <p:style>
+            <a:lnRef idx="2">
+              <a:schemeClr val="accent1"/>
+            </a:lnRef>
+            <a:fillRef idx="0">
+              <a:schemeClr val="accent1"/>
+            </a:fillRef>
+            <a:effectRef idx="1">
+              <a:schemeClr val="accent1"/>
+            </a:effectRef>
+            <a:fontRef idx="minor">
+              <a:schemeClr val="tx1"/>
+            </a:fontRef>
+          </p:style>
+        </p:cxnSp>
+        <p:sp>
+          <p:nvSpPr>
+            <p:cNvPr id="18" name="TextBox 17">
+              <a:extLst>
+                <a:ext uri="{FF2B5EF4-FFF2-40B4-BE49-F238E27FC236}">
+                  <a16:creationId xmlns:a16="http://schemas.microsoft.com/office/drawing/2014/main" id="{ED0639CA-50A6-A356-3BC1-7A60B6683023}"/>
+                </a:ext>
+              </a:extLst>
+            </p:cNvPr>
+            <p:cNvSpPr txBox="1"/>
+            <p:nvPr/>
+          </p:nvSpPr>
+          <p:spPr>
+            <a:xfrm>
+              <a:off x="7850294" y="632794"/>
+              <a:ext cx="751840" cy="369332"/>
+            </a:xfrm>
+            <a:prstGeom prst="rect">
+              <a:avLst/>
+            </a:prstGeom>
+            <a:noFill/>
+          </p:spPr>
+          <p:txBody>
+            <a:bodyPr wrap="square" rtlCol="0">
+              <a:spAutoFit/>
+            </a:bodyPr>
+            <a:lstStyle/>
+            <a:p>
+              <a:r>
+                <a:rPr lang="en-US" dirty="0"/>
+                <a:t>2491</a:t>
+              </a:r>
+              <a:endParaRPr lang="LID4096" dirty="0"/>
+            </a:p>
+          </p:txBody>
+        </p:sp>
+        <p:cxnSp>
+          <p:nvCxnSpPr>
+            <p:cNvPr id="20" name="Straight Connector 19">
+              <a:extLst>
+                <a:ext uri="{FF2B5EF4-FFF2-40B4-BE49-F238E27FC236}">
+                  <a16:creationId xmlns:a16="http://schemas.microsoft.com/office/drawing/2014/main" id="{CABFB256-7952-404F-3104-869E78E58681}"/>
+                </a:ext>
+              </a:extLst>
+            </p:cNvPr>
+            <p:cNvCxnSpPr>
+              <a:endCxn id="18" idx="1"/>
+            </p:cNvCxnSpPr>
+            <p:nvPr/>
+          </p:nvCxnSpPr>
+          <p:spPr>
+            <a:xfrm>
+              <a:off x="7003627" y="816539"/>
+              <a:ext cx="846667" cy="921"/>
+            </a:xfrm>
+            <a:prstGeom prst="line">
+              <a:avLst/>
+            </a:prstGeom>
+            <a:ln>
+              <a:headEnd type="diamond"/>
+            </a:ln>
+          </p:spPr>
+          <p:style>
+            <a:lnRef idx="2">
+              <a:schemeClr val="accent1"/>
+            </a:lnRef>
+            <a:fillRef idx="0">
+              <a:schemeClr val="accent1"/>
+            </a:fillRef>
+            <a:effectRef idx="1">
+              <a:schemeClr val="accent1"/>
+            </a:effectRef>
+            <a:fontRef idx="minor">
+              <a:schemeClr val="tx1"/>
+            </a:fontRef>
+          </p:style>
+        </p:cxnSp>
+        <p:cxnSp>
+          <p:nvCxnSpPr>
+            <p:cNvPr id="21" name="Straight Connector 20">
+              <a:extLst>
+                <a:ext uri="{FF2B5EF4-FFF2-40B4-BE49-F238E27FC236}">
+                  <a16:creationId xmlns:a16="http://schemas.microsoft.com/office/drawing/2014/main" id="{CFDBB57D-AE9A-228F-0262-EAEB02872050}"/>
+                </a:ext>
+              </a:extLst>
+            </p:cNvPr>
+            <p:cNvCxnSpPr>
+              <a:cxnSpLocks/>
+            </p:cNvCxnSpPr>
+            <p:nvPr/>
+          </p:nvCxnSpPr>
+          <p:spPr>
+            <a:xfrm>
+              <a:off x="8602134" y="805810"/>
+              <a:ext cx="1029547" cy="10729"/>
+            </a:xfrm>
+            <a:prstGeom prst="line">
+              <a:avLst/>
+            </a:prstGeom>
+            <a:ln>
+              <a:headEnd type="none"/>
+              <a:tailEnd type="diamond"/>
+            </a:ln>
+          </p:spPr>
+          <p:style>
+            <a:lnRef idx="2">
+              <a:schemeClr val="accent1"/>
+            </a:lnRef>
+            <a:fillRef idx="0">
+              <a:schemeClr val="accent1"/>
+            </a:fillRef>
+            <a:effectRef idx="1">
+              <a:schemeClr val="accent1"/>
+            </a:effectRef>
+            <a:fontRef idx="minor">
+              <a:schemeClr val="tx1"/>
+            </a:fontRef>
+          </p:style>
+        </p:cxnSp>
+      </p:grpSp>
+      <p:sp>
+        <p:nvSpPr>
+          <p:cNvPr id="24" name="TextBox 23">
+            <a:extLst>
+              <a:ext uri="{FF2B5EF4-FFF2-40B4-BE49-F238E27FC236}">
+                <a16:creationId xmlns:a16="http://schemas.microsoft.com/office/drawing/2014/main" id="{40D55DC2-302A-F4BE-342A-4F227F73679D}"/>
+              </a:ext>
+            </a:extLst>
+          </p:cNvPr>
+          <p:cNvSpPr txBox="1"/>
+          <p:nvPr/>
+        </p:nvSpPr>
+        <p:spPr>
+          <a:xfrm>
+            <a:off x="426938" y="2942224"/>
+            <a:ext cx="5520264" cy="338554"/>
+          </a:xfrm>
+          <a:prstGeom prst="rect">
+            <a:avLst/>
+          </a:prstGeom>
+          <a:noFill/>
+        </p:spPr>
+        <p:txBody>
+          <a:bodyPr wrap="square" rtlCol="0">
+            <a:spAutoFit/>
+          </a:bodyPr>
+          <a:lstStyle/>
+          <a:p>
+            <a:r>
+              <a:rPr lang="en-US" sz="1600" b="1" dirty="0"/>
+              <a:t>Merge between target and feature -&gt; 282 molecules</a:t>
+            </a:r>
+            <a:endParaRPr lang="LID4096" sz="1600" b="1" dirty="0"/>
+          </a:p>
+        </p:txBody>
+      </p:sp>
+      <p:sp>
+        <p:nvSpPr>
+          <p:cNvPr id="26" name="TextBox 25">
+            <a:extLst>
+              <a:ext uri="{FF2B5EF4-FFF2-40B4-BE49-F238E27FC236}">
+                <a16:creationId xmlns:a16="http://schemas.microsoft.com/office/drawing/2014/main" id="{6BFB2310-F4D4-D3DB-A3D6-B8E2BB03D4F2}"/>
+              </a:ext>
+            </a:extLst>
+          </p:cNvPr>
+          <p:cNvSpPr txBox="1"/>
+          <p:nvPr/>
+        </p:nvSpPr>
+        <p:spPr>
+          <a:xfrm>
+            <a:off x="7626774" y="3429000"/>
+            <a:ext cx="4117324" cy="3139321"/>
+          </a:xfrm>
+          <a:prstGeom prst="rect">
+            <a:avLst/>
+          </a:prstGeom>
+          <a:noFill/>
+        </p:spPr>
+        <p:txBody>
+          <a:bodyPr wrap="square" rtlCol="0">
+            <a:spAutoFit/>
+          </a:bodyPr>
+          <a:lstStyle/>
+          <a:p>
+            <a:r>
+              <a:rPr lang="en-US" b="1" dirty="0"/>
+              <a:t>From literature review following predictors can be relevant:</a:t>
+            </a:r>
+          </a:p>
+          <a:p>
+            <a:endParaRPr lang="en-US" dirty="0"/>
+          </a:p>
+          <a:p>
+            <a:r>
+              <a:rPr lang="en-US" dirty="0"/>
+              <a:t>~ vapor pressure (std. condition)</a:t>
+            </a:r>
+          </a:p>
+          <a:p>
+            <a:r>
+              <a:rPr lang="en-US" dirty="0"/>
+              <a:t>~ boiling point (std. condition)</a:t>
+            </a:r>
+          </a:p>
+          <a:p>
+            <a:endParaRPr lang="en-US" dirty="0"/>
+          </a:p>
+          <a:p>
+            <a:r>
+              <a:rPr lang="en-US" dirty="0"/>
+              <a:t>~ Alpha-shape</a:t>
+            </a:r>
+          </a:p>
+          <a:p>
+            <a:r>
+              <a:rPr lang="en-US" dirty="0"/>
+              <a:t>~ </a:t>
+            </a:r>
+            <a:r>
+              <a:rPr lang="en-US" dirty="0" err="1"/>
+              <a:t>MLogP</a:t>
+            </a:r>
+            <a:endParaRPr lang="en-US" dirty="0"/>
+          </a:p>
+          <a:p>
+            <a:r>
+              <a:rPr lang="en-US" dirty="0"/>
+              <a:t>~ </a:t>
+            </a:r>
+            <a:r>
+              <a:rPr lang="en-US" dirty="0" err="1"/>
+              <a:t>RDKit</a:t>
+            </a:r>
+            <a:r>
+              <a:rPr lang="en-US" dirty="0"/>
+              <a:t> Library</a:t>
+            </a:r>
+          </a:p>
+          <a:p>
+            <a:endParaRPr lang="en-US" dirty="0"/>
+          </a:p>
+          <a:p>
+            <a:endParaRPr lang="LID4096" dirty="0"/>
+          </a:p>
+        </p:txBody>
+      </p:sp>
+      <p:sp>
+        <p:nvSpPr>
+          <p:cNvPr id="5" name="TextBox 4">
+            <a:extLst>
+              <a:ext uri="{FF2B5EF4-FFF2-40B4-BE49-F238E27FC236}">
+                <a16:creationId xmlns:a16="http://schemas.microsoft.com/office/drawing/2014/main" id="{F498AB37-3C76-F7DB-D673-F6869F499C8B}"/>
+              </a:ext>
+            </a:extLst>
+          </p:cNvPr>
+          <p:cNvSpPr txBox="1"/>
+          <p:nvPr/>
+        </p:nvSpPr>
+        <p:spPr>
+          <a:xfrm>
+            <a:off x="7735711" y="38753"/>
+            <a:ext cx="6191954" cy="307777"/>
+          </a:xfrm>
+          <a:prstGeom prst="rect">
+            <a:avLst/>
+          </a:prstGeom>
+          <a:noFill/>
+        </p:spPr>
+        <p:txBody>
+          <a:bodyPr wrap="square">
+            <a:spAutoFit/>
+          </a:bodyPr>
+          <a:lstStyle/>
+          <a:p>
+            <a:r>
+              <a:rPr lang="LID4096" sz="1400" dirty="0"/>
+              <a:t>https://www.talete.mi.it/products/products.htm</a:t>
+            </a:r>
+          </a:p>
+        </p:txBody>
+      </p:sp>
+    </p:spTree>
+    <p:extLst>
+      <p:ext uri="{BB962C8B-B14F-4D97-AF65-F5344CB8AC3E}">
+        <p14:creationId xmlns:p14="http://schemas.microsoft.com/office/powerpoint/2010/main" val="2421359923"/>
+      </p:ext>
+    </p:extLst>
+  </p:cSld>
+  <p:clrMapOvr>
+    <a:masterClrMapping/>
+  </p:clrMapOvr>
+</p:sld>
+</file>
+
+<file path=ppt/slides/slide6.xml><?xml version="1.0" encoding="utf-8"?>
+<p:sld xmlns:a="http://schemas.openxmlformats.org/drawingml/2006/main" xmlns:r="http://schemas.openxmlformats.org/officeDocument/2006/relationships" xmlns:p="http://schemas.openxmlformats.org/presentationml/2006/main">
+  <p:cSld>
+    <p:spTree>
+      <p:nvGrpSpPr>
+        <p:cNvPr id="1" name=""/>
+        <p:cNvGrpSpPr/>
+        <p:nvPr/>
+      </p:nvGrpSpPr>
+      <p:grpSpPr>
+        <a:xfrm>
+          <a:off x="0" y="0"/>
+          <a:ext cx="0" cy="0"/>
+          <a:chOff x="0" y="0"/>
+          <a:chExt cx="0" cy="0"/>
+        </a:xfrm>
+      </p:grpSpPr>
+      <p:sp>
+        <p:nvSpPr>
+          <p:cNvPr id="2" name="TextBox 1">
+            <a:extLst>
+              <a:ext uri="{FF2B5EF4-FFF2-40B4-BE49-F238E27FC236}">
+                <a16:creationId xmlns:a16="http://schemas.microsoft.com/office/drawing/2014/main" id="{DFE526A6-647B-9228-2E1E-E555301C5767}"/>
+              </a:ext>
+            </a:extLst>
+          </p:cNvPr>
+          <p:cNvSpPr txBox="1"/>
+          <p:nvPr/>
+        </p:nvSpPr>
+        <p:spPr>
+          <a:xfrm>
+            <a:off x="523875" y="342900"/>
+            <a:ext cx="10306050" cy="369332"/>
+          </a:xfrm>
+          <a:prstGeom prst="rect">
+            <a:avLst/>
+          </a:prstGeom>
+          <a:noFill/>
+        </p:spPr>
+        <p:txBody>
+          <a:bodyPr wrap="square" rtlCol="0">
+            <a:spAutoFit/>
+          </a:bodyPr>
+          <a:lstStyle/>
+          <a:p>
+            <a:r>
+              <a:rPr lang="en-US" dirty="0"/>
+              <a:t>Here I want to show the distribution of Imax values (probably also, Ci and Di)</a:t>
+            </a:r>
+            <a:endParaRPr lang="LID4096" dirty="0"/>
+          </a:p>
+        </p:txBody>
+      </p:sp>
+      <p:sp>
+        <p:nvSpPr>
+          <p:cNvPr id="3" name="TextBox 2">
+            <a:extLst>
+              <a:ext uri="{FF2B5EF4-FFF2-40B4-BE49-F238E27FC236}">
+                <a16:creationId xmlns:a16="http://schemas.microsoft.com/office/drawing/2014/main" id="{6A8DE3EC-EC2D-DA2D-AAA0-D1FEADAAA724}"/>
+              </a:ext>
+            </a:extLst>
+          </p:cNvPr>
+          <p:cNvSpPr txBox="1"/>
+          <p:nvPr/>
+        </p:nvSpPr>
+        <p:spPr>
+          <a:xfrm>
+            <a:off x="590550" y="847725"/>
+            <a:ext cx="6781800" cy="369332"/>
+          </a:xfrm>
+          <a:prstGeom prst="rect">
+            <a:avLst/>
+          </a:prstGeom>
+          <a:noFill/>
+        </p:spPr>
+        <p:txBody>
+          <a:bodyPr wrap="square" rtlCol="0">
+            <a:spAutoFit/>
+          </a:bodyPr>
+          <a:lstStyle/>
+          <a:p>
+            <a:r>
+              <a:rPr lang="en-US" dirty="0"/>
+              <a:t>First Goal is to try to predict the saturation intensity Imax</a:t>
+            </a:r>
+            <a:endParaRPr lang="LID4096" dirty="0"/>
+          </a:p>
+        </p:txBody>
+      </p:sp>
+      <p:sp>
+        <p:nvSpPr>
+          <p:cNvPr id="6" name="TextBox 5">
+            <a:extLst>
+              <a:ext uri="{FF2B5EF4-FFF2-40B4-BE49-F238E27FC236}">
+                <a16:creationId xmlns:a16="http://schemas.microsoft.com/office/drawing/2014/main" id="{54034DC3-FB47-1607-7143-28CBE2961725}"/>
+              </a:ext>
+            </a:extLst>
+          </p:cNvPr>
+          <p:cNvSpPr txBox="1"/>
+          <p:nvPr/>
+        </p:nvSpPr>
+        <p:spPr>
+          <a:xfrm>
+            <a:off x="5600700" y="1724025"/>
+            <a:ext cx="3867150" cy="369332"/>
+          </a:xfrm>
+          <a:prstGeom prst="rect">
+            <a:avLst/>
+          </a:prstGeom>
+          <a:noFill/>
+        </p:spPr>
+        <p:txBody>
+          <a:bodyPr wrap="square" rtlCol="0">
+            <a:spAutoFit/>
+          </a:bodyPr>
+          <a:lstStyle/>
+          <a:p>
+            <a:r>
+              <a:rPr lang="en-US" dirty="0"/>
+              <a:t>Show here the dummy result</a:t>
+            </a:r>
+            <a:endParaRPr lang="LID4096" dirty="0"/>
+          </a:p>
+        </p:txBody>
+      </p:sp>
+      <p:pic>
+        <p:nvPicPr>
+          <p:cNvPr id="7" name="Picture 6">
+            <a:extLst>
+              <a:ext uri="{FF2B5EF4-FFF2-40B4-BE49-F238E27FC236}">
+                <a16:creationId xmlns:a16="http://schemas.microsoft.com/office/drawing/2014/main" id="{078C399C-F42B-360C-684E-DC51FCF47826}"/>
+              </a:ext>
+            </a:extLst>
+          </p:cNvPr>
+          <p:cNvPicPr>
+            <a:picLocks noChangeAspect="1"/>
+          </p:cNvPicPr>
+          <p:nvPr/>
+        </p:nvPicPr>
+        <p:blipFill>
+          <a:blip r:embed="rId2"/>
+          <a:stretch>
+            <a:fillRect/>
+          </a:stretch>
+        </p:blipFill>
+        <p:spPr>
+          <a:xfrm>
+            <a:off x="590550" y="1803760"/>
+            <a:ext cx="5172075" cy="4124325"/>
+          </a:xfrm>
+          <a:prstGeom prst="rect">
+            <a:avLst/>
+          </a:prstGeom>
+        </p:spPr>
+      </p:pic>
+    </p:spTree>
+    <p:extLst>
+      <p:ext uri="{BB962C8B-B14F-4D97-AF65-F5344CB8AC3E}">
+        <p14:creationId xmlns:p14="http://schemas.microsoft.com/office/powerpoint/2010/main" val="3509702930"/>
+      </p:ext>
+    </p:extLst>
+  </p:cSld>
+  <p:clrMapOvr>
+    <a:masterClrMapping/>
+  </p:clrMapOvr>
+</p:sld>
+</file>
+
+<file path=ppt/slides/slide7.xml><?xml version="1.0" encoding="utf-8"?>
+<p:sld xmlns:a="http://schemas.openxmlformats.org/drawingml/2006/main" xmlns:r="http://schemas.openxmlformats.org/officeDocument/2006/relationships" xmlns:p="http://schemas.openxmlformats.org/presentationml/2006/main">
+  <p:cSld>
+    <p:spTree>
+      <p:nvGrpSpPr>
+        <p:cNvPr id="1" name=""/>
+        <p:cNvGrpSpPr/>
+        <p:nvPr/>
+      </p:nvGrpSpPr>
+      <p:grpSpPr>
+        <a:xfrm>
+          <a:off x="0" y="0"/>
+          <a:ext cx="0" cy="0"/>
+          <a:chOff x="0" y="0"/>
+          <a:chExt cx="0" cy="0"/>
+        </a:xfrm>
+      </p:grpSpPr>
+      <p:sp>
+        <p:nvSpPr>
+          <p:cNvPr id="3" name="TextBox 2">
+            <a:extLst>
+              <a:ext uri="{FF2B5EF4-FFF2-40B4-BE49-F238E27FC236}">
+                <a16:creationId xmlns:a16="http://schemas.microsoft.com/office/drawing/2014/main" id="{B6755919-B6B2-BD82-E3F7-0C44994F6151}"/>
+              </a:ext>
+            </a:extLst>
+          </p:cNvPr>
+          <p:cNvSpPr txBox="1"/>
+          <p:nvPr/>
+        </p:nvSpPr>
+        <p:spPr>
+          <a:xfrm>
+            <a:off x="499352" y="415047"/>
+            <a:ext cx="10745821" cy="2585323"/>
+          </a:xfrm>
+          <a:prstGeom prst="rect">
+            <a:avLst/>
+          </a:prstGeom>
+          <a:noFill/>
+        </p:spPr>
+        <p:txBody>
+          <a:bodyPr wrap="square" rtlCol="0">
+            <a:spAutoFit/>
+          </a:bodyPr>
+          <a:lstStyle/>
+          <a:p>
+            <a:r>
+              <a:rPr lang="en-US" dirty="0"/>
+              <a:t>Features Engineering :</a:t>
+            </a:r>
+          </a:p>
+          <a:p>
+            <a:endParaRPr lang="en-US" dirty="0"/>
+          </a:p>
+          <a:p>
+            <a:pPr marL="342900" indent="-342900">
+              <a:buAutoNum type="arabicParenR"/>
+            </a:pPr>
+            <a:r>
+              <a:rPr lang="en-US" dirty="0"/>
+              <a:t>Merge between target (Waka data set) and Features matrix - &gt; 30 sample drops, we stay with 282 samples</a:t>
+            </a:r>
+          </a:p>
+          <a:p>
+            <a:pPr marL="342900" indent="-342900">
+              <a:buAutoNum type="arabicParenR"/>
+            </a:pPr>
+            <a:r>
+              <a:rPr lang="en-US" dirty="0"/>
+              <a:t>Dropping of features with zero variance</a:t>
+            </a:r>
+          </a:p>
+          <a:p>
+            <a:pPr marL="342900" indent="-342900">
+              <a:buAutoNum type="arabicParenR"/>
+            </a:pPr>
+            <a:r>
+              <a:rPr lang="en-US" dirty="0"/>
+              <a:t>Dropping of features with correlation above 0.95  -&gt; stay with 834 features from initial 2491</a:t>
+            </a:r>
+          </a:p>
+          <a:p>
+            <a:pPr marL="342900" indent="-342900">
+              <a:buAutoNum type="arabicParenR"/>
+            </a:pPr>
+            <a:r>
+              <a:rPr lang="en-US" dirty="0"/>
+              <a:t>Running of XGBOOST for features importance (not tunned, and not CV-ed)</a:t>
+            </a:r>
+          </a:p>
+          <a:p>
+            <a:pPr marL="342900" indent="-342900">
+              <a:buAutoNum type="arabicParenR"/>
+            </a:pPr>
+            <a:r>
+              <a:rPr lang="en-US" dirty="0"/>
+              <a:t>Selection of the top 71 features</a:t>
+            </a:r>
+          </a:p>
+          <a:p>
+            <a:pPr marL="342900" indent="-342900">
+              <a:buAutoNum type="arabicParenR"/>
+            </a:pPr>
+            <a:r>
+              <a:rPr lang="en-US" dirty="0"/>
+              <a:t>Wide </a:t>
+            </a:r>
+            <a:r>
+              <a:rPr lang="en-US" dirty="0" err="1"/>
+              <a:t>GridSearch</a:t>
+            </a:r>
+            <a:r>
+              <a:rPr lang="en-US" dirty="0"/>
+              <a:t> - &gt; selection of best params - &gt; Cross Validated prediction</a:t>
+            </a:r>
+          </a:p>
+        </p:txBody>
+      </p:sp>
+      <p:pic>
+        <p:nvPicPr>
+          <p:cNvPr id="9" name="Picture 8">
+            <a:extLst>
+              <a:ext uri="{FF2B5EF4-FFF2-40B4-BE49-F238E27FC236}">
+                <a16:creationId xmlns:a16="http://schemas.microsoft.com/office/drawing/2014/main" id="{8F66EB83-5575-DDC0-CD9C-65865F6CAD01}"/>
+              </a:ext>
+            </a:extLst>
+          </p:cNvPr>
+          <p:cNvPicPr>
+            <a:picLocks noChangeAspect="1"/>
+          </p:cNvPicPr>
+          <p:nvPr/>
+        </p:nvPicPr>
+        <p:blipFill>
+          <a:blip r:embed="rId3"/>
+          <a:stretch>
+            <a:fillRect/>
+          </a:stretch>
+        </p:blipFill>
+        <p:spPr>
+          <a:xfrm>
+            <a:off x="349790" y="2997606"/>
+            <a:ext cx="5352145" cy="3578292"/>
+          </a:xfrm>
+          <a:prstGeom prst="rect">
+            <a:avLst/>
+          </a:prstGeom>
+        </p:spPr>
+      </p:pic>
+      <p:pic>
+        <p:nvPicPr>
+          <p:cNvPr id="11" name="Picture 10">
+            <a:extLst>
+              <a:ext uri="{FF2B5EF4-FFF2-40B4-BE49-F238E27FC236}">
+                <a16:creationId xmlns:a16="http://schemas.microsoft.com/office/drawing/2014/main" id="{7E9DC02D-AB89-450C-9EF0-E2AE555F9E3E}"/>
+              </a:ext>
+            </a:extLst>
+          </p:cNvPr>
+          <p:cNvPicPr>
+            <a:picLocks noChangeAspect="1"/>
+          </p:cNvPicPr>
+          <p:nvPr/>
+        </p:nvPicPr>
+        <p:blipFill>
+          <a:blip r:embed="rId4"/>
+          <a:stretch>
+            <a:fillRect/>
+          </a:stretch>
+        </p:blipFill>
+        <p:spPr>
+          <a:xfrm>
+            <a:off x="5968426" y="2867904"/>
+            <a:ext cx="5617452" cy="3707994"/>
+          </a:xfrm>
+          <a:prstGeom prst="rect">
+            <a:avLst/>
+          </a:prstGeom>
+        </p:spPr>
+      </p:pic>
+    </p:spTree>
+    <p:extLst>
+      <p:ext uri="{BB962C8B-B14F-4D97-AF65-F5344CB8AC3E}">
+        <p14:creationId xmlns:p14="http://schemas.microsoft.com/office/powerpoint/2010/main" val="3086049687"/>
+      </p:ext>
+    </p:extLst>
+  </p:cSld>
+  <p:clrMapOvr>
+    <a:masterClrMapping/>
+  </p:clrMapOvr>
+</p:sld>
+</file>
+
+<file path=ppt/slides/slide8.xml><?xml version="1.0" encoding="utf-8"?>
+<p:sld xmlns:a="http://schemas.openxmlformats.org/drawingml/2006/main" xmlns:r="http://schemas.openxmlformats.org/officeDocument/2006/relationships" xmlns:p="http://schemas.openxmlformats.org/presentationml/2006/main">
+  <p:cSld>
+    <p:spTree>
+      <p:nvGrpSpPr>
+        <p:cNvPr id="1" name=""/>
+        <p:cNvGrpSpPr/>
+        <p:nvPr/>
+      </p:nvGrpSpPr>
+      <p:grpSpPr>
+        <a:xfrm>
+          <a:off x="0" y="0"/>
+          <a:ext cx="0" cy="0"/>
+          <a:chOff x="0" y="0"/>
+          <a:chExt cx="0" cy="0"/>
+        </a:xfrm>
+      </p:grpSpPr>
+      <p:pic>
+        <p:nvPicPr>
+          <p:cNvPr id="3" name="Picture 2">
+            <a:extLst>
+              <a:ext uri="{FF2B5EF4-FFF2-40B4-BE49-F238E27FC236}">
+                <a16:creationId xmlns:a16="http://schemas.microsoft.com/office/drawing/2014/main" id="{F1B7C449-7CC1-F8E6-6F11-DA9D8F9813D5}"/>
+              </a:ext>
+            </a:extLst>
+          </p:cNvPr>
+          <p:cNvPicPr>
+            <a:picLocks noChangeAspect="1"/>
+          </p:cNvPicPr>
+          <p:nvPr/>
+        </p:nvPicPr>
+        <p:blipFill>
+          <a:blip r:embed="rId3"/>
+          <a:stretch>
+            <a:fillRect/>
+          </a:stretch>
+        </p:blipFill>
+        <p:spPr>
+          <a:xfrm>
+            <a:off x="959370" y="847858"/>
+            <a:ext cx="5461730" cy="5595193"/>
+          </a:xfrm>
+          <a:prstGeom prst="rect">
+            <a:avLst/>
+          </a:prstGeom>
+        </p:spPr>
+      </p:pic>
+      <p:sp>
+        <p:nvSpPr>
+          <p:cNvPr id="4" name="TextBox 3">
+            <a:extLst>
+              <a:ext uri="{FF2B5EF4-FFF2-40B4-BE49-F238E27FC236}">
+                <a16:creationId xmlns:a16="http://schemas.microsoft.com/office/drawing/2014/main" id="{664CE599-ABDD-1BEB-D5EE-7174F87E6BD6}"/>
+              </a:ext>
+            </a:extLst>
+          </p:cNvPr>
+          <p:cNvSpPr txBox="1"/>
+          <p:nvPr/>
+        </p:nvSpPr>
+        <p:spPr>
+          <a:xfrm>
+            <a:off x="959370" y="232348"/>
+            <a:ext cx="10942820" cy="369332"/>
+          </a:xfrm>
+          <a:prstGeom prst="rect">
+            <a:avLst/>
+          </a:prstGeom>
+          <a:noFill/>
+        </p:spPr>
+        <p:txBody>
+          <a:bodyPr wrap="square" rtlCol="0">
+            <a:spAutoFit/>
+          </a:bodyPr>
+          <a:lstStyle/>
+          <a:p>
+            <a:r>
+              <a:rPr lang="en-US" dirty="0"/>
+              <a:t>Cross Validated prediction on 5 folds, based on top 71 Dragon features of molecules from Waka Data set</a:t>
+            </a:r>
+            <a:endParaRPr lang="LID4096" dirty="0"/>
+          </a:p>
+        </p:txBody>
+      </p:sp>
+      <p:pic>
+        <p:nvPicPr>
+          <p:cNvPr id="6" name="Picture 5">
+            <a:extLst>
+              <a:ext uri="{FF2B5EF4-FFF2-40B4-BE49-F238E27FC236}">
+                <a16:creationId xmlns:a16="http://schemas.microsoft.com/office/drawing/2014/main" id="{9B57E8A0-D5FC-3FDC-A023-0ADAA19A23AB}"/>
+              </a:ext>
+            </a:extLst>
+          </p:cNvPr>
+          <p:cNvPicPr>
+            <a:picLocks noChangeAspect="1"/>
+          </p:cNvPicPr>
+          <p:nvPr/>
+        </p:nvPicPr>
+        <p:blipFill>
+          <a:blip r:embed="rId4"/>
+          <a:stretch>
+            <a:fillRect/>
+          </a:stretch>
+        </p:blipFill>
+        <p:spPr>
+          <a:xfrm>
+            <a:off x="8013320" y="3028858"/>
+            <a:ext cx="3888870" cy="3515965"/>
+          </a:xfrm>
+          <a:prstGeom prst="rect">
+            <a:avLst/>
+          </a:prstGeom>
+        </p:spPr>
+      </p:pic>
+      <p:pic>
+        <p:nvPicPr>
+          <p:cNvPr id="8" name="Picture 7">
+            <a:extLst>
+              <a:ext uri="{FF2B5EF4-FFF2-40B4-BE49-F238E27FC236}">
+                <a16:creationId xmlns:a16="http://schemas.microsoft.com/office/drawing/2014/main" id="{D50E8E31-25F3-D5DA-8C78-60B31469C812}"/>
+              </a:ext>
+            </a:extLst>
+          </p:cNvPr>
+          <p:cNvPicPr>
+            <a:picLocks noChangeAspect="1"/>
+          </p:cNvPicPr>
+          <p:nvPr/>
+        </p:nvPicPr>
+        <p:blipFill>
+          <a:blip r:embed="rId5"/>
+          <a:stretch>
+            <a:fillRect/>
+          </a:stretch>
+        </p:blipFill>
+        <p:spPr>
+          <a:xfrm>
+            <a:off x="6760656" y="746296"/>
+            <a:ext cx="3147841" cy="2161651"/>
+          </a:xfrm>
+          <a:prstGeom prst="rect">
+            <a:avLst/>
+          </a:prstGeom>
+        </p:spPr>
+      </p:pic>
+    </p:spTree>
+    <p:extLst>
+      <p:ext uri="{BB962C8B-B14F-4D97-AF65-F5344CB8AC3E}">
+        <p14:creationId xmlns:p14="http://schemas.microsoft.com/office/powerpoint/2010/main" val="2429120994"/>
+      </p:ext>
+    </p:extLst>
+  </p:cSld>
+  <p:clrMapOvr>
+    <a:masterClrMapping/>
+  </p:clrMapOvr>
+</p:sld>
+</file>
+
+<file path=ppt/slides/slide9.xml><?xml version="1.0" encoding="utf-8"?>
+<p:sld xmlns:a="http://schemas.openxmlformats.org/drawingml/2006/main" xmlns:r="http://schemas.openxmlformats.org/officeDocument/2006/relationships" xmlns:p="http://schemas.openxmlformats.org/presentationml/2006/main">
+  <p:cSld>
+    <p:spTree>
+      <p:nvGrpSpPr>
+        <p:cNvPr id="1" name=""/>
+        <p:cNvGrpSpPr/>
+        <p:nvPr/>
+      </p:nvGrpSpPr>
+      <p:grpSpPr>
+        <a:xfrm>
+          <a:off x="0" y="0"/>
+          <a:ext cx="0" cy="0"/>
+          <a:chOff x="0" y="0"/>
+          <a:chExt cx="0" cy="0"/>
+        </a:xfrm>
+      </p:grpSpPr>
+      <p:sp>
+        <p:nvSpPr>
+          <p:cNvPr id="4" name="TextBox 3">
+            <a:extLst>
+              <a:ext uri="{FF2B5EF4-FFF2-40B4-BE49-F238E27FC236}">
+                <a16:creationId xmlns:a16="http://schemas.microsoft.com/office/drawing/2014/main" id="{3FE60B6F-CADC-FE76-1467-EFF702F0740B}"/>
+              </a:ext>
+            </a:extLst>
+          </p:cNvPr>
+          <p:cNvSpPr txBox="1"/>
+          <p:nvPr/>
+        </p:nvSpPr>
+        <p:spPr>
+          <a:xfrm>
+            <a:off x="408562" y="402077"/>
+            <a:ext cx="11199778" cy="1569660"/>
+          </a:xfrm>
+          <a:prstGeom prst="rect">
+            <a:avLst/>
+          </a:prstGeom>
+          <a:noFill/>
+        </p:spPr>
+        <p:txBody>
+          <a:bodyPr wrap="square" rtlCol="0">
+            <a:spAutoFit/>
+          </a:bodyPr>
+          <a:lstStyle/>
+          <a:p>
+            <a:r>
+              <a:rPr lang="en-US" dirty="0"/>
+              <a:t>Top 71 descriptors selected by XGBOOST: </a:t>
+            </a:r>
+          </a:p>
+          <a:p>
+            <a:endParaRPr lang="en-US" dirty="0"/>
+          </a:p>
+          <a:p>
+            <a:r>
+              <a:rPr lang="" sz="1200" dirty="0"/>
+              <a:t>['ATS6m', 'Vindex', 'RDF015s', 'MPC08', 'SpMaxA_AEA_dm_', 'Eig07_AEA_dm_', 'RDF065s', 'SpMax6_Bh_s_', 'ATS5m', 'HATS0v', 'SpPosA_RG', 'GGI6', 'Mor08m', 'VE3_RG', 'VE2_B_m_', 'Eta_betaS_A', 'SM11_AEA_bo_', 'RDF010s', 'H2v', 'Mor03v', 'SpMax7_Bh_s_', 'RDF050m', 'Mor11u', 'ChiA_B_m_', 'VE3sign_B_v_', 'G2m', 'SM12_AEA_bo_', 'R6u', 'HATS8m', 'ATSC8e', 'TDB01m', 'SpMax2_Bh_s_', 'RDF025s', 'Mor05m', 'ZM1Mad', 'HGM', 'TDB10u', 'ATSC6m', 'Mor11v', 'Mor05v', 'GGI3', 'Am', 'Mor07m', 'VE1sign_B_v_', 'R5s', 'H3u', 'AVS_B_s_', 'SpMax6_Bh_m_', 'SM09_AEA_dm_', 'H6s', 'Mor04v', 'MATS1e', 'SpMin1_Bh_s_', 'RDF025u', 'Mor29u', 'JGI2', 'H7s', 'ATSC1e', 'MATS1v', 'Mor13m', 'HATS0p', 'VAR', 'R6v', 'TDB06m', 'Gm', 'RDF060m', 'SsOH', 'Mor11p', 'Mor03s', 'Mor10s', 'Mor32v']</a:t>
+            </a:r>
+            <a:endParaRPr lang="LID4096" sz="1200" dirty="0"/>
+          </a:p>
+        </p:txBody>
+      </p:sp>
+      <p:sp>
+        <p:nvSpPr>
+          <p:cNvPr id="5" name="TextBox 4">
+            <a:extLst>
+              <a:ext uri="{FF2B5EF4-FFF2-40B4-BE49-F238E27FC236}">
+                <a16:creationId xmlns:a16="http://schemas.microsoft.com/office/drawing/2014/main" id="{2BF8392B-3B5B-9A3B-DA5E-94F6CE4B8EF8}"/>
+              </a:ext>
+            </a:extLst>
+          </p:cNvPr>
+          <p:cNvSpPr txBox="1"/>
+          <p:nvPr/>
+        </p:nvSpPr>
+        <p:spPr>
+          <a:xfrm>
+            <a:off x="499353" y="3022060"/>
+            <a:ext cx="4286655" cy="2862322"/>
+          </a:xfrm>
+          <a:prstGeom prst="rect">
+            <a:avLst/>
+          </a:prstGeom>
+          <a:noFill/>
+        </p:spPr>
+        <p:txBody>
+          <a:bodyPr wrap="square" rtlCol="0">
+            <a:spAutoFit/>
+          </a:bodyPr>
+          <a:lstStyle/>
+          <a:p>
+            <a:r>
+              <a:rPr lang="en-US" b="1" dirty="0"/>
+              <a:t>Strongly represented:</a:t>
+            </a:r>
+          </a:p>
+          <a:p>
+            <a:endParaRPr lang="en-US" b="1" dirty="0"/>
+          </a:p>
+          <a:p>
+            <a:pPr marL="285750" indent="-285750">
+              <a:buFont typeface="Arial" panose="020B0604020202020204" pitchFamily="34" charset="0"/>
+              <a:buChar char="•"/>
+            </a:pPr>
+            <a:r>
+              <a:rPr lang="" dirty="0"/>
+              <a:t>3D molecular shape and geometry </a:t>
+            </a:r>
+          </a:p>
+          <a:p>
+            <a:pPr marL="285750" indent="-285750">
+              <a:buFont typeface="Arial" panose="020B0604020202020204" pitchFamily="34" charset="0"/>
+              <a:buChar char="•"/>
+            </a:pPr>
+            <a:r>
+              <a:rPr lang="" dirty="0"/>
+              <a:t>Molecular size and bulk</a:t>
+            </a:r>
+          </a:p>
+          <a:p>
+            <a:pPr marL="285750" indent="-285750">
+              <a:buFont typeface="Arial" panose="020B0604020202020204" pitchFamily="34" charset="0"/>
+              <a:buChar char="•"/>
+            </a:pPr>
+            <a:r>
+              <a:rPr lang="" dirty="0"/>
+              <a:t>Electronic structure and charge distribution</a:t>
+            </a:r>
+          </a:p>
+          <a:p>
+            <a:pPr marL="285750" indent="-285750">
+              <a:buFont typeface="Arial" panose="020B0604020202020204" pitchFamily="34" charset="0"/>
+              <a:buChar char="•"/>
+            </a:pPr>
+            <a:r>
+              <a:rPr lang="" dirty="0"/>
+              <a:t>Branching and topological complexity</a:t>
+            </a:r>
+          </a:p>
+          <a:p>
+            <a:pPr marL="285750" indent="-285750">
+              <a:buFont typeface="Arial" panose="020B0604020202020204" pitchFamily="34" charset="0"/>
+              <a:buChar char="•"/>
+            </a:pPr>
+            <a:r>
+              <a:rPr lang="" dirty="0"/>
+              <a:t>Mass-weighted structural information</a:t>
+            </a:r>
+          </a:p>
+          <a:p>
+            <a:pPr marL="285750" indent="-285750">
+              <a:buFont typeface="Arial" panose="020B0604020202020204" pitchFamily="34" charset="0"/>
+              <a:buChar char="•"/>
+            </a:pPr>
+            <a:r>
+              <a:rPr lang="" dirty="0"/>
+              <a:t>Hydrogen-bonding functionality</a:t>
+            </a:r>
+            <a:endParaRPr lang="en-US" dirty="0"/>
+          </a:p>
+          <a:p>
+            <a:endParaRPr lang="LID4096" dirty="0"/>
+          </a:p>
+        </p:txBody>
+      </p:sp>
+      <p:sp>
+        <p:nvSpPr>
+          <p:cNvPr id="6" name="TextBox 5">
+            <a:extLst>
+              <a:ext uri="{FF2B5EF4-FFF2-40B4-BE49-F238E27FC236}">
+                <a16:creationId xmlns:a16="http://schemas.microsoft.com/office/drawing/2014/main" id="{F4E12D3A-CD2A-AF92-E206-0070A8365170}"/>
+              </a:ext>
+            </a:extLst>
+          </p:cNvPr>
+          <p:cNvSpPr txBox="1"/>
+          <p:nvPr/>
+        </p:nvSpPr>
+        <p:spPr>
+          <a:xfrm>
+            <a:off x="6361889" y="3714557"/>
+            <a:ext cx="5648528" cy="1477328"/>
+          </a:xfrm>
+          <a:prstGeom prst="rect">
+            <a:avLst/>
+          </a:prstGeom>
+          <a:noFill/>
+        </p:spPr>
+        <p:txBody>
+          <a:bodyPr wrap="square" rtlCol="0">
+            <a:spAutoFit/>
+          </a:bodyPr>
+          <a:lstStyle/>
+          <a:p>
+            <a:r>
+              <a:rPr lang="" dirty="0"/>
+              <a:t>Maximum odor intensity appears to be driven mainly by molecular 3D shape, size, topology, and electronic structure, whereas classical descriptors such as LogP, PSA, and simple hydrogen-bond counts were not identified as major predictors.</a:t>
+            </a:r>
+            <a:endParaRPr lang="LID4096" dirty="0"/>
+          </a:p>
+        </p:txBody>
+      </p:sp>
+      <p:sp>
+        <p:nvSpPr>
+          <p:cNvPr id="7" name="Arrow: Right 6">
+            <a:extLst>
+              <a:ext uri="{FF2B5EF4-FFF2-40B4-BE49-F238E27FC236}">
+                <a16:creationId xmlns:a16="http://schemas.microsoft.com/office/drawing/2014/main" id="{301F3145-C6F4-5A82-9D8C-20DDB0AABE5C}"/>
+              </a:ext>
+            </a:extLst>
+          </p:cNvPr>
+          <p:cNvSpPr/>
+          <p:nvPr/>
+        </p:nvSpPr>
+        <p:spPr>
+          <a:xfrm>
+            <a:off x="5064868" y="4312596"/>
+            <a:ext cx="953311" cy="168613"/>
+          </a:xfrm>
+          <a:prstGeom prst="rightArrow">
+            <a:avLst/>
+          </a:prstGeom>
+        </p:spPr>
+        <p:style>
+          <a:lnRef idx="2">
+            <a:schemeClr val="accent1">
+              <a:shade val="15000"/>
+            </a:schemeClr>
+          </a:lnRef>
+          <a:fillRef idx="1">
+            <a:schemeClr val="accent1"/>
+          </a:fillRef>
+          <a:effectRef idx="0">
+            <a:schemeClr val="accent1"/>
+          </a:effectRef>
+          <a:fontRef idx="minor">
+            <a:schemeClr val="lt1"/>
+          </a:fontRef>
+        </p:style>
+        <p:txBody>
+          <a:bodyPr rtlCol="0" anchor="ctr"/>
+          <a:lstStyle/>
+          <a:p>
+            <a:pPr algn="ctr"/>
+            <a:endParaRPr lang="LID4096"/>
+          </a:p>
+        </p:txBody>
+      </p:sp>
+    </p:spTree>
+    <p:extLst>
+      <p:ext uri="{BB962C8B-B14F-4D97-AF65-F5344CB8AC3E}">
+        <p14:creationId xmlns:p14="http://schemas.microsoft.com/office/powerpoint/2010/main" val="3088925324"/>
       </p:ext>
     </p:extLst>
   </p:cSld>

--- a/project_1/precentation/Smell intensity presentation.pptx
+++ b/project_1/precentation/Smell intensity presentation.pptx
@@ -2,31 +2,34 @@
 <file path=ppt/presentation.xml><?xml version="1.0" encoding="utf-8"?>
 <p:presentation xmlns:a="http://schemas.openxmlformats.org/drawingml/2006/main" xmlns:r="http://schemas.openxmlformats.org/officeDocument/2006/relationships" xmlns:p="http://schemas.openxmlformats.org/presentationml/2006/main" saveSubsetFonts="1">
   <p:sldMasterIdLst>
-    <p:sldMasterId id="2147483648" r:id="rId1"/>
+    <p:sldMasterId id="2147483648" r:id="rId4"/>
   </p:sldMasterIdLst>
   <p:notesMasterIdLst>
-    <p:notesMasterId r:id="rId21"/>
+    <p:notesMasterId r:id="rId27"/>
   </p:notesMasterIdLst>
   <p:sldIdLst>
-    <p:sldId id="256" r:id="rId2"/>
-    <p:sldId id="257" r:id="rId3"/>
-    <p:sldId id="274" r:id="rId4"/>
-    <p:sldId id="258" r:id="rId5"/>
-    <p:sldId id="264" r:id="rId6"/>
-    <p:sldId id="259" r:id="rId7"/>
-    <p:sldId id="268" r:id="rId8"/>
-    <p:sldId id="271" r:id="rId9"/>
-    <p:sldId id="270" r:id="rId10"/>
-    <p:sldId id="265" r:id="rId11"/>
-    <p:sldId id="267" r:id="rId12"/>
-    <p:sldId id="272" r:id="rId13"/>
-    <p:sldId id="263" r:id="rId14"/>
-    <p:sldId id="275" r:id="rId15"/>
-    <p:sldId id="278" r:id="rId16"/>
-    <p:sldId id="276" r:id="rId17"/>
-    <p:sldId id="277" r:id="rId18"/>
-    <p:sldId id="260" r:id="rId19"/>
-    <p:sldId id="266" r:id="rId20"/>
+    <p:sldId id="256" r:id="rId5"/>
+    <p:sldId id="257" r:id="rId6"/>
+    <p:sldId id="274" r:id="rId7"/>
+    <p:sldId id="258" r:id="rId8"/>
+    <p:sldId id="264" r:id="rId9"/>
+    <p:sldId id="259" r:id="rId10"/>
+    <p:sldId id="268" r:id="rId11"/>
+    <p:sldId id="279" r:id="rId12"/>
+    <p:sldId id="271" r:id="rId13"/>
+    <p:sldId id="270" r:id="rId14"/>
+    <p:sldId id="265" r:id="rId15"/>
+    <p:sldId id="267" r:id="rId16"/>
+    <p:sldId id="272" r:id="rId17"/>
+    <p:sldId id="263" r:id="rId18"/>
+    <p:sldId id="275" r:id="rId19"/>
+    <p:sldId id="278" r:id="rId20"/>
+    <p:sldId id="281" r:id="rId21"/>
+    <p:sldId id="276" r:id="rId22"/>
+    <p:sldId id="277" r:id="rId23"/>
+    <p:sldId id="260" r:id="rId24"/>
+    <p:sldId id="266" r:id="rId25"/>
+    <p:sldId id="280" r:id="rId26"/>
   </p:sldIdLst>
   <p:sldSz cx="12192000" cy="6858000"/>
   <p:notesSz cx="6858000" cy="9144000"/>
@@ -133,6 +136,113 @@
 </p:presentation>
 </file>
 
+<file path=ppt/revisionInfo.xml><?xml version="1.0" encoding="utf-8"?>
+<p1510:revInfo xmlns:a="http://schemas.openxmlformats.org/drawingml/2006/main" xmlns:r="http://schemas.openxmlformats.org/officeDocument/2006/relationships" xmlns:p1510="http://schemas.microsoft.com/office/powerpoint/2015/10/main">
+  <p1510:revLst>
+    <p1510:client id="{0D45FD7A-5B64-4487-A17A-EC3956209378}" v="2" dt="2026-07-01T08:54:40.009"/>
+  </p1510:revLst>
+</p1510:revInfo>
+</file>
+
+<file path=ppt/changesInfos/changesInfo1.xml><?xml version="1.0" encoding="utf-8"?>
+<pc:chgInfo xmlns:a="http://schemas.openxmlformats.org/drawingml/2006/main" xmlns:r="http://schemas.openxmlformats.org/officeDocument/2006/relationships" xmlns:ac="http://schemas.microsoft.com/office/drawing/2013/main/command" xmlns:pc="http://schemas.microsoft.com/office/powerpoint/2013/main/command">
+  <pc:docChgLst>
+    <pc:chgData name="Kiril Kiriyevsky" userId="11d70feb-90cd-4960-8327-645a4241dafb" providerId="ADAL" clId="{4CCB0874-43F7-40E2-8174-C8DA7D86C842}"/>
+    <pc:docChg chg="undo custSel addSld modSld">
+      <pc:chgData name="Kiril Kiriyevsky" userId="11d70feb-90cd-4960-8327-645a4241dafb" providerId="ADAL" clId="{4CCB0874-43F7-40E2-8174-C8DA7D86C842}" dt="2026-07-01T08:55:01.609" v="456" actId="113"/>
+      <pc:docMkLst>
+        <pc:docMk/>
+      </pc:docMkLst>
+      <pc:sldChg chg="modSp mod">
+        <pc:chgData name="Kiril Kiriyevsky" userId="11d70feb-90cd-4960-8327-645a4241dafb" providerId="ADAL" clId="{4CCB0874-43F7-40E2-8174-C8DA7D86C842}" dt="2026-07-01T08:05:40.941" v="1" actId="1076"/>
+        <pc:sldMkLst>
+          <pc:docMk/>
+          <pc:sldMk cId="3088925324" sldId="270"/>
+        </pc:sldMkLst>
+        <pc:spChg chg="mod">
+          <ac:chgData name="Kiril Kiriyevsky" userId="11d70feb-90cd-4960-8327-645a4241dafb" providerId="ADAL" clId="{4CCB0874-43F7-40E2-8174-C8DA7D86C842}" dt="2026-07-01T08:05:40.941" v="1" actId="1076"/>
+          <ac:spMkLst>
+            <pc:docMk/>
+            <pc:sldMk cId="3088925324" sldId="270"/>
+            <ac:spMk id="5" creationId="{2BF8392B-3B5B-9A3B-DA5E-94F6CE4B8EF8}"/>
+          </ac:spMkLst>
+        </pc:spChg>
+      </pc:sldChg>
+      <pc:sldChg chg="addSp modSp new mod">
+        <pc:chgData name="Kiril Kiriyevsky" userId="11d70feb-90cd-4960-8327-645a4241dafb" providerId="ADAL" clId="{4CCB0874-43F7-40E2-8174-C8DA7D86C842}" dt="2026-07-01T08:28:11.909" v="380" actId="20577"/>
+        <pc:sldMkLst>
+          <pc:docMk/>
+          <pc:sldMk cId="96815854" sldId="280"/>
+        </pc:sldMkLst>
+        <pc:spChg chg="add mod">
+          <ac:chgData name="Kiril Kiriyevsky" userId="11d70feb-90cd-4960-8327-645a4241dafb" providerId="ADAL" clId="{4CCB0874-43F7-40E2-8174-C8DA7D86C842}" dt="2026-07-01T08:28:11.909" v="380" actId="20577"/>
+          <ac:spMkLst>
+            <pc:docMk/>
+            <pc:sldMk cId="96815854" sldId="280"/>
+            <ac:spMk id="2" creationId="{CA654FCE-11CD-05A3-4862-A8BF58F7E65F}"/>
+          </ac:spMkLst>
+        </pc:spChg>
+      </pc:sldChg>
+      <pc:sldChg chg="addSp modSp new mod">
+        <pc:chgData name="Kiril Kiriyevsky" userId="11d70feb-90cd-4960-8327-645a4241dafb" providerId="ADAL" clId="{4CCB0874-43F7-40E2-8174-C8DA7D86C842}" dt="2026-07-01T08:55:01.609" v="456" actId="113"/>
+        <pc:sldMkLst>
+          <pc:docMk/>
+          <pc:sldMk cId="1241119122" sldId="281"/>
+        </pc:sldMkLst>
+        <pc:spChg chg="add mod">
+          <ac:chgData name="Kiril Kiriyevsky" userId="11d70feb-90cd-4960-8327-645a4241dafb" providerId="ADAL" clId="{4CCB0874-43F7-40E2-8174-C8DA7D86C842}" dt="2026-07-01T08:55:01.609" v="456" actId="113"/>
+          <ac:spMkLst>
+            <pc:docMk/>
+            <pc:sldMk cId="1241119122" sldId="281"/>
+            <ac:spMk id="12" creationId="{960BBE85-9124-EB89-8AA4-94D7E45698AF}"/>
+          </ac:spMkLst>
+        </pc:spChg>
+        <pc:picChg chg="add mod">
+          <ac:chgData name="Kiril Kiriyevsky" userId="11d70feb-90cd-4960-8327-645a4241dafb" providerId="ADAL" clId="{4CCB0874-43F7-40E2-8174-C8DA7D86C842}" dt="2026-07-01T08:54:17.975" v="422" actId="1076"/>
+          <ac:picMkLst>
+            <pc:docMk/>
+            <pc:sldMk cId="1241119122" sldId="281"/>
+            <ac:picMk id="3" creationId="{D8DF3F30-AF49-D40E-A202-9F59F19956DA}"/>
+          </ac:picMkLst>
+        </pc:picChg>
+        <pc:picChg chg="add mod">
+          <ac:chgData name="Kiril Kiriyevsky" userId="11d70feb-90cd-4960-8327-645a4241dafb" providerId="ADAL" clId="{4CCB0874-43F7-40E2-8174-C8DA7D86C842}" dt="2026-07-01T08:54:15.040" v="421" actId="1076"/>
+          <ac:picMkLst>
+            <pc:docMk/>
+            <pc:sldMk cId="1241119122" sldId="281"/>
+            <ac:picMk id="5" creationId="{DFE77751-B6D3-6679-E684-E2ECAD4E1DAE}"/>
+          </ac:picMkLst>
+        </pc:picChg>
+        <pc:picChg chg="add mod">
+          <ac:chgData name="Kiril Kiriyevsky" userId="11d70feb-90cd-4960-8327-645a4241dafb" providerId="ADAL" clId="{4CCB0874-43F7-40E2-8174-C8DA7D86C842}" dt="2026-07-01T08:54:22.727" v="423" actId="1076"/>
+          <ac:picMkLst>
+            <pc:docMk/>
+            <pc:sldMk cId="1241119122" sldId="281"/>
+            <ac:picMk id="7" creationId="{89D67202-A306-3D17-37F9-A39C7E64E459}"/>
+          </ac:picMkLst>
+        </pc:picChg>
+        <pc:picChg chg="add mod">
+          <ac:chgData name="Kiril Kiriyevsky" userId="11d70feb-90cd-4960-8327-645a4241dafb" providerId="ADAL" clId="{4CCB0874-43F7-40E2-8174-C8DA7D86C842}" dt="2026-07-01T08:54:33.367" v="425" actId="14100"/>
+          <ac:picMkLst>
+            <pc:docMk/>
+            <pc:sldMk cId="1241119122" sldId="281"/>
+            <ac:picMk id="9" creationId="{F139F18E-CC6D-E85C-0655-882085C34CD2}"/>
+          </ac:picMkLst>
+        </pc:picChg>
+        <pc:picChg chg="add mod">
+          <ac:chgData name="Kiril Kiriyevsky" userId="11d70feb-90cd-4960-8327-645a4241dafb" providerId="ADAL" clId="{4CCB0874-43F7-40E2-8174-C8DA7D86C842}" dt="2026-07-01T08:54:27.001" v="424" actId="1076"/>
+          <ac:picMkLst>
+            <pc:docMk/>
+            <pc:sldMk cId="1241119122" sldId="281"/>
+            <ac:picMk id="11" creationId="{BC395089-F171-EE0A-1660-8A2369E035A1}"/>
+          </ac:picMkLst>
+        </pc:picChg>
+      </pc:sldChg>
+    </pc:docChg>
+  </pc:docChgLst>
+</pc:chgInfo>
+</file>
+
 <file path=ppt/notesMasters/notesMaster1.xml><?xml version="1.0" encoding="utf-8"?>
 <p:notesMaster xmlns:a="http://schemas.openxmlformats.org/drawingml/2006/main" xmlns:r="http://schemas.openxmlformats.org/officeDocument/2006/relationships" xmlns:p="http://schemas.openxmlformats.org/presentationml/2006/main">
   <p:cSld>
@@ -215,7 +325,7 @@
           <a:p>
             <a:fld id="{CF4B3431-D7CA-4884-BBC8-551033F4B8B0}" type="datetimeFigureOut">
               <a:rPr lang="LID4096" smtClean="0"/>
-              <a:t>06/23/2026</a:t>
+              <a:t>07/01/2026</a:t>
             </a:fld>
             <a:endParaRPr lang="LID4096"/>
           </a:p>
@@ -511,6 +621,13 @@
           </p:nvPr>
         </p:nvSpPr>
         <p:spPr/>
+        <p:txBody>
+          <a:bodyPr/>
+          <a:lstStyle/>
+          <a:p>
+            <a:endParaRPr lang="LID4096"/>
+          </a:p>
+        </p:txBody>
       </p:sp>
       <p:sp>
         <p:nvSpPr>
@@ -527,98 +644,81 @@
           <a:bodyPr/>
           <a:lstStyle/>
           <a:p>
+            <a:pPr marL="228600" indent="-228600">
+              <a:buAutoNum type="arabicPeriod"/>
+            </a:pPr>
             <a:r>
               <a:rPr lang="en-US" dirty="0"/>
-              <a:t>TY  - JOURT1  - Method for Predicting Odor Intensity of Perfumery Raw Materials Using Dose–Response Curve </a:t>
+              <a:t>Couple of word about fragrance industry – this is multibillion dollar market; we have the smell almost in every consumable product, usually commercial formulas have 30 -150 ingredients where most of them a </a:t>
             </a:r>
             <a:r>
               <a:rPr lang="en-US" dirty="0" err="1"/>
-              <a:t>DatabaseAU</a:t>
+              <a:t>synthethic</a:t>
             </a:r>
             <a:r>
               <a:rPr lang="en-US" dirty="0"/>
-              <a:t>  - Wakayama, </a:t>
-            </a:r>
-            <a:r>
-              <a:rPr lang="en-US" dirty="0" err="1"/>
-              <a:t>HidekiAU</a:t>
-            </a:r>
-            <a:r>
+              <a:t>, naturals ingredients are not better. Target price from 10-30 $/kg. In terms of business: Product - &gt; Brief -&gt; Fragrance house -&gt; Development -&gt; delivery to CPG companies.</a:t>
+            </a:r>
+            <a:br>
               <a:rPr lang="en-US" dirty="0"/>
-              <a:t>  - </a:t>
-            </a:r>
-            <a:r>
-              <a:rPr lang="en-US" dirty="0" err="1"/>
-              <a:t>Sakasai</a:t>
-            </a:r>
-            <a:r>
+            </a:br>
+            <a:br>
               <a:rPr lang="en-US" dirty="0"/>
-              <a:t>, </a:t>
-            </a:r>
-            <a:r>
-              <a:rPr lang="en-US" dirty="0" err="1"/>
-              <a:t>MitsuyoshiAU</a:t>
-            </a:r>
+            </a:br>
             <a:r>
               <a:rPr lang="en-US" dirty="0"/>
-              <a:t>  - Yoshikawa, </a:t>
-            </a:r>
-            <a:r>
-              <a:rPr lang="en-US" dirty="0" err="1"/>
-              <a:t>KeiichiAU</a:t>
-            </a:r>
+              <a:t>Development and maintenance of the formulas are mainly performed by perfumers (art -&gt; experience -&gt; trials and errors -&gt; difficulty to predict -&gt; very time-consuming process)</a:t>
+            </a:r>
+          </a:p>
+          <a:p>
+            <a:pPr marL="228600" indent="-228600">
+              <a:buAutoNum type="arabicPeriod"/>
+            </a:pPr>
+            <a:endParaRPr lang="en-US" dirty="0"/>
+          </a:p>
+          <a:p>
+            <a:pPr marL="0" indent="0">
+              <a:buNone/>
+            </a:pPr>
             <a:r>
               <a:rPr lang="en-US" dirty="0"/>
-              <a:t>  - Inoue, MichiakiY1  - 2019/08/14PY  - 2019DA  - 2019/08/14N1  - </a:t>
-            </a:r>
-            <a:r>
-              <a:rPr lang="en-US" dirty="0" err="1"/>
-              <a:t>doi</a:t>
-            </a:r>
+              <a:t>2. Evaluation of smell ingredients and mixtures is challenging, somewhere subjective, needs training and still not possible with e-nose.</a:t>
+            </a:r>
+          </a:p>
+          <a:p>
+            <a:pPr marL="0" indent="0">
+              <a:buNone/>
+            </a:pPr>
+            <a:endParaRPr lang="en-US" dirty="0"/>
+          </a:p>
+          <a:p>
+            <a:pPr marL="0" indent="0">
+              <a:buNone/>
+            </a:pPr>
             <a:r>
               <a:rPr lang="en-US" dirty="0"/>
-              <a:t>: 10.1021/acs.iecr.9b01225DO  - 10.1021/acs.iecr.9b01225T2  - Industrial &amp; Engineering Chemistry </a:t>
-            </a:r>
-            <a:r>
-              <a:rPr lang="en-US" dirty="0" err="1"/>
-              <a:t>ResearchJF</a:t>
-            </a:r>
-            <a:r>
-              <a:rPr lang="en-US" dirty="0"/>
-              <a:t>  - Industrial &amp; Engineering Chemistry </a:t>
-            </a:r>
-            <a:r>
-              <a:rPr lang="en-US" dirty="0" err="1"/>
-              <a:t>ResearchJO</a:t>
-            </a:r>
-            <a:r>
-              <a:rPr lang="en-US" dirty="0"/>
-              <a:t>  - Ind. Eng. Chem. </a:t>
-            </a:r>
-            <a:r>
-              <a:rPr lang="en-US" dirty="0" err="1"/>
-              <a:t>Res.SP</a:t>
-            </a:r>
-            <a:r>
-              <a:rPr lang="en-US" dirty="0"/>
-              <a:t>  - 15036EP  - 15044VL  - 58IS  - 32PB  - American Chemical </a:t>
-            </a:r>
-            <a:r>
-              <a:rPr lang="en-US" dirty="0" err="1"/>
-              <a:t>SocietySN</a:t>
-            </a:r>
-            <a:r>
-              <a:rPr lang="en-US" dirty="0"/>
-              <a:t>  - 0888-5885M3  - </a:t>
-            </a:r>
-            <a:r>
-              <a:rPr lang="en-US" dirty="0" err="1"/>
-              <a:t>doi</a:t>
-            </a:r>
-            <a:r>
-              <a:rPr lang="en-US" dirty="0"/>
-              <a:t>: 10.1021/acs.iecr.9b01225UR  - https://doi.org/10.1021/acs.iecr.9b01225</a:t>
-            </a:r>
+              <a:t>Odor intensity  - &gt; quantity, character of smell, cost</a:t>
+            </a:r>
+          </a:p>
+          <a:p>
+            <a:pPr marL="0" indent="0">
+              <a:buNone/>
+            </a:pPr>
+            <a:endParaRPr lang="en-US" dirty="0"/>
+          </a:p>
+          <a:p>
+            <a:pPr marL="0" indent="0">
+              <a:buNone/>
+            </a:pPr>
+            <a:r>
+              <a:rPr lang="en-US" b="1" dirty="0"/>
+              <a:t>Mechanism od odor perception is still not understood</a:t>
+            </a:r>
+          </a:p>
+          <a:p>
+            <a:pPr marL="228600" indent="-228600">
+              <a:buAutoNum type="arabicPeriod"/>
+            </a:pPr>
             <a:endParaRPr lang="LID4096" dirty="0"/>
           </a:p>
         </p:txBody>
@@ -640,7 +740,7 @@
           <a:p>
             <a:fld id="{4F081A42-54A3-4E6D-AAAD-815597063FD7}" type="slidenum">
               <a:rPr lang="LID4096" smtClean="0"/>
-              <a:t>2</a:t>
+              <a:t>1</a:t>
             </a:fld>
             <a:endParaRPr lang="LID4096"/>
           </a:p>
@@ -649,7 +749,7 @@
     </p:spTree>
     <p:extLst>
       <p:ext uri="{BB962C8B-B14F-4D97-AF65-F5344CB8AC3E}">
-        <p14:creationId xmlns:p14="http://schemas.microsoft.com/office/powerpoint/2010/main" val="4121670095"/>
+        <p14:creationId xmlns:p14="http://schemas.microsoft.com/office/powerpoint/2010/main" val="4057899386"/>
       </p:ext>
     </p:extLst>
   </p:cSld>
@@ -687,6 +787,13 @@
           </p:nvPr>
         </p:nvSpPr>
         <p:spPr/>
+        <p:txBody>
+          <a:bodyPr/>
+          <a:lstStyle/>
+          <a:p>
+            <a:endParaRPr lang="LID4096"/>
+          </a:p>
+        </p:txBody>
       </p:sp>
       <p:sp>
         <p:nvSpPr>
@@ -703,9 +810,39 @@
           <a:bodyPr/>
           <a:lstStyle/>
           <a:p>
-            <a:r>
-              <a:rPr lang="" dirty="0"/>
-              <a:t>Each dot represents the average score of one evaluator. The box shows the middle 50% of evaluators, and σ shows the standard deviation between evaluators. For several conditions, σ is around 8–13 LMS units, supporting MAE ≈ 8 LMS as a reasonable target for model performance.</a:t>
+            <a:pPr marL="228600" indent="-228600">
+              <a:buAutoNum type="arabicPeriod"/>
+            </a:pPr>
+            <a:r>
+              <a:rPr lang="en-US" dirty="0"/>
+              <a:t>As a data set, we use published research made by KAO corporation, in the frame of this research the intensity of 314 PRM was measured</a:t>
+            </a:r>
+          </a:p>
+          <a:p>
+            <a:pPr marL="228600" indent="-228600">
+              <a:buAutoNum type="arabicPeriod"/>
+            </a:pPr>
+            <a:r>
+              <a:rPr lang="en-US" dirty="0"/>
+              <a:t>Labeled Magnitude scale was used for perceptual evaluation, Intensity was measured against concentration of odorants in air</a:t>
+            </a:r>
+          </a:p>
+          <a:p>
+            <a:pPr marL="228600" indent="-228600">
+              <a:buAutoNum type="arabicPeriod"/>
+            </a:pPr>
+            <a:r>
+              <a:rPr lang="en-US" dirty="0"/>
+              <a:t>3-5 panelists randomly selected from group of 18 measures every concentration point</a:t>
+            </a:r>
+          </a:p>
+          <a:p>
+            <a:pPr marL="228600" indent="-228600">
+              <a:buAutoNum type="arabicPeriod"/>
+            </a:pPr>
+            <a:r>
+              <a:rPr lang="en-US" dirty="0"/>
+              <a:t>Sigmoid behavior of intensity curve (different threshold concentration, steepness of curve, concentration with half Imax, and I max plate</a:t>
             </a:r>
             <a:endParaRPr lang="LID4096" dirty="0"/>
           </a:p>
@@ -728,7 +865,7 @@
           <a:p>
             <a:fld id="{4F081A42-54A3-4E6D-AAAD-815597063FD7}" type="slidenum">
               <a:rPr lang="LID4096" smtClean="0"/>
-              <a:t>4</a:t>
+              <a:t>2</a:t>
             </a:fld>
             <a:endParaRPr lang="LID4096"/>
           </a:p>
@@ -737,7 +874,7 @@
     </p:spTree>
     <p:extLst>
       <p:ext uri="{BB962C8B-B14F-4D97-AF65-F5344CB8AC3E}">
-        <p14:creationId xmlns:p14="http://schemas.microsoft.com/office/powerpoint/2010/main" val="3776948734"/>
+        <p14:creationId xmlns:p14="http://schemas.microsoft.com/office/powerpoint/2010/main" val="4121670095"/>
       </p:ext>
     </p:extLst>
   </p:cSld>
@@ -775,6 +912,13 @@
           </p:nvPr>
         </p:nvSpPr>
         <p:spPr/>
+        <p:txBody>
+          <a:bodyPr/>
+          <a:lstStyle/>
+          <a:p>
+            <a:endParaRPr lang="LID4096"/>
+          </a:p>
+        </p:txBody>
       </p:sp>
       <p:sp>
         <p:nvSpPr>
@@ -791,6 +935,10 @@
           <a:bodyPr/>
           <a:lstStyle/>
           <a:p>
+            <a:r>
+              <a:rPr lang="" dirty="0"/>
+              <a:t>Each dot represents the average score of one evaluator. The box shows the middle 50% of evaluators, and σ shows the standard deviation between evaluators. For several conditions, σ is around 8–13 LMS units, supporting MAE ≈ 8 LMS as a reasonable target for model performance.</a:t>
+            </a:r>
             <a:endParaRPr lang="LID4096" dirty="0"/>
           </a:p>
         </p:txBody>
@@ -812,7 +960,7 @@
           <a:p>
             <a:fld id="{4F081A42-54A3-4E6D-AAAD-815597063FD7}" type="slidenum">
               <a:rPr lang="LID4096" smtClean="0"/>
-              <a:t>7</a:t>
+              <a:t>4</a:t>
             </a:fld>
             <a:endParaRPr lang="LID4096"/>
           </a:p>
@@ -821,7 +969,7 @@
     </p:spTree>
     <p:extLst>
       <p:ext uri="{BB962C8B-B14F-4D97-AF65-F5344CB8AC3E}">
-        <p14:creationId xmlns:p14="http://schemas.microsoft.com/office/powerpoint/2010/main" val="3004632284"/>
+        <p14:creationId xmlns:p14="http://schemas.microsoft.com/office/powerpoint/2010/main" val="3776948734"/>
       </p:ext>
     </p:extLst>
   </p:cSld>
@@ -859,6 +1007,13 @@
           </p:nvPr>
         </p:nvSpPr>
         <p:spPr/>
+        <p:txBody>
+          <a:bodyPr/>
+          <a:lstStyle/>
+          <a:p>
+            <a:endParaRPr lang="LID4096"/>
+          </a:p>
+        </p:txBody>
       </p:sp>
       <p:sp>
         <p:nvSpPr>
@@ -875,27 +1030,6 @@
           <a:bodyPr/>
           <a:lstStyle/>
           <a:p>
-            <a:r>
-              <a:rPr lang="en-US" dirty="0"/>
-              <a:t>MAE less sensitive for </a:t>
-            </a:r>
-            <a:r>
-              <a:rPr lang="en-US" dirty="0" err="1"/>
-              <a:t>outlayers</a:t>
-            </a:r>
-            <a:endParaRPr lang="en-US" dirty="0"/>
-          </a:p>
-          <a:p>
-            <a:r>
-              <a:rPr lang="" dirty="0"/>
-              <a:t>subsample=0.8, Percentage of rows used to build each tree.</a:t>
-            </a:r>
-          </a:p>
-          <a:p>
-            <a:r>
-              <a:rPr lang="" dirty="0"/>
-              <a:t>colsample_bytree=1.0 Percentage of features used by each tree.</a:t>
-            </a:r>
             <a:endParaRPr lang="LID4096" dirty="0"/>
           </a:p>
         </p:txBody>
@@ -917,7 +1051,7 @@
           <a:p>
             <a:fld id="{4F081A42-54A3-4E6D-AAAD-815597063FD7}" type="slidenum">
               <a:rPr lang="LID4096" smtClean="0"/>
-              <a:t>8</a:t>
+              <a:t>7</a:t>
             </a:fld>
             <a:endParaRPr lang="LID4096"/>
           </a:p>
@@ -926,7 +1060,7 @@
     </p:spTree>
     <p:extLst>
       <p:ext uri="{BB962C8B-B14F-4D97-AF65-F5344CB8AC3E}">
-        <p14:creationId xmlns:p14="http://schemas.microsoft.com/office/powerpoint/2010/main" val="1211896185"/>
+        <p14:creationId xmlns:p14="http://schemas.microsoft.com/office/powerpoint/2010/main" val="3004632284"/>
       </p:ext>
     </p:extLst>
   </p:cSld>
@@ -964,6 +1098,13 @@
           </p:nvPr>
         </p:nvSpPr>
         <p:spPr/>
+        <p:txBody>
+          <a:bodyPr/>
+          <a:lstStyle/>
+          <a:p>
+            <a:endParaRPr lang="LID4096"/>
+          </a:p>
+        </p:txBody>
       </p:sp>
       <p:sp>
         <p:nvSpPr>
@@ -981,295 +1122,26 @@
           <a:lstStyle/>
           <a:p>
             <a:r>
+              <a:rPr lang="en-US" dirty="0"/>
+              <a:t>MAE less sensitive for </a:t>
+            </a:r>
+            <a:r>
+              <a:rPr lang="en-US" dirty="0" err="1"/>
+              <a:t>outlayers</a:t>
+            </a:r>
+            <a:endParaRPr lang="en-US" dirty="0"/>
+          </a:p>
+          <a:p>
+            <a:r>
               <a:rPr lang="" dirty="0"/>
-              <a:t>For a presentation slide, I would keep it high-level and connect the descriptors to molecular properties rather than Dragon terminology.</a:t>
-            </a:r>
-          </a:p>
-          <a:p>
-            <a:r>
-              <a:rPr lang="" b="1" dirty="0"/>
-              <a:t>Key Molecular Properties Identified by XGBoost</a:t>
-            </a:r>
-          </a:p>
-          <a:p>
-            <a:r>
-              <a:rPr lang="" b="1" dirty="0"/>
-              <a:t>Strongly represented descriptor groups</a:t>
-            </a:r>
-            <a:endParaRPr lang="" dirty="0"/>
-          </a:p>
-          <a:p>
-            <a:r>
-              <a:rPr lang="" b="1" dirty="0"/>
-              <a:t>3D molecular shape and geometry</a:t>
-            </a:r>
-            <a:endParaRPr lang="" dirty="0"/>
-          </a:p>
-          <a:p>
-            <a:pPr lvl="1"/>
+              <a:t>subsample=0.8, Percentage of rows used to build each tree.</a:t>
+            </a:r>
+          </a:p>
+          <a:p>
             <a:r>
               <a:rPr lang="" dirty="0"/>
-              <a:t>MoRSE descriptors (MorXX)</a:t>
-            </a:r>
-          </a:p>
-          <a:p>
-            <a:pPr lvl="1"/>
-            <a:r>
-              <a:rPr lang="" dirty="0"/>
-              <a:t>RDF descriptors (RDFXXX)</a:t>
-            </a:r>
-          </a:p>
-          <a:p>
-            <a:pPr lvl="1"/>
-            <a:r>
-              <a:rPr lang="" dirty="0"/>
-              <a:t>GETAWAY descriptors (Hx, Rx)</a:t>
-            </a:r>
-          </a:p>
-          <a:p>
-            <a:pPr lvl="1"/>
-            <a:r>
-              <a:rPr lang="" dirty="0"/>
-              <a:t>Suggests odor intensity strongly depends on how atoms are arranged in three-dimensional space.</a:t>
-            </a:r>
-          </a:p>
-          <a:p>
-            <a:r>
-              <a:rPr lang="" b="1" dirty="0"/>
-              <a:t>Molecular size and bulk</a:t>
-            </a:r>
-            <a:endParaRPr lang="" dirty="0"/>
-          </a:p>
-          <a:p>
-            <a:pPr lvl="1"/>
-            <a:r>
-              <a:rPr lang="" dirty="0"/>
-              <a:t>Vindex, Am, Gm, VAR</a:t>
-            </a:r>
-          </a:p>
-          <a:p>
-            <a:pPr lvl="1"/>
-            <a:r>
-              <a:rPr lang="" dirty="0"/>
-              <a:t>Indicates that larger and more complex molecules tend to exhibit different maximum odor intensities than smaller molecules.</a:t>
-            </a:r>
-          </a:p>
-          <a:p>
-            <a:r>
-              <a:rPr lang="" b="1" dirty="0"/>
-              <a:t>Electronic structure and charge distribution</a:t>
-            </a:r>
-            <a:endParaRPr lang="" dirty="0"/>
-          </a:p>
-          <a:p>
-            <a:pPr lvl="1"/>
-            <a:r>
-              <a:rPr lang="" dirty="0"/>
-              <a:t>GGI, JGI, ATSCe, MATSe descriptors</a:t>
-            </a:r>
-          </a:p>
-          <a:p>
-            <a:pPr lvl="1"/>
-            <a:r>
-              <a:rPr lang="" dirty="0"/>
-              <a:t>Captures electronegativity patterns, charge transfer, and electron distribution within the molecule.</a:t>
-            </a:r>
-          </a:p>
-          <a:p>
-            <a:r>
-              <a:rPr lang="" b="1" dirty="0"/>
-              <a:t>Branching and topological complexity</a:t>
-            </a:r>
-            <a:endParaRPr lang="" dirty="0"/>
-          </a:p>
-          <a:p>
-            <a:pPr lvl="1"/>
-            <a:r>
-              <a:rPr lang="" dirty="0"/>
-              <a:t>MPC08, Chi indices, VE indices, Burden eigenvalues</a:t>
-            </a:r>
-          </a:p>
-          <a:p>
-            <a:pPr lvl="1"/>
-            <a:r>
-              <a:rPr lang="" dirty="0"/>
-              <a:t>Suggests that molecular connectivity and branching influence odor intensity.</a:t>
-            </a:r>
-          </a:p>
-          <a:p>
-            <a:r>
-              <a:rPr lang="" b="1" dirty="0"/>
-              <a:t>Mass-weighted structural information</a:t>
-            </a:r>
-            <a:endParaRPr lang="" dirty="0"/>
-          </a:p>
-          <a:p>
-            <a:pPr lvl="1"/>
-            <a:r>
-              <a:rPr lang="" dirty="0"/>
-              <a:t>ATSm, MorXm, G2m, TDBm descriptors</a:t>
-            </a:r>
-          </a:p>
-          <a:p>
-            <a:pPr lvl="1"/>
-            <a:r>
-              <a:rPr lang="" dirty="0"/>
-              <a:t>Indicates that the spatial distribution of atomic masses contributes to intensity prediction.</a:t>
-            </a:r>
-          </a:p>
-          <a:p>
-            <a:r>
-              <a:rPr lang="" b="1" dirty="0"/>
-              <a:t>Hydrogen-bonding functionality</a:t>
-            </a:r>
-            <a:endParaRPr lang="" dirty="0"/>
-          </a:p>
-          <a:p>
-            <a:pPr lvl="1"/>
-            <a:r>
-              <a:rPr lang="" dirty="0"/>
-              <a:t>SsOH descriptor</a:t>
-            </a:r>
-          </a:p>
-          <a:p>
-            <a:pPr lvl="1"/>
-            <a:r>
-              <a:rPr lang="" dirty="0"/>
-              <a:t>Presence of hydroxyl groups appears to influence odor intensity.</a:t>
-            </a:r>
-          </a:p>
-          <a:p>
-            <a:br>
-              <a:rPr lang="" dirty="0"/>
-            </a:br>
-            <a:endParaRPr lang="" dirty="0"/>
-          </a:p>
-          <a:p>
-            <a:r>
-              <a:rPr lang="" b="1" dirty="0"/>
-              <a:t>Interpretation</a:t>
-            </a:r>
-          </a:p>
-          <a:p>
-            <a:r>
-              <a:rPr lang="" dirty="0"/>
-              <a:t>The selected descriptors indicate that </a:t>
-            </a:r>
-            <a:r>
-              <a:rPr lang="" b="1" dirty="0"/>
-              <a:t>odor intensity is primarily related to molecular shape, size, and electronic structure</a:t>
-            </a:r>
-            <a:r>
-              <a:rPr lang="" dirty="0"/>
-              <a:t>.</a:t>
-            </a:r>
-          </a:p>
-          <a:p>
-            <a:r>
-              <a:rPr lang="" dirty="0"/>
-              <a:t>This is consistent with the hypothesis that intensity is determined by:</a:t>
-            </a:r>
-          </a:p>
-          <a:p>
-            <a:r>
-              <a:rPr lang="" dirty="0"/>
-              <a:t>How efficiently a molecule reaches the receptor.</a:t>
-            </a:r>
-          </a:p>
-          <a:p>
-            <a:r>
-              <a:rPr lang="" dirty="0"/>
-              <a:t>How strongly it interacts with the receptor binding site.</a:t>
-            </a:r>
-          </a:p>
-          <a:p>
-            <a:br>
-              <a:rPr lang="" dirty="0"/>
-            </a:br>
-            <a:endParaRPr lang="" dirty="0"/>
-          </a:p>
-          <a:p>
-            <a:r>
-              <a:rPr lang="" b="1" dirty="0"/>
-              <a:t>Surprisingly Underrepresented</a:t>
-            </a:r>
-          </a:p>
-          <a:p>
-            <a:r>
-              <a:rPr lang="" dirty="0"/>
-              <a:t>The model selected very few descriptors directly related to:</a:t>
-            </a:r>
-          </a:p>
-          <a:p>
-            <a:r>
-              <a:rPr lang="" dirty="0"/>
-              <a:t>Lipophilicity (LogP)</a:t>
-            </a:r>
-          </a:p>
-          <a:p>
-            <a:r>
-              <a:rPr lang="" dirty="0"/>
-              <a:t>Hydrogen-bond donor count</a:t>
-            </a:r>
-          </a:p>
-          <a:p>
-            <a:r>
-              <a:rPr lang="" dirty="0"/>
-              <a:t>Hydrogen-bond acceptor count</a:t>
-            </a:r>
-          </a:p>
-          <a:p>
-            <a:r>
-              <a:rPr lang="" dirty="0"/>
-              <a:t>Molecular surface area</a:t>
-            </a:r>
-          </a:p>
-          <a:p>
-            <a:r>
-              <a:rPr lang="" dirty="0"/>
-              <a:t>Polar surface area (PSA)</a:t>
-            </a:r>
-          </a:p>
-          <a:p>
-            <a:r>
-              <a:rPr lang="" dirty="0"/>
-              <a:t>Simple constitutional descriptors</a:t>
-            </a:r>
-          </a:p>
-          <a:p>
-            <a:r>
-              <a:rPr lang="" dirty="0"/>
-              <a:t>These properties are commonly important in odor and drug-design studies, yet they were not among the most informative predictors for </a:t>
-            </a:r>
-            <a:r>
-              <a:rPr lang="" b="1" dirty="0"/>
-              <a:t>Imax</a:t>
-            </a:r>
-            <a:r>
-              <a:rPr lang="" dirty="0"/>
-              <a:t> in this dataset.</a:t>
-            </a:r>
-          </a:p>
-          <a:p>
-            <a:br>
-              <a:rPr lang="" dirty="0"/>
-            </a:br>
-            <a:endParaRPr lang="" dirty="0"/>
-          </a:p>
-          <a:p>
-            <a:r>
-              <a:rPr lang="" b="1" dirty="0"/>
-              <a:t>One-line conclusion for the slide</a:t>
-            </a:r>
-          </a:p>
-          <a:p>
-            <a:r>
-              <a:rPr lang="" b="1" dirty="0"/>
-              <a:t>Maximum odor intensity appears to be driven mainly by molecular 3D shape, size, topology, and electronic structure, whereas classical descriptors such as LogP, PSA, and simple hydrogen-bond counts were not identified as major predictors.</a:t>
-            </a:r>
-            <a:endParaRPr lang="" dirty="0"/>
-          </a:p>
-          <a:p>
+              <a:t>colsample_bytree=1.0 Percentage of features used by each tree.</a:t>
+            </a:r>
             <a:endParaRPr lang="LID4096" dirty="0"/>
           </a:p>
         </p:txBody>
@@ -1300,7 +1172,7 @@
     </p:spTree>
     <p:extLst>
       <p:ext uri="{BB962C8B-B14F-4D97-AF65-F5344CB8AC3E}">
-        <p14:creationId xmlns:p14="http://schemas.microsoft.com/office/powerpoint/2010/main" val="615583566"/>
+        <p14:creationId xmlns:p14="http://schemas.microsoft.com/office/powerpoint/2010/main" val="1211896185"/>
       </p:ext>
     </p:extLst>
   </p:cSld>
@@ -1338,6 +1210,13 @@
           </p:nvPr>
         </p:nvSpPr>
         <p:spPr/>
+        <p:txBody>
+          <a:bodyPr/>
+          <a:lstStyle/>
+          <a:p>
+            <a:endParaRPr lang="LID4096"/>
+          </a:p>
+        </p:txBody>
       </p:sp>
       <p:sp>
         <p:nvSpPr>
@@ -1355,95 +1234,293 @@
           <a:lstStyle/>
           <a:p>
             <a:r>
+              <a:rPr lang="" dirty="0"/>
+              <a:t>For a presentation slide, I would keep it high-level and connect the descriptors to molecular properties rather than Dragon terminology.</a:t>
+            </a:r>
+          </a:p>
+          <a:p>
+            <a:r>
               <a:rPr lang="" b="1" dirty="0"/>
-              <a:t>Here's what we've learned so far</a:t>
+              <a:t>Key Molecular Properties Identified by XGBoost</a:t>
             </a:r>
           </a:p>
           <a:p>
             <a:r>
               <a:rPr lang="" b="1" dirty="0"/>
-              <a:t>✓ XGBoost is currently your strongest base learner</a:t>
-            </a:r>
-          </a:p>
-          <a:p>
+              <a:t>Strongly represented descriptor groups</a:t>
+            </a:r>
+            <a:endParaRPr lang="" dirty="0"/>
+          </a:p>
+          <a:p>
+            <a:r>
+              <a:rPr lang="" b="1" dirty="0"/>
+              <a:t>3D molecular shape and geometry</a:t>
+            </a:r>
+            <a:endParaRPr lang="" dirty="0"/>
+          </a:p>
+          <a:p>
+            <a:pPr lvl="1"/>
             <a:r>
               <a:rPr lang="" dirty="0"/>
-              <a:t>It captures most of the structure in the data.</a:t>
+              <a:t>MoRSE descriptors (MorXX)</a:t>
+            </a:r>
+          </a:p>
+          <a:p>
+            <a:pPr lvl="1"/>
+            <a:r>
+              <a:rPr lang="" dirty="0"/>
+              <a:t>RDF descriptors (RDFXXX)</a:t>
+            </a:r>
+          </a:p>
+          <a:p>
+            <a:pPr lvl="1"/>
+            <a:r>
+              <a:rPr lang="" dirty="0"/>
+              <a:t>GETAWAY descriptors (Hx, Rx)</a:t>
+            </a:r>
+          </a:p>
+          <a:p>
+            <a:pPr lvl="1"/>
+            <a:r>
+              <a:rPr lang="" dirty="0"/>
+              <a:t>Suggests odor intensity strongly depends on how atoms are arranged in three-dimensional space.</a:t>
             </a:r>
           </a:p>
           <a:p>
             <a:r>
               <a:rPr lang="" b="1" dirty="0"/>
-              <a:t>✓ The classifier is meaningful</a:t>
-            </a:r>
-          </a:p>
-          <a:p>
+              <a:t>Molecular size and bulk</a:t>
+            </a:r>
+            <a:endParaRPr lang="" dirty="0"/>
+          </a:p>
+          <a:p>
+            <a:pPr lvl="1"/>
             <a:r>
               <a:rPr lang="" dirty="0"/>
-              <a:t>It learned something real:</a:t>
-            </a:r>
-          </a:p>
-          <a:p>
+              <a:t>Vindex, Am, Gm, VAR</a:t>
+            </a:r>
+          </a:p>
+          <a:p>
+            <a:pPr lvl="1"/>
             <a:r>
               <a:rPr lang="" dirty="0"/>
-              <a:t>no confusion between low and high intensity </a:t>
-            </a:r>
-          </a:p>
-          <a:p>
+              <a:t>Indicates that larger and more complex molecules tend to exhibit different maximum odor intensities than smaller molecules.</a:t>
+            </a:r>
+          </a:p>
+          <a:p>
+            <a:r>
+              <a:rPr lang="" b="1" dirty="0"/>
+              <a:t>Electronic structure and charge distribution</a:t>
+            </a:r>
+            <a:endParaRPr lang="" dirty="0"/>
+          </a:p>
+          <a:p>
+            <a:pPr lvl="1"/>
             <a:r>
               <a:rPr lang="" dirty="0"/>
-              <a:t>class probabilities became moderately important features in XGBoost </a:t>
+              <a:t>GGI, JGI, ATSCe, MATSe descriptors</a:t>
+            </a:r>
+          </a:p>
+          <a:p>
+            <a:pPr lvl="1"/>
+            <a:r>
+              <a:rPr lang="" dirty="0"/>
+              <a:t>Captures electronegativity patterns, charge transfer, and electron distribution within the molecule.</a:t>
             </a:r>
           </a:p>
           <a:p>
             <a:r>
               <a:rPr lang="" b="1" dirty="0"/>
-              <a:t>✓ But classifier probabilities do not improve regression</a:t>
-            </a:r>
-          </a:p>
-          <a:p>
+              <a:t>Branching and topological complexity</a:t>
+            </a:r>
+            <a:endParaRPr lang="" dirty="0"/>
+          </a:p>
+          <a:p>
+            <a:pPr lvl="1"/>
             <a:r>
               <a:rPr lang="" dirty="0"/>
-              <a:t>We tested:</a:t>
-            </a:r>
-          </a:p>
-          <a:p>
+              <a:t>MPC08, Chi indices, VE indices, Burden eigenvalues</a:t>
+            </a:r>
+          </a:p>
+          <a:p>
+            <a:pPr lvl="1"/>
             <a:r>
               <a:rPr lang="" dirty="0"/>
-              <a:t>adding them as features </a:t>
-            </a:r>
-          </a:p>
-          <a:p>
+              <a:t>Suggests that molecular connectivity and branching influence odor intensity.</a:t>
+            </a:r>
+          </a:p>
+          <a:p>
+            <a:r>
+              <a:rPr lang="" b="1" dirty="0"/>
+              <a:t>Mass-weighted structural information</a:t>
+            </a:r>
+            <a:endParaRPr lang="" dirty="0"/>
+          </a:p>
+          <a:p>
+            <a:pPr lvl="1"/>
             <a:r>
               <a:rPr lang="" dirty="0"/>
-              <a:t>using them for residual correction </a:t>
-            </a:r>
-          </a:p>
-          <a:p>
+              <a:t>ATSm, MorXm, G2m, TDBm descriptors</a:t>
+            </a:r>
+          </a:p>
+          <a:p>
+            <a:pPr lvl="1"/>
             <a:r>
               <a:rPr lang="" dirty="0"/>
-              <a:t>Neither reduced CV MAE.</a:t>
-            </a:r>
-          </a:p>
-          <a:p>
+              <a:t>Indicates that the spatial distribution of atomic masses contributes to intensity prediction.</a:t>
+            </a:r>
+          </a:p>
+          <a:p>
+            <a:r>
+              <a:rPr lang="" b="1" dirty="0"/>
+              <a:t>Hydrogen-bonding functionality</a:t>
+            </a:r>
+            <a:endParaRPr lang="" dirty="0"/>
+          </a:p>
+          <a:p>
+            <a:pPr lvl="1"/>
             <a:r>
               <a:rPr lang="" dirty="0"/>
-              <a:t>So I would remove that branch from the production pipeline.</a:t>
-            </a:r>
-          </a:p>
-          <a:p>
+              <a:t>SsOH descriptor</a:t>
+            </a:r>
+          </a:p>
+          <a:p>
+            <a:pPr lvl="1"/>
             <a:r>
               <a:rPr lang="" dirty="0"/>
-              <a:t>This is actually a useful negative result—it tells us where </a:t>
-            </a:r>
+              <a:t>Presence of hydroxyl groups appears to influence odor intensity.</a:t>
+            </a:r>
+          </a:p>
+          <a:p>
+            <a:br>
+              <a:rPr lang="" dirty="0"/>
+            </a:br>
+            <a:endParaRPr lang="" dirty="0"/>
+          </a:p>
+          <a:p>
             <a:r>
               <a:rPr lang="" b="1" dirty="0"/>
-              <a:t>not</a:t>
-            </a:r>
+              <a:t>Interpretation</a:t>
+            </a:r>
+          </a:p>
+          <a:p>
             <a:r>
               <a:rPr lang="" dirty="0"/>
-              <a:t> to spend more time.</a:t>
-            </a:r>
+              <a:t>The selected descriptors indicate that </a:t>
+            </a:r>
+            <a:r>
+              <a:rPr lang="" b="1" dirty="0"/>
+              <a:t>odor intensity is primarily related to molecular shape, size, and electronic structure</a:t>
+            </a:r>
+            <a:r>
+              <a:rPr lang="" dirty="0"/>
+              <a:t>.</a:t>
+            </a:r>
+          </a:p>
+          <a:p>
+            <a:r>
+              <a:rPr lang="" dirty="0"/>
+              <a:t>This is consistent with the hypothesis that intensity is determined by:</a:t>
+            </a:r>
+          </a:p>
+          <a:p>
+            <a:r>
+              <a:rPr lang="" dirty="0"/>
+              <a:t>How efficiently a molecule reaches the receptor.</a:t>
+            </a:r>
+          </a:p>
+          <a:p>
+            <a:r>
+              <a:rPr lang="" dirty="0"/>
+              <a:t>How strongly it interacts with the receptor binding site.</a:t>
+            </a:r>
+          </a:p>
+          <a:p>
+            <a:br>
+              <a:rPr lang="" dirty="0"/>
+            </a:br>
+            <a:endParaRPr lang="" dirty="0"/>
+          </a:p>
+          <a:p>
+            <a:r>
+              <a:rPr lang="" b="1" dirty="0"/>
+              <a:t>Surprisingly Underrepresented</a:t>
+            </a:r>
+          </a:p>
+          <a:p>
+            <a:r>
+              <a:rPr lang="" dirty="0"/>
+              <a:t>The model selected very few descriptors directly related to:</a:t>
+            </a:r>
+          </a:p>
+          <a:p>
+            <a:r>
+              <a:rPr lang="" dirty="0"/>
+              <a:t>Lipophilicity (LogP)</a:t>
+            </a:r>
+          </a:p>
+          <a:p>
+            <a:r>
+              <a:rPr lang="" dirty="0"/>
+              <a:t>Hydrogen-bond donor count</a:t>
+            </a:r>
+          </a:p>
+          <a:p>
+            <a:r>
+              <a:rPr lang="" dirty="0"/>
+              <a:t>Hydrogen-bond acceptor count</a:t>
+            </a:r>
+          </a:p>
+          <a:p>
+            <a:r>
+              <a:rPr lang="" dirty="0"/>
+              <a:t>Molecular surface area</a:t>
+            </a:r>
+          </a:p>
+          <a:p>
+            <a:r>
+              <a:rPr lang="" dirty="0"/>
+              <a:t>Polar surface area (PSA)</a:t>
+            </a:r>
+          </a:p>
+          <a:p>
+            <a:r>
+              <a:rPr lang="" dirty="0"/>
+              <a:t>Simple constitutional descriptors</a:t>
+            </a:r>
+          </a:p>
+          <a:p>
+            <a:r>
+              <a:rPr lang="" dirty="0"/>
+              <a:t>These properties are commonly important in odor and drug-design studies, yet they were not among the most informative predictors for </a:t>
+            </a:r>
+            <a:r>
+              <a:rPr lang="" b="1" dirty="0"/>
+              <a:t>Imax</a:t>
+            </a:r>
+            <a:r>
+              <a:rPr lang="" dirty="0"/>
+              <a:t> in this dataset.</a:t>
+            </a:r>
+          </a:p>
+          <a:p>
+            <a:br>
+              <a:rPr lang="" dirty="0"/>
+            </a:br>
+            <a:endParaRPr lang="" dirty="0"/>
+          </a:p>
+          <a:p>
+            <a:r>
+              <a:rPr lang="" b="1" dirty="0"/>
+              <a:t>One-line conclusion for the slide</a:t>
+            </a:r>
+          </a:p>
+          <a:p>
+            <a:r>
+              <a:rPr lang="" b="1" dirty="0"/>
+              <a:t>Maximum odor intensity appears to be driven mainly by molecular 3D shape, size, topology, and electronic structure, whereas classical descriptors such as LogP, PSA, and simple hydrogen-bond counts were not identified as major predictors.</a:t>
+            </a:r>
+            <a:endParaRPr lang="" dirty="0"/>
           </a:p>
           <a:p>
             <a:endParaRPr lang="LID4096" dirty="0"/>
@@ -1467,7 +1544,7 @@
           <a:p>
             <a:fld id="{4F081A42-54A3-4E6D-AAAD-815597063FD7}" type="slidenum">
               <a:rPr lang="LID4096" smtClean="0"/>
-              <a:t>13</a:t>
+              <a:t>10</a:t>
             </a:fld>
             <a:endParaRPr lang="LID4096"/>
           </a:p>
@@ -1476,7 +1553,7 @@
     </p:spTree>
     <p:extLst>
       <p:ext uri="{BB962C8B-B14F-4D97-AF65-F5344CB8AC3E}">
-        <p14:creationId xmlns:p14="http://schemas.microsoft.com/office/powerpoint/2010/main" val="2199111028"/>
+        <p14:creationId xmlns:p14="http://schemas.microsoft.com/office/powerpoint/2010/main" val="615583566"/>
       </p:ext>
     </p:extLst>
   </p:cSld>
@@ -1514,6 +1591,13 @@
           </p:nvPr>
         </p:nvSpPr>
         <p:spPr/>
+        <p:txBody>
+          <a:bodyPr/>
+          <a:lstStyle/>
+          <a:p>
+            <a:endParaRPr lang="LID4096"/>
+          </a:p>
+        </p:txBody>
       </p:sp>
       <p:sp>
         <p:nvSpPr>
@@ -1530,6 +1614,98 @@
           <a:bodyPr/>
           <a:lstStyle/>
           <a:p>
+            <a:r>
+              <a:rPr lang="" b="1" dirty="0"/>
+              <a:t>Here's what we've learned so far</a:t>
+            </a:r>
+          </a:p>
+          <a:p>
+            <a:r>
+              <a:rPr lang="" b="1" dirty="0"/>
+              <a:t>✓ XGBoost is currently your strongest base learner</a:t>
+            </a:r>
+          </a:p>
+          <a:p>
+            <a:r>
+              <a:rPr lang="" dirty="0"/>
+              <a:t>It captures most of the structure in the data.</a:t>
+            </a:r>
+          </a:p>
+          <a:p>
+            <a:r>
+              <a:rPr lang="" b="1" dirty="0"/>
+              <a:t>✓ The classifier is meaningful</a:t>
+            </a:r>
+          </a:p>
+          <a:p>
+            <a:r>
+              <a:rPr lang="" dirty="0"/>
+              <a:t>It learned something real:</a:t>
+            </a:r>
+          </a:p>
+          <a:p>
+            <a:r>
+              <a:rPr lang="" dirty="0"/>
+              <a:t>no confusion between low and high intensity </a:t>
+            </a:r>
+          </a:p>
+          <a:p>
+            <a:r>
+              <a:rPr lang="" dirty="0"/>
+              <a:t>class probabilities became moderately important features in XGBoost </a:t>
+            </a:r>
+          </a:p>
+          <a:p>
+            <a:r>
+              <a:rPr lang="" b="1" dirty="0"/>
+              <a:t>✓ But classifier probabilities do not improve regression</a:t>
+            </a:r>
+          </a:p>
+          <a:p>
+            <a:r>
+              <a:rPr lang="" dirty="0"/>
+              <a:t>We tested:</a:t>
+            </a:r>
+          </a:p>
+          <a:p>
+            <a:r>
+              <a:rPr lang="" dirty="0"/>
+              <a:t>adding them as features </a:t>
+            </a:r>
+          </a:p>
+          <a:p>
+            <a:r>
+              <a:rPr lang="" dirty="0"/>
+              <a:t>using them for residual correction </a:t>
+            </a:r>
+          </a:p>
+          <a:p>
+            <a:r>
+              <a:rPr lang="" dirty="0"/>
+              <a:t>Neither reduced CV MAE.</a:t>
+            </a:r>
+          </a:p>
+          <a:p>
+            <a:r>
+              <a:rPr lang="" dirty="0"/>
+              <a:t>So I would remove that branch from the production pipeline.</a:t>
+            </a:r>
+          </a:p>
+          <a:p>
+            <a:r>
+              <a:rPr lang="" dirty="0"/>
+              <a:t>This is actually a useful negative result—it tells us where </a:t>
+            </a:r>
+            <a:r>
+              <a:rPr lang="" b="1" dirty="0"/>
+              <a:t>not</a:t>
+            </a:r>
+            <a:r>
+              <a:rPr lang="" dirty="0"/>
+              <a:t> to spend more time.</a:t>
+            </a:r>
+          </a:p>
+          <a:p>
             <a:endParaRPr lang="LID4096" dirty="0"/>
           </a:p>
         </p:txBody>
@@ -1551,7 +1727,7 @@
           <a:p>
             <a:fld id="{4F081A42-54A3-4E6D-AAAD-815597063FD7}" type="slidenum">
               <a:rPr lang="LID4096" smtClean="0"/>
-              <a:t>18</a:t>
+              <a:t>14</a:t>
             </a:fld>
             <a:endParaRPr lang="LID4096"/>
           </a:p>
@@ -1560,7 +1736,7 @@
     </p:spTree>
     <p:extLst>
       <p:ext uri="{BB962C8B-B14F-4D97-AF65-F5344CB8AC3E}">
-        <p14:creationId xmlns:p14="http://schemas.microsoft.com/office/powerpoint/2010/main" val="2900156597"/>
+        <p14:creationId xmlns:p14="http://schemas.microsoft.com/office/powerpoint/2010/main" val="2199111028"/>
       </p:ext>
     </p:extLst>
   </p:cSld>
@@ -1598,6 +1774,104 @@
           </p:nvPr>
         </p:nvSpPr>
         <p:spPr/>
+        <p:txBody>
+          <a:bodyPr/>
+          <a:lstStyle/>
+          <a:p>
+            <a:endParaRPr lang="LID4096"/>
+          </a:p>
+        </p:txBody>
+      </p:sp>
+      <p:sp>
+        <p:nvSpPr>
+          <p:cNvPr id="3" name="Notes Placeholder 2"/>
+          <p:cNvSpPr>
+            <a:spLocks noGrp="1"/>
+          </p:cNvSpPr>
+          <p:nvPr>
+            <p:ph type="body" idx="1"/>
+          </p:nvPr>
+        </p:nvSpPr>
+        <p:spPr/>
+        <p:txBody>
+          <a:bodyPr/>
+          <a:lstStyle/>
+          <a:p>
+            <a:endParaRPr lang="LID4096" dirty="0"/>
+          </a:p>
+        </p:txBody>
+      </p:sp>
+      <p:sp>
+        <p:nvSpPr>
+          <p:cNvPr id="4" name="Slide Number Placeholder 3"/>
+          <p:cNvSpPr>
+            <a:spLocks noGrp="1"/>
+          </p:cNvSpPr>
+          <p:nvPr>
+            <p:ph type="sldNum" sz="quarter" idx="5"/>
+          </p:nvPr>
+        </p:nvSpPr>
+        <p:spPr/>
+        <p:txBody>
+          <a:bodyPr/>
+          <a:lstStyle/>
+          <a:p>
+            <a:fld id="{4F081A42-54A3-4E6D-AAAD-815597063FD7}" type="slidenum">
+              <a:rPr lang="LID4096" smtClean="0"/>
+              <a:t>20</a:t>
+            </a:fld>
+            <a:endParaRPr lang="LID4096"/>
+          </a:p>
+        </p:txBody>
+      </p:sp>
+    </p:spTree>
+    <p:extLst>
+      <p:ext uri="{BB962C8B-B14F-4D97-AF65-F5344CB8AC3E}">
+        <p14:creationId xmlns:p14="http://schemas.microsoft.com/office/powerpoint/2010/main" val="2900156597"/>
+      </p:ext>
+    </p:extLst>
+  </p:cSld>
+  <p:clrMapOvr>
+    <a:masterClrMapping/>
+  </p:clrMapOvr>
+</p:notes>
+</file>
+
+<file path=ppt/notesSlides/notesSlide9.xml><?xml version="1.0" encoding="utf-8"?>
+<p:notes xmlns:a="http://schemas.openxmlformats.org/drawingml/2006/main" xmlns:r="http://schemas.openxmlformats.org/officeDocument/2006/relationships" xmlns:p="http://schemas.openxmlformats.org/presentationml/2006/main">
+  <p:cSld>
+    <p:spTree>
+      <p:nvGrpSpPr>
+        <p:cNvPr id="1" name=""/>
+        <p:cNvGrpSpPr/>
+        <p:nvPr/>
+      </p:nvGrpSpPr>
+      <p:grpSpPr>
+        <a:xfrm>
+          <a:off x="0" y="0"/>
+          <a:ext cx="0" cy="0"/>
+          <a:chOff x="0" y="0"/>
+          <a:chExt cx="0" cy="0"/>
+        </a:xfrm>
+      </p:grpSpPr>
+      <p:sp>
+        <p:nvSpPr>
+          <p:cNvPr id="2" name="Slide Image Placeholder 1"/>
+          <p:cNvSpPr>
+            <a:spLocks noGrp="1" noRot="1" noChangeAspect="1"/>
+          </p:cNvSpPr>
+          <p:nvPr>
+            <p:ph type="sldImg"/>
+          </p:nvPr>
+        </p:nvSpPr>
+        <p:spPr/>
+        <p:txBody>
+          <a:bodyPr/>
+          <a:lstStyle/>
+          <a:p>
+            <a:endParaRPr lang="LID4096"/>
+          </a:p>
+        </p:txBody>
       </p:sp>
       <p:sp>
         <p:nvSpPr>
@@ -1683,7 +1957,7 @@
           <a:p>
             <a:fld id="{4F081A42-54A3-4E6D-AAAD-815597063FD7}" type="slidenum">
               <a:rPr lang="LID4096" smtClean="0"/>
-              <a:t>19</a:t>
+              <a:t>21</a:t>
             </a:fld>
             <a:endParaRPr lang="LID4096"/>
           </a:p>
@@ -1851,7 +2125,7 @@
           <a:p>
             <a:fld id="{3DBD65A3-F498-4B74-9815-EB2DD0BB06C6}" type="datetimeFigureOut">
               <a:rPr lang="LID4096" smtClean="0"/>
-              <a:t>06/23/2026</a:t>
+              <a:t>07/01/2026</a:t>
             </a:fld>
             <a:endParaRPr lang="LID4096"/>
           </a:p>
@@ -2051,7 +2325,7 @@
           <a:p>
             <a:fld id="{3DBD65A3-F498-4B74-9815-EB2DD0BB06C6}" type="datetimeFigureOut">
               <a:rPr lang="LID4096" smtClean="0"/>
-              <a:t>06/23/2026</a:t>
+              <a:t>07/01/2026</a:t>
             </a:fld>
             <a:endParaRPr lang="LID4096"/>
           </a:p>
@@ -2261,7 +2535,7 @@
           <a:p>
             <a:fld id="{3DBD65A3-F498-4B74-9815-EB2DD0BB06C6}" type="datetimeFigureOut">
               <a:rPr lang="LID4096" smtClean="0"/>
-              <a:t>06/23/2026</a:t>
+              <a:t>07/01/2026</a:t>
             </a:fld>
             <a:endParaRPr lang="LID4096"/>
           </a:p>
@@ -2461,7 +2735,7 @@
           <a:p>
             <a:fld id="{3DBD65A3-F498-4B74-9815-EB2DD0BB06C6}" type="datetimeFigureOut">
               <a:rPr lang="LID4096" smtClean="0"/>
-              <a:t>06/23/2026</a:t>
+              <a:t>07/01/2026</a:t>
             </a:fld>
             <a:endParaRPr lang="LID4096"/>
           </a:p>
@@ -2737,7 +3011,7 @@
           <a:p>
             <a:fld id="{3DBD65A3-F498-4B74-9815-EB2DD0BB06C6}" type="datetimeFigureOut">
               <a:rPr lang="LID4096" smtClean="0"/>
-              <a:t>06/23/2026</a:t>
+              <a:t>07/01/2026</a:t>
             </a:fld>
             <a:endParaRPr lang="LID4096"/>
           </a:p>
@@ -3005,7 +3279,7 @@
           <a:p>
             <a:fld id="{3DBD65A3-F498-4B74-9815-EB2DD0BB06C6}" type="datetimeFigureOut">
               <a:rPr lang="LID4096" smtClean="0"/>
-              <a:t>06/23/2026</a:t>
+              <a:t>07/01/2026</a:t>
             </a:fld>
             <a:endParaRPr lang="LID4096"/>
           </a:p>
@@ -3420,7 +3694,7 @@
           <a:p>
             <a:fld id="{3DBD65A3-F498-4B74-9815-EB2DD0BB06C6}" type="datetimeFigureOut">
               <a:rPr lang="LID4096" smtClean="0"/>
-              <a:t>06/23/2026</a:t>
+              <a:t>07/01/2026</a:t>
             </a:fld>
             <a:endParaRPr lang="LID4096"/>
           </a:p>
@@ -3562,7 +3836,7 @@
           <a:p>
             <a:fld id="{3DBD65A3-F498-4B74-9815-EB2DD0BB06C6}" type="datetimeFigureOut">
               <a:rPr lang="LID4096" smtClean="0"/>
-              <a:t>06/23/2026</a:t>
+              <a:t>07/01/2026</a:t>
             </a:fld>
             <a:endParaRPr lang="LID4096"/>
           </a:p>
@@ -3675,7 +3949,7 @@
           <a:p>
             <a:fld id="{3DBD65A3-F498-4B74-9815-EB2DD0BB06C6}" type="datetimeFigureOut">
               <a:rPr lang="LID4096" smtClean="0"/>
-              <a:t>06/23/2026</a:t>
+              <a:t>07/01/2026</a:t>
             </a:fld>
             <a:endParaRPr lang="LID4096"/>
           </a:p>
@@ -3988,7 +4262,7 @@
           <a:p>
             <a:fld id="{3DBD65A3-F498-4B74-9815-EB2DD0BB06C6}" type="datetimeFigureOut">
               <a:rPr lang="LID4096" smtClean="0"/>
-              <a:t>06/23/2026</a:t>
+              <a:t>07/01/2026</a:t>
             </a:fld>
             <a:endParaRPr lang="LID4096"/>
           </a:p>
@@ -4277,7 +4551,7 @@
           <a:p>
             <a:fld id="{3DBD65A3-F498-4B74-9815-EB2DD0BB06C6}" type="datetimeFigureOut">
               <a:rPr lang="LID4096" smtClean="0"/>
-              <a:t>06/23/2026</a:t>
+              <a:t>07/01/2026</a:t>
             </a:fld>
             <a:endParaRPr lang="LID4096"/>
           </a:p>
@@ -4520,7 +4794,7 @@
           <a:p>
             <a:fld id="{3DBD65A3-F498-4B74-9815-EB2DD0BB06C6}" type="datetimeFigureOut">
               <a:rPr lang="LID4096" smtClean="0"/>
-              <a:t>06/23/2026</a:t>
+              <a:t>07/01/2026</a:t>
             </a:fld>
             <a:endParaRPr lang="LID4096"/>
           </a:p>
@@ -4952,7 +5226,7 @@
         <p:spPr>
           <a:xfrm>
             <a:off x="621703" y="831135"/>
-            <a:ext cx="11265497" cy="4253537"/>
+            <a:ext cx="11265497" cy="4530536"/>
           </a:xfrm>
           <a:prstGeom prst="rect">
             <a:avLst/>
@@ -4979,6 +5253,9 @@
               <a:rPr lang="en-US" sz="2400" dirty="0"/>
               <a:t>The real word problem:</a:t>
             </a:r>
+          </a:p>
+          <a:p>
+            <a:endParaRPr lang="en-US" dirty="0"/>
           </a:p>
           <a:p>
             <a:endParaRPr lang="en-US" dirty="0"/>
@@ -5078,6 +5355,283 @@
 </file>
 
 <file path=ppt/slides/slide10.xml><?xml version="1.0" encoding="utf-8"?>
+<p:sld xmlns:a="http://schemas.openxmlformats.org/drawingml/2006/main" xmlns:r="http://schemas.openxmlformats.org/officeDocument/2006/relationships" xmlns:p="http://schemas.openxmlformats.org/presentationml/2006/main">
+  <p:cSld>
+    <p:spTree>
+      <p:nvGrpSpPr>
+        <p:cNvPr id="1" name=""/>
+        <p:cNvGrpSpPr/>
+        <p:nvPr/>
+      </p:nvGrpSpPr>
+      <p:grpSpPr>
+        <a:xfrm>
+          <a:off x="0" y="0"/>
+          <a:ext cx="0" cy="0"/>
+          <a:chOff x="0" y="0"/>
+          <a:chExt cx="0" cy="0"/>
+        </a:xfrm>
+      </p:grpSpPr>
+      <p:sp>
+        <p:nvSpPr>
+          <p:cNvPr id="4" name="TextBox 3">
+            <a:extLst>
+              <a:ext uri="{FF2B5EF4-FFF2-40B4-BE49-F238E27FC236}">
+                <a16:creationId xmlns:a16="http://schemas.microsoft.com/office/drawing/2014/main" id="{3FE60B6F-CADC-FE76-1467-EFF702F0740B}"/>
+              </a:ext>
+            </a:extLst>
+          </p:cNvPr>
+          <p:cNvSpPr txBox="1"/>
+          <p:nvPr/>
+        </p:nvSpPr>
+        <p:spPr>
+          <a:xfrm>
+            <a:off x="408562" y="402077"/>
+            <a:ext cx="11199778" cy="1569660"/>
+          </a:xfrm>
+          <a:prstGeom prst="rect">
+            <a:avLst/>
+          </a:prstGeom>
+          <a:noFill/>
+        </p:spPr>
+        <p:txBody>
+          <a:bodyPr wrap="square" rtlCol="0">
+            <a:spAutoFit/>
+          </a:bodyPr>
+          <a:lstStyle/>
+          <a:p>
+            <a:r>
+              <a:rPr lang="en-US" dirty="0"/>
+              <a:t>Top 71 descriptors selected by XGBOOST: </a:t>
+            </a:r>
+          </a:p>
+          <a:p>
+            <a:endParaRPr lang="en-US" dirty="0"/>
+          </a:p>
+          <a:p>
+            <a:r>
+              <a:rPr lang="" sz="1200" dirty="0"/>
+              <a:t>['ATS6m', 'Vindex', 'RDF015s', 'MPC08', 'SpMaxA_AEA_dm_', 'Eig07_AEA_dm_', 'RDF065s', 'SpMax6_Bh_s_', 'ATS5m', 'HATS0v', 'SpPosA_RG', 'GGI6', 'Mor08m', 'VE3_RG', 'VE2_B_m_', 'Eta_betaS_A', 'SM11_AEA_bo_', 'RDF010s', 'H2v', 'Mor03v', 'SpMax7_Bh_s_', 'RDF050m', 'Mor11u', 'ChiA_B_m_', 'VE3sign_B_v_', 'G2m', 'SM12_AEA_bo_', 'R6u', 'HATS8m', 'ATSC8e', 'TDB01m', 'SpMax2_Bh_s_', 'RDF025s', 'Mor05m', 'ZM1Mad', 'HGM', 'TDB10u', 'ATSC6m', 'Mor11v', 'Mor05v', 'GGI3', 'Am', 'Mor07m', 'VE1sign_B_v_', 'R5s', 'H3u', 'AVS_B_s_', 'SpMax6_Bh_m_', 'SM09_AEA_dm_', 'H6s', 'Mor04v', 'MATS1e', 'SpMin1_Bh_s_', 'RDF025u', 'Mor29u', 'JGI2', 'H7s', 'ATSC1e', 'MATS1v', 'Mor13m', 'HATS0p', 'VAR', 'R6v', 'TDB06m', 'Gm', 'RDF060m', 'SsOH', 'Mor11p', 'Mor03s', 'Mor10s', 'Mor32v']</a:t>
+            </a:r>
+            <a:endParaRPr lang="LID4096" sz="1200" dirty="0"/>
+          </a:p>
+        </p:txBody>
+      </p:sp>
+      <p:sp>
+        <p:nvSpPr>
+          <p:cNvPr id="5" name="TextBox 4">
+            <a:extLst>
+              <a:ext uri="{FF2B5EF4-FFF2-40B4-BE49-F238E27FC236}">
+                <a16:creationId xmlns:a16="http://schemas.microsoft.com/office/drawing/2014/main" id="{2BF8392B-3B5B-9A3B-DA5E-94F6CE4B8EF8}"/>
+              </a:ext>
+            </a:extLst>
+          </p:cNvPr>
+          <p:cNvSpPr txBox="1"/>
+          <p:nvPr/>
+        </p:nvSpPr>
+        <p:spPr>
+          <a:xfrm>
+            <a:off x="408562" y="2480993"/>
+            <a:ext cx="4286655" cy="3831818"/>
+          </a:xfrm>
+          <a:prstGeom prst="rect">
+            <a:avLst/>
+          </a:prstGeom>
+          <a:noFill/>
+        </p:spPr>
+        <p:txBody>
+          <a:bodyPr wrap="square" rtlCol="0">
+            <a:spAutoFit/>
+          </a:bodyPr>
+          <a:lstStyle/>
+          <a:p>
+            <a:r>
+              <a:rPr lang="en-US" b="1" dirty="0"/>
+              <a:t>Strongly represented:</a:t>
+            </a:r>
+          </a:p>
+          <a:p>
+            <a:endParaRPr lang="en-US" b="1" dirty="0"/>
+          </a:p>
+          <a:p>
+            <a:pPr marL="285750" indent="-285750">
+              <a:lnSpc>
+                <a:spcPct val="150000"/>
+              </a:lnSpc>
+              <a:buFont typeface="Arial" panose="020B0604020202020204" pitchFamily="34" charset="0"/>
+              <a:buChar char="•"/>
+            </a:pPr>
+            <a:r>
+              <a:rPr lang="" dirty="0"/>
+              <a:t>3D molecular shape and geometry </a:t>
+            </a:r>
+          </a:p>
+          <a:p>
+            <a:pPr marL="285750" indent="-285750">
+              <a:lnSpc>
+                <a:spcPct val="150000"/>
+              </a:lnSpc>
+              <a:buFont typeface="Arial" panose="020B0604020202020204" pitchFamily="34" charset="0"/>
+              <a:buChar char="•"/>
+            </a:pPr>
+            <a:r>
+              <a:rPr lang="" dirty="0"/>
+              <a:t>Molecular size and bulk</a:t>
+            </a:r>
+          </a:p>
+          <a:p>
+            <a:pPr marL="285750" indent="-285750">
+              <a:lnSpc>
+                <a:spcPct val="150000"/>
+              </a:lnSpc>
+              <a:buFont typeface="Arial" panose="020B0604020202020204" pitchFamily="34" charset="0"/>
+              <a:buChar char="•"/>
+            </a:pPr>
+            <a:r>
+              <a:rPr lang="" dirty="0"/>
+              <a:t>Electronic structure and charge distribution</a:t>
+            </a:r>
+          </a:p>
+          <a:p>
+            <a:pPr marL="285750" indent="-285750">
+              <a:lnSpc>
+                <a:spcPct val="150000"/>
+              </a:lnSpc>
+              <a:buFont typeface="Arial" panose="020B0604020202020204" pitchFamily="34" charset="0"/>
+              <a:buChar char="•"/>
+            </a:pPr>
+            <a:r>
+              <a:rPr lang="" dirty="0"/>
+              <a:t>Branching and topological complexity</a:t>
+            </a:r>
+          </a:p>
+          <a:p>
+            <a:pPr marL="285750" indent="-285750">
+              <a:lnSpc>
+                <a:spcPct val="150000"/>
+              </a:lnSpc>
+              <a:buFont typeface="Arial" panose="020B0604020202020204" pitchFamily="34" charset="0"/>
+              <a:buChar char="•"/>
+            </a:pPr>
+            <a:r>
+              <a:rPr lang="" dirty="0"/>
+              <a:t>Mass-weighted structural information</a:t>
+            </a:r>
+          </a:p>
+          <a:p>
+            <a:pPr marL="285750" indent="-285750">
+              <a:lnSpc>
+                <a:spcPct val="150000"/>
+              </a:lnSpc>
+              <a:buFont typeface="Arial" panose="020B0604020202020204" pitchFamily="34" charset="0"/>
+              <a:buChar char="•"/>
+            </a:pPr>
+            <a:r>
+              <a:rPr lang="" dirty="0"/>
+              <a:t>Hydrogen-bonding functionality</a:t>
+            </a:r>
+            <a:endParaRPr lang="en-US" dirty="0"/>
+          </a:p>
+          <a:p>
+            <a:endParaRPr lang="LID4096" dirty="0"/>
+          </a:p>
+        </p:txBody>
+      </p:sp>
+      <p:sp>
+        <p:nvSpPr>
+          <p:cNvPr id="6" name="TextBox 5">
+            <a:extLst>
+              <a:ext uri="{FF2B5EF4-FFF2-40B4-BE49-F238E27FC236}">
+                <a16:creationId xmlns:a16="http://schemas.microsoft.com/office/drawing/2014/main" id="{F4E12D3A-CD2A-AF92-E206-0070A8365170}"/>
+              </a:ext>
+            </a:extLst>
+          </p:cNvPr>
+          <p:cNvSpPr txBox="1"/>
+          <p:nvPr/>
+        </p:nvSpPr>
+        <p:spPr>
+          <a:xfrm>
+            <a:off x="6361889" y="3714557"/>
+            <a:ext cx="5648528" cy="1477328"/>
+          </a:xfrm>
+          <a:prstGeom prst="rect">
+            <a:avLst/>
+          </a:prstGeom>
+          <a:noFill/>
+        </p:spPr>
+        <p:txBody>
+          <a:bodyPr wrap="square" rtlCol="0">
+            <a:spAutoFit/>
+          </a:bodyPr>
+          <a:lstStyle/>
+          <a:p>
+            <a:r>
+              <a:rPr lang="" dirty="0"/>
+              <a:t>Maximum odor intensity appears to be driven mainly by molecular 3D shape, size, topology, and electronic structure, whereas classical descriptors such as LogP, PSA, and simple hydrogen-bond counts were not identified as major predictors.</a:t>
+            </a:r>
+            <a:endParaRPr lang="LID4096" dirty="0"/>
+          </a:p>
+        </p:txBody>
+      </p:sp>
+      <p:sp>
+        <p:nvSpPr>
+          <p:cNvPr id="7" name="Arrow: Right 6">
+            <a:extLst>
+              <a:ext uri="{FF2B5EF4-FFF2-40B4-BE49-F238E27FC236}">
+                <a16:creationId xmlns:a16="http://schemas.microsoft.com/office/drawing/2014/main" id="{301F3145-C6F4-5A82-9D8C-20DDB0AABE5C}"/>
+              </a:ext>
+            </a:extLst>
+          </p:cNvPr>
+          <p:cNvSpPr/>
+          <p:nvPr/>
+        </p:nvSpPr>
+        <p:spPr>
+          <a:xfrm>
+            <a:off x="5064868" y="4312596"/>
+            <a:ext cx="953311" cy="168613"/>
+          </a:xfrm>
+          <a:prstGeom prst="rightArrow">
+            <a:avLst/>
+          </a:prstGeom>
+        </p:spPr>
+        <p:style>
+          <a:lnRef idx="2">
+            <a:schemeClr val="accent1">
+              <a:shade val="15000"/>
+            </a:schemeClr>
+          </a:lnRef>
+          <a:fillRef idx="1">
+            <a:schemeClr val="accent1"/>
+          </a:fillRef>
+          <a:effectRef idx="0">
+            <a:schemeClr val="accent1"/>
+          </a:effectRef>
+          <a:fontRef idx="minor">
+            <a:schemeClr val="lt1"/>
+          </a:fontRef>
+        </p:style>
+        <p:txBody>
+          <a:bodyPr rtlCol="0" anchor="ctr"/>
+          <a:lstStyle/>
+          <a:p>
+            <a:pPr algn="ctr"/>
+            <a:endParaRPr lang="LID4096"/>
+          </a:p>
+        </p:txBody>
+      </p:sp>
+    </p:spTree>
+    <p:extLst>
+      <p:ext uri="{BB962C8B-B14F-4D97-AF65-F5344CB8AC3E}">
+        <p14:creationId xmlns:p14="http://schemas.microsoft.com/office/powerpoint/2010/main" val="3088925324"/>
+      </p:ext>
+    </p:extLst>
+  </p:cSld>
+  <p:clrMapOvr>
+    <a:masterClrMapping/>
+  </p:clrMapOvr>
+</p:sld>
+</file>
+
+<file path=ppt/slides/slide11.xml><?xml version="1.0" encoding="utf-8"?>
 <p:sld xmlns:a="http://schemas.openxmlformats.org/drawingml/2006/main" xmlns:r="http://schemas.openxmlformats.org/officeDocument/2006/relationships" xmlns:p="http://schemas.openxmlformats.org/presentationml/2006/main">
   <p:cSld>
     <p:spTree>
@@ -5226,7 +5780,7 @@
 </p:sld>
 </file>
 
-<file path=ppt/slides/slide11.xml><?xml version="1.0" encoding="utf-8"?>
+<file path=ppt/slides/slide12.xml><?xml version="1.0" encoding="utf-8"?>
 <p:sld xmlns:a="http://schemas.openxmlformats.org/drawingml/2006/main" xmlns:r="http://schemas.openxmlformats.org/officeDocument/2006/relationships" xmlns:p="http://schemas.openxmlformats.org/presentationml/2006/main">
   <p:cSld>
     <p:spTree>
@@ -5382,7 +5936,7 @@
 </p:sld>
 </file>
 
-<file path=ppt/slides/slide12.xml><?xml version="1.0" encoding="utf-8"?>
+<file path=ppt/slides/slide13.xml><?xml version="1.0" encoding="utf-8"?>
 <p:sld xmlns:a="http://schemas.openxmlformats.org/drawingml/2006/main" xmlns:r="http://schemas.openxmlformats.org/officeDocument/2006/relationships" xmlns:p="http://schemas.openxmlformats.org/presentationml/2006/main">
   <p:cSld>
     <p:spTree>
@@ -5629,7 +6183,7 @@
 </p:sld>
 </file>
 
-<file path=ppt/slides/slide13.xml><?xml version="1.0" encoding="utf-8"?>
+<file path=ppt/slides/slide14.xml><?xml version="1.0" encoding="utf-8"?>
 <p:sld xmlns:a="http://schemas.openxmlformats.org/drawingml/2006/main" xmlns:r="http://schemas.openxmlformats.org/officeDocument/2006/relationships" xmlns:p="http://schemas.openxmlformats.org/presentationml/2006/main">
   <p:cSld>
     <p:spTree>
@@ -5725,7 +6279,7 @@
 </p:sld>
 </file>
 
-<file path=ppt/slides/slide14.xml><?xml version="1.0" encoding="utf-8"?>
+<file path=ppt/slides/slide15.xml><?xml version="1.0" encoding="utf-8"?>
 <p:sld xmlns:a="http://schemas.openxmlformats.org/drawingml/2006/main" xmlns:r="http://schemas.openxmlformats.org/officeDocument/2006/relationships" xmlns:p="http://schemas.openxmlformats.org/presentationml/2006/main">
   <p:cSld>
     <p:spTree>
@@ -5851,7 +6405,7 @@
 </p:sld>
 </file>
 
-<file path=ppt/slides/slide15.xml><?xml version="1.0" encoding="utf-8"?>
+<file path=ppt/slides/slide16.xml><?xml version="1.0" encoding="utf-8"?>
 <p:sld xmlns:a="http://schemas.openxmlformats.org/drawingml/2006/main" xmlns:r="http://schemas.openxmlformats.org/officeDocument/2006/relationships" xmlns:p="http://schemas.openxmlformats.org/presentationml/2006/main">
   <p:cSld>
     <p:spTree>
@@ -6037,7 +6591,223 @@
 </p:sld>
 </file>
 
-<file path=ppt/slides/slide16.xml><?xml version="1.0" encoding="utf-8"?>
+<file path=ppt/slides/slide17.xml><?xml version="1.0" encoding="utf-8"?>
+<p:sld xmlns:a="http://schemas.openxmlformats.org/drawingml/2006/main" xmlns:r="http://schemas.openxmlformats.org/officeDocument/2006/relationships" xmlns:p="http://schemas.openxmlformats.org/presentationml/2006/main">
+  <p:cSld>
+    <p:spTree>
+      <p:nvGrpSpPr>
+        <p:cNvPr id="1" name=""/>
+        <p:cNvGrpSpPr/>
+        <p:nvPr/>
+      </p:nvGrpSpPr>
+      <p:grpSpPr>
+        <a:xfrm>
+          <a:off x="0" y="0"/>
+          <a:ext cx="0" cy="0"/>
+          <a:chOff x="0" y="0"/>
+          <a:chExt cx="0" cy="0"/>
+        </a:xfrm>
+      </p:grpSpPr>
+      <p:pic>
+        <p:nvPicPr>
+          <p:cNvPr id="3" name="Picture 2">
+            <a:extLst>
+              <a:ext uri="{FF2B5EF4-FFF2-40B4-BE49-F238E27FC236}">
+                <a16:creationId xmlns:a16="http://schemas.microsoft.com/office/drawing/2014/main" id="{D8DF3F30-AF49-D40E-A202-9F59F19956DA}"/>
+              </a:ext>
+            </a:extLst>
+          </p:cNvPr>
+          <p:cNvPicPr>
+            <a:picLocks noChangeAspect="1"/>
+          </p:cNvPicPr>
+          <p:nvPr/>
+        </p:nvPicPr>
+        <p:blipFill>
+          <a:blip r:embed="rId2"/>
+          <a:stretch>
+            <a:fillRect/>
+          </a:stretch>
+        </p:blipFill>
+        <p:spPr>
+          <a:xfrm>
+            <a:off x="386398" y="1251463"/>
+            <a:ext cx="2534648" cy="1414260"/>
+          </a:xfrm>
+          <a:prstGeom prst="rect">
+            <a:avLst/>
+          </a:prstGeom>
+        </p:spPr>
+      </p:pic>
+      <p:pic>
+        <p:nvPicPr>
+          <p:cNvPr id="5" name="Picture 4">
+            <a:extLst>
+              <a:ext uri="{FF2B5EF4-FFF2-40B4-BE49-F238E27FC236}">
+                <a16:creationId xmlns:a16="http://schemas.microsoft.com/office/drawing/2014/main" id="{DFE77751-B6D3-6679-E684-E2ECAD4E1DAE}"/>
+              </a:ext>
+            </a:extLst>
+          </p:cNvPr>
+          <p:cNvPicPr>
+            <a:picLocks noChangeAspect="1"/>
+          </p:cNvPicPr>
+          <p:nvPr/>
+        </p:nvPicPr>
+        <p:blipFill>
+          <a:blip r:embed="rId3"/>
+          <a:stretch>
+            <a:fillRect/>
+          </a:stretch>
+        </p:blipFill>
+        <p:spPr>
+          <a:xfrm>
+            <a:off x="386398" y="3175971"/>
+            <a:ext cx="3672040" cy="672656"/>
+          </a:xfrm>
+          <a:prstGeom prst="rect">
+            <a:avLst/>
+          </a:prstGeom>
+        </p:spPr>
+      </p:pic>
+      <p:pic>
+        <p:nvPicPr>
+          <p:cNvPr id="7" name="Picture 6">
+            <a:extLst>
+              <a:ext uri="{FF2B5EF4-FFF2-40B4-BE49-F238E27FC236}">
+                <a16:creationId xmlns:a16="http://schemas.microsoft.com/office/drawing/2014/main" id="{89D67202-A306-3D17-37F9-A39C7E64E459}"/>
+              </a:ext>
+            </a:extLst>
+          </p:cNvPr>
+          <p:cNvPicPr>
+            <a:picLocks noChangeAspect="1"/>
+          </p:cNvPicPr>
+          <p:nvPr/>
+        </p:nvPicPr>
+        <p:blipFill>
+          <a:blip r:embed="rId4"/>
+          <a:stretch>
+            <a:fillRect/>
+          </a:stretch>
+        </p:blipFill>
+        <p:spPr>
+          <a:xfrm>
+            <a:off x="6814731" y="2102966"/>
+            <a:ext cx="4800326" cy="4622222"/>
+          </a:xfrm>
+          <a:prstGeom prst="rect">
+            <a:avLst/>
+          </a:prstGeom>
+        </p:spPr>
+      </p:pic>
+      <p:pic>
+        <p:nvPicPr>
+          <p:cNvPr id="9" name="Picture 8">
+            <a:extLst>
+              <a:ext uri="{FF2B5EF4-FFF2-40B4-BE49-F238E27FC236}">
+                <a16:creationId xmlns:a16="http://schemas.microsoft.com/office/drawing/2014/main" id="{F139F18E-CC6D-E85C-0655-882085C34CD2}"/>
+              </a:ext>
+            </a:extLst>
+          </p:cNvPr>
+          <p:cNvPicPr>
+            <a:picLocks noChangeAspect="1"/>
+          </p:cNvPicPr>
+          <p:nvPr/>
+        </p:nvPicPr>
+        <p:blipFill>
+          <a:blip r:embed="rId5"/>
+          <a:stretch>
+            <a:fillRect/>
+          </a:stretch>
+        </p:blipFill>
+        <p:spPr>
+          <a:xfrm>
+            <a:off x="386398" y="4168473"/>
+            <a:ext cx="4287934" cy="1715174"/>
+          </a:xfrm>
+          <a:prstGeom prst="rect">
+            <a:avLst/>
+          </a:prstGeom>
+        </p:spPr>
+      </p:pic>
+      <p:pic>
+        <p:nvPicPr>
+          <p:cNvPr id="11" name="Picture 10">
+            <a:extLst>
+              <a:ext uri="{FF2B5EF4-FFF2-40B4-BE49-F238E27FC236}">
+                <a16:creationId xmlns:a16="http://schemas.microsoft.com/office/drawing/2014/main" id="{BC395089-F171-EE0A-1660-8A2369E035A1}"/>
+              </a:ext>
+            </a:extLst>
+          </p:cNvPr>
+          <p:cNvPicPr>
+            <a:picLocks noChangeAspect="1"/>
+          </p:cNvPicPr>
+          <p:nvPr/>
+        </p:nvPicPr>
+        <p:blipFill>
+          <a:blip r:embed="rId6"/>
+          <a:stretch>
+            <a:fillRect/>
+          </a:stretch>
+        </p:blipFill>
+        <p:spPr>
+          <a:xfrm>
+            <a:off x="3347313" y="1251463"/>
+            <a:ext cx="3804602" cy="1604662"/>
+          </a:xfrm>
+          <a:prstGeom prst="rect">
+            <a:avLst/>
+          </a:prstGeom>
+        </p:spPr>
+      </p:pic>
+      <p:sp>
+        <p:nvSpPr>
+          <p:cNvPr id="12" name="TextBox 11">
+            <a:extLst>
+              <a:ext uri="{FF2B5EF4-FFF2-40B4-BE49-F238E27FC236}">
+                <a16:creationId xmlns:a16="http://schemas.microsoft.com/office/drawing/2014/main" id="{960BBE85-9124-EB89-8AA4-94D7E45698AF}"/>
+              </a:ext>
+            </a:extLst>
+          </p:cNvPr>
+          <p:cNvSpPr txBox="1"/>
+          <p:nvPr/>
+        </p:nvSpPr>
+        <p:spPr>
+          <a:xfrm>
+            <a:off x="468086" y="402771"/>
+            <a:ext cx="6172200" cy="461665"/>
+          </a:xfrm>
+          <a:prstGeom prst="rect">
+            <a:avLst/>
+          </a:prstGeom>
+          <a:noFill/>
+        </p:spPr>
+        <p:txBody>
+          <a:bodyPr wrap="square" rtlCol="0">
+            <a:spAutoFit/>
+          </a:bodyPr>
+          <a:lstStyle/>
+          <a:p>
+            <a:r>
+              <a:rPr lang="en-US" sz="2400" b="1" dirty="0"/>
+              <a:t>Classification with XGBOOST</a:t>
+            </a:r>
+            <a:endParaRPr lang="LID4096" sz="2400" b="1" dirty="0"/>
+          </a:p>
+        </p:txBody>
+      </p:sp>
+    </p:spTree>
+    <p:extLst>
+      <p:ext uri="{BB962C8B-B14F-4D97-AF65-F5344CB8AC3E}">
+        <p14:creationId xmlns:p14="http://schemas.microsoft.com/office/powerpoint/2010/main" val="1241119122"/>
+      </p:ext>
+    </p:extLst>
+  </p:cSld>
+  <p:clrMapOvr>
+    <a:masterClrMapping/>
+  </p:clrMapOvr>
+</p:sld>
+</file>
+
+<file path=ppt/slides/slide18.xml><?xml version="1.0" encoding="utf-8"?>
 <p:sld xmlns:a="http://schemas.openxmlformats.org/drawingml/2006/main" xmlns:r="http://schemas.openxmlformats.org/officeDocument/2006/relationships" xmlns:p="http://schemas.openxmlformats.org/presentationml/2006/main">
   <p:cSld>
     <p:spTree>
@@ -7699,7 +8469,7 @@
 </p:sld>
 </file>
 
-<file path=ppt/slides/slide17.xml><?xml version="1.0" encoding="utf-8"?>
+<file path=ppt/slides/slide19.xml><?xml version="1.0" encoding="utf-8"?>
 <p:sld xmlns:a="http://schemas.openxmlformats.org/drawingml/2006/main" xmlns:r="http://schemas.openxmlformats.org/officeDocument/2006/relationships" xmlns:p="http://schemas.openxmlformats.org/presentationml/2006/main">
   <p:cSld>
     <p:spTree>
@@ -7896,7 +8666,266 @@
 </p:sld>
 </file>
 
-<file path=ppt/slides/slide18.xml><?xml version="1.0" encoding="utf-8"?>
+<file path=ppt/slides/slide2.xml><?xml version="1.0" encoding="utf-8"?>
+<p:sld xmlns:a="http://schemas.openxmlformats.org/drawingml/2006/main" xmlns:r="http://schemas.openxmlformats.org/officeDocument/2006/relationships" xmlns:p="http://schemas.openxmlformats.org/presentationml/2006/main">
+  <p:cSld>
+    <p:spTree>
+      <p:nvGrpSpPr>
+        <p:cNvPr id="1" name=""/>
+        <p:cNvGrpSpPr/>
+        <p:nvPr/>
+      </p:nvGrpSpPr>
+      <p:grpSpPr>
+        <a:xfrm>
+          <a:off x="0" y="0"/>
+          <a:ext cx="0" cy="0"/>
+          <a:chOff x="0" y="0"/>
+          <a:chExt cx="0" cy="0"/>
+        </a:xfrm>
+      </p:grpSpPr>
+      <p:sp>
+        <p:nvSpPr>
+          <p:cNvPr id="2" name="TextBox 1">
+            <a:extLst>
+              <a:ext uri="{FF2B5EF4-FFF2-40B4-BE49-F238E27FC236}">
+                <a16:creationId xmlns:a16="http://schemas.microsoft.com/office/drawing/2014/main" id="{BF5BABD6-1A96-9F71-774C-E1DF982A4CAB}"/>
+              </a:ext>
+            </a:extLst>
+          </p:cNvPr>
+          <p:cNvSpPr txBox="1"/>
+          <p:nvPr/>
+        </p:nvSpPr>
+        <p:spPr>
+          <a:xfrm>
+            <a:off x="331624" y="315389"/>
+            <a:ext cx="6498154" cy="461665"/>
+          </a:xfrm>
+          <a:prstGeom prst="rect">
+            <a:avLst/>
+          </a:prstGeom>
+          <a:noFill/>
+        </p:spPr>
+        <p:txBody>
+          <a:bodyPr wrap="square" rtlCol="0">
+            <a:spAutoFit/>
+          </a:bodyPr>
+          <a:lstStyle/>
+          <a:p>
+            <a:r>
+              <a:rPr lang="en-US" sz="2400" b="1" dirty="0"/>
+              <a:t>Intensity behavior (different threshold)</a:t>
+            </a:r>
+            <a:endParaRPr lang="LID4096" sz="2400" b="1" dirty="0"/>
+          </a:p>
+        </p:txBody>
+      </p:sp>
+      <p:pic>
+        <p:nvPicPr>
+          <p:cNvPr id="6" name="Picture 5">
+            <a:extLst>
+              <a:ext uri="{FF2B5EF4-FFF2-40B4-BE49-F238E27FC236}">
+                <a16:creationId xmlns:a16="http://schemas.microsoft.com/office/drawing/2014/main" id="{5C05899B-29F6-AD87-D70F-5398748B488C}"/>
+              </a:ext>
+            </a:extLst>
+          </p:cNvPr>
+          <p:cNvPicPr>
+            <a:picLocks noChangeAspect="1"/>
+          </p:cNvPicPr>
+          <p:nvPr/>
+        </p:nvPicPr>
+        <p:blipFill>
+          <a:blip r:embed="rId3"/>
+          <a:stretch>
+            <a:fillRect/>
+          </a:stretch>
+        </p:blipFill>
+        <p:spPr>
+          <a:xfrm>
+            <a:off x="2235433" y="1456536"/>
+            <a:ext cx="2209914" cy="787440"/>
+          </a:xfrm>
+          <a:prstGeom prst="rect">
+            <a:avLst/>
+          </a:prstGeom>
+        </p:spPr>
+      </p:pic>
+      <p:sp>
+        <p:nvSpPr>
+          <p:cNvPr id="7" name="TextBox 6">
+            <a:extLst>
+              <a:ext uri="{FF2B5EF4-FFF2-40B4-BE49-F238E27FC236}">
+                <a16:creationId xmlns:a16="http://schemas.microsoft.com/office/drawing/2014/main" id="{DB79EB18-0A80-C009-DC4E-ADFAECF1280B}"/>
+              </a:ext>
+            </a:extLst>
+          </p:cNvPr>
+          <p:cNvSpPr txBox="1"/>
+          <p:nvPr/>
+        </p:nvSpPr>
+        <p:spPr>
+          <a:xfrm>
+            <a:off x="418271" y="875609"/>
+            <a:ext cx="11080750" cy="646331"/>
+          </a:xfrm>
+          <a:prstGeom prst="rect">
+            <a:avLst/>
+          </a:prstGeom>
+          <a:noFill/>
+        </p:spPr>
+        <p:txBody>
+          <a:bodyPr wrap="square" rtlCol="0">
+            <a:spAutoFit/>
+          </a:bodyPr>
+          <a:lstStyle/>
+          <a:p>
+            <a:r>
+              <a:rPr lang="en-US" dirty="0"/>
+              <a:t>Odor intensity is measured by  labeled magnitude scale  (LMS), which is hybrid scaling technique using verbally labeled line with quasi-logarithmic spacing between the labels.</a:t>
+            </a:r>
+            <a:endParaRPr lang="LID4096" dirty="0"/>
+          </a:p>
+        </p:txBody>
+      </p:sp>
+      <p:pic>
+        <p:nvPicPr>
+          <p:cNvPr id="5" name="Picture 4">
+            <a:extLst>
+              <a:ext uri="{FF2B5EF4-FFF2-40B4-BE49-F238E27FC236}">
+                <a16:creationId xmlns:a16="http://schemas.microsoft.com/office/drawing/2014/main" id="{B0EC1BE1-BF81-17A7-302C-30B1EB2D80BC}"/>
+              </a:ext>
+            </a:extLst>
+          </p:cNvPr>
+          <p:cNvPicPr>
+            <a:picLocks noChangeAspect="1"/>
+          </p:cNvPicPr>
+          <p:nvPr/>
+        </p:nvPicPr>
+        <p:blipFill>
+          <a:blip r:embed="rId4"/>
+          <a:stretch>
+            <a:fillRect/>
+          </a:stretch>
+        </p:blipFill>
+        <p:spPr>
+          <a:xfrm>
+            <a:off x="6559673" y="1758257"/>
+            <a:ext cx="5428011" cy="4224134"/>
+          </a:xfrm>
+          <a:prstGeom prst="rect">
+            <a:avLst/>
+          </a:prstGeom>
+        </p:spPr>
+      </p:pic>
+      <p:pic>
+        <p:nvPicPr>
+          <p:cNvPr id="10" name="Picture 9">
+            <a:extLst>
+              <a:ext uri="{FF2B5EF4-FFF2-40B4-BE49-F238E27FC236}">
+                <a16:creationId xmlns:a16="http://schemas.microsoft.com/office/drawing/2014/main" id="{613DD6F3-2A55-C108-5E5C-56DCD8D2283C}"/>
+              </a:ext>
+            </a:extLst>
+          </p:cNvPr>
+          <p:cNvPicPr>
+            <a:picLocks noChangeAspect="1"/>
+          </p:cNvPicPr>
+          <p:nvPr/>
+        </p:nvPicPr>
+        <p:blipFill>
+          <a:blip r:embed="rId5"/>
+          <a:srcRect t="1035"/>
+          <a:stretch>
+            <a:fillRect/>
+          </a:stretch>
+        </p:blipFill>
+        <p:spPr>
+          <a:xfrm>
+            <a:off x="710044" y="2243976"/>
+            <a:ext cx="5609244" cy="3062402"/>
+          </a:xfrm>
+          <a:prstGeom prst="rect">
+            <a:avLst/>
+          </a:prstGeom>
+        </p:spPr>
+      </p:pic>
+      <p:pic>
+        <p:nvPicPr>
+          <p:cNvPr id="8" name="Picture 7">
+            <a:extLst>
+              <a:ext uri="{FF2B5EF4-FFF2-40B4-BE49-F238E27FC236}">
+                <a16:creationId xmlns:a16="http://schemas.microsoft.com/office/drawing/2014/main" id="{E9126F27-6D42-EDBE-7F0E-AE58444AA521}"/>
+              </a:ext>
+            </a:extLst>
+          </p:cNvPr>
+          <p:cNvPicPr>
+            <a:picLocks noChangeAspect="1"/>
+          </p:cNvPicPr>
+          <p:nvPr/>
+        </p:nvPicPr>
+        <p:blipFill>
+          <a:blip r:embed="rId6"/>
+          <a:stretch>
+            <a:fillRect/>
+          </a:stretch>
+        </p:blipFill>
+        <p:spPr>
+          <a:xfrm>
+            <a:off x="418271" y="5643580"/>
+            <a:ext cx="7019512" cy="745141"/>
+          </a:xfrm>
+          <a:prstGeom prst="rect">
+            <a:avLst/>
+          </a:prstGeom>
+        </p:spPr>
+      </p:pic>
+      <p:sp>
+        <p:nvSpPr>
+          <p:cNvPr id="11" name="TextBox 10">
+            <a:extLst>
+              <a:ext uri="{FF2B5EF4-FFF2-40B4-BE49-F238E27FC236}">
+                <a16:creationId xmlns:a16="http://schemas.microsoft.com/office/drawing/2014/main" id="{C8E0A61A-0624-F99E-02AC-471C6F29B0D2}"/>
+              </a:ext>
+            </a:extLst>
+          </p:cNvPr>
+          <p:cNvSpPr txBox="1"/>
+          <p:nvPr/>
+        </p:nvSpPr>
+        <p:spPr>
+          <a:xfrm>
+            <a:off x="418271" y="6388722"/>
+            <a:ext cx="4867275" cy="307777"/>
+          </a:xfrm>
+          <a:prstGeom prst="rect">
+            <a:avLst/>
+          </a:prstGeom>
+          <a:noFill/>
+        </p:spPr>
+        <p:txBody>
+          <a:bodyPr wrap="square" rtlCol="0">
+            <a:spAutoFit/>
+          </a:bodyPr>
+          <a:lstStyle/>
+          <a:p>
+            <a:r>
+              <a:rPr lang="da-DK" sz="1400" dirty="0"/>
+              <a:t>Ind. Eng. Chem. Res. 2019, 58, 32, 15036–15044</a:t>
+            </a:r>
+            <a:endParaRPr lang="LID4096" sz="1400" dirty="0"/>
+          </a:p>
+        </p:txBody>
+      </p:sp>
+    </p:spTree>
+    <p:extLst>
+      <p:ext uri="{BB962C8B-B14F-4D97-AF65-F5344CB8AC3E}">
+        <p14:creationId xmlns:p14="http://schemas.microsoft.com/office/powerpoint/2010/main" val="406209042"/>
+      </p:ext>
+    </p:extLst>
+  </p:cSld>
+  <p:clrMapOvr>
+    <a:masterClrMapping/>
+  </p:clrMapOvr>
+</p:sld>
+</file>
+
+<file path=ppt/slides/slide20.xml><?xml version="1.0" encoding="utf-8"?>
 <p:sld xmlns:a="http://schemas.openxmlformats.org/drawingml/2006/main" xmlns:r="http://schemas.openxmlformats.org/officeDocument/2006/relationships" xmlns:p="http://schemas.openxmlformats.org/presentationml/2006/main">
   <p:cSld>
     <p:spTree>
@@ -7992,7 +9021,7 @@
 </p:sld>
 </file>
 
-<file path=ppt/slides/slide19.xml><?xml version="1.0" encoding="utf-8"?>
+<file path=ppt/slides/slide21.xml><?xml version="1.0" encoding="utf-8"?>
 <p:sld xmlns:a="http://schemas.openxmlformats.org/drawingml/2006/main" xmlns:r="http://schemas.openxmlformats.org/officeDocument/2006/relationships" xmlns:p="http://schemas.openxmlformats.org/presentationml/2006/main">
   <p:cSld>
     <p:spTree>
@@ -8118,7 +9147,7 @@
 </p:sld>
 </file>
 
-<file path=ppt/slides/slide2.xml><?xml version="1.0" encoding="utf-8"?>
+<file path=ppt/slides/slide22.xml><?xml version="1.0" encoding="utf-8"?>
 <p:sld xmlns:a="http://schemas.openxmlformats.org/drawingml/2006/main" xmlns:r="http://schemas.openxmlformats.org/officeDocument/2006/relationships" xmlns:p="http://schemas.openxmlformats.org/presentationml/2006/main">
   <p:cSld>
     <p:spTree>
@@ -8140,7 +9169,7 @@
           <p:cNvPr id="2" name="TextBox 1">
             <a:extLst>
               <a:ext uri="{FF2B5EF4-FFF2-40B4-BE49-F238E27FC236}">
-                <a16:creationId xmlns:a16="http://schemas.microsoft.com/office/drawing/2014/main" id="{BF5BABD6-1A96-9F71-774C-E1DF982A4CAB}"/>
+                <a16:creationId xmlns:a16="http://schemas.microsoft.com/office/drawing/2014/main" id="{CA654FCE-11CD-05A3-4862-A8BF58F7E65F}"/>
               </a:ext>
             </a:extLst>
           </p:cNvPr>
@@ -8149,8 +9178,8 @@
         </p:nvSpPr>
         <p:spPr>
           <a:xfrm>
-            <a:off x="331624" y="315389"/>
-            <a:ext cx="6498154" cy="461665"/>
+            <a:off x="968829" y="457200"/>
+            <a:ext cx="10145485" cy="2123658"/>
           </a:xfrm>
           <a:prstGeom prst="rect">
             <a:avLst/>
@@ -8165,58 +9194,74 @@
           <a:p>
             <a:r>
               <a:rPr lang="en-US" sz="2400" b="1" dirty="0"/>
-              <a:t>Intensity behavior (different threshold)</a:t>
-            </a:r>
-            <a:endParaRPr lang="LID4096" sz="2400" b="1" dirty="0"/>
-          </a:p>
-        </p:txBody>
-      </p:sp>
-      <p:pic>
-        <p:nvPicPr>
-          <p:cNvPr id="6" name="Picture 5">
-            <a:extLst>
-              <a:ext uri="{FF2B5EF4-FFF2-40B4-BE49-F238E27FC236}">
-                <a16:creationId xmlns:a16="http://schemas.microsoft.com/office/drawing/2014/main" id="{5C05899B-29F6-AD87-D70F-5398748B488C}"/>
-              </a:ext>
-            </a:extLst>
-          </p:cNvPr>
-          <p:cNvPicPr>
-            <a:picLocks noChangeAspect="1"/>
-          </p:cNvPicPr>
+              <a:t>Possible steps for future research:</a:t>
+            </a:r>
+          </a:p>
+          <a:p>
+            <a:endParaRPr lang="en-US" dirty="0"/>
+          </a:p>
+          <a:p>
+            <a:endParaRPr lang="en-US" dirty="0"/>
+          </a:p>
+          <a:p>
+            <a:pPr marL="342900" indent="-342900">
+              <a:buFont typeface="+mj-lt"/>
+              <a:buAutoNum type="arabicPeriod"/>
+            </a:pPr>
+            <a:r>
+              <a:rPr lang="en-US" dirty="0"/>
+              <a:t>Look for additional relevant features (interaction between molecules and olfactory receptors)</a:t>
+            </a:r>
+          </a:p>
+          <a:p>
+            <a:pPr marL="342900" indent="-342900">
+              <a:buFont typeface="+mj-lt"/>
+              <a:buAutoNum type="arabicPeriod"/>
+            </a:pPr>
+            <a:r>
+              <a:rPr lang="en-US" dirty="0"/>
+              <a:t>Predict Di (steepness) and Ci (half intensity concentration)</a:t>
+            </a:r>
+          </a:p>
+          <a:p>
+            <a:pPr marL="342900" indent="-342900">
+              <a:buFont typeface="+mj-lt"/>
+              <a:buAutoNum type="arabicPeriod"/>
+            </a:pPr>
+            <a:r>
+              <a:rPr lang="en-US" dirty="0"/>
+              <a:t>Predict the full intensity curve</a:t>
+            </a:r>
+          </a:p>
+          <a:p>
+            <a:pPr marL="342900" indent="-342900">
+              <a:buFont typeface="+mj-lt"/>
+              <a:buAutoNum type="arabicPeriod"/>
+            </a:pPr>
+            <a:r>
+              <a:rPr lang="en-US" dirty="0"/>
+              <a:t>Use the clean and expanded database </a:t>
+            </a:r>
+            <a:endParaRPr lang="LID4096" dirty="0"/>
+          </a:p>
+        </p:txBody>
+      </p:sp>
+      <p:sp>
+        <p:nvSpPr>
+          <p:cNvPr id="3" name="TextBox 2">
+            <a:extLst>
+              <a:ext uri="{FF2B5EF4-FFF2-40B4-BE49-F238E27FC236}">
+                <a16:creationId xmlns:a16="http://schemas.microsoft.com/office/drawing/2014/main" id="{8C55CB60-E2FE-E5D8-A959-C0BA8D9504BE}"/>
+              </a:ext>
+            </a:extLst>
+          </p:cNvPr>
+          <p:cNvSpPr txBox="1"/>
           <p:nvPr/>
-        </p:nvPicPr>
-        <p:blipFill>
-          <a:blip r:embed="rId3"/>
-          <a:stretch>
-            <a:fillRect/>
-          </a:stretch>
-        </p:blipFill>
+        </p:nvSpPr>
         <p:spPr>
           <a:xfrm>
-            <a:off x="2235433" y="1456536"/>
-            <a:ext cx="2209914" cy="787440"/>
-          </a:xfrm>
-          <a:prstGeom prst="rect">
-            <a:avLst/>
-          </a:prstGeom>
-        </p:spPr>
-      </p:pic>
-      <p:sp>
-        <p:nvSpPr>
-          <p:cNvPr id="7" name="TextBox 6">
-            <a:extLst>
-              <a:ext uri="{FF2B5EF4-FFF2-40B4-BE49-F238E27FC236}">
-                <a16:creationId xmlns:a16="http://schemas.microsoft.com/office/drawing/2014/main" id="{DB79EB18-0A80-C009-DC4E-ADFAECF1280B}"/>
-              </a:ext>
-            </a:extLst>
-          </p:cNvPr>
-          <p:cNvSpPr txBox="1"/>
-          <p:nvPr/>
-        </p:nvSpPr>
-        <p:spPr>
-          <a:xfrm>
-            <a:off x="418271" y="875609"/>
-            <a:ext cx="11080750" cy="646331"/>
+            <a:off x="2645229" y="3923200"/>
+            <a:ext cx="9666514" cy="707886"/>
           </a:xfrm>
           <a:prstGeom prst="rect">
             <a:avLst/>
@@ -8230,121 +9275,17 @@
           <a:lstStyle/>
           <a:p>
             <a:r>
-              <a:rPr lang="en-US" dirty="0"/>
-              <a:t>Odor intensity is measured by  labeled magnitude scale  (LMS), which is hybrid scaling technique using verbally labeled line with quasi-logarithmic spacing between the labels.</a:t>
-            </a:r>
-            <a:endParaRPr lang="LID4096" dirty="0"/>
-          </a:p>
-        </p:txBody>
-      </p:sp>
-      <p:sp>
-        <p:nvSpPr>
-          <p:cNvPr id="3" name="TextBox 2">
-            <a:extLst>
-              <a:ext uri="{FF2B5EF4-FFF2-40B4-BE49-F238E27FC236}">
-                <a16:creationId xmlns:a16="http://schemas.microsoft.com/office/drawing/2014/main" id="{D950E2B9-F4ED-64FE-3875-E8D1D5E4F4A9}"/>
-              </a:ext>
-            </a:extLst>
-          </p:cNvPr>
-          <p:cNvSpPr txBox="1"/>
-          <p:nvPr/>
-        </p:nvSpPr>
-        <p:spPr>
-          <a:xfrm>
-            <a:off x="587022" y="6478852"/>
-            <a:ext cx="6852356" cy="400110"/>
-          </a:xfrm>
-          <a:prstGeom prst="rect">
-            <a:avLst/>
-          </a:prstGeom>
-          <a:noFill/>
-        </p:spPr>
-        <p:txBody>
-          <a:bodyPr wrap="square" rtlCol="0">
-            <a:spAutoFit/>
-          </a:bodyPr>
-          <a:lstStyle/>
-          <a:p>
-            <a:r>
-              <a:rPr lang="en-US" sz="1000" dirty="0"/>
-              <a:t>ref: Method for Predicting Odor Intensity of Perfumery Raw Materials Using Dose–Response Curve Database, Wakayama, Hideki, </a:t>
-            </a:r>
-            <a:r>
-              <a:rPr lang="en-US" sz="1000" dirty="0" err="1"/>
-              <a:t>doi</a:t>
-            </a:r>
-            <a:r>
-              <a:rPr lang="en-US" sz="1000" dirty="0"/>
-              <a:t>: 10.1021/acs.iecr.9b01225, https://pubs.acs.org/doi/10.1021/acs.iecr.9b01225</a:t>
-            </a:r>
-            <a:endParaRPr lang="LID4096" sz="1000" dirty="0"/>
-          </a:p>
-        </p:txBody>
-      </p:sp>
-      <p:pic>
-        <p:nvPicPr>
-          <p:cNvPr id="5" name="Picture 4">
-            <a:extLst>
-              <a:ext uri="{FF2B5EF4-FFF2-40B4-BE49-F238E27FC236}">
-                <a16:creationId xmlns:a16="http://schemas.microsoft.com/office/drawing/2014/main" id="{B0EC1BE1-BF81-17A7-302C-30B1EB2D80BC}"/>
-              </a:ext>
-            </a:extLst>
-          </p:cNvPr>
-          <p:cNvPicPr>
-            <a:picLocks noChangeAspect="1"/>
-          </p:cNvPicPr>
-          <p:nvPr/>
-        </p:nvPicPr>
-        <p:blipFill>
-          <a:blip r:embed="rId4"/>
-          <a:stretch>
-            <a:fillRect/>
-          </a:stretch>
-        </p:blipFill>
-        <p:spPr>
-          <a:xfrm>
-            <a:off x="6559673" y="1758257"/>
-            <a:ext cx="5428011" cy="4224134"/>
-          </a:xfrm>
-          <a:prstGeom prst="rect">
-            <a:avLst/>
-          </a:prstGeom>
-        </p:spPr>
-      </p:pic>
-      <p:pic>
-        <p:nvPicPr>
-          <p:cNvPr id="10" name="Picture 9">
-            <a:extLst>
-              <a:ext uri="{FF2B5EF4-FFF2-40B4-BE49-F238E27FC236}">
-                <a16:creationId xmlns:a16="http://schemas.microsoft.com/office/drawing/2014/main" id="{613DD6F3-2A55-C108-5E5C-56DCD8D2283C}"/>
-              </a:ext>
-            </a:extLst>
-          </p:cNvPr>
-          <p:cNvPicPr>
-            <a:picLocks noChangeAspect="1"/>
-          </p:cNvPicPr>
-          <p:nvPr/>
-        </p:nvPicPr>
-        <p:blipFill>
-          <a:blip r:embed="rId5"/>
-          <a:stretch>
-            <a:fillRect/>
-          </a:stretch>
-        </p:blipFill>
-        <p:spPr>
-          <a:xfrm>
-            <a:off x="835308" y="2427411"/>
-            <a:ext cx="5260692" cy="2902148"/>
-          </a:xfrm>
-          <a:prstGeom prst="rect">
-            <a:avLst/>
-          </a:prstGeom>
-        </p:spPr>
-      </p:pic>
+              <a:rPr lang="en-US" sz="4000" b="1" dirty="0"/>
+              <a:t>Thank you for your attention!</a:t>
+            </a:r>
+            <a:endParaRPr lang="LID4096" sz="4000" b="1" dirty="0"/>
+          </a:p>
+        </p:txBody>
+      </p:sp>
     </p:spTree>
     <p:extLst>
       <p:ext uri="{BB962C8B-B14F-4D97-AF65-F5344CB8AC3E}">
-        <p14:creationId xmlns:p14="http://schemas.microsoft.com/office/powerpoint/2010/main" val="406209042"/>
+        <p14:creationId xmlns:p14="http://schemas.microsoft.com/office/powerpoint/2010/main" val="96815854"/>
       </p:ext>
     </p:extLst>
   </p:cSld>
@@ -8393,7 +9334,7 @@
         </p:blipFill>
         <p:spPr>
           <a:xfrm>
-            <a:off x="4856022" y="1009407"/>
+            <a:off x="4714508" y="908277"/>
             <a:ext cx="7226071" cy="5041445"/>
           </a:xfrm>
           <a:prstGeom prst="rect">
@@ -9719,7 +10660,7 @@
         <p:spPr>
           <a:xfrm>
             <a:off x="7626774" y="3429000"/>
-            <a:ext cx="4117324" cy="3139321"/>
+            <a:ext cx="4117324" cy="2862322"/>
           </a:xfrm>
           <a:prstGeom prst="rect">
             <a:avLst/>
@@ -9734,10 +10675,8 @@
           <a:p>
             <a:r>
               <a:rPr lang="en-US" b="1" dirty="0"/>
-              <a:t>From literature review following predictors can be relevant:</a:t>
-            </a:r>
-          </a:p>
-          <a:p>
+              <a:t>Also, the  following predictors can be relevant:</a:t>
+            </a:r>
             <a:endParaRPr lang="en-US" dirty="0"/>
           </a:p>
           <a:p>
@@ -9874,7 +10813,7 @@
         <p:spPr>
           <a:xfrm>
             <a:off x="523875" y="342900"/>
-            <a:ext cx="10306050" cy="369332"/>
+            <a:ext cx="10306050" cy="461665"/>
           </a:xfrm>
           <a:prstGeom prst="rect">
             <a:avLst/>
@@ -9888,91 +10827,19 @@
           <a:lstStyle/>
           <a:p>
             <a:r>
-              <a:rPr lang="en-US" dirty="0"/>
-              <a:t>Here I want to show the distribution of Imax values (probably also, Ci and Di)</a:t>
-            </a:r>
-            <a:endParaRPr lang="LID4096" dirty="0"/>
-          </a:p>
-        </p:txBody>
-      </p:sp>
-      <p:sp>
-        <p:nvSpPr>
-          <p:cNvPr id="3" name="TextBox 2">
-            <a:extLst>
-              <a:ext uri="{FF2B5EF4-FFF2-40B4-BE49-F238E27FC236}">
-                <a16:creationId xmlns:a16="http://schemas.microsoft.com/office/drawing/2014/main" id="{6A8DE3EC-EC2D-DA2D-AAA0-D1FEADAAA724}"/>
-              </a:ext>
-            </a:extLst>
-          </p:cNvPr>
-          <p:cNvSpPr txBox="1"/>
-          <p:nvPr/>
-        </p:nvSpPr>
-        <p:spPr>
-          <a:xfrm>
-            <a:off x="590550" y="847725"/>
-            <a:ext cx="6781800" cy="369332"/>
-          </a:xfrm>
-          <a:prstGeom prst="rect">
-            <a:avLst/>
-          </a:prstGeom>
-          <a:noFill/>
-        </p:spPr>
-        <p:txBody>
-          <a:bodyPr wrap="square" rtlCol="0">
-            <a:spAutoFit/>
-          </a:bodyPr>
-          <a:lstStyle/>
-          <a:p>
-            <a:r>
-              <a:rPr lang="en-US" dirty="0"/>
-              <a:t>First Goal is to try to predict the saturation intensity Imax</a:t>
-            </a:r>
-            <a:endParaRPr lang="LID4096" dirty="0"/>
-          </a:p>
-        </p:txBody>
-      </p:sp>
-      <p:sp>
-        <p:nvSpPr>
-          <p:cNvPr id="6" name="TextBox 5">
-            <a:extLst>
-              <a:ext uri="{FF2B5EF4-FFF2-40B4-BE49-F238E27FC236}">
-                <a16:creationId xmlns:a16="http://schemas.microsoft.com/office/drawing/2014/main" id="{54034DC3-FB47-1607-7143-28CBE2961725}"/>
-              </a:ext>
-            </a:extLst>
-          </p:cNvPr>
-          <p:cNvSpPr txBox="1"/>
-          <p:nvPr/>
-        </p:nvSpPr>
-        <p:spPr>
-          <a:xfrm>
-            <a:off x="5600700" y="1724025"/>
-            <a:ext cx="3867150" cy="369332"/>
-          </a:xfrm>
-          <a:prstGeom prst="rect">
-            <a:avLst/>
-          </a:prstGeom>
-          <a:noFill/>
-        </p:spPr>
-        <p:txBody>
-          <a:bodyPr wrap="square" rtlCol="0">
-            <a:spAutoFit/>
-          </a:bodyPr>
-          <a:lstStyle/>
-          <a:p>
-            <a:r>
-              <a:rPr lang="en-US" dirty="0"/>
-              <a:t>Show here the dummy result</a:t>
-            </a:r>
-            <a:endParaRPr lang="LID4096" dirty="0"/>
+              <a:rPr lang="en-US" sz="2400" b="1" dirty="0"/>
+              <a:t>Distribution of Imax </a:t>
+            </a:r>
+            <a:endParaRPr lang="LID4096" sz="2400" b="1" dirty="0"/>
           </a:p>
         </p:txBody>
       </p:sp>
       <p:pic>
         <p:nvPicPr>
-          <p:cNvPr id="7" name="Picture 6">
-            <a:extLst>
-              <a:ext uri="{FF2B5EF4-FFF2-40B4-BE49-F238E27FC236}">
-                <a16:creationId xmlns:a16="http://schemas.microsoft.com/office/drawing/2014/main" id="{078C399C-F42B-360C-684E-DC51FCF47826}"/>
+          <p:cNvPr id="5" name="Picture 4">
+            <a:extLst>
+              <a:ext uri="{FF2B5EF4-FFF2-40B4-BE49-F238E27FC236}">
+                <a16:creationId xmlns:a16="http://schemas.microsoft.com/office/drawing/2014/main" id="{6A940479-1B43-32B0-A531-AEA344E4CE44}"/>
               </a:ext>
             </a:extLst>
           </p:cNvPr>
@@ -9989,8 +10856,38 @@
         </p:blipFill>
         <p:spPr>
           <a:xfrm>
-            <a:off x="590550" y="1803760"/>
-            <a:ext cx="5172075" cy="4124325"/>
+            <a:off x="523875" y="1278456"/>
+            <a:ext cx="5805489" cy="4671202"/>
+          </a:xfrm>
+          <a:prstGeom prst="rect">
+            <a:avLst/>
+          </a:prstGeom>
+        </p:spPr>
+      </p:pic>
+      <p:pic>
+        <p:nvPicPr>
+          <p:cNvPr id="9" name="Picture 8">
+            <a:extLst>
+              <a:ext uri="{FF2B5EF4-FFF2-40B4-BE49-F238E27FC236}">
+                <a16:creationId xmlns:a16="http://schemas.microsoft.com/office/drawing/2014/main" id="{A888DDB2-F23D-D2CE-98C9-CC3CE71166AA}"/>
+              </a:ext>
+            </a:extLst>
+          </p:cNvPr>
+          <p:cNvPicPr>
+            <a:picLocks noChangeAspect="1"/>
+          </p:cNvPicPr>
+          <p:nvPr/>
+        </p:nvPicPr>
+        <p:blipFill>
+          <a:blip r:embed="rId3"/>
+          <a:stretch>
+            <a:fillRect/>
+          </a:stretch>
+        </p:blipFill>
+        <p:spPr>
+          <a:xfrm>
+            <a:off x="7051901" y="1376419"/>
+            <a:ext cx="4376738" cy="4475276"/>
           </a:xfrm>
           <a:prstGeom prst="rect">
             <a:avLst/>
@@ -10042,7 +10939,7 @@
         <p:spPr>
           <a:xfrm>
             <a:off x="499352" y="415047"/>
-            <a:ext cx="10745821" cy="2585323"/>
+            <a:ext cx="10745821" cy="2677656"/>
           </a:xfrm>
           <a:prstGeom prst="rect">
             <a:avLst/>
@@ -10056,7 +10953,7 @@
           <a:lstStyle/>
           <a:p>
             <a:r>
-              <a:rPr lang="en-US" dirty="0"/>
+              <a:rPr lang="en-US" sz="2400" b="1" dirty="0"/>
               <a:t>Features Engineering :</a:t>
             </a:r>
           </a:p>
@@ -10114,15 +11011,7 @@
             </a:pPr>
             <a:r>
               <a:rPr lang="en-US" dirty="0"/>
-              <a:t>Wide </a:t>
-            </a:r>
-            <a:r>
-              <a:rPr lang="en-US" dirty="0" err="1"/>
-              <a:t>GridSearch</a:t>
-            </a:r>
-            <a:r>
-              <a:rPr lang="en-US" dirty="0"/>
-              <a:t> - &gt; selection of best params - &gt; Cross Validated prediction</a:t>
+              <a:t>Comprehensive GridSearch - &gt; selection of best params - &gt; Cross Validated prediction</a:t>
             </a:r>
           </a:p>
         </p:txBody>
@@ -10179,7 +11068,7 @@
         </p:blipFill>
         <p:spPr>
           <a:xfrm>
-            <a:off x="5968426" y="2867904"/>
+            <a:off x="6075196" y="2980304"/>
             <a:ext cx="5617452" cy="3707994"/>
           </a:xfrm>
           <a:prstGeom prst="rect">
@@ -10222,7 +11111,7 @@
           <p:cNvPr id="3" name="Picture 2">
             <a:extLst>
               <a:ext uri="{FF2B5EF4-FFF2-40B4-BE49-F238E27FC236}">
-                <a16:creationId xmlns:a16="http://schemas.microsoft.com/office/drawing/2014/main" id="{F1B7C449-7CC1-F8E6-6F11-DA9D8F9813D5}"/>
+                <a16:creationId xmlns:a16="http://schemas.microsoft.com/office/drawing/2014/main" id="{5AFF1BB7-A08F-30DB-6BA7-D0C1905AE802}"/>
               </a:ext>
             </a:extLst>
           </p:cNvPr>
@@ -10232,15 +11121,15 @@
           <p:nvPr/>
         </p:nvPicPr>
         <p:blipFill>
-          <a:blip r:embed="rId3"/>
+          <a:blip r:embed="rId2"/>
           <a:stretch>
             <a:fillRect/>
           </a:stretch>
         </p:blipFill>
         <p:spPr>
           <a:xfrm>
-            <a:off x="959370" y="847858"/>
-            <a:ext cx="5461730" cy="5595193"/>
+            <a:off x="2982686" y="974951"/>
+            <a:ext cx="5619069" cy="5745577"/>
           </a:xfrm>
           <a:prstGeom prst="rect">
             <a:avLst/>
@@ -10252,7 +11141,7 @@
           <p:cNvPr id="4" name="TextBox 3">
             <a:extLst>
               <a:ext uri="{FF2B5EF4-FFF2-40B4-BE49-F238E27FC236}">
-                <a16:creationId xmlns:a16="http://schemas.microsoft.com/office/drawing/2014/main" id="{664CE599-ABDD-1BEB-D5EE-7174F87E6BD6}"/>
+                <a16:creationId xmlns:a16="http://schemas.microsoft.com/office/drawing/2014/main" id="{2BCF69EB-9044-6DA3-A67D-60DEBA86CAB2}"/>
               </a:ext>
             </a:extLst>
           </p:cNvPr>
@@ -10261,8 +11150,8 @@
         </p:nvSpPr>
         <p:spPr>
           <a:xfrm>
-            <a:off x="959370" y="232348"/>
-            <a:ext cx="10942820" cy="369332"/>
+            <a:off x="476931" y="278986"/>
+            <a:ext cx="7143069" cy="461665"/>
           </a:xfrm>
           <a:prstGeom prst="rect">
             <a:avLst/>
@@ -10276,77 +11165,17 @@
           <a:lstStyle/>
           <a:p>
             <a:r>
-              <a:rPr lang="en-US" dirty="0"/>
-              <a:t>Cross Validated prediction on 5 folds, based on top 71 Dragon features of molecules from Waka Data set</a:t>
-            </a:r>
-            <a:endParaRPr lang="LID4096" dirty="0"/>
-          </a:p>
-        </p:txBody>
-      </p:sp>
-      <p:pic>
-        <p:nvPicPr>
-          <p:cNvPr id="6" name="Picture 5">
-            <a:extLst>
-              <a:ext uri="{FF2B5EF4-FFF2-40B4-BE49-F238E27FC236}">
-                <a16:creationId xmlns:a16="http://schemas.microsoft.com/office/drawing/2014/main" id="{9B57E8A0-D5FC-3FDC-A023-0ADAA19A23AB}"/>
-              </a:ext>
-            </a:extLst>
-          </p:cNvPr>
-          <p:cNvPicPr>
-            <a:picLocks noChangeAspect="1"/>
-          </p:cNvPicPr>
-          <p:nvPr/>
-        </p:nvPicPr>
-        <p:blipFill>
-          <a:blip r:embed="rId4"/>
-          <a:stretch>
-            <a:fillRect/>
-          </a:stretch>
-        </p:blipFill>
-        <p:spPr>
-          <a:xfrm>
-            <a:off x="8013320" y="3028858"/>
-            <a:ext cx="3888870" cy="3515965"/>
-          </a:xfrm>
-          <a:prstGeom prst="rect">
-            <a:avLst/>
-          </a:prstGeom>
-        </p:spPr>
-      </p:pic>
-      <p:pic>
-        <p:nvPicPr>
-          <p:cNvPr id="8" name="Picture 7">
-            <a:extLst>
-              <a:ext uri="{FF2B5EF4-FFF2-40B4-BE49-F238E27FC236}">
-                <a16:creationId xmlns:a16="http://schemas.microsoft.com/office/drawing/2014/main" id="{D50E8E31-25F3-D5DA-8C78-60B31469C812}"/>
-              </a:ext>
-            </a:extLst>
-          </p:cNvPr>
-          <p:cNvPicPr>
-            <a:picLocks noChangeAspect="1"/>
-          </p:cNvPicPr>
-          <p:nvPr/>
-        </p:nvPicPr>
-        <p:blipFill>
-          <a:blip r:embed="rId5"/>
-          <a:stretch>
-            <a:fillRect/>
-          </a:stretch>
-        </p:blipFill>
-        <p:spPr>
-          <a:xfrm>
-            <a:off x="6760656" y="746296"/>
-            <a:ext cx="3147841" cy="2161651"/>
-          </a:xfrm>
-          <a:prstGeom prst="rect">
-            <a:avLst/>
-          </a:prstGeom>
-        </p:spPr>
-      </p:pic>
+              <a:rPr lang="en-US" sz="2400" b="1" dirty="0"/>
+              <a:t>Dummy predictor as a base-line for comparison</a:t>
+            </a:r>
+            <a:endParaRPr lang="LID4096" sz="2400" b="1" dirty="0"/>
+          </a:p>
+        </p:txBody>
+      </p:sp>
     </p:spTree>
     <p:extLst>
       <p:ext uri="{BB962C8B-B14F-4D97-AF65-F5344CB8AC3E}">
-        <p14:creationId xmlns:p14="http://schemas.microsoft.com/office/powerpoint/2010/main" val="2429120994"/>
+        <p14:creationId xmlns:p14="http://schemas.microsoft.com/office/powerpoint/2010/main" val="3683599090"/>
       </p:ext>
     </p:extLst>
   </p:cSld>
@@ -10373,12 +11202,42 @@
           <a:chExt cx="0" cy="0"/>
         </a:xfrm>
       </p:grpSpPr>
+      <p:pic>
+        <p:nvPicPr>
+          <p:cNvPr id="3" name="Picture 2">
+            <a:extLst>
+              <a:ext uri="{FF2B5EF4-FFF2-40B4-BE49-F238E27FC236}">
+                <a16:creationId xmlns:a16="http://schemas.microsoft.com/office/drawing/2014/main" id="{F1B7C449-7CC1-F8E6-6F11-DA9D8F9813D5}"/>
+              </a:ext>
+            </a:extLst>
+          </p:cNvPr>
+          <p:cNvPicPr>
+            <a:picLocks noChangeAspect="1"/>
+          </p:cNvPicPr>
+          <p:nvPr/>
+        </p:nvPicPr>
+        <p:blipFill>
+          <a:blip r:embed="rId3"/>
+          <a:stretch>
+            <a:fillRect/>
+          </a:stretch>
+        </p:blipFill>
+        <p:spPr>
+          <a:xfrm>
+            <a:off x="634270" y="1063345"/>
+            <a:ext cx="5461730" cy="5595193"/>
+          </a:xfrm>
+          <a:prstGeom prst="rect">
+            <a:avLst/>
+          </a:prstGeom>
+        </p:spPr>
+      </p:pic>
       <p:sp>
         <p:nvSpPr>
           <p:cNvPr id="4" name="TextBox 3">
             <a:extLst>
               <a:ext uri="{FF2B5EF4-FFF2-40B4-BE49-F238E27FC236}">
-                <a16:creationId xmlns:a16="http://schemas.microsoft.com/office/drawing/2014/main" id="{3FE60B6F-CADC-FE76-1467-EFF702F0740B}"/>
+                <a16:creationId xmlns:a16="http://schemas.microsoft.com/office/drawing/2014/main" id="{664CE599-ABDD-1BEB-D5EE-7174F87E6BD6}"/>
               </a:ext>
             </a:extLst>
           </p:cNvPr>
@@ -10387,8 +11246,8 @@
         </p:nvSpPr>
         <p:spPr>
           <a:xfrm>
-            <a:off x="408562" y="402077"/>
-            <a:ext cx="11199778" cy="1569660"/>
+            <a:off x="348343" y="232348"/>
+            <a:ext cx="11553847" cy="461665"/>
           </a:xfrm>
           <a:prstGeom prst="rect">
             <a:avLst/>
@@ -10402,210 +11261,77 @@
           <a:lstStyle/>
           <a:p>
             <a:r>
-              <a:rPr lang="en-US" dirty="0"/>
-              <a:t>Top 71 descriptors selected by XGBOOST: </a:t>
-            </a:r>
-          </a:p>
-          <a:p>
-            <a:endParaRPr lang="en-US" dirty="0"/>
-          </a:p>
-          <a:p>
-            <a:r>
-              <a:rPr lang="" sz="1200" dirty="0"/>
-              <a:t>['ATS6m', 'Vindex', 'RDF015s', 'MPC08', 'SpMaxA_AEA_dm_', 'Eig07_AEA_dm_', 'RDF065s', 'SpMax6_Bh_s_', 'ATS5m', 'HATS0v', 'SpPosA_RG', 'GGI6', 'Mor08m', 'VE3_RG', 'VE2_B_m_', 'Eta_betaS_A', 'SM11_AEA_bo_', 'RDF010s', 'H2v', 'Mor03v', 'SpMax7_Bh_s_', 'RDF050m', 'Mor11u', 'ChiA_B_m_', 'VE3sign_B_v_', 'G2m', 'SM12_AEA_bo_', 'R6u', 'HATS8m', 'ATSC8e', 'TDB01m', 'SpMax2_Bh_s_', 'RDF025s', 'Mor05m', 'ZM1Mad', 'HGM', 'TDB10u', 'ATSC6m', 'Mor11v', 'Mor05v', 'GGI3', 'Am', 'Mor07m', 'VE1sign_B_v_', 'R5s', 'H3u', 'AVS_B_s_', 'SpMax6_Bh_m_', 'SM09_AEA_dm_', 'H6s', 'Mor04v', 'MATS1e', 'SpMin1_Bh_s_', 'RDF025u', 'Mor29u', 'JGI2', 'H7s', 'ATSC1e', 'MATS1v', 'Mor13m', 'HATS0p', 'VAR', 'R6v', 'TDB06m', 'Gm', 'RDF060m', 'SsOH', 'Mor11p', 'Mor03s', 'Mor10s', 'Mor32v']</a:t>
-            </a:r>
-            <a:endParaRPr lang="LID4096" sz="1200" dirty="0"/>
-          </a:p>
-        </p:txBody>
-      </p:sp>
-      <p:sp>
-        <p:nvSpPr>
-          <p:cNvPr id="5" name="TextBox 4">
-            <a:extLst>
-              <a:ext uri="{FF2B5EF4-FFF2-40B4-BE49-F238E27FC236}">
-                <a16:creationId xmlns:a16="http://schemas.microsoft.com/office/drawing/2014/main" id="{2BF8392B-3B5B-9A3B-DA5E-94F6CE4B8EF8}"/>
-              </a:ext>
-            </a:extLst>
-          </p:cNvPr>
-          <p:cNvSpPr txBox="1"/>
+              <a:rPr lang="en-US" sz="2400" b="1" dirty="0"/>
+              <a:t>CV Prediction on 5 folds, on top 71 Dragon features set</a:t>
+            </a:r>
+            <a:endParaRPr lang="LID4096" sz="2400" b="1" dirty="0"/>
+          </a:p>
+        </p:txBody>
+      </p:sp>
+      <p:pic>
+        <p:nvPicPr>
+          <p:cNvPr id="6" name="Picture 5">
+            <a:extLst>
+              <a:ext uri="{FF2B5EF4-FFF2-40B4-BE49-F238E27FC236}">
+                <a16:creationId xmlns:a16="http://schemas.microsoft.com/office/drawing/2014/main" id="{9B57E8A0-D5FC-3FDC-A023-0ADAA19A23AB}"/>
+              </a:ext>
+            </a:extLst>
+          </p:cNvPr>
+          <p:cNvPicPr>
+            <a:picLocks noChangeAspect="1"/>
+          </p:cNvPicPr>
           <p:nvPr/>
-        </p:nvSpPr>
+        </p:nvPicPr>
+        <p:blipFill>
+          <a:blip r:embed="rId4"/>
+          <a:stretch>
+            <a:fillRect/>
+          </a:stretch>
+        </p:blipFill>
         <p:spPr>
           <a:xfrm>
-            <a:off x="499353" y="3022060"/>
-            <a:ext cx="4286655" cy="2862322"/>
+            <a:off x="8013320" y="3028858"/>
+            <a:ext cx="3888870" cy="3515965"/>
           </a:xfrm>
           <a:prstGeom prst="rect">
             <a:avLst/>
           </a:prstGeom>
-          <a:noFill/>
         </p:spPr>
-        <p:txBody>
-          <a:bodyPr wrap="square" rtlCol="0">
-            <a:spAutoFit/>
-          </a:bodyPr>
-          <a:lstStyle/>
-          <a:p>
-            <a:r>
-              <a:rPr lang="en-US" b="1" dirty="0"/>
-              <a:t>Strongly represented:</a:t>
-            </a:r>
-          </a:p>
-          <a:p>
-            <a:endParaRPr lang="en-US" b="1" dirty="0"/>
-          </a:p>
-          <a:p>
-            <a:pPr marL="285750" indent="-285750">
-              <a:buFont typeface="Arial" panose="020B0604020202020204" pitchFamily="34" charset="0"/>
-              <a:buChar char="•"/>
-            </a:pPr>
-            <a:r>
-              <a:rPr lang="" dirty="0"/>
-              <a:t>3D molecular shape and geometry </a:t>
-            </a:r>
-          </a:p>
-          <a:p>
-            <a:pPr marL="285750" indent="-285750">
-              <a:buFont typeface="Arial" panose="020B0604020202020204" pitchFamily="34" charset="0"/>
-              <a:buChar char="•"/>
-            </a:pPr>
-            <a:r>
-              <a:rPr lang="" dirty="0"/>
-              <a:t>Molecular size and bulk</a:t>
-            </a:r>
-          </a:p>
-          <a:p>
-            <a:pPr marL="285750" indent="-285750">
-              <a:buFont typeface="Arial" panose="020B0604020202020204" pitchFamily="34" charset="0"/>
-              <a:buChar char="•"/>
-            </a:pPr>
-            <a:r>
-              <a:rPr lang="" dirty="0"/>
-              <a:t>Electronic structure and charge distribution</a:t>
-            </a:r>
-          </a:p>
-          <a:p>
-            <a:pPr marL="285750" indent="-285750">
-              <a:buFont typeface="Arial" panose="020B0604020202020204" pitchFamily="34" charset="0"/>
-              <a:buChar char="•"/>
-            </a:pPr>
-            <a:r>
-              <a:rPr lang="" dirty="0"/>
-              <a:t>Branching and topological complexity</a:t>
-            </a:r>
-          </a:p>
-          <a:p>
-            <a:pPr marL="285750" indent="-285750">
-              <a:buFont typeface="Arial" panose="020B0604020202020204" pitchFamily="34" charset="0"/>
-              <a:buChar char="•"/>
-            </a:pPr>
-            <a:r>
-              <a:rPr lang="" dirty="0"/>
-              <a:t>Mass-weighted structural information</a:t>
-            </a:r>
-          </a:p>
-          <a:p>
-            <a:pPr marL="285750" indent="-285750">
-              <a:buFont typeface="Arial" panose="020B0604020202020204" pitchFamily="34" charset="0"/>
-              <a:buChar char="•"/>
-            </a:pPr>
-            <a:r>
-              <a:rPr lang="" dirty="0"/>
-              <a:t>Hydrogen-bonding functionality</a:t>
-            </a:r>
-            <a:endParaRPr lang="en-US" dirty="0"/>
-          </a:p>
-          <a:p>
-            <a:endParaRPr lang="LID4096" dirty="0"/>
-          </a:p>
-        </p:txBody>
-      </p:sp>
-      <p:sp>
-        <p:nvSpPr>
-          <p:cNvPr id="6" name="TextBox 5">
-            <a:extLst>
-              <a:ext uri="{FF2B5EF4-FFF2-40B4-BE49-F238E27FC236}">
-                <a16:creationId xmlns:a16="http://schemas.microsoft.com/office/drawing/2014/main" id="{F4E12D3A-CD2A-AF92-E206-0070A8365170}"/>
-              </a:ext>
-            </a:extLst>
-          </p:cNvPr>
-          <p:cNvSpPr txBox="1"/>
+      </p:pic>
+      <p:pic>
+        <p:nvPicPr>
+          <p:cNvPr id="8" name="Picture 7">
+            <a:extLst>
+              <a:ext uri="{FF2B5EF4-FFF2-40B4-BE49-F238E27FC236}">
+                <a16:creationId xmlns:a16="http://schemas.microsoft.com/office/drawing/2014/main" id="{D50E8E31-25F3-D5DA-8C78-60B31469C812}"/>
+              </a:ext>
+            </a:extLst>
+          </p:cNvPr>
+          <p:cNvPicPr>
+            <a:picLocks noChangeAspect="1"/>
+          </p:cNvPicPr>
           <p:nvPr/>
-        </p:nvSpPr>
+        </p:nvPicPr>
+        <p:blipFill>
+          <a:blip r:embed="rId5"/>
+          <a:stretch>
+            <a:fillRect/>
+          </a:stretch>
+        </p:blipFill>
         <p:spPr>
           <a:xfrm>
-            <a:off x="6361889" y="3714557"/>
-            <a:ext cx="5648528" cy="1477328"/>
+            <a:off x="6760656" y="746296"/>
+            <a:ext cx="3147841" cy="2161651"/>
           </a:xfrm>
           <a:prstGeom prst="rect">
             <a:avLst/>
           </a:prstGeom>
-          <a:noFill/>
         </p:spPr>
-        <p:txBody>
-          <a:bodyPr wrap="square" rtlCol="0">
-            <a:spAutoFit/>
-          </a:bodyPr>
-          <a:lstStyle/>
-          <a:p>
-            <a:r>
-              <a:rPr lang="" dirty="0"/>
-              <a:t>Maximum odor intensity appears to be driven mainly by molecular 3D shape, size, topology, and electronic structure, whereas classical descriptors such as LogP, PSA, and simple hydrogen-bond counts were not identified as major predictors.</a:t>
-            </a:r>
-            <a:endParaRPr lang="LID4096" dirty="0"/>
-          </a:p>
-        </p:txBody>
-      </p:sp>
-      <p:sp>
-        <p:nvSpPr>
-          <p:cNvPr id="7" name="Arrow: Right 6">
-            <a:extLst>
-              <a:ext uri="{FF2B5EF4-FFF2-40B4-BE49-F238E27FC236}">
-                <a16:creationId xmlns:a16="http://schemas.microsoft.com/office/drawing/2014/main" id="{301F3145-C6F4-5A82-9D8C-20DDB0AABE5C}"/>
-              </a:ext>
-            </a:extLst>
-          </p:cNvPr>
-          <p:cNvSpPr/>
-          <p:nvPr/>
-        </p:nvSpPr>
-        <p:spPr>
-          <a:xfrm>
-            <a:off x="5064868" y="4312596"/>
-            <a:ext cx="953311" cy="168613"/>
-          </a:xfrm>
-          <a:prstGeom prst="rightArrow">
-            <a:avLst/>
-          </a:prstGeom>
-        </p:spPr>
-        <p:style>
-          <a:lnRef idx="2">
-            <a:schemeClr val="accent1">
-              <a:shade val="15000"/>
-            </a:schemeClr>
-          </a:lnRef>
-          <a:fillRef idx="1">
-            <a:schemeClr val="accent1"/>
-          </a:fillRef>
-          <a:effectRef idx="0">
-            <a:schemeClr val="accent1"/>
-          </a:effectRef>
-          <a:fontRef idx="minor">
-            <a:schemeClr val="lt1"/>
-          </a:fontRef>
-        </p:style>
-        <p:txBody>
-          <a:bodyPr rtlCol="0" anchor="ctr"/>
-          <a:lstStyle/>
-          <a:p>
-            <a:pPr algn="ctr"/>
-            <a:endParaRPr lang="LID4096"/>
-          </a:p>
-        </p:txBody>
-      </p:sp>
+      </p:pic>
     </p:spTree>
     <p:extLst>
       <p:ext uri="{BB962C8B-B14F-4D97-AF65-F5344CB8AC3E}">
-        <p14:creationId xmlns:p14="http://schemas.microsoft.com/office/powerpoint/2010/main" val="3088925324"/>
+        <p14:creationId xmlns:p14="http://schemas.microsoft.com/office/powerpoint/2010/main" val="2429120994"/>
       </p:ext>
     </p:extLst>
   </p:cSld>
@@ -11243,4 +11969,317 @@
     </a:ext>
   </a:extLst>
 </a:theme>
+</file>
+
+<file path=customXml/item1.xml><?xml version="1.0" encoding="utf-8"?>
+<ct:contentTypeSchema xmlns:ct="http://schemas.microsoft.com/office/2006/metadata/contentType" xmlns:ma="http://schemas.microsoft.com/office/2006/metadata/properties/metaAttributes" ct:_="" ma:_="" ma:contentTypeName="Document" ma:contentTypeID="0x01010003E034A81636BF4191134986BD4BF0FC" ma:contentTypeVersion="18" ma:contentTypeDescription="Create a new document." ma:contentTypeScope="" ma:versionID="2703cb2241a2b939b7334c03fb9f533e">
+  <xsd:schema xmlns:xsd="http://www.w3.org/2001/XMLSchema" xmlns:xs="http://www.w3.org/2001/XMLSchema" xmlns:p="http://schemas.microsoft.com/office/2006/metadata/properties" xmlns:ns2="fc8719d5-a7d3-4ce2-a42c-5dc8ae5b02b5" xmlns:ns3="8a305f76-35c7-4bc6-8d22-97b26a027996" targetNamespace="http://schemas.microsoft.com/office/2006/metadata/properties" ma:root="true" ma:fieldsID="1cc8a7701fed31646cd7d9e4eee1cc98" ns2:_="" ns3:_="">
+    <xsd:import namespace="fc8719d5-a7d3-4ce2-a42c-5dc8ae5b02b5"/>
+    <xsd:import namespace="8a305f76-35c7-4bc6-8d22-97b26a027996"/>
+    <xsd:element name="properties">
+      <xsd:complexType>
+        <xsd:sequence>
+          <xsd:element name="documentManagement">
+            <xsd:complexType>
+              <xsd:all>
+                <xsd:element ref="ns2:MediaServiceMetadata" minOccurs="0"/>
+                <xsd:element ref="ns2:MediaServiceFastMetadata" minOccurs="0"/>
+                <xsd:element ref="ns2:MediaServiceAutoKeyPoints" minOccurs="0"/>
+                <xsd:element ref="ns2:MediaServiceKeyPoints" minOccurs="0"/>
+                <xsd:element ref="ns2:MediaServiceDateTaken" minOccurs="0"/>
+                <xsd:element ref="ns2:MediaServiceAutoTags" minOccurs="0"/>
+                <xsd:element ref="ns2:MediaLengthInSeconds" minOccurs="0"/>
+                <xsd:element ref="ns3:SharedWithUsers" minOccurs="0"/>
+                <xsd:element ref="ns3:SharedWithDetails" minOccurs="0"/>
+                <xsd:element ref="ns2:MediaServiceGenerationTime" minOccurs="0"/>
+                <xsd:element ref="ns2:MediaServiceEventHashCode" minOccurs="0"/>
+                <xsd:element ref="ns2:MediaServiceOCR" minOccurs="0"/>
+                <xsd:element ref="ns2:MediaServiceLocation" minOccurs="0"/>
+                <xsd:element ref="ns2:lcf76f155ced4ddcb4097134ff3c332f" minOccurs="0"/>
+                <xsd:element ref="ns3:TaxCatchAll" minOccurs="0"/>
+                <xsd:element ref="ns2:MediaServiceObjectDetectorVersions" minOccurs="0"/>
+                <xsd:element ref="ns2:MediaServiceSearchProperties" minOccurs="0"/>
+              </xsd:all>
+            </xsd:complexType>
+          </xsd:element>
+        </xsd:sequence>
+      </xsd:complexType>
+    </xsd:element>
+  </xsd:schema>
+  <xsd:schema xmlns:xsd="http://www.w3.org/2001/XMLSchema" xmlns:xs="http://www.w3.org/2001/XMLSchema" xmlns:dms="http://schemas.microsoft.com/office/2006/documentManagement/types" xmlns:pc="http://schemas.microsoft.com/office/infopath/2007/PartnerControls" targetNamespace="fc8719d5-a7d3-4ce2-a42c-5dc8ae5b02b5" elementFormDefault="qualified">
+    <xsd:import namespace="http://schemas.microsoft.com/office/2006/documentManagement/types"/>
+    <xsd:import namespace="http://schemas.microsoft.com/office/infopath/2007/PartnerControls"/>
+    <xsd:element name="MediaServiceMetadata" ma:index="8" nillable="true" ma:displayName="MediaServiceMetadata" ma:hidden="true" ma:internalName="MediaServiceMetadata" ma:readOnly="true">
+      <xsd:simpleType>
+        <xsd:restriction base="dms:Note"/>
+      </xsd:simpleType>
+    </xsd:element>
+    <xsd:element name="MediaServiceFastMetadata" ma:index="9" nillable="true" ma:displayName="MediaServiceFastMetadata" ma:hidden="true" ma:internalName="MediaServiceFastMetadata" ma:readOnly="true">
+      <xsd:simpleType>
+        <xsd:restriction base="dms:Note"/>
+      </xsd:simpleType>
+    </xsd:element>
+    <xsd:element name="MediaServiceAutoKeyPoints" ma:index="10" nillable="true" ma:displayName="MediaServiceAutoKeyPoints" ma:hidden="true" ma:internalName="MediaServiceAutoKeyPoints" ma:readOnly="true">
+      <xsd:simpleType>
+        <xsd:restriction base="dms:Note"/>
+      </xsd:simpleType>
+    </xsd:element>
+    <xsd:element name="MediaServiceKeyPoints" ma:index="11" nillable="true" ma:displayName="KeyPoints" ma:internalName="MediaServiceKeyPoints" ma:readOnly="true">
+      <xsd:simpleType>
+        <xsd:restriction base="dms:Note">
+          <xsd:maxLength value="255"/>
+        </xsd:restriction>
+      </xsd:simpleType>
+    </xsd:element>
+    <xsd:element name="MediaServiceDateTaken" ma:index="12" nillable="true" ma:displayName="MediaServiceDateTaken" ma:hidden="true" ma:internalName="MediaServiceDateTaken" ma:readOnly="true">
+      <xsd:simpleType>
+        <xsd:restriction base="dms:Text"/>
+      </xsd:simpleType>
+    </xsd:element>
+    <xsd:element name="MediaServiceAutoTags" ma:index="13" nillable="true" ma:displayName="Tags" ma:internalName="MediaServiceAutoTags" ma:readOnly="true">
+      <xsd:simpleType>
+        <xsd:restriction base="dms:Text"/>
+      </xsd:simpleType>
+    </xsd:element>
+    <xsd:element name="MediaLengthInSeconds" ma:index="14" nillable="true" ma:displayName="MediaLengthInSeconds" ma:hidden="true" ma:internalName="MediaLengthInSeconds" ma:readOnly="true">
+      <xsd:simpleType>
+        <xsd:restriction base="dms:Unknown"/>
+      </xsd:simpleType>
+    </xsd:element>
+    <xsd:element name="MediaServiceGenerationTime" ma:index="17" nillable="true" ma:displayName="MediaServiceGenerationTime" ma:hidden="true" ma:internalName="MediaServiceGenerationTime" ma:readOnly="true">
+      <xsd:simpleType>
+        <xsd:restriction base="dms:Text"/>
+      </xsd:simpleType>
+    </xsd:element>
+    <xsd:element name="MediaServiceEventHashCode" ma:index="18" nillable="true" ma:displayName="MediaServiceEventHashCode" ma:hidden="true" ma:internalName="MediaServiceEventHashCode" ma:readOnly="true">
+      <xsd:simpleType>
+        <xsd:restriction base="dms:Text"/>
+      </xsd:simpleType>
+    </xsd:element>
+    <xsd:element name="MediaServiceOCR" ma:index="19" nillable="true" ma:displayName="Extracted Text" ma:internalName="MediaServiceOCR" ma:readOnly="true">
+      <xsd:simpleType>
+        <xsd:restriction base="dms:Note">
+          <xsd:maxLength value="255"/>
+        </xsd:restriction>
+      </xsd:simpleType>
+    </xsd:element>
+    <xsd:element name="MediaServiceLocation" ma:index="20" nillable="true" ma:displayName="Location" ma:internalName="MediaServiceLocation" ma:readOnly="true">
+      <xsd:simpleType>
+        <xsd:restriction base="dms:Text"/>
+      </xsd:simpleType>
+    </xsd:element>
+    <xsd:element name="lcf76f155ced4ddcb4097134ff3c332f" ma:index="22" nillable="true" ma:taxonomy="true" ma:internalName="lcf76f155ced4ddcb4097134ff3c332f" ma:taxonomyFieldName="MediaServiceImageTags" ma:displayName="Image Tags" ma:readOnly="false" ma:fieldId="{5cf76f15-5ced-4ddc-b409-7134ff3c332f}" ma:taxonomyMulti="true" ma:sspId="b59ceb3c-f586-4bbb-beb2-26f1ca5e32b7" ma:termSetId="09814cd3-568e-fe90-9814-8d621ff8fb84" ma:anchorId="fba54fb3-c3e1-fe81-a776-ca4b69148c4d" ma:open="true" ma:isKeyword="false">
+      <xsd:complexType>
+        <xsd:sequence>
+          <xsd:element ref="pc:Terms" minOccurs="0" maxOccurs="1"/>
+        </xsd:sequence>
+      </xsd:complexType>
+    </xsd:element>
+    <xsd:element name="MediaServiceObjectDetectorVersions" ma:index="24" nillable="true" ma:displayName="MediaServiceObjectDetectorVersions" ma:description="" ma:hidden="true" ma:indexed="true" ma:internalName="MediaServiceObjectDetectorVersions" ma:readOnly="true">
+      <xsd:simpleType>
+        <xsd:restriction base="dms:Text"/>
+      </xsd:simpleType>
+    </xsd:element>
+    <xsd:element name="MediaServiceSearchProperties" ma:index="25" nillable="true" ma:displayName="MediaServiceSearchProperties" ma:hidden="true" ma:internalName="MediaServiceSearchProperties" ma:readOnly="true">
+      <xsd:simpleType>
+        <xsd:restriction base="dms:Note"/>
+      </xsd:simpleType>
+    </xsd:element>
+  </xsd:schema>
+  <xsd:schema xmlns:xsd="http://www.w3.org/2001/XMLSchema" xmlns:xs="http://www.w3.org/2001/XMLSchema" xmlns:dms="http://schemas.microsoft.com/office/2006/documentManagement/types" xmlns:pc="http://schemas.microsoft.com/office/infopath/2007/PartnerControls" targetNamespace="8a305f76-35c7-4bc6-8d22-97b26a027996" elementFormDefault="qualified">
+    <xsd:import namespace="http://schemas.microsoft.com/office/2006/documentManagement/types"/>
+    <xsd:import namespace="http://schemas.microsoft.com/office/infopath/2007/PartnerControls"/>
+    <xsd:element name="SharedWithUsers" ma:index="15" nillable="true" ma:displayName="Shared With" ma:internalName="SharedWithUsers" ma:readOnly="true">
+      <xsd:complexType>
+        <xsd:complexContent>
+          <xsd:extension base="dms:UserMulti">
+            <xsd:sequence>
+              <xsd:element name="UserInfo" minOccurs="0" maxOccurs="unbounded">
+                <xsd:complexType>
+                  <xsd:sequence>
+                    <xsd:element name="DisplayName" type="xsd:string" minOccurs="0"/>
+                    <xsd:element name="AccountId" type="dms:UserId" minOccurs="0" nillable="true"/>
+                    <xsd:element name="AccountType" type="xsd:string" minOccurs="0"/>
+                  </xsd:sequence>
+                </xsd:complexType>
+              </xsd:element>
+            </xsd:sequence>
+          </xsd:extension>
+        </xsd:complexContent>
+      </xsd:complexType>
+    </xsd:element>
+    <xsd:element name="SharedWithDetails" ma:index="16" nillable="true" ma:displayName="Shared With Details" ma:internalName="SharedWithDetails" ma:readOnly="true">
+      <xsd:simpleType>
+        <xsd:restriction base="dms:Note">
+          <xsd:maxLength value="255"/>
+        </xsd:restriction>
+      </xsd:simpleType>
+    </xsd:element>
+    <xsd:element name="TaxCatchAll" ma:index="23" nillable="true" ma:displayName="Taxonomy Catch All Column" ma:hidden="true" ma:list="{80ceac21-5a26-4d4f-a4d8-4df0d55b3c64}" ma:internalName="TaxCatchAll" ma:showField="CatchAllData" ma:web="8a305f76-35c7-4bc6-8d22-97b26a027996">
+      <xsd:complexType>
+        <xsd:complexContent>
+          <xsd:extension base="dms:MultiChoiceLookup">
+            <xsd:sequence>
+              <xsd:element name="Value" type="dms:Lookup" maxOccurs="unbounded" minOccurs="0" nillable="true"/>
+            </xsd:sequence>
+          </xsd:extension>
+        </xsd:complexContent>
+      </xsd:complexType>
+    </xsd:element>
+  </xsd:schema>
+  <xsd:schema xmlns="http://schemas.openxmlformats.org/package/2006/metadata/core-properties" xmlns:xsd="http://www.w3.org/2001/XMLSchema" xmlns:xsi="http://www.w3.org/2001/XMLSchema-instance" xmlns:dc="http://purl.org/dc/elements/1.1/" xmlns:dcterms="http://purl.org/dc/terms/" xmlns:odoc="http://schemas.microsoft.com/internal/obd" targetNamespace="http://schemas.openxmlformats.org/package/2006/metadata/core-properties" elementFormDefault="qualified" attributeFormDefault="unqualified" blockDefault="#all">
+    <xsd:import namespace="http://purl.org/dc/elements/1.1/" schemaLocation="http://dublincore.org/schemas/xmls/qdc/2003/04/02/dc.xsd"/>
+    <xsd:import namespace="http://purl.org/dc/terms/" schemaLocation="http://dublincore.org/schemas/xmls/qdc/2003/04/02/dcterms.xsd"/>
+    <xsd:element name="coreProperties" type="CT_coreProperties"/>
+    <xsd:complexType name="CT_coreProperties">
+      <xsd:all>
+        <xsd:element ref="dc:creator" minOccurs="0" maxOccurs="1"/>
+        <xsd:element ref="dcterms:created" minOccurs="0" maxOccurs="1"/>
+        <xsd:element ref="dc:identifier" minOccurs="0" maxOccurs="1"/>
+        <xsd:element name="contentType" minOccurs="0" maxOccurs="1" type="xsd:string" ma:index="0" ma:displayName="Content Type"/>
+        <xsd:element ref="dc:title" minOccurs="0" maxOccurs="1" ma:index="4" ma:displayName="Title"/>
+        <xsd:element ref="dc:subject" minOccurs="0" maxOccurs="1"/>
+        <xsd:element ref="dc:description" minOccurs="0" maxOccurs="1"/>
+        <xsd:element name="keywords" minOccurs="0" maxOccurs="1" type="xsd:string"/>
+        <xsd:element ref="dc:language" minOccurs="0" maxOccurs="1"/>
+        <xsd:element name="category" minOccurs="0" maxOccurs="1" type="xsd:string"/>
+        <xsd:element name="version" minOccurs="0" maxOccurs="1" type="xsd:string"/>
+        <xsd:element name="revision" minOccurs="0" maxOccurs="1" type="xsd:string">
+          <xsd:annotation>
+            <xsd:documentation>
+                        This value indicates the number of saves or revisions. The application is responsible for updating this value after each revision.
+                    </xsd:documentation>
+          </xsd:annotation>
+        </xsd:element>
+        <xsd:element name="lastModifiedBy" minOccurs="0" maxOccurs="1" type="xsd:string"/>
+        <xsd:element ref="dcterms:modified" minOccurs="0" maxOccurs="1"/>
+        <xsd:element name="contentStatus" minOccurs="0" maxOccurs="1" type="xsd:string"/>
+      </xsd:all>
+    </xsd:complexType>
+  </xsd:schema>
+  <xs:schema xmlns:pc="http://schemas.microsoft.com/office/infopath/2007/PartnerControls" xmlns:xs="http://www.w3.org/2001/XMLSchema" targetNamespace="http://schemas.microsoft.com/office/infopath/2007/PartnerControls" elementFormDefault="qualified" attributeFormDefault="unqualified">
+    <xs:element name="Person">
+      <xs:complexType>
+        <xs:sequence>
+          <xs:element ref="pc:DisplayName" minOccurs="0"/>
+          <xs:element ref="pc:AccountId" minOccurs="0"/>
+          <xs:element ref="pc:AccountType" minOccurs="0"/>
+        </xs:sequence>
+      </xs:complexType>
+    </xs:element>
+    <xs:element name="DisplayName" type="xs:string"/>
+    <xs:element name="AccountId" type="xs:string"/>
+    <xs:element name="AccountType" type="xs:string"/>
+    <xs:element name="BDCAssociatedEntity">
+      <xs:complexType>
+        <xs:sequence>
+          <xs:element ref="pc:BDCEntity" minOccurs="0" maxOccurs="unbounded"/>
+        </xs:sequence>
+        <xs:attribute ref="pc:EntityNamespace"/>
+        <xs:attribute ref="pc:EntityName"/>
+        <xs:attribute ref="pc:SystemInstanceName"/>
+        <xs:attribute ref="pc:AssociationName"/>
+      </xs:complexType>
+    </xs:element>
+    <xs:attribute name="EntityNamespace" type="xs:string"/>
+    <xs:attribute name="EntityName" type="xs:string"/>
+    <xs:attribute name="SystemInstanceName" type="xs:string"/>
+    <xs:attribute name="AssociationName" type="xs:string"/>
+    <xs:element name="BDCEntity">
+      <xs:complexType>
+        <xs:sequence>
+          <xs:element ref="pc:EntityDisplayName" minOccurs="0"/>
+          <xs:element ref="pc:EntityInstanceReference" minOccurs="0"/>
+          <xs:element ref="pc:EntityId1" minOccurs="0"/>
+          <xs:element ref="pc:EntityId2" minOccurs="0"/>
+          <xs:element ref="pc:EntityId3" minOccurs="0"/>
+          <xs:element ref="pc:EntityId4" minOccurs="0"/>
+          <xs:element ref="pc:EntityId5" minOccurs="0"/>
+        </xs:sequence>
+      </xs:complexType>
+    </xs:element>
+    <xs:element name="EntityDisplayName" type="xs:string"/>
+    <xs:element name="EntityInstanceReference" type="xs:string"/>
+    <xs:element name="EntityId1" type="xs:string"/>
+    <xs:element name="EntityId2" type="xs:string"/>
+    <xs:element name="EntityId3" type="xs:string"/>
+    <xs:element name="EntityId4" type="xs:string"/>
+    <xs:element name="EntityId5" type="xs:string"/>
+    <xs:element name="Terms">
+      <xs:complexType>
+        <xs:sequence>
+          <xs:element ref="pc:TermInfo" minOccurs="0" maxOccurs="unbounded"/>
+        </xs:sequence>
+      </xs:complexType>
+    </xs:element>
+    <xs:element name="TermInfo">
+      <xs:complexType>
+        <xs:sequence>
+          <xs:element ref="pc:TermName" minOccurs="0"/>
+          <xs:element ref="pc:TermId" minOccurs="0"/>
+        </xs:sequence>
+      </xs:complexType>
+    </xs:element>
+    <xs:element name="TermName" type="xs:string"/>
+    <xs:element name="TermId" type="xs:string"/>
+  </xs:schema>
+</ct:contentTypeSchema>
+</file>
+
+<file path=customXml/item2.xml><?xml version="1.0" encoding="utf-8"?>
+<?mso-contentType ?>
+<FormTemplates xmlns="http://schemas.microsoft.com/sharepoint/v3/contenttype/forms">
+  <Display>DocumentLibraryForm</Display>
+  <Edit>DocumentLibraryForm</Edit>
+  <New>DocumentLibraryForm</New>
+</FormTemplates>
+</file>
+
+<file path=customXml/item3.xml><?xml version="1.0" encoding="utf-8"?>
+<p:properties xmlns:p="http://schemas.microsoft.com/office/2006/metadata/properties" xmlns:xsi="http://www.w3.org/2001/XMLSchema-instance" xmlns:pc="http://schemas.microsoft.com/office/infopath/2007/PartnerControls">
+  <documentManagement>
+    <TaxCatchAll xmlns="8a305f76-35c7-4bc6-8d22-97b26a027996" xsi:nil="true"/>
+    <lcf76f155ced4ddcb4097134ff3c332f xmlns="fc8719d5-a7d3-4ce2-a42c-5dc8ae5b02b5">
+      <Terms xmlns="http://schemas.microsoft.com/office/infopath/2007/PartnerControls"/>
+    </lcf76f155ced4ddcb4097134ff3c332f>
+  </documentManagement>
+</p:properties>
+</file>
+
+<file path=customXml/itemProps1.xml><?xml version="1.0" encoding="utf-8"?>
+<ds:datastoreItem xmlns:ds="http://schemas.openxmlformats.org/officeDocument/2006/customXml" ds:itemID="{2A47E4A6-EECD-48D6-97CD-4B58B591E7F6}">
+  <ds:schemaRefs>
+    <ds:schemaRef ds:uri="http://schemas.microsoft.com/office/2006/metadata/contentType"/>
+    <ds:schemaRef ds:uri="http://schemas.microsoft.com/office/2006/metadata/properties/metaAttributes"/>
+    <ds:schemaRef ds:uri="http://www.w3.org/2001/XMLSchema"/>
+    <ds:schemaRef ds:uri="http://schemas.microsoft.com/office/2006/metadata/properties"/>
+    <ds:schemaRef ds:uri="fc8719d5-a7d3-4ce2-a42c-5dc8ae5b02b5"/>
+    <ds:schemaRef ds:uri="8a305f76-35c7-4bc6-8d22-97b26a027996"/>
+    <ds:schemaRef ds:uri="http://schemas.microsoft.com/office/2006/documentManagement/types"/>
+    <ds:schemaRef ds:uri="http://schemas.microsoft.com/office/infopath/2007/PartnerControls"/>
+    <ds:schemaRef ds:uri="http://schemas.openxmlformats.org/package/2006/metadata/core-properties"/>
+    <ds:schemaRef ds:uri="http://purl.org/dc/elements/1.1/"/>
+    <ds:schemaRef ds:uri="http://purl.org/dc/terms/"/>
+    <ds:schemaRef ds:uri="http://schemas.microsoft.com/internal/obd"/>
+  </ds:schemaRefs>
+</ds:datastoreItem>
+</file>
+
+<file path=customXml/itemProps2.xml><?xml version="1.0" encoding="utf-8"?>
+<ds:datastoreItem xmlns:ds="http://schemas.openxmlformats.org/officeDocument/2006/customXml" ds:itemID="{E7BB157B-7E7B-435D-849B-C7932CB2F027}">
+  <ds:schemaRefs>
+    <ds:schemaRef ds:uri="http://schemas.microsoft.com/sharepoint/v3/contenttype/forms"/>
+  </ds:schemaRefs>
+</ds:datastoreItem>
+</file>
+
+<file path=customXml/itemProps3.xml><?xml version="1.0" encoding="utf-8"?>
+<ds:datastoreItem xmlns:ds="http://schemas.openxmlformats.org/officeDocument/2006/customXml" ds:itemID="{BB7670FB-9B39-447E-BE90-063F66B83D40}">
+  <ds:schemaRefs>
+    <ds:schemaRef ds:uri="http://schemas.microsoft.com/office/2006/metadata/properties"/>
+    <ds:schemaRef ds:uri="http://schemas.microsoft.com/office/infopath/2007/PartnerControls"/>
+    <ds:schemaRef ds:uri="8a305f76-35c7-4bc6-8d22-97b26a027996"/>
+    <ds:schemaRef ds:uri="fc8719d5-a7d3-4ce2-a42c-5dc8ae5b02b5"/>
+  </ds:schemaRefs>
+</ds:datastoreItem>
 </file>